--- a/Science_Teesside/Teaching_Packs/GROW/lessons/W5A/GROW_Science_Autumn1_W5A_Fair_Test.pptx
+++ b/Science_Teesside/Teaching_Packs/GROW/lessons/W5A/GROW_Science_Autumn1_W5A_Fair_Test.pptx
@@ -2,25 +2,25 @@
 <file path=ppt/presentation.xml><?xml version="1.0" encoding="utf-8"?>
 <p:presentation xmlns:p="http://schemas.openxmlformats.org/presentationml/2006/main">
   <p:sldMasterIdLst>
-    <p:sldMasterId xmlns:r="http://schemas.openxmlformats.org/officeDocument/2006/relationships" id="2147483648" r:id="Re34407430d184b9d"/>
+    <p:sldMasterId xmlns:r="http://schemas.openxmlformats.org/officeDocument/2006/relationships" id="2147483648" r:id="R13f2e059defd4f77"/>
   </p:sldMasterIdLst>
   <p:notesMasterIdLst>
-    <p:notesMasterId xmlns:r="http://schemas.openxmlformats.org/officeDocument/2006/relationships" r:id="R223dc164cb2449a1"/>
+    <p:notesMasterId xmlns:r="http://schemas.openxmlformats.org/officeDocument/2006/relationships" r:id="Rb24839854c0f4577"/>
   </p:notesMasterIdLst>
   <p:sldIdLst>
-    <p:sldId xmlns:r="http://schemas.openxmlformats.org/officeDocument/2006/relationships" id="256" r:id="R4e90bff0b404408c"/>
-    <p:sldId xmlns:r="http://schemas.openxmlformats.org/officeDocument/2006/relationships" id="257" r:id="R23a141353d904fa8"/>
-    <p:sldId xmlns:r="http://schemas.openxmlformats.org/officeDocument/2006/relationships" id="258" r:id="Ra2d55a0cfb26455d"/>
-    <p:sldId xmlns:r="http://schemas.openxmlformats.org/officeDocument/2006/relationships" id="259" r:id="Re4ea4e493bd64bce"/>
-    <p:sldId xmlns:r="http://schemas.openxmlformats.org/officeDocument/2006/relationships" id="260" r:id="R78caeebcc5e1420f"/>
-    <p:sldId xmlns:r="http://schemas.openxmlformats.org/officeDocument/2006/relationships" id="261" r:id="R2ca7fbd288c0439b"/>
-    <p:sldId xmlns:r="http://schemas.openxmlformats.org/officeDocument/2006/relationships" id="262" r:id="Rbe69a1cd03ca4641"/>
-    <p:sldId xmlns:r="http://schemas.openxmlformats.org/officeDocument/2006/relationships" id="263" r:id="R0e1a1416a45a4e8c"/>
-    <p:sldId xmlns:r="http://schemas.openxmlformats.org/officeDocument/2006/relationships" id="264" r:id="R8e814dd8c88f4268"/>
-    <p:sldId xmlns:r="http://schemas.openxmlformats.org/officeDocument/2006/relationships" id="265" r:id="R1214f76f65d94197"/>
-    <p:sldId xmlns:r="http://schemas.openxmlformats.org/officeDocument/2006/relationships" id="266" r:id="R65636831c8334d28"/>
-    <p:sldId xmlns:r="http://schemas.openxmlformats.org/officeDocument/2006/relationships" id="267" r:id="Rcae2158c74f14da1"/>
-    <p:sldId xmlns:r="http://schemas.openxmlformats.org/officeDocument/2006/relationships" id="268" r:id="R7ab07e4ba0b64c06"/>
+    <p:sldId xmlns:r="http://schemas.openxmlformats.org/officeDocument/2006/relationships" id="256" r:id="R3e96831c2674434f"/>
+    <p:sldId xmlns:r="http://schemas.openxmlformats.org/officeDocument/2006/relationships" id="257" r:id="Rb7f5002c93774803"/>
+    <p:sldId xmlns:r="http://schemas.openxmlformats.org/officeDocument/2006/relationships" id="258" r:id="R4f42a232d42f4405"/>
+    <p:sldId xmlns:r="http://schemas.openxmlformats.org/officeDocument/2006/relationships" id="259" r:id="R0e706fe90ee64383"/>
+    <p:sldId xmlns:r="http://schemas.openxmlformats.org/officeDocument/2006/relationships" id="260" r:id="R6eb1fcd72a1d499b"/>
+    <p:sldId xmlns:r="http://schemas.openxmlformats.org/officeDocument/2006/relationships" id="261" r:id="R99a9ca0bdf7a4e49"/>
+    <p:sldId xmlns:r="http://schemas.openxmlformats.org/officeDocument/2006/relationships" id="262" r:id="R94232a954c354dd3"/>
+    <p:sldId xmlns:r="http://schemas.openxmlformats.org/officeDocument/2006/relationships" id="263" r:id="R0c25cc2818174c28"/>
+    <p:sldId xmlns:r="http://schemas.openxmlformats.org/officeDocument/2006/relationships" id="264" r:id="Reff6f6da26e842af"/>
+    <p:sldId xmlns:r="http://schemas.openxmlformats.org/officeDocument/2006/relationships" id="265" r:id="R227216c3dc5543be"/>
+    <p:sldId xmlns:r="http://schemas.openxmlformats.org/officeDocument/2006/relationships" id="266" r:id="R92fd01c304e742d3"/>
+    <p:sldId xmlns:r="http://schemas.openxmlformats.org/officeDocument/2006/relationships" id="267" r:id="R25d0d3a5b5f5443f"/>
+    <p:sldId xmlns:r="http://schemas.openxmlformats.org/officeDocument/2006/relationships" id="268" r:id="R2cc1e9f420e74485"/>
   </p:sldIdLst>
   <p:sldSz cx="12192000" cy="6858000"/>
   <p:notesSz cx="6858000" cy="9144000"/>
@@ -492,6 +492,14 @@
               <a:t>[/Sources]</a:t>
             </a:r>
           </a:p>
+          <a:p xmlns:a="http://schemas.openxmlformats.org/drawingml/2006/main">
+            <a:r>
+              <a:t>
+[Sources]
+Generated contextual illustration for this visual edition; not measured or recorded experimental evidence.
+[/Sources]</a:t>
+            </a:r>
+          </a:p>
         </p:txBody>
       </p:sp>
       <p:sp>
@@ -1817,7 +1825,7 @@
   </p:cSld>
   <p:clrMap bg1="lt1" tx1="dk1" bg2="lt2" tx2="dk2" accent1="accent1" accent2="accent2" accent3="accent3" accent4="accent4" accent5="accent5" accent6="accent6" hlink="hlink" folHlink="folHlink"/>
   <p:sldLayoutIdLst>
-    <p:sldLayoutId xmlns:r="http://schemas.openxmlformats.org/officeDocument/2006/relationships" id="2147483649" r:id="R6150b7be08594b6d"/>
+    <p:sldLayoutId xmlns:r="http://schemas.openxmlformats.org/officeDocument/2006/relationships" id="2147483649" r:id="Rcb9f08afcb1c4b7c"/>
   </p:sldLayoutIdLst>
   <p:txStyles>
     <p:titleStyle>
@@ -2350,7 +2358,7 @@
     <p:bg>
       <p:bgPr>
         <a:solidFill xmlns:a="http://schemas.openxmlformats.org/drawingml/2006/main">
-          <a:srgbClr val="F5F1E8"/>
+          <a:srgbClr val="FAF9F5"/>
         </a:solidFill>
       </p:bgPr>
     </p:bg>
@@ -2379,8 +2387,8 @@
         </p:nvSpPr>
         <p:spPr>
           <a:xfrm xmlns:a="http://schemas.openxmlformats.org/drawingml/2006/main">
-            <a:off x="609600" y="552450"/>
-            <a:ext cx="781050" cy="57150"/>
+            <a:off x="609600" y="733425"/>
+            <a:ext cx="781050" cy="38100"/>
           </a:xfrm>
           <a:prstGeom xmlns:a="http://schemas.openxmlformats.org/drawingml/2006/main" prst="rect">
             <a:avLst/>
@@ -2410,34 +2418,43 @@
         </p:nvSpPr>
         <p:spPr>
           <a:xfrm xmlns:a="http://schemas.openxmlformats.org/drawingml/2006/main">
-            <a:off x="609600" y="762000"/>
-            <a:ext cx="8572500" cy="285750"/>
-          </a:xfrm>
-          <a:prstGeom xmlns:a="http://schemas.openxmlformats.org/drawingml/2006/main" prst="rect">
-            <a:avLst/>
-          </a:prstGeom>
-          <a:noFill xmlns:a="http://schemas.openxmlformats.org/drawingml/2006/main"/>
-          <a:ln xmlns:a="http://schemas.openxmlformats.org/drawingml/2006/main" w="0">
-            <a:noFill/>
-            <a:prstDash val="solid"/>
-          </a:ln>
-        </p:spPr>
-        <p:txBody>
-          <a:bodyPr xmlns:a="http://schemas.openxmlformats.org/drawingml/2006/main" lIns="0" tIns="0" rIns="0" bIns="0" anchor="ctr"/>
-          <a:lstStyle xmlns:a="http://schemas.openxmlformats.org/drawingml/2006/main"/>
-          <a:p xmlns:a="http://schemas.openxmlformats.org/drawingml/2006/main">
-            <a:pPr>
-              <a:defRPr sz="1500" b="1">
+            <a:off x="609600" y="342900"/>
+            <a:ext cx="9334500" cy="304800"/>
+          </a:xfrm>
+          <a:prstGeom xmlns:a="http://schemas.openxmlformats.org/drawingml/2006/main" prst="rect">
+            <a:avLst/>
+          </a:prstGeom>
+          <a:noFill xmlns:a="http://schemas.openxmlformats.org/drawingml/2006/main"/>
+          <a:ln xmlns:a="http://schemas.openxmlformats.org/drawingml/2006/main" w="0">
+            <a:noFill/>
+            <a:prstDash val="solid"/>
+          </a:ln>
+        </p:spPr>
+        <p:txBody>
+          <a:bodyPr xmlns:a="http://schemas.openxmlformats.org/drawingml/2006/main" lIns="0" tIns="0" rIns="0" bIns="0" anchor="ctr">
+            <a:noAutofit/>
+          </a:bodyPr>
+          <a:lstStyle xmlns:a="http://schemas.openxmlformats.org/drawingml/2006/main"/>
+          <a:p xmlns:a="http://schemas.openxmlformats.org/drawingml/2006/main">
+            <a:pPr algn="l">
+              <a:buNone/>
+              <a:defRPr sz="1350" b="1">
                 <a:solidFill>
                   <a:srgbClr val="28685E"/>
                 </a:solidFill>
-              </a:defRPr>
-            </a:pPr>
-            <a:r>
-              <a:rPr sz="1500" b="1">
+                <a:latin typeface="Calibri"/>
+                <a:ea typeface="Calibri"/>
+                <a:cs typeface="Calibri"/>
+              </a:defRPr>
+            </a:pPr>
+            <a:r>
+              <a:rPr sz="1350" b="1">
                 <a:solidFill>
                   <a:srgbClr val="28685E"/>
                 </a:solidFill>
+                <a:latin typeface="Calibri"/>
+                <a:ea typeface="Calibri"/>
+                <a:cs typeface="Calibri"/>
               </a:rPr>
               <a:t>MADE BY MATT  /  GROW SCIENCE</a:t>
             </a:r>
@@ -2460,34 +2477,43 @@
         </p:nvSpPr>
         <p:spPr>
           <a:xfrm xmlns:a="http://schemas.openxmlformats.org/drawingml/2006/main">
-            <a:off x="609600" y="1352550"/>
-            <a:ext cx="10972800" cy="952500"/>
-          </a:xfrm>
-          <a:prstGeom xmlns:a="http://schemas.openxmlformats.org/drawingml/2006/main" prst="rect">
-            <a:avLst/>
-          </a:prstGeom>
-          <a:noFill xmlns:a="http://schemas.openxmlformats.org/drawingml/2006/main"/>
-          <a:ln xmlns:a="http://schemas.openxmlformats.org/drawingml/2006/main" w="0">
-            <a:noFill/>
-            <a:prstDash val="solid"/>
-          </a:ln>
-        </p:spPr>
-        <p:txBody>
-          <a:bodyPr xmlns:a="http://schemas.openxmlformats.org/drawingml/2006/main" lIns="0" tIns="0" rIns="0" bIns="0" anchor="ctr"/>
-          <a:lstStyle xmlns:a="http://schemas.openxmlformats.org/drawingml/2006/main"/>
-          <a:p xmlns:a="http://schemas.openxmlformats.org/drawingml/2006/main">
-            <a:pPr>
-              <a:defRPr sz="3750" b="1">
+            <a:off x="609600" y="990600"/>
+            <a:ext cx="10972800" cy="1000125"/>
+          </a:xfrm>
+          <a:prstGeom xmlns:a="http://schemas.openxmlformats.org/drawingml/2006/main" prst="rect">
+            <a:avLst/>
+          </a:prstGeom>
+          <a:noFill xmlns:a="http://schemas.openxmlformats.org/drawingml/2006/main"/>
+          <a:ln xmlns:a="http://schemas.openxmlformats.org/drawingml/2006/main" w="0">
+            <a:noFill/>
+            <a:prstDash val="solid"/>
+          </a:ln>
+        </p:spPr>
+        <p:txBody>
+          <a:bodyPr xmlns:a="http://schemas.openxmlformats.org/drawingml/2006/main" lIns="0" tIns="0" rIns="0" bIns="0" anchor="ctr">
+            <a:noAutofit/>
+          </a:bodyPr>
+          <a:lstStyle xmlns:a="http://schemas.openxmlformats.org/drawingml/2006/main"/>
+          <a:p xmlns:a="http://schemas.openxmlformats.org/drawingml/2006/main">
+            <a:pPr algn="l">
+              <a:buNone/>
+              <a:defRPr sz="3675" b="1">
                 <a:solidFill>
                   <a:srgbClr val="152B3A"/>
                 </a:solidFill>
-              </a:defRPr>
-            </a:pPr>
-            <a:r>
-              <a:rPr sz="3750" b="1">
+                <a:latin typeface="Calibri"/>
+                <a:ea typeface="Calibri"/>
+                <a:cs typeface="Calibri"/>
+              </a:defRPr>
+            </a:pPr>
+            <a:r>
+              <a:rPr sz="3675" b="1">
                 <a:solidFill>
                   <a:srgbClr val="152B3A"/>
                 </a:solidFill>
+                <a:latin typeface="Calibri"/>
+                <a:ea typeface="Calibri"/>
+                <a:cs typeface="Calibri"/>
               </a:rPr>
               <a:t>Planning a fair test</a:t>
             </a:r>
@@ -2510,14 +2536,14 @@
         </p:nvSpPr>
         <p:spPr>
           <a:xfrm xmlns:a="http://schemas.openxmlformats.org/drawingml/2006/main">
-            <a:off x="609600" y="6219825"/>
+            <a:off x="609600" y="6191250"/>
             <a:ext cx="10972800" cy="9525"/>
           </a:xfrm>
           <a:prstGeom xmlns:a="http://schemas.openxmlformats.org/drawingml/2006/main" prst="rect">
             <a:avLst/>
           </a:prstGeom>
           <a:solidFill xmlns:a="http://schemas.openxmlformats.org/drawingml/2006/main">
-            <a:srgbClr val="DCE7DD"/>
+            <a:srgbClr val="CEDBD3"/>
           </a:solidFill>
           <a:ln xmlns:a="http://schemas.openxmlformats.org/drawingml/2006/main" w="0">
             <a:noFill/>
@@ -2541,34 +2567,43 @@
         </p:nvSpPr>
         <p:spPr>
           <a:xfrm xmlns:a="http://schemas.openxmlformats.org/drawingml/2006/main">
-            <a:off x="609600" y="6381750"/>
-            <a:ext cx="9906000" cy="228600"/>
-          </a:xfrm>
-          <a:prstGeom xmlns:a="http://schemas.openxmlformats.org/drawingml/2006/main" prst="rect">
-            <a:avLst/>
-          </a:prstGeom>
-          <a:noFill xmlns:a="http://schemas.openxmlformats.org/drawingml/2006/main"/>
-          <a:ln xmlns:a="http://schemas.openxmlformats.org/drawingml/2006/main" w="0">
-            <a:noFill/>
-            <a:prstDash val="solid"/>
-          </a:ln>
-        </p:spPr>
-        <p:txBody>
-          <a:bodyPr xmlns:a="http://schemas.openxmlformats.org/drawingml/2006/main" lIns="0" tIns="0" rIns="0" bIns="0" anchor="ctr"/>
-          <a:lstStyle xmlns:a="http://schemas.openxmlformats.org/drawingml/2006/main"/>
-          <a:p xmlns:a="http://schemas.openxmlformats.org/drawingml/2006/main">
-            <a:pPr>
-              <a:defRPr sz="1275" b="0">
+            <a:off x="609600" y="6419850"/>
+            <a:ext cx="9525000" cy="219075"/>
+          </a:xfrm>
+          <a:prstGeom xmlns:a="http://schemas.openxmlformats.org/drawingml/2006/main" prst="rect">
+            <a:avLst/>
+          </a:prstGeom>
+          <a:noFill xmlns:a="http://schemas.openxmlformats.org/drawingml/2006/main"/>
+          <a:ln xmlns:a="http://schemas.openxmlformats.org/drawingml/2006/main" w="0">
+            <a:noFill/>
+            <a:prstDash val="solid"/>
+          </a:ln>
+        </p:spPr>
+        <p:txBody>
+          <a:bodyPr xmlns:a="http://schemas.openxmlformats.org/drawingml/2006/main" lIns="0" tIns="0" rIns="0" bIns="0" anchor="ctr">
+            <a:noAutofit/>
+          </a:bodyPr>
+          <a:lstStyle xmlns:a="http://schemas.openxmlformats.org/drawingml/2006/main"/>
+          <a:p xmlns:a="http://schemas.openxmlformats.org/drawingml/2006/main">
+            <a:pPr algn="l">
+              <a:buNone/>
+              <a:defRPr sz="1200" b="0">
                 <a:solidFill>
                   <a:srgbClr val="50616B"/>
                 </a:solidFill>
-              </a:defRPr>
-            </a:pPr>
-            <a:r>
-              <a:rPr sz="1275" b="0">
+                <a:latin typeface="Calibri"/>
+                <a:ea typeface="Calibri"/>
+                <a:cs typeface="Calibri"/>
+              </a:defRPr>
+            </a:pPr>
+            <a:r>
+              <a:rPr sz="1200" b="0">
                 <a:solidFill>
                   <a:srgbClr val="50616B"/>
                 </a:solidFill>
+                <a:latin typeface="Calibri"/>
+                <a:ea typeface="Calibri"/>
+                <a:cs typeface="Calibri"/>
               </a:rPr>
               <a:t>AUTUMN 1  ·  WEEK 5  ·  LESSON A</a:t>
             </a:r>
@@ -2591,27 +2626,33 @@
         </p:nvSpPr>
         <p:spPr>
           <a:xfrm xmlns:a="http://schemas.openxmlformats.org/drawingml/2006/main">
-            <a:off x="11106150" y="6362700"/>
-            <a:ext cx="476250" cy="238125"/>
-          </a:xfrm>
-          <a:prstGeom xmlns:a="http://schemas.openxmlformats.org/drawingml/2006/main" prst="rect">
-            <a:avLst/>
-          </a:prstGeom>
-          <a:noFill xmlns:a="http://schemas.openxmlformats.org/drawingml/2006/main"/>
-          <a:ln xmlns:a="http://schemas.openxmlformats.org/drawingml/2006/main" w="0">
-            <a:noFill/>
-            <a:prstDash val="solid"/>
-          </a:ln>
-        </p:spPr>
-        <p:txBody>
-          <a:bodyPr xmlns:a="http://schemas.openxmlformats.org/drawingml/2006/main" lIns="0" tIns="0" rIns="0" bIns="0" anchor="ctr"/>
-          <a:lstStyle xmlns:a="http://schemas.openxmlformats.org/drawingml/2006/main"/>
-          <a:p xmlns:a="http://schemas.openxmlformats.org/drawingml/2006/main">
-            <a:pPr>
+            <a:off x="11106150" y="6400800"/>
+            <a:ext cx="476250" cy="247650"/>
+          </a:xfrm>
+          <a:prstGeom xmlns:a="http://schemas.openxmlformats.org/drawingml/2006/main" prst="rect">
+            <a:avLst/>
+          </a:prstGeom>
+          <a:noFill xmlns:a="http://schemas.openxmlformats.org/drawingml/2006/main"/>
+          <a:ln xmlns:a="http://schemas.openxmlformats.org/drawingml/2006/main" w="0">
+            <a:noFill/>
+            <a:prstDash val="solid"/>
+          </a:ln>
+        </p:spPr>
+        <p:txBody>
+          <a:bodyPr xmlns:a="http://schemas.openxmlformats.org/drawingml/2006/main" lIns="0" tIns="0" rIns="0" bIns="0" anchor="ctr">
+            <a:noAutofit/>
+          </a:bodyPr>
+          <a:lstStyle xmlns:a="http://schemas.openxmlformats.org/drawingml/2006/main"/>
+          <a:p xmlns:a="http://schemas.openxmlformats.org/drawingml/2006/main">
+            <a:pPr algn="l">
+              <a:buNone/>
               <a:defRPr sz="1350" b="1">
                 <a:solidFill>
                   <a:srgbClr val="28685E"/>
                 </a:solidFill>
+                <a:latin typeface="Calibri"/>
+                <a:ea typeface="Calibri"/>
+                <a:cs typeface="Calibri"/>
               </a:defRPr>
             </a:pPr>
             <a:r>
@@ -2619,6 +2660,9 @@
                 <a:solidFill>
                   <a:srgbClr val="28685E"/>
                 </a:solidFill>
+                <a:latin typeface="Calibri"/>
+                <a:ea typeface="Calibri"/>
+                <a:cs typeface="Calibri"/>
               </a:rPr>
               <a:t>01</a:t>
             </a:r>
@@ -2641,36 +2685,69 @@
         </p:nvSpPr>
         <p:spPr>
           <a:xfrm xmlns:a="http://schemas.openxmlformats.org/drawingml/2006/main">
-            <a:off x="609600" y="2809875"/>
-            <a:ext cx="10668000" cy="1000125"/>
-          </a:xfrm>
-          <a:prstGeom xmlns:a="http://schemas.openxmlformats.org/drawingml/2006/main" prst="rect">
-            <a:avLst/>
-          </a:prstGeom>
-          <a:noFill xmlns:a="http://schemas.openxmlformats.org/drawingml/2006/main"/>
-          <a:ln xmlns:a="http://schemas.openxmlformats.org/drawingml/2006/main" w="0">
-            <a:noFill/>
-            <a:prstDash val="solid"/>
-          </a:ln>
-        </p:spPr>
-        <p:txBody>
-          <a:bodyPr xmlns:a="http://schemas.openxmlformats.org/drawingml/2006/main" lIns="0" tIns="0" rIns="0" bIns="0" anchor="ctr"/>
-          <a:lstStyle xmlns:a="http://schemas.openxmlformats.org/drawingml/2006/main"/>
-          <a:p xmlns:a="http://schemas.openxmlformats.org/drawingml/2006/main">
-            <a:pPr>
-              <a:defRPr sz="3900" b="1">
+            <a:off x="609600" y="2447925"/>
+            <a:ext cx="5429250" cy="1638300"/>
+          </a:xfrm>
+          <a:prstGeom xmlns:a="http://schemas.openxmlformats.org/drawingml/2006/main" prst="rect">
+            <a:avLst/>
+          </a:prstGeom>
+          <a:noFill xmlns:a="http://schemas.openxmlformats.org/drawingml/2006/main"/>
+          <a:ln xmlns:a="http://schemas.openxmlformats.org/drawingml/2006/main" w="0">
+            <a:noFill/>
+            <a:prstDash val="solid"/>
+          </a:ln>
+        </p:spPr>
+        <p:txBody>
+          <a:bodyPr xmlns:a="http://schemas.openxmlformats.org/drawingml/2006/main" lIns="0" tIns="0" rIns="0" bIns="0" anchor="ctr">
+            <a:noAutofit/>
+          </a:bodyPr>
+          <a:lstStyle xmlns:a="http://schemas.openxmlformats.org/drawingml/2006/main"/>
+          <a:p xmlns:a="http://schemas.openxmlformats.org/drawingml/2006/main">
+            <a:pPr algn="l">
+              <a:buNone/>
+              <a:defRPr sz="3600" b="1">
                 <a:solidFill>
                   <a:srgbClr val="28685E"/>
                 </a:solidFill>
-              </a:defRPr>
-            </a:pPr>
-            <a:r>
-              <a:rPr sz="3900" b="1">
+                <a:latin typeface="Calibri"/>
+                <a:ea typeface="Calibri"/>
+                <a:cs typeface="Calibri"/>
+              </a:defRPr>
+            </a:pPr>
+            <a:r>
+              <a:rPr sz="3600" b="1">
                 <a:solidFill>
                   <a:srgbClr val="28685E"/>
                 </a:solidFill>
-              </a:rPr>
-              <a:t>Change one thing. Trust the comparison.</a:t>
+                <a:latin typeface="Calibri"/>
+                <a:ea typeface="Calibri"/>
+                <a:cs typeface="Calibri"/>
+              </a:rPr>
+              <a:t>Change one thing.</a:t>
+            </a:r>
+          </a:p>
+          <a:p xmlns:a="http://schemas.openxmlformats.org/drawingml/2006/main">
+            <a:pPr algn="l">
+              <a:buNone/>
+              <a:defRPr sz="3600" b="1">
+                <a:solidFill>
+                  <a:srgbClr val="28685E"/>
+                </a:solidFill>
+                <a:latin typeface="Calibri"/>
+                <a:ea typeface="Calibri"/>
+                <a:cs typeface="Calibri"/>
+              </a:defRPr>
+            </a:pPr>
+            <a:r>
+              <a:rPr sz="3600" b="1">
+                <a:solidFill>
+                  <a:srgbClr val="28685E"/>
+                </a:solidFill>
+                <a:latin typeface="Calibri"/>
+                <a:ea typeface="Calibri"/>
+                <a:cs typeface="Calibri"/>
+              </a:rPr>
+              <a:t>Trust the comparison.</a:t>
             </a:r>
           </a:p>
         </p:txBody>
@@ -2691,40 +2768,74 @@
         </p:nvSpPr>
         <p:spPr>
           <a:xfrm xmlns:a="http://schemas.openxmlformats.org/drawingml/2006/main">
-            <a:off x="609600" y="4143375"/>
-            <a:ext cx="10668000" cy="1143000"/>
-          </a:xfrm>
-          <a:prstGeom xmlns:a="http://schemas.openxmlformats.org/drawingml/2006/main" prst="rect">
-            <a:avLst/>
-          </a:prstGeom>
-          <a:noFill xmlns:a="http://schemas.openxmlformats.org/drawingml/2006/main"/>
-          <a:ln xmlns:a="http://schemas.openxmlformats.org/drawingml/2006/main" w="0">
-            <a:noFill/>
-            <a:prstDash val="solid"/>
-          </a:ln>
-        </p:spPr>
-        <p:txBody>
-          <a:bodyPr xmlns:a="http://schemas.openxmlformats.org/drawingml/2006/main" lIns="0" tIns="0" rIns="0" bIns="0" anchor="ctr"/>
-          <a:lstStyle xmlns:a="http://schemas.openxmlformats.org/drawingml/2006/main"/>
-          <a:p xmlns:a="http://schemas.openxmlformats.org/drawingml/2006/main">
-            <a:pPr>
-              <a:defRPr sz="2550" b="0">
+            <a:off x="609600" y="4286250"/>
+            <a:ext cx="5314950" cy="1466850"/>
+          </a:xfrm>
+          <a:prstGeom xmlns:a="http://schemas.openxmlformats.org/drawingml/2006/main" prst="rect">
+            <a:avLst/>
+          </a:prstGeom>
+          <a:noFill xmlns:a="http://schemas.openxmlformats.org/drawingml/2006/main"/>
+          <a:ln xmlns:a="http://schemas.openxmlformats.org/drawingml/2006/main" w="0">
+            <a:noFill/>
+            <a:prstDash val="solid"/>
+          </a:ln>
+        </p:spPr>
+        <p:txBody>
+          <a:bodyPr xmlns:a="http://schemas.openxmlformats.org/drawingml/2006/main" lIns="0" tIns="0" rIns="0" bIns="0" anchor="ctr">
+            <a:noAutofit/>
+          </a:bodyPr>
+          <a:lstStyle xmlns:a="http://schemas.openxmlformats.org/drawingml/2006/main"/>
+          <a:p xmlns:a="http://schemas.openxmlformats.org/drawingml/2006/main">
+            <a:pPr algn="l">
+              <a:buNone/>
+              <a:defRPr sz="2400" b="0">
                 <a:solidFill>
                   <a:srgbClr val="152B3A"/>
                 </a:solidFill>
-              </a:defRPr>
-            </a:pPr>
-            <a:r>
-              <a:rPr sz="2550" b="0">
+                <a:latin typeface="Calibri"/>
+                <a:ea typeface="Calibri"/>
+                <a:cs typeface="Calibri"/>
+              </a:defRPr>
+            </a:pPr>
+            <a:r>
+              <a:rPr sz="2400" b="0">
                 <a:solidFill>
                   <a:srgbClr val="152B3A"/>
                 </a:solidFill>
+                <a:latin typeface="Calibri"/>
+                <a:ea typeface="Calibri"/>
+                <a:cs typeface="Calibri"/>
               </a:rPr>
               <a:t>Plan variables, record with units and judge what the evidence can support.</a:t>
             </a:r>
           </a:p>
         </p:txBody>
       </p:sp>
+      <p:pic>
+        <p:nvPicPr>
+          <p:cNvPr id="19" name=""/>
+          <p:cNvPicPr>
+            <a:picLocks xmlns:a="http://schemas.openxmlformats.org/drawingml/2006/main" noChangeAspect="1"/>
+          </p:cNvPicPr>
+          <p:nvPr/>
+        </p:nvPicPr>
+        <p:blipFill>
+          <a:blip xmlns:r="http://schemas.openxmlformats.org/officeDocument/2006/relationships" xmlns:a="http://schemas.openxmlformats.org/drawingml/2006/main" r:embed="Rf92918dc6a144025"/>
+          <a:srcRect xmlns:a="http://schemas.openxmlformats.org/drawingml/2006/main" l="0" t="14154" r="0" b="14154"/>
+          <a:stretch xmlns:a="http://schemas.openxmlformats.org/drawingml/2006/main">
+            <a:fillRect l="0" t="0" r="0" b="0"/>
+          </a:stretch>
+        </p:blipFill>
+        <p:spPr>
+          <a:xfrm xmlns:a="http://schemas.openxmlformats.org/drawingml/2006/main">
+            <a:off x="6400800" y="2200275"/>
+            <a:ext cx="5181600" cy="3714750"/>
+          </a:xfrm>
+          <a:prstGeom xmlns:a="http://schemas.openxmlformats.org/drawingml/2006/main" prst="rect">
+            <a:avLst/>
+          </a:prstGeom>
+        </p:spPr>
+      </p:pic>
     </p:spTree>
     <p:extLst>
       <p:ext uri="{BB962C8B-B14F-4D97-AF65-F5344CB8AC3E}">
@@ -2741,7 +2852,7 @@
     <p:bg>
       <p:bgPr>
         <a:solidFill xmlns:a="http://schemas.openxmlformats.org/drawingml/2006/main">
-          <a:srgbClr val="F5F1E8"/>
+          <a:srgbClr val="FAF9F5"/>
         </a:solidFill>
       </p:bgPr>
     </p:bg>
@@ -2770,8 +2881,8 @@
         </p:nvSpPr>
         <p:spPr>
           <a:xfrm xmlns:a="http://schemas.openxmlformats.org/drawingml/2006/main">
-            <a:off x="609600" y="552450"/>
-            <a:ext cx="781050" cy="57150"/>
+            <a:off x="609600" y="733425"/>
+            <a:ext cx="781050" cy="38100"/>
           </a:xfrm>
           <a:prstGeom xmlns:a="http://schemas.openxmlformats.org/drawingml/2006/main" prst="rect">
             <a:avLst/>
@@ -2801,34 +2912,43 @@
         </p:nvSpPr>
         <p:spPr>
           <a:xfrm xmlns:a="http://schemas.openxmlformats.org/drawingml/2006/main">
-            <a:off x="609600" y="762000"/>
-            <a:ext cx="8572500" cy="285750"/>
-          </a:xfrm>
-          <a:prstGeom xmlns:a="http://schemas.openxmlformats.org/drawingml/2006/main" prst="rect">
-            <a:avLst/>
-          </a:prstGeom>
-          <a:noFill xmlns:a="http://schemas.openxmlformats.org/drawingml/2006/main"/>
-          <a:ln xmlns:a="http://schemas.openxmlformats.org/drawingml/2006/main" w="0">
-            <a:noFill/>
-            <a:prstDash val="solid"/>
-          </a:ln>
-        </p:spPr>
-        <p:txBody>
-          <a:bodyPr xmlns:a="http://schemas.openxmlformats.org/drawingml/2006/main" lIns="0" tIns="0" rIns="0" bIns="0" anchor="ctr"/>
-          <a:lstStyle xmlns:a="http://schemas.openxmlformats.org/drawingml/2006/main"/>
-          <a:p xmlns:a="http://schemas.openxmlformats.org/drawingml/2006/main">
-            <a:pPr>
-              <a:defRPr sz="1500" b="1">
+            <a:off x="609600" y="342900"/>
+            <a:ext cx="9334500" cy="304800"/>
+          </a:xfrm>
+          <a:prstGeom xmlns:a="http://schemas.openxmlformats.org/drawingml/2006/main" prst="rect">
+            <a:avLst/>
+          </a:prstGeom>
+          <a:noFill xmlns:a="http://schemas.openxmlformats.org/drawingml/2006/main"/>
+          <a:ln xmlns:a="http://schemas.openxmlformats.org/drawingml/2006/main" w="0">
+            <a:noFill/>
+            <a:prstDash val="solid"/>
+          </a:ln>
+        </p:spPr>
+        <p:txBody>
+          <a:bodyPr xmlns:a="http://schemas.openxmlformats.org/drawingml/2006/main" lIns="0" tIns="0" rIns="0" bIns="0" anchor="ctr">
+            <a:noAutofit/>
+          </a:bodyPr>
+          <a:lstStyle xmlns:a="http://schemas.openxmlformats.org/drawingml/2006/main"/>
+          <a:p xmlns:a="http://schemas.openxmlformats.org/drawingml/2006/main">
+            <a:pPr algn="l">
+              <a:buNone/>
+              <a:defRPr sz="1350" b="1">
                 <a:solidFill>
                   <a:srgbClr val="28685E"/>
                 </a:solidFill>
-              </a:defRPr>
-            </a:pPr>
-            <a:r>
-              <a:rPr sz="1500" b="1">
+                <a:latin typeface="Calibri"/>
+                <a:ea typeface="Calibri"/>
+                <a:cs typeface="Calibri"/>
+              </a:defRPr>
+            </a:pPr>
+            <a:r>
+              <a:rPr sz="1350" b="1">
                 <a:solidFill>
                   <a:srgbClr val="28685E"/>
                 </a:solidFill>
+                <a:latin typeface="Calibri"/>
+                <a:ea typeface="Calibri"/>
+                <a:cs typeface="Calibri"/>
               </a:rPr>
               <a:t>MADE BY MATT  /  GROW SCIENCE</a:t>
             </a:r>
@@ -2851,34 +2971,43 @@
         </p:nvSpPr>
         <p:spPr>
           <a:xfrm xmlns:a="http://schemas.openxmlformats.org/drawingml/2006/main">
-            <a:off x="609600" y="1352550"/>
-            <a:ext cx="10972800" cy="952500"/>
-          </a:xfrm>
-          <a:prstGeom xmlns:a="http://schemas.openxmlformats.org/drawingml/2006/main" prst="rect">
-            <a:avLst/>
-          </a:prstGeom>
-          <a:noFill xmlns:a="http://schemas.openxmlformats.org/drawingml/2006/main"/>
-          <a:ln xmlns:a="http://schemas.openxmlformats.org/drawingml/2006/main" w="0">
-            <a:noFill/>
-            <a:prstDash val="solid"/>
-          </a:ln>
-        </p:spPr>
-        <p:txBody>
-          <a:bodyPr xmlns:a="http://schemas.openxmlformats.org/drawingml/2006/main" lIns="0" tIns="0" rIns="0" bIns="0" anchor="ctr"/>
-          <a:lstStyle xmlns:a="http://schemas.openxmlformats.org/drawingml/2006/main"/>
-          <a:p xmlns:a="http://schemas.openxmlformats.org/drawingml/2006/main">
-            <a:pPr>
-              <a:defRPr sz="3750" b="1">
+            <a:off x="609600" y="990600"/>
+            <a:ext cx="10972800" cy="1000125"/>
+          </a:xfrm>
+          <a:prstGeom xmlns:a="http://schemas.openxmlformats.org/drawingml/2006/main" prst="rect">
+            <a:avLst/>
+          </a:prstGeom>
+          <a:noFill xmlns:a="http://schemas.openxmlformats.org/drawingml/2006/main"/>
+          <a:ln xmlns:a="http://schemas.openxmlformats.org/drawingml/2006/main" w="0">
+            <a:noFill/>
+            <a:prstDash val="solid"/>
+          </a:ln>
+        </p:spPr>
+        <p:txBody>
+          <a:bodyPr xmlns:a="http://schemas.openxmlformats.org/drawingml/2006/main" lIns="0" tIns="0" rIns="0" bIns="0" anchor="ctr">
+            <a:noAutofit/>
+          </a:bodyPr>
+          <a:lstStyle xmlns:a="http://schemas.openxmlformats.org/drawingml/2006/main"/>
+          <a:p xmlns:a="http://schemas.openxmlformats.org/drawingml/2006/main">
+            <a:pPr algn="l">
+              <a:buNone/>
+              <a:defRPr sz="3675" b="1">
                 <a:solidFill>
                   <a:srgbClr val="152B3A"/>
                 </a:solidFill>
-              </a:defRPr>
-            </a:pPr>
-            <a:r>
-              <a:rPr sz="3750" b="1">
+                <a:latin typeface="Calibri"/>
+                <a:ea typeface="Calibri"/>
+                <a:cs typeface="Calibri"/>
+              </a:defRPr>
+            </a:pPr>
+            <a:r>
+              <a:rPr sz="3675" b="1">
                 <a:solidFill>
                   <a:srgbClr val="152B3A"/>
                 </a:solidFill>
+                <a:latin typeface="Calibri"/>
+                <a:ea typeface="Calibri"/>
+                <a:cs typeface="Calibri"/>
               </a:rPr>
               <a:t>Fair method or a problem?</a:t>
             </a:r>
@@ -2901,14 +3030,14 @@
         </p:nvSpPr>
         <p:spPr>
           <a:xfrm xmlns:a="http://schemas.openxmlformats.org/drawingml/2006/main">
-            <a:off x="609600" y="6219825"/>
+            <a:off x="609600" y="6191250"/>
             <a:ext cx="10972800" cy="9525"/>
           </a:xfrm>
           <a:prstGeom xmlns:a="http://schemas.openxmlformats.org/drawingml/2006/main" prst="rect">
             <a:avLst/>
           </a:prstGeom>
           <a:solidFill xmlns:a="http://schemas.openxmlformats.org/drawingml/2006/main">
-            <a:srgbClr val="DCE7DD"/>
+            <a:srgbClr val="CEDBD3"/>
           </a:solidFill>
           <a:ln xmlns:a="http://schemas.openxmlformats.org/drawingml/2006/main" w="0">
             <a:noFill/>
@@ -2932,34 +3061,43 @@
         </p:nvSpPr>
         <p:spPr>
           <a:xfrm xmlns:a="http://schemas.openxmlformats.org/drawingml/2006/main">
-            <a:off x="609600" y="6381750"/>
-            <a:ext cx="9906000" cy="228600"/>
-          </a:xfrm>
-          <a:prstGeom xmlns:a="http://schemas.openxmlformats.org/drawingml/2006/main" prst="rect">
-            <a:avLst/>
-          </a:prstGeom>
-          <a:noFill xmlns:a="http://schemas.openxmlformats.org/drawingml/2006/main"/>
-          <a:ln xmlns:a="http://schemas.openxmlformats.org/drawingml/2006/main" w="0">
-            <a:noFill/>
-            <a:prstDash val="solid"/>
-          </a:ln>
-        </p:spPr>
-        <p:txBody>
-          <a:bodyPr xmlns:a="http://schemas.openxmlformats.org/drawingml/2006/main" lIns="0" tIns="0" rIns="0" bIns="0" anchor="ctr"/>
-          <a:lstStyle xmlns:a="http://schemas.openxmlformats.org/drawingml/2006/main"/>
-          <a:p xmlns:a="http://schemas.openxmlformats.org/drawingml/2006/main">
-            <a:pPr>
-              <a:defRPr sz="1275" b="0">
+            <a:off x="609600" y="6419850"/>
+            <a:ext cx="9525000" cy="219075"/>
+          </a:xfrm>
+          <a:prstGeom xmlns:a="http://schemas.openxmlformats.org/drawingml/2006/main" prst="rect">
+            <a:avLst/>
+          </a:prstGeom>
+          <a:noFill xmlns:a="http://schemas.openxmlformats.org/drawingml/2006/main"/>
+          <a:ln xmlns:a="http://schemas.openxmlformats.org/drawingml/2006/main" w="0">
+            <a:noFill/>
+            <a:prstDash val="solid"/>
+          </a:ln>
+        </p:spPr>
+        <p:txBody>
+          <a:bodyPr xmlns:a="http://schemas.openxmlformats.org/drawingml/2006/main" lIns="0" tIns="0" rIns="0" bIns="0" anchor="ctr">
+            <a:noAutofit/>
+          </a:bodyPr>
+          <a:lstStyle xmlns:a="http://schemas.openxmlformats.org/drawingml/2006/main"/>
+          <a:p xmlns:a="http://schemas.openxmlformats.org/drawingml/2006/main">
+            <a:pPr algn="l">
+              <a:buNone/>
+              <a:defRPr sz="1200" b="0">
                 <a:solidFill>
                   <a:srgbClr val="50616B"/>
                 </a:solidFill>
-              </a:defRPr>
-            </a:pPr>
-            <a:r>
-              <a:rPr sz="1275" b="0">
+                <a:latin typeface="Calibri"/>
+                <a:ea typeface="Calibri"/>
+                <a:cs typeface="Calibri"/>
+              </a:defRPr>
+            </a:pPr>
+            <a:r>
+              <a:rPr sz="1200" b="0">
                 <a:solidFill>
                   <a:srgbClr val="50616B"/>
                 </a:solidFill>
+                <a:latin typeface="Calibri"/>
+                <a:ea typeface="Calibri"/>
+                <a:cs typeface="Calibri"/>
               </a:rPr>
               <a:t>AUTUMN 1  ·  WEEK 5  ·  LESSON A</a:t>
             </a:r>
@@ -2982,27 +3120,33 @@
         </p:nvSpPr>
         <p:spPr>
           <a:xfrm xmlns:a="http://schemas.openxmlformats.org/drawingml/2006/main">
-            <a:off x="11106150" y="6362700"/>
-            <a:ext cx="476250" cy="238125"/>
-          </a:xfrm>
-          <a:prstGeom xmlns:a="http://schemas.openxmlformats.org/drawingml/2006/main" prst="rect">
-            <a:avLst/>
-          </a:prstGeom>
-          <a:noFill xmlns:a="http://schemas.openxmlformats.org/drawingml/2006/main"/>
-          <a:ln xmlns:a="http://schemas.openxmlformats.org/drawingml/2006/main" w="0">
-            <a:noFill/>
-            <a:prstDash val="solid"/>
-          </a:ln>
-        </p:spPr>
-        <p:txBody>
-          <a:bodyPr xmlns:a="http://schemas.openxmlformats.org/drawingml/2006/main" lIns="0" tIns="0" rIns="0" bIns="0" anchor="ctr"/>
-          <a:lstStyle xmlns:a="http://schemas.openxmlformats.org/drawingml/2006/main"/>
-          <a:p xmlns:a="http://schemas.openxmlformats.org/drawingml/2006/main">
-            <a:pPr>
+            <a:off x="11106150" y="6400800"/>
+            <a:ext cx="476250" cy="247650"/>
+          </a:xfrm>
+          <a:prstGeom xmlns:a="http://schemas.openxmlformats.org/drawingml/2006/main" prst="rect">
+            <a:avLst/>
+          </a:prstGeom>
+          <a:noFill xmlns:a="http://schemas.openxmlformats.org/drawingml/2006/main"/>
+          <a:ln xmlns:a="http://schemas.openxmlformats.org/drawingml/2006/main" w="0">
+            <a:noFill/>
+            <a:prstDash val="solid"/>
+          </a:ln>
+        </p:spPr>
+        <p:txBody>
+          <a:bodyPr xmlns:a="http://schemas.openxmlformats.org/drawingml/2006/main" lIns="0" tIns="0" rIns="0" bIns="0" anchor="ctr">
+            <a:noAutofit/>
+          </a:bodyPr>
+          <a:lstStyle xmlns:a="http://schemas.openxmlformats.org/drawingml/2006/main"/>
+          <a:p xmlns:a="http://schemas.openxmlformats.org/drawingml/2006/main">
+            <a:pPr algn="l">
+              <a:buNone/>
               <a:defRPr sz="1350" b="1">
                 <a:solidFill>
                   <a:srgbClr val="28685E"/>
                 </a:solidFill>
+                <a:latin typeface="Calibri"/>
+                <a:ea typeface="Calibri"/>
+                <a:cs typeface="Calibri"/>
               </a:defRPr>
             </a:pPr>
             <a:r>
@@ -3010,6 +3154,9 @@
                 <a:solidFill>
                   <a:srgbClr val="28685E"/>
                 </a:solidFill>
+                <a:latin typeface="Calibri"/>
+                <a:ea typeface="Calibri"/>
+                <a:cs typeface="Calibri"/>
               </a:rPr>
               <a:t>10</a:t>
             </a:r>
@@ -3032,34 +3179,43 @@
         </p:nvSpPr>
         <p:spPr>
           <a:xfrm xmlns:a="http://schemas.openxmlformats.org/drawingml/2006/main">
-            <a:off x="609600" y="2619375"/>
-            <a:ext cx="10972800" cy="533400"/>
-          </a:xfrm>
-          <a:prstGeom xmlns:a="http://schemas.openxmlformats.org/drawingml/2006/main" prst="rect">
-            <a:avLst/>
-          </a:prstGeom>
-          <a:noFill xmlns:a="http://schemas.openxmlformats.org/drawingml/2006/main"/>
-          <a:ln xmlns:a="http://schemas.openxmlformats.org/drawingml/2006/main" w="0">
-            <a:noFill/>
-            <a:prstDash val="solid"/>
-          </a:ln>
-        </p:spPr>
-        <p:txBody>
-          <a:bodyPr xmlns:a="http://schemas.openxmlformats.org/drawingml/2006/main" lIns="0" tIns="0" rIns="0" bIns="0" anchor="ctr"/>
-          <a:lstStyle xmlns:a="http://schemas.openxmlformats.org/drawingml/2006/main"/>
-          <a:p xmlns:a="http://schemas.openxmlformats.org/drawingml/2006/main">
-            <a:pPr>
-              <a:defRPr sz="2175" b="0">
+            <a:off x="1000125" y="2333625"/>
+            <a:ext cx="10382250" cy="622935"/>
+          </a:xfrm>
+          <a:prstGeom xmlns:a="http://schemas.openxmlformats.org/drawingml/2006/main" prst="rect">
+            <a:avLst/>
+          </a:prstGeom>
+          <a:noFill xmlns:a="http://schemas.openxmlformats.org/drawingml/2006/main"/>
+          <a:ln xmlns:a="http://schemas.openxmlformats.org/drawingml/2006/main" w="0">
+            <a:noFill/>
+            <a:prstDash val="solid"/>
+          </a:ln>
+        </p:spPr>
+        <p:txBody>
+          <a:bodyPr xmlns:a="http://schemas.openxmlformats.org/drawingml/2006/main" lIns="0" tIns="0" rIns="0" bIns="0" anchor="ctr">
+            <a:noAutofit/>
+          </a:bodyPr>
+          <a:lstStyle xmlns:a="http://schemas.openxmlformats.org/drawingml/2006/main"/>
+          <a:p xmlns:a="http://schemas.openxmlformats.org/drawingml/2006/main">
+            <a:pPr algn="l">
+              <a:buNone/>
+              <a:defRPr sz="2400" b="0">
                 <a:solidFill>
                   <a:srgbClr val="152B3A"/>
                 </a:solidFill>
-              </a:defRPr>
-            </a:pPr>
-            <a:r>
-              <a:rPr sz="2175" b="0">
+                <a:latin typeface="Calibri"/>
+                <a:ea typeface="Calibri"/>
+                <a:cs typeface="Calibri"/>
+              </a:defRPr>
+            </a:pPr>
+            <a:r>
+              <a:rPr sz="2400" b="0">
                 <a:solidFill>
                   <a:srgbClr val="152B3A"/>
                 </a:solidFill>
+                <a:latin typeface="Calibri"/>
+                <a:ea typeface="Calibri"/>
+                <a:cs typeface="Calibri"/>
               </a:rPr>
               <a:t>Same ramp height; different surfaces</a:t>
             </a:r>
@@ -3082,34 +3238,43 @@
         </p:nvSpPr>
         <p:spPr>
           <a:xfrm xmlns:a="http://schemas.openxmlformats.org/drawingml/2006/main">
-            <a:off x="609600" y="3228975"/>
-            <a:ext cx="10972800" cy="533400"/>
-          </a:xfrm>
-          <a:prstGeom xmlns:a="http://schemas.openxmlformats.org/drawingml/2006/main" prst="rect">
-            <a:avLst/>
-          </a:prstGeom>
-          <a:noFill xmlns:a="http://schemas.openxmlformats.org/drawingml/2006/main"/>
-          <a:ln xmlns:a="http://schemas.openxmlformats.org/drawingml/2006/main" w="0">
-            <a:noFill/>
-            <a:prstDash val="solid"/>
-          </a:ln>
-        </p:spPr>
-        <p:txBody>
-          <a:bodyPr xmlns:a="http://schemas.openxmlformats.org/drawingml/2006/main" lIns="0" tIns="0" rIns="0" bIns="0" anchor="ctr"/>
-          <a:lstStyle xmlns:a="http://schemas.openxmlformats.org/drawingml/2006/main"/>
-          <a:p xmlns:a="http://schemas.openxmlformats.org/drawingml/2006/main">
-            <a:pPr>
-              <a:defRPr sz="2175" b="0">
+            <a:off x="1000125" y="3013710"/>
+            <a:ext cx="10382250" cy="622935"/>
+          </a:xfrm>
+          <a:prstGeom xmlns:a="http://schemas.openxmlformats.org/drawingml/2006/main" prst="rect">
+            <a:avLst/>
+          </a:prstGeom>
+          <a:noFill xmlns:a="http://schemas.openxmlformats.org/drawingml/2006/main"/>
+          <a:ln xmlns:a="http://schemas.openxmlformats.org/drawingml/2006/main" w="0">
+            <a:noFill/>
+            <a:prstDash val="solid"/>
+          </a:ln>
+        </p:spPr>
+        <p:txBody>
+          <a:bodyPr xmlns:a="http://schemas.openxmlformats.org/drawingml/2006/main" lIns="0" tIns="0" rIns="0" bIns="0" anchor="ctr">
+            <a:noAutofit/>
+          </a:bodyPr>
+          <a:lstStyle xmlns:a="http://schemas.openxmlformats.org/drawingml/2006/main"/>
+          <a:p xmlns:a="http://schemas.openxmlformats.org/drawingml/2006/main">
+            <a:pPr algn="l">
+              <a:buNone/>
+              <a:defRPr sz="2400" b="0">
                 <a:solidFill>
                   <a:srgbClr val="152B3A"/>
                 </a:solidFill>
-              </a:defRPr>
-            </a:pPr>
-            <a:r>
-              <a:rPr sz="2175" b="0">
+                <a:latin typeface="Calibri"/>
+                <a:ea typeface="Calibri"/>
+                <a:cs typeface="Calibri"/>
+              </a:defRPr>
+            </a:pPr>
+            <a:r>
+              <a:rPr sz="2400" b="0">
                 <a:solidFill>
                   <a:srgbClr val="152B3A"/>
                 </a:solidFill>
+                <a:latin typeface="Calibri"/>
+                <a:ea typeface="Calibri"/>
+                <a:cs typeface="Calibri"/>
               </a:rPr>
               <a:t>Different ramp heights AND different surfaces</a:t>
             </a:r>
@@ -3132,34 +3297,43 @@
         </p:nvSpPr>
         <p:spPr>
           <a:xfrm xmlns:a="http://schemas.openxmlformats.org/drawingml/2006/main">
-            <a:off x="609600" y="3838575"/>
-            <a:ext cx="10972800" cy="533400"/>
-          </a:xfrm>
-          <a:prstGeom xmlns:a="http://schemas.openxmlformats.org/drawingml/2006/main" prst="rect">
-            <a:avLst/>
-          </a:prstGeom>
-          <a:noFill xmlns:a="http://schemas.openxmlformats.org/drawingml/2006/main"/>
-          <a:ln xmlns:a="http://schemas.openxmlformats.org/drawingml/2006/main" w="0">
-            <a:noFill/>
-            <a:prstDash val="solid"/>
-          </a:ln>
-        </p:spPr>
-        <p:txBody>
-          <a:bodyPr xmlns:a="http://schemas.openxmlformats.org/drawingml/2006/main" lIns="0" tIns="0" rIns="0" bIns="0" anchor="ctr"/>
-          <a:lstStyle xmlns:a="http://schemas.openxmlformats.org/drawingml/2006/main"/>
-          <a:p xmlns:a="http://schemas.openxmlformats.org/drawingml/2006/main">
-            <a:pPr>
-              <a:defRPr sz="2175" b="0">
+            <a:off x="1000125" y="3693795"/>
+            <a:ext cx="10382250" cy="622935"/>
+          </a:xfrm>
+          <a:prstGeom xmlns:a="http://schemas.openxmlformats.org/drawingml/2006/main" prst="rect">
+            <a:avLst/>
+          </a:prstGeom>
+          <a:noFill xmlns:a="http://schemas.openxmlformats.org/drawingml/2006/main"/>
+          <a:ln xmlns:a="http://schemas.openxmlformats.org/drawingml/2006/main" w="0">
+            <a:noFill/>
+            <a:prstDash val="solid"/>
+          </a:ln>
+        </p:spPr>
+        <p:txBody>
+          <a:bodyPr xmlns:a="http://schemas.openxmlformats.org/drawingml/2006/main" lIns="0" tIns="0" rIns="0" bIns="0" anchor="ctr">
+            <a:noAutofit/>
+          </a:bodyPr>
+          <a:lstStyle xmlns:a="http://schemas.openxmlformats.org/drawingml/2006/main"/>
+          <a:p xmlns:a="http://schemas.openxmlformats.org/drawingml/2006/main">
+            <a:pPr algn="l">
+              <a:buNone/>
+              <a:defRPr sz="2400" b="0">
                 <a:solidFill>
                   <a:srgbClr val="152B3A"/>
                 </a:solidFill>
-              </a:defRPr>
-            </a:pPr>
-            <a:r>
-              <a:rPr sz="2175" b="0">
+                <a:latin typeface="Calibri"/>
+                <a:ea typeface="Calibri"/>
+                <a:cs typeface="Calibri"/>
+              </a:defRPr>
+            </a:pPr>
+            <a:r>
+              <a:rPr sz="2400" b="0">
                 <a:solidFill>
                   <a:srgbClr val="152B3A"/>
                 </a:solidFill>
+                <a:latin typeface="Calibri"/>
+                <a:ea typeface="Calibri"/>
+                <a:cs typeface="Calibri"/>
               </a:rPr>
               <a:t>Three repeats for each surface</a:t>
             </a:r>
@@ -3182,34 +3356,43 @@
         </p:nvSpPr>
         <p:spPr>
           <a:xfrm xmlns:a="http://schemas.openxmlformats.org/drawingml/2006/main">
-            <a:off x="609600" y="4448175"/>
-            <a:ext cx="10972800" cy="533400"/>
-          </a:xfrm>
-          <a:prstGeom xmlns:a="http://schemas.openxmlformats.org/drawingml/2006/main" prst="rect">
-            <a:avLst/>
-          </a:prstGeom>
-          <a:noFill xmlns:a="http://schemas.openxmlformats.org/drawingml/2006/main"/>
-          <a:ln xmlns:a="http://schemas.openxmlformats.org/drawingml/2006/main" w="0">
-            <a:noFill/>
-            <a:prstDash val="solid"/>
-          </a:ln>
-        </p:spPr>
-        <p:txBody>
-          <a:bodyPr xmlns:a="http://schemas.openxmlformats.org/drawingml/2006/main" lIns="0" tIns="0" rIns="0" bIns="0" anchor="ctr"/>
-          <a:lstStyle xmlns:a="http://schemas.openxmlformats.org/drawingml/2006/main"/>
-          <a:p xmlns:a="http://schemas.openxmlformats.org/drawingml/2006/main">
-            <a:pPr>
-              <a:defRPr sz="2175" b="0">
+            <a:off x="1000125" y="4373880"/>
+            <a:ext cx="10382250" cy="622935"/>
+          </a:xfrm>
+          <a:prstGeom xmlns:a="http://schemas.openxmlformats.org/drawingml/2006/main" prst="rect">
+            <a:avLst/>
+          </a:prstGeom>
+          <a:noFill xmlns:a="http://schemas.openxmlformats.org/drawingml/2006/main"/>
+          <a:ln xmlns:a="http://schemas.openxmlformats.org/drawingml/2006/main" w="0">
+            <a:noFill/>
+            <a:prstDash val="solid"/>
+          </a:ln>
+        </p:spPr>
+        <p:txBody>
+          <a:bodyPr xmlns:a="http://schemas.openxmlformats.org/drawingml/2006/main" lIns="0" tIns="0" rIns="0" bIns="0" anchor="ctr">
+            <a:noAutofit/>
+          </a:bodyPr>
+          <a:lstStyle xmlns:a="http://schemas.openxmlformats.org/drawingml/2006/main"/>
+          <a:p xmlns:a="http://schemas.openxmlformats.org/drawingml/2006/main">
+            <a:pPr algn="l">
+              <a:buNone/>
+              <a:defRPr sz="2400" b="0">
                 <a:solidFill>
                   <a:srgbClr val="152B3A"/>
                 </a:solidFill>
-              </a:defRPr>
-            </a:pPr>
-            <a:r>
-              <a:rPr sz="2175" b="0">
+                <a:latin typeface="Calibri"/>
+                <a:ea typeface="Calibri"/>
+                <a:cs typeface="Calibri"/>
+              </a:defRPr>
+            </a:pPr>
+            <a:r>
+              <a:rPr sz="2400" b="0">
                 <a:solidFill>
                   <a:srgbClr val="152B3A"/>
                 </a:solidFill>
+                <a:latin typeface="Calibri"/>
+                <a:ea typeface="Calibri"/>
+                <a:cs typeface="Calibri"/>
               </a:rPr>
               <a:t>Ignoring a result you did not like</a:t>
             </a:r>
@@ -3232,36 +3415,450 @@
         </p:nvSpPr>
         <p:spPr>
           <a:xfrm xmlns:a="http://schemas.openxmlformats.org/drawingml/2006/main">
-            <a:off x="609600" y="5057775"/>
-            <a:ext cx="10972800" cy="533400"/>
-          </a:xfrm>
-          <a:prstGeom xmlns:a="http://schemas.openxmlformats.org/drawingml/2006/main" prst="rect">
-            <a:avLst/>
-          </a:prstGeom>
-          <a:noFill xmlns:a="http://schemas.openxmlformats.org/drawingml/2006/main"/>
-          <a:ln xmlns:a="http://schemas.openxmlformats.org/drawingml/2006/main" w="0">
-            <a:noFill/>
-            <a:prstDash val="solid"/>
-          </a:ln>
-        </p:spPr>
-        <p:txBody>
-          <a:bodyPr xmlns:a="http://schemas.openxmlformats.org/drawingml/2006/main" lIns="0" tIns="0" rIns="0" bIns="0" anchor="ctr"/>
-          <a:lstStyle xmlns:a="http://schemas.openxmlformats.org/drawingml/2006/main"/>
-          <a:p xmlns:a="http://schemas.openxmlformats.org/drawingml/2006/main">
-            <a:pPr>
-              <a:defRPr sz="2175" b="0">
+            <a:off x="1000125" y="5053965"/>
+            <a:ext cx="10382250" cy="622935"/>
+          </a:xfrm>
+          <a:prstGeom xmlns:a="http://schemas.openxmlformats.org/drawingml/2006/main" prst="rect">
+            <a:avLst/>
+          </a:prstGeom>
+          <a:noFill xmlns:a="http://schemas.openxmlformats.org/drawingml/2006/main"/>
+          <a:ln xmlns:a="http://schemas.openxmlformats.org/drawingml/2006/main" w="0">
+            <a:noFill/>
+            <a:prstDash val="solid"/>
+          </a:ln>
+        </p:spPr>
+        <p:txBody>
+          <a:bodyPr xmlns:a="http://schemas.openxmlformats.org/drawingml/2006/main" lIns="0" tIns="0" rIns="0" bIns="0" anchor="ctr">
+            <a:noAutofit/>
+          </a:bodyPr>
+          <a:lstStyle xmlns:a="http://schemas.openxmlformats.org/drawingml/2006/main"/>
+          <a:p xmlns:a="http://schemas.openxmlformats.org/drawingml/2006/main">
+            <a:pPr algn="l">
+              <a:buNone/>
+              <a:defRPr sz="2400" b="0">
                 <a:solidFill>
                   <a:srgbClr val="152B3A"/>
                 </a:solidFill>
-              </a:defRPr>
-            </a:pPr>
-            <a:r>
-              <a:rPr sz="2175" b="0">
+                <a:latin typeface="Calibri"/>
+                <a:ea typeface="Calibri"/>
+                <a:cs typeface="Calibri"/>
+              </a:defRPr>
+            </a:pPr>
+            <a:r>
+              <a:rPr sz="2400" b="0">
                 <a:solidFill>
                   <a:srgbClr val="152B3A"/>
                 </a:solidFill>
+                <a:latin typeface="Calibri"/>
+                <a:ea typeface="Calibri"/>
+                <a:cs typeface="Calibri"/>
               </a:rPr>
               <a:t>Measuring in ‘about a ruler’</a:t>
+            </a:r>
+          </a:p>
+        </p:txBody>
+      </p:sp>
+      <p:sp>
+        <p:nvSpPr>
+          <p:cNvPr id="13" name="cue-0">
+            <a:extLst xmlns:a="http://schemas.openxmlformats.org/drawingml/2006/main">
+              <a:ext uri="{FF2B5EF4-FFF2-40B4-BE49-F238E27FC236}">
+                <a16:creationId xmlns:a16="http://schemas.microsoft.com/office/drawing/2014/main" id="{BE1287A0-ECFD-4DDF-92F0-334FBF63264F}"/>
+              </a:ext>
+            </a:extLst>
+          </p:cNvPr>
+          <p:cNvSpPr>
+            <a:spLocks xmlns:a="http://schemas.openxmlformats.org/drawingml/2006/main" noGrp="1"/>
+          </p:cNvSpPr>
+          <p:nvPr/>
+        </p:nvSpPr>
+        <p:spPr>
+          <a:xfrm xmlns:a="http://schemas.openxmlformats.org/drawingml/2006/main">
+            <a:off x="609600" y="2362200"/>
+            <a:ext cx="323850" cy="323850"/>
+          </a:xfrm>
+          <a:prstGeom xmlns:a="http://schemas.openxmlformats.org/drawingml/2006/main" prst="rect">
+            <a:avLst/>
+          </a:prstGeom>
+          <a:noFill xmlns:a="http://schemas.openxmlformats.org/drawingml/2006/main"/>
+          <a:ln xmlns:a="http://schemas.openxmlformats.org/drawingml/2006/main" w="0">
+            <a:noFill/>
+          </a:ln>
+        </p:spPr>
+        <p:txBody>
+          <a:bodyPr xmlns:a="http://schemas.openxmlformats.org/drawingml/2006/main" lIns="0" tIns="0" rIns="0" bIns="0" anchor="ctr">
+            <a:noAutofit/>
+          </a:bodyPr>
+          <a:lstStyle xmlns:a="http://schemas.openxmlformats.org/drawingml/2006/main"/>
+          <a:p xmlns:a="http://schemas.openxmlformats.org/drawingml/2006/main">
+            <a:pPr algn="l">
+              <a:defRPr sz="1350" b="1">
+                <a:solidFill>
+                  <a:srgbClr val="28685E"/>
+                </a:solidFill>
+                <a:latin typeface="Calibri"/>
+                <a:ea typeface="Calibri"/>
+                <a:cs typeface="Calibri"/>
+              </a:defRPr>
+            </a:pPr>
+            <a:r>
+              <a:rPr sz="1350" b="1">
+                <a:solidFill>
+                  <a:srgbClr val="28685E"/>
+                </a:solidFill>
+                <a:latin typeface="Calibri"/>
+                <a:ea typeface="Calibri"/>
+                <a:cs typeface="Calibri"/>
+              </a:rPr>
+              <a:t>01</a:t>
+            </a:r>
+          </a:p>
+        </p:txBody>
+      </p:sp>
+      <p:sp>
+        <p:nvSpPr>
+          <p:cNvPr id="14" name="row-rule-0">
+            <a:extLst xmlns:a="http://schemas.openxmlformats.org/drawingml/2006/main">
+              <a:ext uri="{FF2B5EF4-FFF2-40B4-BE49-F238E27FC236}">
+                <a16:creationId xmlns:a16="http://schemas.microsoft.com/office/drawing/2014/main" id="{87516707-FB5C-4BFF-BA9A-43B5EE8AC5C0}"/>
+              </a:ext>
+            </a:extLst>
+          </p:cNvPr>
+          <p:cNvSpPr>
+            <a:spLocks xmlns:a="http://schemas.openxmlformats.org/drawingml/2006/main" noGrp="1"/>
+          </p:cNvSpPr>
+          <p:nvPr/>
+        </p:nvSpPr>
+        <p:spPr>
+          <a:xfrm xmlns:a="http://schemas.openxmlformats.org/drawingml/2006/main">
+            <a:off x="1000125" y="2966085"/>
+            <a:ext cx="10334625" cy="0"/>
+          </a:xfrm>
+          <a:prstGeom xmlns:a="http://schemas.openxmlformats.org/drawingml/2006/main" prst="line">
+            <a:avLst/>
+          </a:prstGeom>
+          <a:noFill xmlns:a="http://schemas.openxmlformats.org/drawingml/2006/main"/>
+          <a:ln xmlns:a="http://schemas.openxmlformats.org/drawingml/2006/main" w="9525">
+            <a:solidFill>
+              <a:srgbClr val="CEDBD3"/>
+            </a:solidFill>
+          </a:ln>
+        </p:spPr>
+      </p:sp>
+      <p:sp>
+        <p:nvSpPr>
+          <p:cNvPr id="15" name="cue-1">
+            <a:extLst xmlns:a="http://schemas.openxmlformats.org/drawingml/2006/main">
+              <a:ext uri="{FF2B5EF4-FFF2-40B4-BE49-F238E27FC236}">
+                <a16:creationId xmlns:a16="http://schemas.microsoft.com/office/drawing/2014/main" id="{08A02F25-8A8A-4BCF-B6E8-9EBCF9003C32}"/>
+              </a:ext>
+            </a:extLst>
+          </p:cNvPr>
+          <p:cNvSpPr>
+            <a:spLocks xmlns:a="http://schemas.openxmlformats.org/drawingml/2006/main" noGrp="1"/>
+          </p:cNvSpPr>
+          <p:nvPr/>
+        </p:nvSpPr>
+        <p:spPr>
+          <a:xfrm xmlns:a="http://schemas.openxmlformats.org/drawingml/2006/main">
+            <a:off x="609600" y="3042285"/>
+            <a:ext cx="323850" cy="323850"/>
+          </a:xfrm>
+          <a:prstGeom xmlns:a="http://schemas.openxmlformats.org/drawingml/2006/main" prst="rect">
+            <a:avLst/>
+          </a:prstGeom>
+          <a:noFill xmlns:a="http://schemas.openxmlformats.org/drawingml/2006/main"/>
+          <a:ln xmlns:a="http://schemas.openxmlformats.org/drawingml/2006/main" w="0">
+            <a:noFill/>
+          </a:ln>
+        </p:spPr>
+        <p:txBody>
+          <a:bodyPr xmlns:a="http://schemas.openxmlformats.org/drawingml/2006/main" lIns="0" tIns="0" rIns="0" bIns="0" anchor="ctr">
+            <a:noAutofit/>
+          </a:bodyPr>
+          <a:lstStyle xmlns:a="http://schemas.openxmlformats.org/drawingml/2006/main"/>
+          <a:p xmlns:a="http://schemas.openxmlformats.org/drawingml/2006/main">
+            <a:pPr algn="l">
+              <a:defRPr sz="1350" b="1">
+                <a:solidFill>
+                  <a:srgbClr val="28685E"/>
+                </a:solidFill>
+                <a:latin typeface="Calibri"/>
+                <a:ea typeface="Calibri"/>
+                <a:cs typeface="Calibri"/>
+              </a:defRPr>
+            </a:pPr>
+            <a:r>
+              <a:rPr sz="1350" b="1">
+                <a:solidFill>
+                  <a:srgbClr val="28685E"/>
+                </a:solidFill>
+                <a:latin typeface="Calibri"/>
+                <a:ea typeface="Calibri"/>
+                <a:cs typeface="Calibri"/>
+              </a:rPr>
+              <a:t>02</a:t>
+            </a:r>
+          </a:p>
+        </p:txBody>
+      </p:sp>
+      <p:sp>
+        <p:nvSpPr>
+          <p:cNvPr id="16" name="row-rule-1">
+            <a:extLst xmlns:a="http://schemas.openxmlformats.org/drawingml/2006/main">
+              <a:ext uri="{FF2B5EF4-FFF2-40B4-BE49-F238E27FC236}">
+                <a16:creationId xmlns:a16="http://schemas.microsoft.com/office/drawing/2014/main" id="{A18D3F2B-D84B-47A8-B786-3B0924D964D5}"/>
+              </a:ext>
+            </a:extLst>
+          </p:cNvPr>
+          <p:cNvSpPr>
+            <a:spLocks xmlns:a="http://schemas.openxmlformats.org/drawingml/2006/main" noGrp="1"/>
+          </p:cNvSpPr>
+          <p:nvPr/>
+        </p:nvSpPr>
+        <p:spPr>
+          <a:xfrm xmlns:a="http://schemas.openxmlformats.org/drawingml/2006/main">
+            <a:off x="1000125" y="3646170"/>
+            <a:ext cx="10334625" cy="0"/>
+          </a:xfrm>
+          <a:prstGeom xmlns:a="http://schemas.openxmlformats.org/drawingml/2006/main" prst="line">
+            <a:avLst/>
+          </a:prstGeom>
+          <a:noFill xmlns:a="http://schemas.openxmlformats.org/drawingml/2006/main"/>
+          <a:ln xmlns:a="http://schemas.openxmlformats.org/drawingml/2006/main" w="9525">
+            <a:solidFill>
+              <a:srgbClr val="CEDBD3"/>
+            </a:solidFill>
+          </a:ln>
+        </p:spPr>
+      </p:sp>
+      <p:sp>
+        <p:nvSpPr>
+          <p:cNvPr id="17" name="cue-2">
+            <a:extLst xmlns:a="http://schemas.openxmlformats.org/drawingml/2006/main">
+              <a:ext uri="{FF2B5EF4-FFF2-40B4-BE49-F238E27FC236}">
+                <a16:creationId xmlns:a16="http://schemas.microsoft.com/office/drawing/2014/main" id="{00C64E48-AFC2-407E-8B1F-1D0FEA83EE6F}"/>
+              </a:ext>
+            </a:extLst>
+          </p:cNvPr>
+          <p:cNvSpPr>
+            <a:spLocks xmlns:a="http://schemas.openxmlformats.org/drawingml/2006/main" noGrp="1"/>
+          </p:cNvSpPr>
+          <p:nvPr/>
+        </p:nvSpPr>
+        <p:spPr>
+          <a:xfrm xmlns:a="http://schemas.openxmlformats.org/drawingml/2006/main">
+            <a:off x="609600" y="3722370"/>
+            <a:ext cx="323850" cy="323850"/>
+          </a:xfrm>
+          <a:prstGeom xmlns:a="http://schemas.openxmlformats.org/drawingml/2006/main" prst="rect">
+            <a:avLst/>
+          </a:prstGeom>
+          <a:noFill xmlns:a="http://schemas.openxmlformats.org/drawingml/2006/main"/>
+          <a:ln xmlns:a="http://schemas.openxmlformats.org/drawingml/2006/main" w="0">
+            <a:noFill/>
+          </a:ln>
+        </p:spPr>
+        <p:txBody>
+          <a:bodyPr xmlns:a="http://schemas.openxmlformats.org/drawingml/2006/main" lIns="0" tIns="0" rIns="0" bIns="0" anchor="ctr">
+            <a:noAutofit/>
+          </a:bodyPr>
+          <a:lstStyle xmlns:a="http://schemas.openxmlformats.org/drawingml/2006/main"/>
+          <a:p xmlns:a="http://schemas.openxmlformats.org/drawingml/2006/main">
+            <a:pPr algn="l">
+              <a:defRPr sz="1350" b="1">
+                <a:solidFill>
+                  <a:srgbClr val="28685E"/>
+                </a:solidFill>
+                <a:latin typeface="Calibri"/>
+                <a:ea typeface="Calibri"/>
+                <a:cs typeface="Calibri"/>
+              </a:defRPr>
+            </a:pPr>
+            <a:r>
+              <a:rPr sz="1350" b="1">
+                <a:solidFill>
+                  <a:srgbClr val="28685E"/>
+                </a:solidFill>
+                <a:latin typeface="Calibri"/>
+                <a:ea typeface="Calibri"/>
+                <a:cs typeface="Calibri"/>
+              </a:rPr>
+              <a:t>03</a:t>
+            </a:r>
+          </a:p>
+        </p:txBody>
+      </p:sp>
+      <p:sp>
+        <p:nvSpPr>
+          <p:cNvPr id="18" name="row-rule-2">
+            <a:extLst xmlns:a="http://schemas.openxmlformats.org/drawingml/2006/main">
+              <a:ext uri="{FF2B5EF4-FFF2-40B4-BE49-F238E27FC236}">
+                <a16:creationId xmlns:a16="http://schemas.microsoft.com/office/drawing/2014/main" id="{BEB41633-38A0-4E5B-86E2-DACE3D3C5E79}"/>
+              </a:ext>
+            </a:extLst>
+          </p:cNvPr>
+          <p:cNvSpPr>
+            <a:spLocks xmlns:a="http://schemas.openxmlformats.org/drawingml/2006/main" noGrp="1"/>
+          </p:cNvSpPr>
+          <p:nvPr/>
+        </p:nvSpPr>
+        <p:spPr>
+          <a:xfrm xmlns:a="http://schemas.openxmlformats.org/drawingml/2006/main">
+            <a:off x="1000125" y="4326255"/>
+            <a:ext cx="10334625" cy="0"/>
+          </a:xfrm>
+          <a:prstGeom xmlns:a="http://schemas.openxmlformats.org/drawingml/2006/main" prst="line">
+            <a:avLst/>
+          </a:prstGeom>
+          <a:noFill xmlns:a="http://schemas.openxmlformats.org/drawingml/2006/main"/>
+          <a:ln xmlns:a="http://schemas.openxmlformats.org/drawingml/2006/main" w="9525">
+            <a:solidFill>
+              <a:srgbClr val="CEDBD3"/>
+            </a:solidFill>
+          </a:ln>
+        </p:spPr>
+      </p:sp>
+      <p:sp>
+        <p:nvSpPr>
+          <p:cNvPr id="19" name="cue-3">
+            <a:extLst xmlns:a="http://schemas.openxmlformats.org/drawingml/2006/main">
+              <a:ext uri="{FF2B5EF4-FFF2-40B4-BE49-F238E27FC236}">
+                <a16:creationId xmlns:a16="http://schemas.microsoft.com/office/drawing/2014/main" id="{2DD536EA-5068-4F55-A821-5E8AF69D749A}"/>
+              </a:ext>
+            </a:extLst>
+          </p:cNvPr>
+          <p:cNvSpPr>
+            <a:spLocks xmlns:a="http://schemas.openxmlformats.org/drawingml/2006/main" noGrp="1"/>
+          </p:cNvSpPr>
+          <p:nvPr/>
+        </p:nvSpPr>
+        <p:spPr>
+          <a:xfrm xmlns:a="http://schemas.openxmlformats.org/drawingml/2006/main">
+            <a:off x="609600" y="4402455"/>
+            <a:ext cx="323850" cy="323850"/>
+          </a:xfrm>
+          <a:prstGeom xmlns:a="http://schemas.openxmlformats.org/drawingml/2006/main" prst="rect">
+            <a:avLst/>
+          </a:prstGeom>
+          <a:noFill xmlns:a="http://schemas.openxmlformats.org/drawingml/2006/main"/>
+          <a:ln xmlns:a="http://schemas.openxmlformats.org/drawingml/2006/main" w="0">
+            <a:noFill/>
+          </a:ln>
+        </p:spPr>
+        <p:txBody>
+          <a:bodyPr xmlns:a="http://schemas.openxmlformats.org/drawingml/2006/main" lIns="0" tIns="0" rIns="0" bIns="0" anchor="ctr">
+            <a:noAutofit/>
+          </a:bodyPr>
+          <a:lstStyle xmlns:a="http://schemas.openxmlformats.org/drawingml/2006/main"/>
+          <a:p xmlns:a="http://schemas.openxmlformats.org/drawingml/2006/main">
+            <a:pPr algn="l">
+              <a:defRPr sz="1350" b="1">
+                <a:solidFill>
+                  <a:srgbClr val="28685E"/>
+                </a:solidFill>
+                <a:latin typeface="Calibri"/>
+                <a:ea typeface="Calibri"/>
+                <a:cs typeface="Calibri"/>
+              </a:defRPr>
+            </a:pPr>
+            <a:r>
+              <a:rPr sz="1350" b="1">
+                <a:solidFill>
+                  <a:srgbClr val="28685E"/>
+                </a:solidFill>
+                <a:latin typeface="Calibri"/>
+                <a:ea typeface="Calibri"/>
+                <a:cs typeface="Calibri"/>
+              </a:rPr>
+              <a:t>04</a:t>
+            </a:r>
+          </a:p>
+        </p:txBody>
+      </p:sp>
+      <p:sp>
+        <p:nvSpPr>
+          <p:cNvPr id="20" name="row-rule-3">
+            <a:extLst xmlns:a="http://schemas.openxmlformats.org/drawingml/2006/main">
+              <a:ext uri="{FF2B5EF4-FFF2-40B4-BE49-F238E27FC236}">
+                <a16:creationId xmlns:a16="http://schemas.microsoft.com/office/drawing/2014/main" id="{8ABB4665-980B-453B-805C-7B07BD13AC9A}"/>
+              </a:ext>
+            </a:extLst>
+          </p:cNvPr>
+          <p:cNvSpPr>
+            <a:spLocks xmlns:a="http://schemas.openxmlformats.org/drawingml/2006/main" noGrp="1"/>
+          </p:cNvSpPr>
+          <p:nvPr/>
+        </p:nvSpPr>
+        <p:spPr>
+          <a:xfrm xmlns:a="http://schemas.openxmlformats.org/drawingml/2006/main">
+            <a:off x="1000125" y="5006340"/>
+            <a:ext cx="10334625" cy="0"/>
+          </a:xfrm>
+          <a:prstGeom xmlns:a="http://schemas.openxmlformats.org/drawingml/2006/main" prst="line">
+            <a:avLst/>
+          </a:prstGeom>
+          <a:noFill xmlns:a="http://schemas.openxmlformats.org/drawingml/2006/main"/>
+          <a:ln xmlns:a="http://schemas.openxmlformats.org/drawingml/2006/main" w="9525">
+            <a:solidFill>
+              <a:srgbClr val="CEDBD3"/>
+            </a:solidFill>
+          </a:ln>
+        </p:spPr>
+      </p:sp>
+      <p:sp>
+        <p:nvSpPr>
+          <p:cNvPr id="21" name="cue-4">
+            <a:extLst xmlns:a="http://schemas.openxmlformats.org/drawingml/2006/main">
+              <a:ext uri="{FF2B5EF4-FFF2-40B4-BE49-F238E27FC236}">
+                <a16:creationId xmlns:a16="http://schemas.microsoft.com/office/drawing/2014/main" id="{C20B1841-E84D-4ADA-8478-B73D3025DD24}"/>
+              </a:ext>
+            </a:extLst>
+          </p:cNvPr>
+          <p:cNvSpPr>
+            <a:spLocks xmlns:a="http://schemas.openxmlformats.org/drawingml/2006/main" noGrp="1"/>
+          </p:cNvSpPr>
+          <p:nvPr/>
+        </p:nvSpPr>
+        <p:spPr>
+          <a:xfrm xmlns:a="http://schemas.openxmlformats.org/drawingml/2006/main">
+            <a:off x="609600" y="5082540"/>
+            <a:ext cx="323850" cy="323850"/>
+          </a:xfrm>
+          <a:prstGeom xmlns:a="http://schemas.openxmlformats.org/drawingml/2006/main" prst="rect">
+            <a:avLst/>
+          </a:prstGeom>
+          <a:noFill xmlns:a="http://schemas.openxmlformats.org/drawingml/2006/main"/>
+          <a:ln xmlns:a="http://schemas.openxmlformats.org/drawingml/2006/main" w="0">
+            <a:noFill/>
+          </a:ln>
+        </p:spPr>
+        <p:txBody>
+          <a:bodyPr xmlns:a="http://schemas.openxmlformats.org/drawingml/2006/main" lIns="0" tIns="0" rIns="0" bIns="0" anchor="ctr">
+            <a:noAutofit/>
+          </a:bodyPr>
+          <a:lstStyle xmlns:a="http://schemas.openxmlformats.org/drawingml/2006/main"/>
+          <a:p xmlns:a="http://schemas.openxmlformats.org/drawingml/2006/main">
+            <a:pPr algn="l">
+              <a:defRPr sz="1350" b="1">
+                <a:solidFill>
+                  <a:srgbClr val="28685E"/>
+                </a:solidFill>
+                <a:latin typeface="Calibri"/>
+                <a:ea typeface="Calibri"/>
+                <a:cs typeface="Calibri"/>
+              </a:defRPr>
+            </a:pPr>
+            <a:r>
+              <a:rPr sz="1350" b="1">
+                <a:solidFill>
+                  <a:srgbClr val="28685E"/>
+                </a:solidFill>
+                <a:latin typeface="Calibri"/>
+                <a:ea typeface="Calibri"/>
+                <a:cs typeface="Calibri"/>
+              </a:rPr>
+              <a:t>05</a:t>
             </a:r>
           </a:p>
         </p:txBody>
@@ -3282,7 +3879,7 @@
     <p:bg>
       <p:bgPr>
         <a:solidFill xmlns:a="http://schemas.openxmlformats.org/drawingml/2006/main">
-          <a:srgbClr val="F5F1E8"/>
+          <a:srgbClr val="FAF9F5"/>
         </a:solidFill>
       </p:bgPr>
     </p:bg>
@@ -3311,8 +3908,8 @@
         </p:nvSpPr>
         <p:spPr>
           <a:xfrm xmlns:a="http://schemas.openxmlformats.org/drawingml/2006/main">
-            <a:off x="609600" y="552450"/>
-            <a:ext cx="781050" cy="57150"/>
+            <a:off x="609600" y="733425"/>
+            <a:ext cx="781050" cy="38100"/>
           </a:xfrm>
           <a:prstGeom xmlns:a="http://schemas.openxmlformats.org/drawingml/2006/main" prst="rect">
             <a:avLst/>
@@ -3342,34 +3939,43 @@
         </p:nvSpPr>
         <p:spPr>
           <a:xfrm xmlns:a="http://schemas.openxmlformats.org/drawingml/2006/main">
-            <a:off x="609600" y="762000"/>
-            <a:ext cx="8572500" cy="285750"/>
-          </a:xfrm>
-          <a:prstGeom xmlns:a="http://schemas.openxmlformats.org/drawingml/2006/main" prst="rect">
-            <a:avLst/>
-          </a:prstGeom>
-          <a:noFill xmlns:a="http://schemas.openxmlformats.org/drawingml/2006/main"/>
-          <a:ln xmlns:a="http://schemas.openxmlformats.org/drawingml/2006/main" w="0">
-            <a:noFill/>
-            <a:prstDash val="solid"/>
-          </a:ln>
-        </p:spPr>
-        <p:txBody>
-          <a:bodyPr xmlns:a="http://schemas.openxmlformats.org/drawingml/2006/main" lIns="0" tIns="0" rIns="0" bIns="0" anchor="ctr"/>
-          <a:lstStyle xmlns:a="http://schemas.openxmlformats.org/drawingml/2006/main"/>
-          <a:p xmlns:a="http://schemas.openxmlformats.org/drawingml/2006/main">
-            <a:pPr>
-              <a:defRPr sz="1500" b="1">
+            <a:off x="609600" y="342900"/>
+            <a:ext cx="9334500" cy="304800"/>
+          </a:xfrm>
+          <a:prstGeom xmlns:a="http://schemas.openxmlformats.org/drawingml/2006/main" prst="rect">
+            <a:avLst/>
+          </a:prstGeom>
+          <a:noFill xmlns:a="http://schemas.openxmlformats.org/drawingml/2006/main"/>
+          <a:ln xmlns:a="http://schemas.openxmlformats.org/drawingml/2006/main" w="0">
+            <a:noFill/>
+            <a:prstDash val="solid"/>
+          </a:ln>
+        </p:spPr>
+        <p:txBody>
+          <a:bodyPr xmlns:a="http://schemas.openxmlformats.org/drawingml/2006/main" lIns="0" tIns="0" rIns="0" bIns="0" anchor="ctr">
+            <a:noAutofit/>
+          </a:bodyPr>
+          <a:lstStyle xmlns:a="http://schemas.openxmlformats.org/drawingml/2006/main"/>
+          <a:p xmlns:a="http://schemas.openxmlformats.org/drawingml/2006/main">
+            <a:pPr algn="l">
+              <a:buNone/>
+              <a:defRPr sz="1350" b="1">
                 <a:solidFill>
                   <a:srgbClr val="28685E"/>
                 </a:solidFill>
-              </a:defRPr>
-            </a:pPr>
-            <a:r>
-              <a:rPr sz="1500" b="1">
+                <a:latin typeface="Calibri"/>
+                <a:ea typeface="Calibri"/>
+                <a:cs typeface="Calibri"/>
+              </a:defRPr>
+            </a:pPr>
+            <a:r>
+              <a:rPr sz="1350" b="1">
                 <a:solidFill>
                   <a:srgbClr val="28685E"/>
                 </a:solidFill>
+                <a:latin typeface="Calibri"/>
+                <a:ea typeface="Calibri"/>
+                <a:cs typeface="Calibri"/>
               </a:rPr>
               <a:t>MADE BY MATT  /  GROW SCIENCE</a:t>
             </a:r>
@@ -3392,34 +3998,43 @@
         </p:nvSpPr>
         <p:spPr>
           <a:xfrm xmlns:a="http://schemas.openxmlformats.org/drawingml/2006/main">
-            <a:off x="609600" y="1352550"/>
-            <a:ext cx="10972800" cy="952500"/>
-          </a:xfrm>
-          <a:prstGeom xmlns:a="http://schemas.openxmlformats.org/drawingml/2006/main" prst="rect">
-            <a:avLst/>
-          </a:prstGeom>
-          <a:noFill xmlns:a="http://schemas.openxmlformats.org/drawingml/2006/main"/>
-          <a:ln xmlns:a="http://schemas.openxmlformats.org/drawingml/2006/main" w="0">
-            <a:noFill/>
-            <a:prstDash val="solid"/>
-          </a:ln>
-        </p:spPr>
-        <p:txBody>
-          <a:bodyPr xmlns:a="http://schemas.openxmlformats.org/drawingml/2006/main" lIns="0" tIns="0" rIns="0" bIns="0" anchor="ctr"/>
-          <a:lstStyle xmlns:a="http://schemas.openxmlformats.org/drawingml/2006/main"/>
-          <a:p xmlns:a="http://schemas.openxmlformats.org/drawingml/2006/main">
-            <a:pPr>
-              <a:defRPr sz="3750" b="1">
+            <a:off x="609600" y="990600"/>
+            <a:ext cx="10972800" cy="1000125"/>
+          </a:xfrm>
+          <a:prstGeom xmlns:a="http://schemas.openxmlformats.org/drawingml/2006/main" prst="rect">
+            <a:avLst/>
+          </a:prstGeom>
+          <a:noFill xmlns:a="http://schemas.openxmlformats.org/drawingml/2006/main"/>
+          <a:ln xmlns:a="http://schemas.openxmlformats.org/drawingml/2006/main" w="0">
+            <a:noFill/>
+            <a:prstDash val="solid"/>
+          </a:ln>
+        </p:spPr>
+        <p:txBody>
+          <a:bodyPr xmlns:a="http://schemas.openxmlformats.org/drawingml/2006/main" lIns="0" tIns="0" rIns="0" bIns="0" anchor="ctr">
+            <a:noAutofit/>
+          </a:bodyPr>
+          <a:lstStyle xmlns:a="http://schemas.openxmlformats.org/drawingml/2006/main"/>
+          <a:p xmlns:a="http://schemas.openxmlformats.org/drawingml/2006/main">
+            <a:pPr algn="l">
+              <a:buNone/>
+              <a:defRPr sz="3675" b="1">
                 <a:solidFill>
                   <a:srgbClr val="152B3A"/>
                 </a:solidFill>
-              </a:defRPr>
-            </a:pPr>
-            <a:r>
-              <a:rPr sz="3750" b="1">
+                <a:latin typeface="Calibri"/>
+                <a:ea typeface="Calibri"/>
+                <a:cs typeface="Calibri"/>
+              </a:defRPr>
+            </a:pPr>
+            <a:r>
+              <a:rPr sz="3675" b="1">
                 <a:solidFill>
                   <a:srgbClr val="152B3A"/>
                 </a:solidFill>
+                <a:latin typeface="Calibri"/>
+                <a:ea typeface="Calibri"/>
+                <a:cs typeface="Calibri"/>
               </a:rPr>
               <a:t>Check what each problem means</a:t>
             </a:r>
@@ -3442,14 +4057,14 @@
         </p:nvSpPr>
         <p:spPr>
           <a:xfrm xmlns:a="http://schemas.openxmlformats.org/drawingml/2006/main">
-            <a:off x="609600" y="6219825"/>
+            <a:off x="609600" y="6191250"/>
             <a:ext cx="10972800" cy="9525"/>
           </a:xfrm>
           <a:prstGeom xmlns:a="http://schemas.openxmlformats.org/drawingml/2006/main" prst="rect">
             <a:avLst/>
           </a:prstGeom>
           <a:solidFill xmlns:a="http://schemas.openxmlformats.org/drawingml/2006/main">
-            <a:srgbClr val="DCE7DD"/>
+            <a:srgbClr val="CEDBD3"/>
           </a:solidFill>
           <a:ln xmlns:a="http://schemas.openxmlformats.org/drawingml/2006/main" w="0">
             <a:noFill/>
@@ -3473,34 +4088,43 @@
         </p:nvSpPr>
         <p:spPr>
           <a:xfrm xmlns:a="http://schemas.openxmlformats.org/drawingml/2006/main">
-            <a:off x="609600" y="6381750"/>
-            <a:ext cx="9906000" cy="228600"/>
-          </a:xfrm>
-          <a:prstGeom xmlns:a="http://schemas.openxmlformats.org/drawingml/2006/main" prst="rect">
-            <a:avLst/>
-          </a:prstGeom>
-          <a:noFill xmlns:a="http://schemas.openxmlformats.org/drawingml/2006/main"/>
-          <a:ln xmlns:a="http://schemas.openxmlformats.org/drawingml/2006/main" w="0">
-            <a:noFill/>
-            <a:prstDash val="solid"/>
-          </a:ln>
-        </p:spPr>
-        <p:txBody>
-          <a:bodyPr xmlns:a="http://schemas.openxmlformats.org/drawingml/2006/main" lIns="0" tIns="0" rIns="0" bIns="0" anchor="ctr"/>
-          <a:lstStyle xmlns:a="http://schemas.openxmlformats.org/drawingml/2006/main"/>
-          <a:p xmlns:a="http://schemas.openxmlformats.org/drawingml/2006/main">
-            <a:pPr>
-              <a:defRPr sz="1275" b="0">
+            <a:off x="609600" y="6419850"/>
+            <a:ext cx="9525000" cy="219075"/>
+          </a:xfrm>
+          <a:prstGeom xmlns:a="http://schemas.openxmlformats.org/drawingml/2006/main" prst="rect">
+            <a:avLst/>
+          </a:prstGeom>
+          <a:noFill xmlns:a="http://schemas.openxmlformats.org/drawingml/2006/main"/>
+          <a:ln xmlns:a="http://schemas.openxmlformats.org/drawingml/2006/main" w="0">
+            <a:noFill/>
+            <a:prstDash val="solid"/>
+          </a:ln>
+        </p:spPr>
+        <p:txBody>
+          <a:bodyPr xmlns:a="http://schemas.openxmlformats.org/drawingml/2006/main" lIns="0" tIns="0" rIns="0" bIns="0" anchor="ctr">
+            <a:noAutofit/>
+          </a:bodyPr>
+          <a:lstStyle xmlns:a="http://schemas.openxmlformats.org/drawingml/2006/main"/>
+          <a:p xmlns:a="http://schemas.openxmlformats.org/drawingml/2006/main">
+            <a:pPr algn="l">
+              <a:buNone/>
+              <a:defRPr sz="1200" b="0">
                 <a:solidFill>
                   <a:srgbClr val="50616B"/>
                 </a:solidFill>
-              </a:defRPr>
-            </a:pPr>
-            <a:r>
-              <a:rPr sz="1275" b="0">
+                <a:latin typeface="Calibri"/>
+                <a:ea typeface="Calibri"/>
+                <a:cs typeface="Calibri"/>
+              </a:defRPr>
+            </a:pPr>
+            <a:r>
+              <a:rPr sz="1200" b="0">
                 <a:solidFill>
                   <a:srgbClr val="50616B"/>
                 </a:solidFill>
+                <a:latin typeface="Calibri"/>
+                <a:ea typeface="Calibri"/>
+                <a:cs typeface="Calibri"/>
               </a:rPr>
               <a:t>AUTUMN 1  ·  WEEK 5  ·  LESSON A</a:t>
             </a:r>
@@ -3523,27 +4147,33 @@
         </p:nvSpPr>
         <p:spPr>
           <a:xfrm xmlns:a="http://schemas.openxmlformats.org/drawingml/2006/main">
-            <a:off x="11106150" y="6362700"/>
-            <a:ext cx="476250" cy="238125"/>
-          </a:xfrm>
-          <a:prstGeom xmlns:a="http://schemas.openxmlformats.org/drawingml/2006/main" prst="rect">
-            <a:avLst/>
-          </a:prstGeom>
-          <a:noFill xmlns:a="http://schemas.openxmlformats.org/drawingml/2006/main"/>
-          <a:ln xmlns:a="http://schemas.openxmlformats.org/drawingml/2006/main" w="0">
-            <a:noFill/>
-            <a:prstDash val="solid"/>
-          </a:ln>
-        </p:spPr>
-        <p:txBody>
-          <a:bodyPr xmlns:a="http://schemas.openxmlformats.org/drawingml/2006/main" lIns="0" tIns="0" rIns="0" bIns="0" anchor="ctr"/>
-          <a:lstStyle xmlns:a="http://schemas.openxmlformats.org/drawingml/2006/main"/>
-          <a:p xmlns:a="http://schemas.openxmlformats.org/drawingml/2006/main">
-            <a:pPr>
+            <a:off x="11106150" y="6400800"/>
+            <a:ext cx="476250" cy="247650"/>
+          </a:xfrm>
+          <a:prstGeom xmlns:a="http://schemas.openxmlformats.org/drawingml/2006/main" prst="rect">
+            <a:avLst/>
+          </a:prstGeom>
+          <a:noFill xmlns:a="http://schemas.openxmlformats.org/drawingml/2006/main"/>
+          <a:ln xmlns:a="http://schemas.openxmlformats.org/drawingml/2006/main" w="0">
+            <a:noFill/>
+            <a:prstDash val="solid"/>
+          </a:ln>
+        </p:spPr>
+        <p:txBody>
+          <a:bodyPr xmlns:a="http://schemas.openxmlformats.org/drawingml/2006/main" lIns="0" tIns="0" rIns="0" bIns="0" anchor="ctr">
+            <a:noAutofit/>
+          </a:bodyPr>
+          <a:lstStyle xmlns:a="http://schemas.openxmlformats.org/drawingml/2006/main"/>
+          <a:p xmlns:a="http://schemas.openxmlformats.org/drawingml/2006/main">
+            <a:pPr algn="l">
+              <a:buNone/>
               <a:defRPr sz="1350" b="1">
                 <a:solidFill>
                   <a:srgbClr val="28685E"/>
                 </a:solidFill>
+                <a:latin typeface="Calibri"/>
+                <a:ea typeface="Calibri"/>
+                <a:cs typeface="Calibri"/>
               </a:defRPr>
             </a:pPr>
             <a:r>
@@ -3551,6 +4181,9 @@
                 <a:solidFill>
                   <a:srgbClr val="28685E"/>
                 </a:solidFill>
+                <a:latin typeface="Calibri"/>
+                <a:ea typeface="Calibri"/>
+                <a:cs typeface="Calibri"/>
               </a:rPr>
               <a:t>11</a:t>
             </a:r>
@@ -3573,34 +4206,45 @@
         </p:nvSpPr>
         <p:spPr>
           <a:xfrm xmlns:a="http://schemas.openxmlformats.org/drawingml/2006/main">
-            <a:off x="609600" y="2619375"/>
-            <a:ext cx="4953000" cy="428625"/>
-          </a:xfrm>
-          <a:prstGeom xmlns:a="http://schemas.openxmlformats.org/drawingml/2006/main" prst="rect">
-            <a:avLst/>
-          </a:prstGeom>
-          <a:noFill xmlns:a="http://schemas.openxmlformats.org/drawingml/2006/main"/>
-          <a:ln xmlns:a="http://schemas.openxmlformats.org/drawingml/2006/main" w="0">
-            <a:noFill/>
-            <a:prstDash val="solid"/>
-          </a:ln>
-        </p:spPr>
-        <p:txBody>
-          <a:bodyPr xmlns:a="http://schemas.openxmlformats.org/drawingml/2006/main" lIns="0" tIns="0" rIns="0" bIns="0" anchor="ctr"/>
-          <a:lstStyle xmlns:a="http://schemas.openxmlformats.org/drawingml/2006/main"/>
-          <a:p xmlns:a="http://schemas.openxmlformats.org/drawingml/2006/main">
-            <a:pPr>
-              <a:defRPr sz="2025" b="1">
+            <a:off x="609600" y="2219325"/>
+            <a:ext cx="5257800" cy="762000"/>
+          </a:xfrm>
+          <a:prstGeom xmlns:a="http://schemas.openxmlformats.org/drawingml/2006/main" prst="rect">
+            <a:avLst/>
+          </a:prstGeom>
+          <a:solidFill xmlns:a="http://schemas.openxmlformats.org/drawingml/2006/main">
+            <a:srgbClr val="E7EFE9"/>
+          </a:solidFill>
+          <a:ln xmlns:a="http://schemas.openxmlformats.org/drawingml/2006/main" w="0">
+            <a:noFill/>
+            <a:prstDash val="solid"/>
+          </a:ln>
+        </p:spPr>
+        <p:txBody>
+          <a:bodyPr xmlns:a="http://schemas.openxmlformats.org/drawingml/2006/main" lIns="228600" tIns="114300" rIns="228600" bIns="114300" anchor="ctr">
+            <a:noAutofit/>
+          </a:bodyPr>
+          <a:lstStyle xmlns:a="http://schemas.openxmlformats.org/drawingml/2006/main"/>
+          <a:p xmlns:a="http://schemas.openxmlformats.org/drawingml/2006/main">
+            <a:pPr algn="l">
+              <a:buNone/>
+              <a:defRPr sz="1875" b="1">
                 <a:solidFill>
                   <a:srgbClr val="28685E"/>
                 </a:solidFill>
-              </a:defRPr>
-            </a:pPr>
-            <a:r>
-              <a:rPr sz="2025" b="1">
+                <a:latin typeface="Calibri"/>
+                <a:ea typeface="Calibri"/>
+                <a:cs typeface="Calibri"/>
+              </a:defRPr>
+            </a:pPr>
+            <a:r>
+              <a:rPr sz="1875" b="1">
                 <a:solidFill>
                   <a:srgbClr val="28685E"/>
                 </a:solidFill>
+                <a:latin typeface="Calibri"/>
+                <a:ea typeface="Calibri"/>
+                <a:cs typeface="Calibri"/>
               </a:rPr>
               <a:t>SUPPORTS THE COMPARISON</a:t>
             </a:r>
@@ -3623,34 +4267,45 @@
         </p:nvSpPr>
         <p:spPr>
           <a:xfrm xmlns:a="http://schemas.openxmlformats.org/drawingml/2006/main">
-            <a:off x="6572250" y="2619375"/>
-            <a:ext cx="4953000" cy="428625"/>
-          </a:xfrm>
-          <a:prstGeom xmlns:a="http://schemas.openxmlformats.org/drawingml/2006/main" prst="rect">
-            <a:avLst/>
-          </a:prstGeom>
-          <a:noFill xmlns:a="http://schemas.openxmlformats.org/drawingml/2006/main"/>
-          <a:ln xmlns:a="http://schemas.openxmlformats.org/drawingml/2006/main" w="0">
-            <a:noFill/>
-            <a:prstDash val="solid"/>
-          </a:ln>
-        </p:spPr>
-        <p:txBody>
-          <a:bodyPr xmlns:a="http://schemas.openxmlformats.org/drawingml/2006/main" lIns="0" tIns="0" rIns="0" bIns="0" anchor="ctr"/>
-          <a:lstStyle xmlns:a="http://schemas.openxmlformats.org/drawingml/2006/main"/>
-          <a:p xmlns:a="http://schemas.openxmlformats.org/drawingml/2006/main">
-            <a:pPr>
-              <a:defRPr sz="2025" b="1">
-                <a:solidFill>
-                  <a:srgbClr val="A65D25"/>
-                </a:solidFill>
-              </a:defRPr>
-            </a:pPr>
-            <a:r>
-              <a:rPr sz="2025" b="1">
-                <a:solidFill>
-                  <a:srgbClr val="A65D25"/>
-                </a:solidFill>
+            <a:off x="6381750" y="2219325"/>
+            <a:ext cx="5200650" cy="762000"/>
+          </a:xfrm>
+          <a:prstGeom xmlns:a="http://schemas.openxmlformats.org/drawingml/2006/main" prst="rect">
+            <a:avLst/>
+          </a:prstGeom>
+          <a:solidFill xmlns:a="http://schemas.openxmlformats.org/drawingml/2006/main">
+            <a:srgbClr val="F0EBE3"/>
+          </a:solidFill>
+          <a:ln xmlns:a="http://schemas.openxmlformats.org/drawingml/2006/main" w="0">
+            <a:noFill/>
+            <a:prstDash val="solid"/>
+          </a:ln>
+        </p:spPr>
+        <p:txBody>
+          <a:bodyPr xmlns:a="http://schemas.openxmlformats.org/drawingml/2006/main" lIns="228600" tIns="114300" rIns="228600" bIns="114300" anchor="ctr">
+            <a:noAutofit/>
+          </a:bodyPr>
+          <a:lstStyle xmlns:a="http://schemas.openxmlformats.org/drawingml/2006/main"/>
+          <a:p xmlns:a="http://schemas.openxmlformats.org/drawingml/2006/main">
+            <a:pPr algn="l">
+              <a:buNone/>
+              <a:defRPr sz="1875" b="1">
+                <a:solidFill>
+                  <a:srgbClr val="A95D21"/>
+                </a:solidFill>
+                <a:latin typeface="Calibri"/>
+                <a:ea typeface="Calibri"/>
+                <a:cs typeface="Calibri"/>
+              </a:defRPr>
+            </a:pPr>
+            <a:r>
+              <a:rPr sz="1875" b="1">
+                <a:solidFill>
+                  <a:srgbClr val="A95D21"/>
+                </a:solidFill>
+                <a:latin typeface="Calibri"/>
+                <a:ea typeface="Calibri"/>
+                <a:cs typeface="Calibri"/>
               </a:rPr>
               <a:t>NEEDS CORRECTION</a:t>
             </a:r>
@@ -3673,27 +4328,35 @@
         </p:nvSpPr>
         <p:spPr>
           <a:xfrm xmlns:a="http://schemas.openxmlformats.org/drawingml/2006/main">
-            <a:off x="609600" y="3333750"/>
-            <a:ext cx="4953000" cy="2524125"/>
-          </a:xfrm>
-          <a:prstGeom xmlns:a="http://schemas.openxmlformats.org/drawingml/2006/main" prst="rect">
-            <a:avLst/>
-          </a:prstGeom>
-          <a:noFill xmlns:a="http://schemas.openxmlformats.org/drawingml/2006/main"/>
-          <a:ln xmlns:a="http://schemas.openxmlformats.org/drawingml/2006/main" w="0">
-            <a:noFill/>
-            <a:prstDash val="solid"/>
-          </a:ln>
-        </p:spPr>
-        <p:txBody>
-          <a:bodyPr xmlns:a="http://schemas.openxmlformats.org/drawingml/2006/main" lIns="0" tIns="0" rIns="0" bIns="0" anchor="ctr"/>
-          <a:lstStyle xmlns:a="http://schemas.openxmlformats.org/drawingml/2006/main"/>
-          <a:p xmlns:a="http://schemas.openxmlformats.org/drawingml/2006/main">
-            <a:pPr>
+            <a:off x="609600" y="2981325"/>
+            <a:ext cx="5257800" cy="2714625"/>
+          </a:xfrm>
+          <a:prstGeom xmlns:a="http://schemas.openxmlformats.org/drawingml/2006/main" prst="rect">
+            <a:avLst/>
+          </a:prstGeom>
+          <a:solidFill xmlns:a="http://schemas.openxmlformats.org/drawingml/2006/main">
+            <a:srgbClr val="E7EFE9"/>
+          </a:solidFill>
+          <a:ln xmlns:a="http://schemas.openxmlformats.org/drawingml/2006/main" w="0">
+            <a:noFill/>
+            <a:prstDash val="solid"/>
+          </a:ln>
+        </p:spPr>
+        <p:txBody>
+          <a:bodyPr xmlns:a="http://schemas.openxmlformats.org/drawingml/2006/main" lIns="228600" tIns="114300" rIns="228600" bIns="114300" anchor="ctr">
+            <a:noAutofit/>
+          </a:bodyPr>
+          <a:lstStyle xmlns:a="http://schemas.openxmlformats.org/drawingml/2006/main"/>
+          <a:p xmlns:a="http://schemas.openxmlformats.org/drawingml/2006/main">
+            <a:pPr algn="l">
+              <a:buNone/>
               <a:defRPr sz="2400" b="0">
                 <a:solidFill>
                   <a:srgbClr val="152B3A"/>
                 </a:solidFill>
+                <a:latin typeface="Calibri"/>
+                <a:ea typeface="Calibri"/>
+                <a:cs typeface="Calibri"/>
               </a:defRPr>
             </a:pPr>
             <a:r>
@@ -3701,16 +4364,23 @@
                 <a:solidFill>
                   <a:srgbClr val="152B3A"/>
                 </a:solidFill>
+                <a:latin typeface="Calibri"/>
+                <a:ea typeface="Calibri"/>
+                <a:cs typeface="Calibri"/>
               </a:rPr>
               <a:t>Same height; one planned change</a:t>
             </a:r>
           </a:p>
           <a:p xmlns:a="http://schemas.openxmlformats.org/drawingml/2006/main">
-            <a:pPr>
+            <a:pPr algn="l">
+              <a:buNone/>
               <a:defRPr sz="2400" b="0">
                 <a:solidFill>
                   <a:srgbClr val="152B3A"/>
                 </a:solidFill>
+                <a:latin typeface="Calibri"/>
+                <a:ea typeface="Calibri"/>
+                <a:cs typeface="Calibri"/>
               </a:defRPr>
             </a:pPr>
             <a:r>
@@ -3718,6 +4388,9 @@
                 <a:solidFill>
                   <a:srgbClr val="152B3A"/>
                 </a:solidFill>
+                <a:latin typeface="Calibri"/>
+                <a:ea typeface="Calibri"/>
+                <a:cs typeface="Calibri"/>
               </a:rPr>
               <a:t>Repeats with method unchanged</a:t>
             </a:r>
@@ -3740,27 +4413,35 @@
         </p:nvSpPr>
         <p:spPr>
           <a:xfrm xmlns:a="http://schemas.openxmlformats.org/drawingml/2006/main">
-            <a:off x="6572250" y="3333750"/>
-            <a:ext cx="4857750" cy="2524125"/>
-          </a:xfrm>
-          <a:prstGeom xmlns:a="http://schemas.openxmlformats.org/drawingml/2006/main" prst="rect">
-            <a:avLst/>
-          </a:prstGeom>
-          <a:noFill xmlns:a="http://schemas.openxmlformats.org/drawingml/2006/main"/>
-          <a:ln xmlns:a="http://schemas.openxmlformats.org/drawingml/2006/main" w="0">
-            <a:noFill/>
-            <a:prstDash val="solid"/>
-          </a:ln>
-        </p:spPr>
-        <p:txBody>
-          <a:bodyPr xmlns:a="http://schemas.openxmlformats.org/drawingml/2006/main" lIns="0" tIns="0" rIns="0" bIns="0" anchor="ctr"/>
-          <a:lstStyle xmlns:a="http://schemas.openxmlformats.org/drawingml/2006/main"/>
-          <a:p xmlns:a="http://schemas.openxmlformats.org/drawingml/2006/main">
-            <a:pPr>
+            <a:off x="6381750" y="2981325"/>
+            <a:ext cx="5200650" cy="2714625"/>
+          </a:xfrm>
+          <a:prstGeom xmlns:a="http://schemas.openxmlformats.org/drawingml/2006/main" prst="rect">
+            <a:avLst/>
+          </a:prstGeom>
+          <a:solidFill xmlns:a="http://schemas.openxmlformats.org/drawingml/2006/main">
+            <a:srgbClr val="F0EBE3"/>
+          </a:solidFill>
+          <a:ln xmlns:a="http://schemas.openxmlformats.org/drawingml/2006/main" w="0">
+            <a:noFill/>
+            <a:prstDash val="solid"/>
+          </a:ln>
+        </p:spPr>
+        <p:txBody>
+          <a:bodyPr xmlns:a="http://schemas.openxmlformats.org/drawingml/2006/main" lIns="228600" tIns="114300" rIns="228600" bIns="114300" anchor="ctr">
+            <a:noAutofit/>
+          </a:bodyPr>
+          <a:lstStyle xmlns:a="http://schemas.openxmlformats.org/drawingml/2006/main"/>
+          <a:p xmlns:a="http://schemas.openxmlformats.org/drawingml/2006/main">
+            <a:pPr algn="l">
+              <a:buNone/>
               <a:defRPr sz="2400" b="0">
                 <a:solidFill>
                   <a:srgbClr val="152B3A"/>
                 </a:solidFill>
+                <a:latin typeface="Calibri"/>
+                <a:ea typeface="Calibri"/>
+                <a:cs typeface="Calibri"/>
               </a:defRPr>
             </a:pPr>
             <a:r>
@@ -3768,16 +4449,23 @@
                 <a:solidFill>
                   <a:srgbClr val="152B3A"/>
                 </a:solidFill>
+                <a:latin typeface="Calibri"/>
+                <a:ea typeface="Calibri"/>
+                <a:cs typeface="Calibri"/>
               </a:rPr>
               <a:t>Two changed causes: unclear</a:t>
             </a:r>
           </a:p>
           <a:p xmlns:a="http://schemas.openxmlformats.org/drawingml/2006/main">
-            <a:pPr>
+            <a:pPr algn="l">
+              <a:buNone/>
               <a:defRPr sz="2400" b="0">
                 <a:solidFill>
                   <a:srgbClr val="152B3A"/>
                 </a:solidFill>
+                <a:latin typeface="Calibri"/>
+                <a:ea typeface="Calibri"/>
+                <a:cs typeface="Calibri"/>
               </a:defRPr>
             </a:pPr>
             <a:r>
@@ -3785,16 +4473,23 @@
                 <a:solidFill>
                   <a:srgbClr val="152B3A"/>
                 </a:solidFill>
+                <a:latin typeface="Calibri"/>
+                <a:ea typeface="Calibri"/>
+                <a:cs typeface="Calibri"/>
               </a:rPr>
               <a:t>Discarding disliked data: biased</a:t>
             </a:r>
           </a:p>
           <a:p xmlns:a="http://schemas.openxmlformats.org/drawingml/2006/main">
-            <a:pPr>
+            <a:pPr algn="l">
+              <a:buNone/>
               <a:defRPr sz="2400" b="0">
                 <a:solidFill>
                   <a:srgbClr val="152B3A"/>
                 </a:solidFill>
+                <a:latin typeface="Calibri"/>
+                <a:ea typeface="Calibri"/>
+                <a:cs typeface="Calibri"/>
               </a:defRPr>
             </a:pPr>
             <a:r>
@@ -3802,6 +4497,9 @@
                 <a:solidFill>
                   <a:srgbClr val="152B3A"/>
                 </a:solidFill>
+                <a:latin typeface="Calibri"/>
+                <a:ea typeface="Calibri"/>
+                <a:cs typeface="Calibri"/>
               </a:rPr>
               <a:t>‘About a ruler’: no clear unit</a:t>
             </a:r>
@@ -3824,7 +4522,7 @@
     <p:bg>
       <p:bgPr>
         <a:solidFill xmlns:a="http://schemas.openxmlformats.org/drawingml/2006/main">
-          <a:srgbClr val="F5F1E8"/>
+          <a:srgbClr val="FAF9F5"/>
         </a:solidFill>
       </p:bgPr>
     </p:bg>
@@ -3853,8 +4551,8 @@
         </p:nvSpPr>
         <p:spPr>
           <a:xfrm xmlns:a="http://schemas.openxmlformats.org/drawingml/2006/main">
-            <a:off x="609600" y="552450"/>
-            <a:ext cx="781050" cy="57150"/>
+            <a:off x="609600" y="733425"/>
+            <a:ext cx="781050" cy="38100"/>
           </a:xfrm>
           <a:prstGeom xmlns:a="http://schemas.openxmlformats.org/drawingml/2006/main" prst="rect">
             <a:avLst/>
@@ -3884,34 +4582,43 @@
         </p:nvSpPr>
         <p:spPr>
           <a:xfrm xmlns:a="http://schemas.openxmlformats.org/drawingml/2006/main">
-            <a:off x="609600" y="762000"/>
-            <a:ext cx="8572500" cy="285750"/>
-          </a:xfrm>
-          <a:prstGeom xmlns:a="http://schemas.openxmlformats.org/drawingml/2006/main" prst="rect">
-            <a:avLst/>
-          </a:prstGeom>
-          <a:noFill xmlns:a="http://schemas.openxmlformats.org/drawingml/2006/main"/>
-          <a:ln xmlns:a="http://schemas.openxmlformats.org/drawingml/2006/main" w="0">
-            <a:noFill/>
-            <a:prstDash val="solid"/>
-          </a:ln>
-        </p:spPr>
-        <p:txBody>
-          <a:bodyPr xmlns:a="http://schemas.openxmlformats.org/drawingml/2006/main" lIns="0" tIns="0" rIns="0" bIns="0" anchor="ctr"/>
-          <a:lstStyle xmlns:a="http://schemas.openxmlformats.org/drawingml/2006/main"/>
-          <a:p xmlns:a="http://schemas.openxmlformats.org/drawingml/2006/main">
-            <a:pPr>
-              <a:defRPr sz="1500" b="1">
+            <a:off x="609600" y="342900"/>
+            <a:ext cx="9334500" cy="304800"/>
+          </a:xfrm>
+          <a:prstGeom xmlns:a="http://schemas.openxmlformats.org/drawingml/2006/main" prst="rect">
+            <a:avLst/>
+          </a:prstGeom>
+          <a:noFill xmlns:a="http://schemas.openxmlformats.org/drawingml/2006/main"/>
+          <a:ln xmlns:a="http://schemas.openxmlformats.org/drawingml/2006/main" w="0">
+            <a:noFill/>
+            <a:prstDash val="solid"/>
+          </a:ln>
+        </p:spPr>
+        <p:txBody>
+          <a:bodyPr xmlns:a="http://schemas.openxmlformats.org/drawingml/2006/main" lIns="0" tIns="0" rIns="0" bIns="0" anchor="ctr">
+            <a:noAutofit/>
+          </a:bodyPr>
+          <a:lstStyle xmlns:a="http://schemas.openxmlformats.org/drawingml/2006/main"/>
+          <a:p xmlns:a="http://schemas.openxmlformats.org/drawingml/2006/main">
+            <a:pPr algn="l">
+              <a:buNone/>
+              <a:defRPr sz="1350" b="1">
                 <a:solidFill>
                   <a:srgbClr val="28685E"/>
                 </a:solidFill>
-              </a:defRPr>
-            </a:pPr>
-            <a:r>
-              <a:rPr sz="1500" b="1">
+                <a:latin typeface="Calibri"/>
+                <a:ea typeface="Calibri"/>
+                <a:cs typeface="Calibri"/>
+              </a:defRPr>
+            </a:pPr>
+            <a:r>
+              <a:rPr sz="1350" b="1">
                 <a:solidFill>
                   <a:srgbClr val="28685E"/>
                 </a:solidFill>
+                <a:latin typeface="Calibri"/>
+                <a:ea typeface="Calibri"/>
+                <a:cs typeface="Calibri"/>
               </a:rPr>
               <a:t>MADE BY MATT  /  GROW SCIENCE</a:t>
             </a:r>
@@ -3934,34 +4641,43 @@
         </p:nvSpPr>
         <p:spPr>
           <a:xfrm xmlns:a="http://schemas.openxmlformats.org/drawingml/2006/main">
-            <a:off x="609600" y="1352550"/>
-            <a:ext cx="10972800" cy="952500"/>
-          </a:xfrm>
-          <a:prstGeom xmlns:a="http://schemas.openxmlformats.org/drawingml/2006/main" prst="rect">
-            <a:avLst/>
-          </a:prstGeom>
-          <a:noFill xmlns:a="http://schemas.openxmlformats.org/drawingml/2006/main"/>
-          <a:ln xmlns:a="http://schemas.openxmlformats.org/drawingml/2006/main" w="0">
-            <a:noFill/>
-            <a:prstDash val="solid"/>
-          </a:ln>
-        </p:spPr>
-        <p:txBody>
-          <a:bodyPr xmlns:a="http://schemas.openxmlformats.org/drawingml/2006/main" lIns="0" tIns="0" rIns="0" bIns="0" anchor="ctr"/>
-          <a:lstStyle xmlns:a="http://schemas.openxmlformats.org/drawingml/2006/main"/>
-          <a:p xmlns:a="http://schemas.openxmlformats.org/drawingml/2006/main">
-            <a:pPr>
-              <a:defRPr sz="3750" b="1">
+            <a:off x="609600" y="990600"/>
+            <a:ext cx="10972800" cy="1000125"/>
+          </a:xfrm>
+          <a:prstGeom xmlns:a="http://schemas.openxmlformats.org/drawingml/2006/main" prst="rect">
+            <a:avLst/>
+          </a:prstGeom>
+          <a:noFill xmlns:a="http://schemas.openxmlformats.org/drawingml/2006/main"/>
+          <a:ln xmlns:a="http://schemas.openxmlformats.org/drawingml/2006/main" w="0">
+            <a:noFill/>
+            <a:prstDash val="solid"/>
+          </a:ln>
+        </p:spPr>
+        <p:txBody>
+          <a:bodyPr xmlns:a="http://schemas.openxmlformats.org/drawingml/2006/main" lIns="0" tIns="0" rIns="0" bIns="0" anchor="ctr">
+            <a:noAutofit/>
+          </a:bodyPr>
+          <a:lstStyle xmlns:a="http://schemas.openxmlformats.org/drawingml/2006/main"/>
+          <a:p xmlns:a="http://schemas.openxmlformats.org/drawingml/2006/main">
+            <a:pPr algn="l">
+              <a:buNone/>
+              <a:defRPr sz="3675" b="1">
                 <a:solidFill>
                   <a:srgbClr val="152B3A"/>
                 </a:solidFill>
-              </a:defRPr>
-            </a:pPr>
-            <a:r>
-              <a:rPr sz="3750" b="1">
+                <a:latin typeface="Calibri"/>
+                <a:ea typeface="Calibri"/>
+                <a:cs typeface="Calibri"/>
+              </a:defRPr>
+            </a:pPr>
+            <a:r>
+              <a:rPr sz="3675" b="1">
                 <a:solidFill>
                   <a:srgbClr val="152B3A"/>
                 </a:solidFill>
+                <a:latin typeface="Calibri"/>
+                <a:ea typeface="Calibri"/>
+                <a:cs typeface="Calibri"/>
               </a:rPr>
               <a:t>Keep an unexpected result</a:t>
             </a:r>
@@ -3984,14 +4700,14 @@
         </p:nvSpPr>
         <p:spPr>
           <a:xfrm xmlns:a="http://schemas.openxmlformats.org/drawingml/2006/main">
-            <a:off x="609600" y="6219825"/>
+            <a:off x="609600" y="6191250"/>
             <a:ext cx="10972800" cy="9525"/>
           </a:xfrm>
           <a:prstGeom xmlns:a="http://schemas.openxmlformats.org/drawingml/2006/main" prst="rect">
             <a:avLst/>
           </a:prstGeom>
           <a:solidFill xmlns:a="http://schemas.openxmlformats.org/drawingml/2006/main">
-            <a:srgbClr val="DCE7DD"/>
+            <a:srgbClr val="CEDBD3"/>
           </a:solidFill>
           <a:ln xmlns:a="http://schemas.openxmlformats.org/drawingml/2006/main" w="0">
             <a:noFill/>
@@ -4015,34 +4731,43 @@
         </p:nvSpPr>
         <p:spPr>
           <a:xfrm xmlns:a="http://schemas.openxmlformats.org/drawingml/2006/main">
-            <a:off x="609600" y="6381750"/>
-            <a:ext cx="9906000" cy="228600"/>
-          </a:xfrm>
-          <a:prstGeom xmlns:a="http://schemas.openxmlformats.org/drawingml/2006/main" prst="rect">
-            <a:avLst/>
-          </a:prstGeom>
-          <a:noFill xmlns:a="http://schemas.openxmlformats.org/drawingml/2006/main"/>
-          <a:ln xmlns:a="http://schemas.openxmlformats.org/drawingml/2006/main" w="0">
-            <a:noFill/>
-            <a:prstDash val="solid"/>
-          </a:ln>
-        </p:spPr>
-        <p:txBody>
-          <a:bodyPr xmlns:a="http://schemas.openxmlformats.org/drawingml/2006/main" lIns="0" tIns="0" rIns="0" bIns="0" anchor="ctr"/>
-          <a:lstStyle xmlns:a="http://schemas.openxmlformats.org/drawingml/2006/main"/>
-          <a:p xmlns:a="http://schemas.openxmlformats.org/drawingml/2006/main">
-            <a:pPr>
-              <a:defRPr sz="1275" b="0">
+            <a:off x="609600" y="6419850"/>
+            <a:ext cx="9525000" cy="219075"/>
+          </a:xfrm>
+          <a:prstGeom xmlns:a="http://schemas.openxmlformats.org/drawingml/2006/main" prst="rect">
+            <a:avLst/>
+          </a:prstGeom>
+          <a:noFill xmlns:a="http://schemas.openxmlformats.org/drawingml/2006/main"/>
+          <a:ln xmlns:a="http://schemas.openxmlformats.org/drawingml/2006/main" w="0">
+            <a:noFill/>
+            <a:prstDash val="solid"/>
+          </a:ln>
+        </p:spPr>
+        <p:txBody>
+          <a:bodyPr xmlns:a="http://schemas.openxmlformats.org/drawingml/2006/main" lIns="0" tIns="0" rIns="0" bIns="0" anchor="ctr">
+            <a:noAutofit/>
+          </a:bodyPr>
+          <a:lstStyle xmlns:a="http://schemas.openxmlformats.org/drawingml/2006/main"/>
+          <a:p xmlns:a="http://schemas.openxmlformats.org/drawingml/2006/main">
+            <a:pPr algn="l">
+              <a:buNone/>
+              <a:defRPr sz="1200" b="0">
                 <a:solidFill>
                   <a:srgbClr val="50616B"/>
                 </a:solidFill>
-              </a:defRPr>
-            </a:pPr>
-            <a:r>
-              <a:rPr sz="1275" b="0">
+                <a:latin typeface="Calibri"/>
+                <a:ea typeface="Calibri"/>
+                <a:cs typeface="Calibri"/>
+              </a:defRPr>
+            </a:pPr>
+            <a:r>
+              <a:rPr sz="1200" b="0">
                 <a:solidFill>
                   <a:srgbClr val="50616B"/>
                 </a:solidFill>
+                <a:latin typeface="Calibri"/>
+                <a:ea typeface="Calibri"/>
+                <a:cs typeface="Calibri"/>
               </a:rPr>
               <a:t>AUTUMN 1  ·  WEEK 5  ·  LESSON A</a:t>
             </a:r>
@@ -4065,27 +4790,33 @@
         </p:nvSpPr>
         <p:spPr>
           <a:xfrm xmlns:a="http://schemas.openxmlformats.org/drawingml/2006/main">
-            <a:off x="11106150" y="6362700"/>
-            <a:ext cx="476250" cy="238125"/>
-          </a:xfrm>
-          <a:prstGeom xmlns:a="http://schemas.openxmlformats.org/drawingml/2006/main" prst="rect">
-            <a:avLst/>
-          </a:prstGeom>
-          <a:noFill xmlns:a="http://schemas.openxmlformats.org/drawingml/2006/main"/>
-          <a:ln xmlns:a="http://schemas.openxmlformats.org/drawingml/2006/main" w="0">
-            <a:noFill/>
-            <a:prstDash val="solid"/>
-          </a:ln>
-        </p:spPr>
-        <p:txBody>
-          <a:bodyPr xmlns:a="http://schemas.openxmlformats.org/drawingml/2006/main" lIns="0" tIns="0" rIns="0" bIns="0" anchor="ctr"/>
-          <a:lstStyle xmlns:a="http://schemas.openxmlformats.org/drawingml/2006/main"/>
-          <a:p xmlns:a="http://schemas.openxmlformats.org/drawingml/2006/main">
-            <a:pPr>
+            <a:off x="11106150" y="6400800"/>
+            <a:ext cx="476250" cy="247650"/>
+          </a:xfrm>
+          <a:prstGeom xmlns:a="http://schemas.openxmlformats.org/drawingml/2006/main" prst="rect">
+            <a:avLst/>
+          </a:prstGeom>
+          <a:noFill xmlns:a="http://schemas.openxmlformats.org/drawingml/2006/main"/>
+          <a:ln xmlns:a="http://schemas.openxmlformats.org/drawingml/2006/main" w="0">
+            <a:noFill/>
+            <a:prstDash val="solid"/>
+          </a:ln>
+        </p:spPr>
+        <p:txBody>
+          <a:bodyPr xmlns:a="http://schemas.openxmlformats.org/drawingml/2006/main" lIns="0" tIns="0" rIns="0" bIns="0" anchor="ctr">
+            <a:noAutofit/>
+          </a:bodyPr>
+          <a:lstStyle xmlns:a="http://schemas.openxmlformats.org/drawingml/2006/main"/>
+          <a:p xmlns:a="http://schemas.openxmlformats.org/drawingml/2006/main">
+            <a:pPr algn="l">
+              <a:buNone/>
               <a:defRPr sz="1350" b="1">
                 <a:solidFill>
                   <a:srgbClr val="28685E"/>
                 </a:solidFill>
+                <a:latin typeface="Calibri"/>
+                <a:ea typeface="Calibri"/>
+                <a:cs typeface="Calibri"/>
               </a:defRPr>
             </a:pPr>
             <a:r>
@@ -4093,6 +4824,9 @@
                 <a:solidFill>
                   <a:srgbClr val="28685E"/>
                 </a:solidFill>
+                <a:latin typeface="Calibri"/>
+                <a:ea typeface="Calibri"/>
+                <a:cs typeface="Calibri"/>
               </a:rPr>
               <a:t>12</a:t>
             </a:r>
@@ -4115,36 +4849,71 @@
         </p:nvSpPr>
         <p:spPr>
           <a:xfrm xmlns:a="http://schemas.openxmlformats.org/drawingml/2006/main">
-            <a:off x="609600" y="2686050"/>
-            <a:ext cx="10858500" cy="1524000"/>
-          </a:xfrm>
-          <a:prstGeom xmlns:a="http://schemas.openxmlformats.org/drawingml/2006/main" prst="rect">
-            <a:avLst/>
-          </a:prstGeom>
-          <a:noFill xmlns:a="http://schemas.openxmlformats.org/drawingml/2006/main"/>
-          <a:ln xmlns:a="http://schemas.openxmlformats.org/drawingml/2006/main" w="0">
-            <a:noFill/>
-            <a:prstDash val="solid"/>
-          </a:ln>
-        </p:spPr>
-        <p:txBody>
-          <a:bodyPr xmlns:a="http://schemas.openxmlformats.org/drawingml/2006/main" lIns="0" tIns="0" rIns="0" bIns="0" anchor="ctr"/>
-          <a:lstStyle xmlns:a="http://schemas.openxmlformats.org/drawingml/2006/main"/>
-          <a:p xmlns:a="http://schemas.openxmlformats.org/drawingml/2006/main">
-            <a:pPr>
-              <a:defRPr sz="2925" b="1">
+            <a:off x="457200" y="2190750"/>
+            <a:ext cx="11277600" cy="2143125"/>
+          </a:xfrm>
+          <a:prstGeom xmlns:a="http://schemas.openxmlformats.org/drawingml/2006/main" prst="rect">
+            <a:avLst/>
+          </a:prstGeom>
+          <a:solidFill xmlns:a="http://schemas.openxmlformats.org/drawingml/2006/main">
+            <a:srgbClr val="E7EFE9"/>
+          </a:solidFill>
+          <a:ln xmlns:a="http://schemas.openxmlformats.org/drawingml/2006/main" w="0">
+            <a:noFill/>
+            <a:prstDash val="solid"/>
+          </a:ln>
+        </p:spPr>
+        <p:txBody>
+          <a:bodyPr xmlns:a="http://schemas.openxmlformats.org/drawingml/2006/main" lIns="152400" tIns="114300" rIns="152400" bIns="114300" anchor="ctr">
+            <a:noAutofit/>
+          </a:bodyPr>
+          <a:lstStyle xmlns:a="http://schemas.openxmlformats.org/drawingml/2006/main"/>
+          <a:p xmlns:a="http://schemas.openxmlformats.org/drawingml/2006/main">
+            <a:pPr algn="l">
+              <a:buNone/>
+              <a:defRPr sz="3075" b="1">
                 <a:solidFill>
                   <a:srgbClr val="28685E"/>
                 </a:solidFill>
-              </a:defRPr>
-            </a:pPr>
-            <a:r>
-              <a:rPr sz="2925" b="1">
+                <a:latin typeface="Calibri"/>
+                <a:ea typeface="Calibri"/>
+                <a:cs typeface="Calibri"/>
+              </a:defRPr>
+            </a:pPr>
+            <a:r>
+              <a:rPr sz="3075" b="1">
                 <a:solidFill>
                   <a:srgbClr val="28685E"/>
                 </a:solidFill>
-              </a:rPr>
-              <a:t>A trolley stopped much farther away on Trial 3. That is something to investigate.</a:t>
+                <a:latin typeface="Calibri"/>
+                <a:ea typeface="Calibri"/>
+                <a:cs typeface="Calibri"/>
+              </a:rPr>
+              <a:t>A trolley stopped much farther away on Trial 3.</a:t>
+            </a:r>
+          </a:p>
+          <a:p xmlns:a="http://schemas.openxmlformats.org/drawingml/2006/main">
+            <a:pPr algn="l">
+              <a:buNone/>
+              <a:defRPr sz="3075" b="1">
+                <a:solidFill>
+                  <a:srgbClr val="28685E"/>
+                </a:solidFill>
+                <a:latin typeface="Calibri"/>
+                <a:ea typeface="Calibri"/>
+                <a:cs typeface="Calibri"/>
+              </a:defRPr>
+            </a:pPr>
+            <a:r>
+              <a:rPr sz="3075" b="1">
+                <a:solidFill>
+                  <a:srgbClr val="28685E"/>
+                </a:solidFill>
+                <a:latin typeface="Calibri"/>
+                <a:ea typeface="Calibri"/>
+                <a:cs typeface="Calibri"/>
+              </a:rPr>
+              <a:t>That is something to investigate.</a:t>
             </a:r>
           </a:p>
         </p:txBody>
@@ -4165,34 +4934,43 @@
         </p:nvSpPr>
         <p:spPr>
           <a:xfrm xmlns:a="http://schemas.openxmlformats.org/drawingml/2006/main">
-            <a:off x="609600" y="4552950"/>
-            <a:ext cx="10858500" cy="1285875"/>
-          </a:xfrm>
-          <a:prstGeom xmlns:a="http://schemas.openxmlformats.org/drawingml/2006/main" prst="rect">
-            <a:avLst/>
-          </a:prstGeom>
-          <a:noFill xmlns:a="http://schemas.openxmlformats.org/drawingml/2006/main"/>
-          <a:ln xmlns:a="http://schemas.openxmlformats.org/drawingml/2006/main" w="0">
-            <a:noFill/>
-            <a:prstDash val="solid"/>
-          </a:ln>
-        </p:spPr>
-        <p:txBody>
-          <a:bodyPr xmlns:a="http://schemas.openxmlformats.org/drawingml/2006/main" lIns="0" tIns="0" rIns="0" bIns="0" anchor="ctr"/>
-          <a:lstStyle xmlns:a="http://schemas.openxmlformats.org/drawingml/2006/main"/>
-          <a:p xmlns:a="http://schemas.openxmlformats.org/drawingml/2006/main">
-            <a:pPr>
-              <a:defRPr sz="2700" b="0">
+            <a:off x="609600" y="4438650"/>
+            <a:ext cx="10972800" cy="1257300"/>
+          </a:xfrm>
+          <a:prstGeom xmlns:a="http://schemas.openxmlformats.org/drawingml/2006/main" prst="rect">
+            <a:avLst/>
+          </a:prstGeom>
+          <a:noFill xmlns:a="http://schemas.openxmlformats.org/drawingml/2006/main"/>
+          <a:ln xmlns:a="http://schemas.openxmlformats.org/drawingml/2006/main" w="0">
+            <a:noFill/>
+            <a:prstDash val="solid"/>
+          </a:ln>
+        </p:spPr>
+        <p:txBody>
+          <a:bodyPr xmlns:a="http://schemas.openxmlformats.org/drawingml/2006/main" lIns="0" tIns="0" rIns="0" bIns="0" anchor="ctr">
+            <a:noAutofit/>
+          </a:bodyPr>
+          <a:lstStyle xmlns:a="http://schemas.openxmlformats.org/drawingml/2006/main"/>
+          <a:p xmlns:a="http://schemas.openxmlformats.org/drawingml/2006/main">
+            <a:pPr algn="l">
+              <a:buNone/>
+              <a:defRPr sz="2550" b="0">
                 <a:solidFill>
                   <a:srgbClr val="152B3A"/>
                 </a:solidFill>
-              </a:defRPr>
-            </a:pPr>
-            <a:r>
-              <a:rPr sz="2700" b="0">
+                <a:latin typeface="Calibri"/>
+                <a:ea typeface="Calibri"/>
+                <a:cs typeface="Calibri"/>
+              </a:defRPr>
+            </a:pPr>
+            <a:r>
+              <a:rPr sz="2550" b="0">
                 <a:solidFill>
                   <a:srgbClr val="152B3A"/>
                 </a:solidFill>
+                <a:latin typeface="Calibri"/>
+                <a:ea typeface="Calibri"/>
+                <a:cs typeface="Calibri"/>
               </a:rPr>
               <a:t>Keep the value. Note any method issue. Plan a repeat.</a:t>
             </a:r>
@@ -4215,7 +4993,7 @@
     <p:bg>
       <p:bgPr>
         <a:solidFill xmlns:a="http://schemas.openxmlformats.org/drawingml/2006/main">
-          <a:srgbClr val="F5F1E8"/>
+          <a:srgbClr val="FAF9F5"/>
         </a:solidFill>
       </p:bgPr>
     </p:bg>
@@ -4244,8 +5022,8 @@
         </p:nvSpPr>
         <p:spPr>
           <a:xfrm xmlns:a="http://schemas.openxmlformats.org/drawingml/2006/main">
-            <a:off x="609600" y="552450"/>
-            <a:ext cx="781050" cy="57150"/>
+            <a:off x="609600" y="733425"/>
+            <a:ext cx="781050" cy="38100"/>
           </a:xfrm>
           <a:prstGeom xmlns:a="http://schemas.openxmlformats.org/drawingml/2006/main" prst="rect">
             <a:avLst/>
@@ -4275,34 +5053,43 @@
         </p:nvSpPr>
         <p:spPr>
           <a:xfrm xmlns:a="http://schemas.openxmlformats.org/drawingml/2006/main">
-            <a:off x="609600" y="762000"/>
-            <a:ext cx="8572500" cy="285750"/>
-          </a:xfrm>
-          <a:prstGeom xmlns:a="http://schemas.openxmlformats.org/drawingml/2006/main" prst="rect">
-            <a:avLst/>
-          </a:prstGeom>
-          <a:noFill xmlns:a="http://schemas.openxmlformats.org/drawingml/2006/main"/>
-          <a:ln xmlns:a="http://schemas.openxmlformats.org/drawingml/2006/main" w="0">
-            <a:noFill/>
-            <a:prstDash val="solid"/>
-          </a:ln>
-        </p:spPr>
-        <p:txBody>
-          <a:bodyPr xmlns:a="http://schemas.openxmlformats.org/drawingml/2006/main" lIns="0" tIns="0" rIns="0" bIns="0" anchor="ctr"/>
-          <a:lstStyle xmlns:a="http://schemas.openxmlformats.org/drawingml/2006/main"/>
-          <a:p xmlns:a="http://schemas.openxmlformats.org/drawingml/2006/main">
-            <a:pPr>
-              <a:defRPr sz="1500" b="1">
+            <a:off x="609600" y="342900"/>
+            <a:ext cx="9334500" cy="304800"/>
+          </a:xfrm>
+          <a:prstGeom xmlns:a="http://schemas.openxmlformats.org/drawingml/2006/main" prst="rect">
+            <a:avLst/>
+          </a:prstGeom>
+          <a:noFill xmlns:a="http://schemas.openxmlformats.org/drawingml/2006/main"/>
+          <a:ln xmlns:a="http://schemas.openxmlformats.org/drawingml/2006/main" w="0">
+            <a:noFill/>
+            <a:prstDash val="solid"/>
+          </a:ln>
+        </p:spPr>
+        <p:txBody>
+          <a:bodyPr xmlns:a="http://schemas.openxmlformats.org/drawingml/2006/main" lIns="0" tIns="0" rIns="0" bIns="0" anchor="ctr">
+            <a:noAutofit/>
+          </a:bodyPr>
+          <a:lstStyle xmlns:a="http://schemas.openxmlformats.org/drawingml/2006/main"/>
+          <a:p xmlns:a="http://schemas.openxmlformats.org/drawingml/2006/main">
+            <a:pPr algn="l">
+              <a:buNone/>
+              <a:defRPr sz="1350" b="1">
                 <a:solidFill>
                   <a:srgbClr val="28685E"/>
                 </a:solidFill>
-              </a:defRPr>
-            </a:pPr>
-            <a:r>
-              <a:rPr sz="1500" b="1">
+                <a:latin typeface="Calibri"/>
+                <a:ea typeface="Calibri"/>
+                <a:cs typeface="Calibri"/>
+              </a:defRPr>
+            </a:pPr>
+            <a:r>
+              <a:rPr sz="1350" b="1">
                 <a:solidFill>
                   <a:srgbClr val="28685E"/>
                 </a:solidFill>
+                <a:latin typeface="Calibri"/>
+                <a:ea typeface="Calibri"/>
+                <a:cs typeface="Calibri"/>
               </a:rPr>
               <a:t>MADE BY MATT  /  GROW SCIENCE</a:t>
             </a:r>
@@ -4325,34 +5112,43 @@
         </p:nvSpPr>
         <p:spPr>
           <a:xfrm xmlns:a="http://schemas.openxmlformats.org/drawingml/2006/main">
-            <a:off x="609600" y="1352550"/>
-            <a:ext cx="10972800" cy="952500"/>
-          </a:xfrm>
-          <a:prstGeom xmlns:a="http://schemas.openxmlformats.org/drawingml/2006/main" prst="rect">
-            <a:avLst/>
-          </a:prstGeom>
-          <a:noFill xmlns:a="http://schemas.openxmlformats.org/drawingml/2006/main"/>
-          <a:ln xmlns:a="http://schemas.openxmlformats.org/drawingml/2006/main" w="0">
-            <a:noFill/>
-            <a:prstDash val="solid"/>
-          </a:ln>
-        </p:spPr>
-        <p:txBody>
-          <a:bodyPr xmlns:a="http://schemas.openxmlformats.org/drawingml/2006/main" lIns="0" tIns="0" rIns="0" bIns="0" anchor="ctr"/>
-          <a:lstStyle xmlns:a="http://schemas.openxmlformats.org/drawingml/2006/main"/>
-          <a:p xmlns:a="http://schemas.openxmlformats.org/drawingml/2006/main">
-            <a:pPr>
-              <a:defRPr sz="3750" b="1">
+            <a:off x="609600" y="990600"/>
+            <a:ext cx="10972800" cy="1000125"/>
+          </a:xfrm>
+          <a:prstGeom xmlns:a="http://schemas.openxmlformats.org/drawingml/2006/main" prst="rect">
+            <a:avLst/>
+          </a:prstGeom>
+          <a:noFill xmlns:a="http://schemas.openxmlformats.org/drawingml/2006/main"/>
+          <a:ln xmlns:a="http://schemas.openxmlformats.org/drawingml/2006/main" w="0">
+            <a:noFill/>
+            <a:prstDash val="solid"/>
+          </a:ln>
+        </p:spPr>
+        <p:txBody>
+          <a:bodyPr xmlns:a="http://schemas.openxmlformats.org/drawingml/2006/main" lIns="0" tIns="0" rIns="0" bIns="0" anchor="ctr">
+            <a:noAutofit/>
+          </a:bodyPr>
+          <a:lstStyle xmlns:a="http://schemas.openxmlformats.org/drawingml/2006/main"/>
+          <a:p xmlns:a="http://schemas.openxmlformats.org/drawingml/2006/main">
+            <a:pPr algn="l">
+              <a:buNone/>
+              <a:defRPr sz="3675" b="1">
                 <a:solidFill>
                   <a:srgbClr val="152B3A"/>
                 </a:solidFill>
-              </a:defRPr>
-            </a:pPr>
-            <a:r>
-              <a:rPr sz="3750" b="1">
+                <a:latin typeface="Calibri"/>
+                <a:ea typeface="Calibri"/>
+                <a:cs typeface="Calibri"/>
+              </a:defRPr>
+            </a:pPr>
+            <a:r>
+              <a:rPr sz="3675" b="1">
                 <a:solidFill>
                   <a:srgbClr val="152B3A"/>
                 </a:solidFill>
+                <a:latin typeface="Calibri"/>
+                <a:ea typeface="Calibri"/>
+                <a:cs typeface="Calibri"/>
               </a:rPr>
               <a:t>Keep your plan for Tuesday</a:t>
             </a:r>
@@ -4375,14 +5171,14 @@
         </p:nvSpPr>
         <p:spPr>
           <a:xfrm xmlns:a="http://schemas.openxmlformats.org/drawingml/2006/main">
-            <a:off x="609600" y="6219825"/>
+            <a:off x="609600" y="6191250"/>
             <a:ext cx="10972800" cy="9525"/>
           </a:xfrm>
           <a:prstGeom xmlns:a="http://schemas.openxmlformats.org/drawingml/2006/main" prst="rect">
             <a:avLst/>
           </a:prstGeom>
           <a:solidFill xmlns:a="http://schemas.openxmlformats.org/drawingml/2006/main">
-            <a:srgbClr val="DCE7DD"/>
+            <a:srgbClr val="CEDBD3"/>
           </a:solidFill>
           <a:ln xmlns:a="http://schemas.openxmlformats.org/drawingml/2006/main" w="0">
             <a:noFill/>
@@ -4406,34 +5202,43 @@
         </p:nvSpPr>
         <p:spPr>
           <a:xfrm xmlns:a="http://schemas.openxmlformats.org/drawingml/2006/main">
-            <a:off x="609600" y="6381750"/>
-            <a:ext cx="9906000" cy="228600"/>
-          </a:xfrm>
-          <a:prstGeom xmlns:a="http://schemas.openxmlformats.org/drawingml/2006/main" prst="rect">
-            <a:avLst/>
-          </a:prstGeom>
-          <a:noFill xmlns:a="http://schemas.openxmlformats.org/drawingml/2006/main"/>
-          <a:ln xmlns:a="http://schemas.openxmlformats.org/drawingml/2006/main" w="0">
-            <a:noFill/>
-            <a:prstDash val="solid"/>
-          </a:ln>
-        </p:spPr>
-        <p:txBody>
-          <a:bodyPr xmlns:a="http://schemas.openxmlformats.org/drawingml/2006/main" lIns="0" tIns="0" rIns="0" bIns="0" anchor="ctr"/>
-          <a:lstStyle xmlns:a="http://schemas.openxmlformats.org/drawingml/2006/main"/>
-          <a:p xmlns:a="http://schemas.openxmlformats.org/drawingml/2006/main">
-            <a:pPr>
-              <a:defRPr sz="1275" b="0">
+            <a:off x="609600" y="6419850"/>
+            <a:ext cx="9525000" cy="219075"/>
+          </a:xfrm>
+          <a:prstGeom xmlns:a="http://schemas.openxmlformats.org/drawingml/2006/main" prst="rect">
+            <a:avLst/>
+          </a:prstGeom>
+          <a:noFill xmlns:a="http://schemas.openxmlformats.org/drawingml/2006/main"/>
+          <a:ln xmlns:a="http://schemas.openxmlformats.org/drawingml/2006/main" w="0">
+            <a:noFill/>
+            <a:prstDash val="solid"/>
+          </a:ln>
+        </p:spPr>
+        <p:txBody>
+          <a:bodyPr xmlns:a="http://schemas.openxmlformats.org/drawingml/2006/main" lIns="0" tIns="0" rIns="0" bIns="0" anchor="ctr">
+            <a:noAutofit/>
+          </a:bodyPr>
+          <a:lstStyle xmlns:a="http://schemas.openxmlformats.org/drawingml/2006/main"/>
+          <a:p xmlns:a="http://schemas.openxmlformats.org/drawingml/2006/main">
+            <a:pPr algn="l">
+              <a:buNone/>
+              <a:defRPr sz="1200" b="0">
                 <a:solidFill>
                   <a:srgbClr val="50616B"/>
                 </a:solidFill>
-              </a:defRPr>
-            </a:pPr>
-            <a:r>
-              <a:rPr sz="1275" b="0">
+                <a:latin typeface="Calibri"/>
+                <a:ea typeface="Calibri"/>
+                <a:cs typeface="Calibri"/>
+              </a:defRPr>
+            </a:pPr>
+            <a:r>
+              <a:rPr sz="1200" b="0">
                 <a:solidFill>
                   <a:srgbClr val="50616B"/>
                 </a:solidFill>
+                <a:latin typeface="Calibri"/>
+                <a:ea typeface="Calibri"/>
+                <a:cs typeface="Calibri"/>
               </a:rPr>
               <a:t>AUTUMN 1  ·  WEEK 5  ·  LESSON A</a:t>
             </a:r>
@@ -4456,27 +5261,33 @@
         </p:nvSpPr>
         <p:spPr>
           <a:xfrm xmlns:a="http://schemas.openxmlformats.org/drawingml/2006/main">
-            <a:off x="11106150" y="6362700"/>
-            <a:ext cx="476250" cy="238125"/>
-          </a:xfrm>
-          <a:prstGeom xmlns:a="http://schemas.openxmlformats.org/drawingml/2006/main" prst="rect">
-            <a:avLst/>
-          </a:prstGeom>
-          <a:noFill xmlns:a="http://schemas.openxmlformats.org/drawingml/2006/main"/>
-          <a:ln xmlns:a="http://schemas.openxmlformats.org/drawingml/2006/main" w="0">
-            <a:noFill/>
-            <a:prstDash val="solid"/>
-          </a:ln>
-        </p:spPr>
-        <p:txBody>
-          <a:bodyPr xmlns:a="http://schemas.openxmlformats.org/drawingml/2006/main" lIns="0" tIns="0" rIns="0" bIns="0" anchor="ctr"/>
-          <a:lstStyle xmlns:a="http://schemas.openxmlformats.org/drawingml/2006/main"/>
-          <a:p xmlns:a="http://schemas.openxmlformats.org/drawingml/2006/main">
-            <a:pPr>
+            <a:off x="11106150" y="6400800"/>
+            <a:ext cx="476250" cy="247650"/>
+          </a:xfrm>
+          <a:prstGeom xmlns:a="http://schemas.openxmlformats.org/drawingml/2006/main" prst="rect">
+            <a:avLst/>
+          </a:prstGeom>
+          <a:noFill xmlns:a="http://schemas.openxmlformats.org/drawingml/2006/main"/>
+          <a:ln xmlns:a="http://schemas.openxmlformats.org/drawingml/2006/main" w="0">
+            <a:noFill/>
+            <a:prstDash val="solid"/>
+          </a:ln>
+        </p:spPr>
+        <p:txBody>
+          <a:bodyPr xmlns:a="http://schemas.openxmlformats.org/drawingml/2006/main" lIns="0" tIns="0" rIns="0" bIns="0" anchor="ctr">
+            <a:noAutofit/>
+          </a:bodyPr>
+          <a:lstStyle xmlns:a="http://schemas.openxmlformats.org/drawingml/2006/main"/>
+          <a:p xmlns:a="http://schemas.openxmlformats.org/drawingml/2006/main">
+            <a:pPr algn="l">
+              <a:buNone/>
               <a:defRPr sz="1350" b="1">
                 <a:solidFill>
                   <a:srgbClr val="28685E"/>
                 </a:solidFill>
+                <a:latin typeface="Calibri"/>
+                <a:ea typeface="Calibri"/>
+                <a:cs typeface="Calibri"/>
               </a:defRPr>
             </a:pPr>
             <a:r>
@@ -4484,6 +5295,9 @@
                 <a:solidFill>
                   <a:srgbClr val="28685E"/>
                 </a:solidFill>
+                <a:latin typeface="Calibri"/>
+                <a:ea typeface="Calibri"/>
+                <a:cs typeface="Calibri"/>
               </a:rPr>
               <a:t>13</a:t>
             </a:r>
@@ -4506,36 +5320,71 @@
         </p:nvSpPr>
         <p:spPr>
           <a:xfrm xmlns:a="http://schemas.openxmlformats.org/drawingml/2006/main">
-            <a:off x="609600" y="2686050"/>
-            <a:ext cx="10858500" cy="1524000"/>
-          </a:xfrm>
-          <a:prstGeom xmlns:a="http://schemas.openxmlformats.org/drawingml/2006/main" prst="rect">
-            <a:avLst/>
-          </a:prstGeom>
-          <a:noFill xmlns:a="http://schemas.openxmlformats.org/drawingml/2006/main"/>
-          <a:ln xmlns:a="http://schemas.openxmlformats.org/drawingml/2006/main" w="0">
-            <a:noFill/>
-            <a:prstDash val="solid"/>
-          </a:ln>
-        </p:spPr>
-        <p:txBody>
-          <a:bodyPr xmlns:a="http://schemas.openxmlformats.org/drawingml/2006/main" lIns="0" tIns="0" rIns="0" bIns="0" anchor="ctr"/>
-          <a:lstStyle xmlns:a="http://schemas.openxmlformats.org/drawingml/2006/main"/>
-          <a:p xmlns:a="http://schemas.openxmlformats.org/drawingml/2006/main">
-            <a:pPr>
-              <a:defRPr sz="2925" b="1">
+            <a:off x="457200" y="2190750"/>
+            <a:ext cx="11277600" cy="2143125"/>
+          </a:xfrm>
+          <a:prstGeom xmlns:a="http://schemas.openxmlformats.org/drawingml/2006/main" prst="rect">
+            <a:avLst/>
+          </a:prstGeom>
+          <a:solidFill xmlns:a="http://schemas.openxmlformats.org/drawingml/2006/main">
+            <a:srgbClr val="E7EFE9"/>
+          </a:solidFill>
+          <a:ln xmlns:a="http://schemas.openxmlformats.org/drawingml/2006/main" w="0">
+            <a:noFill/>
+            <a:prstDash val="solid"/>
+          </a:ln>
+        </p:spPr>
+        <p:txBody>
+          <a:bodyPr xmlns:a="http://schemas.openxmlformats.org/drawingml/2006/main" lIns="152400" tIns="114300" rIns="152400" bIns="114300" anchor="ctr">
+            <a:noAutofit/>
+          </a:bodyPr>
+          <a:lstStyle xmlns:a="http://schemas.openxmlformats.org/drawingml/2006/main"/>
+          <a:p xmlns:a="http://schemas.openxmlformats.org/drawingml/2006/main">
+            <a:pPr algn="l">
+              <a:buNone/>
+              <a:defRPr sz="3075" b="1">
                 <a:solidFill>
                   <a:srgbClr val="28685E"/>
                 </a:solidFill>
-              </a:defRPr>
-            </a:pPr>
-            <a:r>
-              <a:rPr sz="2925" b="1">
+                <a:latin typeface="Calibri"/>
+                <a:ea typeface="Calibri"/>
+                <a:cs typeface="Calibri"/>
+              </a:defRPr>
+            </a:pPr>
+            <a:r>
+              <a:rPr sz="3075" b="1">
                 <a:solidFill>
                   <a:srgbClr val="28685E"/>
                 </a:solidFill>
-              </a:rPr>
-              <a:t>I will change the surface, control the release and measure stopping distance in cm.</a:t>
+                <a:latin typeface="Calibri"/>
+                <a:ea typeface="Calibri"/>
+                <a:cs typeface="Calibri"/>
+              </a:rPr>
+              <a:t>I will change the surface, control the release</a:t>
+            </a:r>
+          </a:p>
+          <a:p xmlns:a="http://schemas.openxmlformats.org/drawingml/2006/main">
+            <a:pPr algn="l">
+              <a:buNone/>
+              <a:defRPr sz="3075" b="1">
+                <a:solidFill>
+                  <a:srgbClr val="28685E"/>
+                </a:solidFill>
+                <a:latin typeface="Calibri"/>
+                <a:ea typeface="Calibri"/>
+                <a:cs typeface="Calibri"/>
+              </a:defRPr>
+            </a:pPr>
+            <a:r>
+              <a:rPr sz="3075" b="1">
+                <a:solidFill>
+                  <a:srgbClr val="28685E"/>
+                </a:solidFill>
+                <a:latin typeface="Calibri"/>
+                <a:ea typeface="Calibri"/>
+                <a:cs typeface="Calibri"/>
+              </a:rPr>
+              <a:t>and measure stopping distance in cm.</a:t>
             </a:r>
           </a:p>
         </p:txBody>
@@ -4556,34 +5405,43 @@
         </p:nvSpPr>
         <p:spPr>
           <a:xfrm xmlns:a="http://schemas.openxmlformats.org/drawingml/2006/main">
-            <a:off x="609600" y="4552950"/>
-            <a:ext cx="10858500" cy="1285875"/>
-          </a:xfrm>
-          <a:prstGeom xmlns:a="http://schemas.openxmlformats.org/drawingml/2006/main" prst="rect">
-            <a:avLst/>
-          </a:prstGeom>
-          <a:noFill xmlns:a="http://schemas.openxmlformats.org/drawingml/2006/main"/>
-          <a:ln xmlns:a="http://schemas.openxmlformats.org/drawingml/2006/main" w="0">
-            <a:noFill/>
-            <a:prstDash val="solid"/>
-          </a:ln>
-        </p:spPr>
-        <p:txBody>
-          <a:bodyPr xmlns:a="http://schemas.openxmlformats.org/drawingml/2006/main" lIns="0" tIns="0" rIns="0" bIns="0" anchor="ctr"/>
-          <a:lstStyle xmlns:a="http://schemas.openxmlformats.org/drawingml/2006/main"/>
-          <a:p xmlns:a="http://schemas.openxmlformats.org/drawingml/2006/main">
-            <a:pPr>
-              <a:defRPr sz="2700" b="0">
+            <a:off x="609600" y="4438650"/>
+            <a:ext cx="10972800" cy="1257300"/>
+          </a:xfrm>
+          <a:prstGeom xmlns:a="http://schemas.openxmlformats.org/drawingml/2006/main" prst="rect">
+            <a:avLst/>
+          </a:prstGeom>
+          <a:noFill xmlns:a="http://schemas.openxmlformats.org/drawingml/2006/main"/>
+          <a:ln xmlns:a="http://schemas.openxmlformats.org/drawingml/2006/main" w="0">
+            <a:noFill/>
+            <a:prstDash val="solid"/>
+          </a:ln>
+        </p:spPr>
+        <p:txBody>
+          <a:bodyPr xmlns:a="http://schemas.openxmlformats.org/drawingml/2006/main" lIns="0" tIns="0" rIns="0" bIns="0" anchor="ctr">
+            <a:noAutofit/>
+          </a:bodyPr>
+          <a:lstStyle xmlns:a="http://schemas.openxmlformats.org/drawingml/2006/main"/>
+          <a:p xmlns:a="http://schemas.openxmlformats.org/drawingml/2006/main">
+            <a:pPr algn="l">
+              <a:buNone/>
+              <a:defRPr sz="2550" b="0">
                 <a:solidFill>
                   <a:srgbClr val="152B3A"/>
                 </a:solidFill>
-              </a:defRPr>
-            </a:pPr>
-            <a:r>
-              <a:rPr sz="2700" b="0">
+                <a:latin typeface="Calibri"/>
+                <a:ea typeface="Calibri"/>
+                <a:cs typeface="Calibri"/>
+              </a:defRPr>
+            </a:pPr>
+            <a:r>
+              <a:rPr sz="2550" b="0">
                 <a:solidFill>
                   <a:srgbClr val="152B3A"/>
                 </a:solidFill>
+                <a:latin typeface="Calibri"/>
+                <a:ea typeface="Calibri"/>
+                <a:cs typeface="Calibri"/>
               </a:rPr>
               <a:t>Three repeats can show consistency. They cannot repair an unfair method.</a:t>
             </a:r>
@@ -4606,7 +5464,7 @@
     <p:bg>
       <p:bgPr>
         <a:solidFill xmlns:a="http://schemas.openxmlformats.org/drawingml/2006/main">
-          <a:srgbClr val="F5F1E8"/>
+          <a:srgbClr val="FAF9F5"/>
         </a:solidFill>
       </p:bgPr>
     </p:bg>
@@ -4635,8 +5493,8 @@
         </p:nvSpPr>
         <p:spPr>
           <a:xfrm xmlns:a="http://schemas.openxmlformats.org/drawingml/2006/main">
-            <a:off x="609600" y="552450"/>
-            <a:ext cx="781050" cy="57150"/>
+            <a:off x="609600" y="733425"/>
+            <a:ext cx="781050" cy="38100"/>
           </a:xfrm>
           <a:prstGeom xmlns:a="http://schemas.openxmlformats.org/drawingml/2006/main" prst="rect">
             <a:avLst/>
@@ -4666,34 +5524,43 @@
         </p:nvSpPr>
         <p:spPr>
           <a:xfrm xmlns:a="http://schemas.openxmlformats.org/drawingml/2006/main">
-            <a:off x="609600" y="762000"/>
-            <a:ext cx="8572500" cy="285750"/>
-          </a:xfrm>
-          <a:prstGeom xmlns:a="http://schemas.openxmlformats.org/drawingml/2006/main" prst="rect">
-            <a:avLst/>
-          </a:prstGeom>
-          <a:noFill xmlns:a="http://schemas.openxmlformats.org/drawingml/2006/main"/>
-          <a:ln xmlns:a="http://schemas.openxmlformats.org/drawingml/2006/main" w="0">
-            <a:noFill/>
-            <a:prstDash val="solid"/>
-          </a:ln>
-        </p:spPr>
-        <p:txBody>
-          <a:bodyPr xmlns:a="http://schemas.openxmlformats.org/drawingml/2006/main" lIns="0" tIns="0" rIns="0" bIns="0" anchor="ctr"/>
-          <a:lstStyle xmlns:a="http://schemas.openxmlformats.org/drawingml/2006/main"/>
-          <a:p xmlns:a="http://schemas.openxmlformats.org/drawingml/2006/main">
-            <a:pPr>
-              <a:defRPr sz="1500" b="1">
+            <a:off x="609600" y="342900"/>
+            <a:ext cx="9334500" cy="304800"/>
+          </a:xfrm>
+          <a:prstGeom xmlns:a="http://schemas.openxmlformats.org/drawingml/2006/main" prst="rect">
+            <a:avLst/>
+          </a:prstGeom>
+          <a:noFill xmlns:a="http://schemas.openxmlformats.org/drawingml/2006/main"/>
+          <a:ln xmlns:a="http://schemas.openxmlformats.org/drawingml/2006/main" w="0">
+            <a:noFill/>
+            <a:prstDash val="solid"/>
+          </a:ln>
+        </p:spPr>
+        <p:txBody>
+          <a:bodyPr xmlns:a="http://schemas.openxmlformats.org/drawingml/2006/main" lIns="0" tIns="0" rIns="0" bIns="0" anchor="ctr">
+            <a:noAutofit/>
+          </a:bodyPr>
+          <a:lstStyle xmlns:a="http://schemas.openxmlformats.org/drawingml/2006/main"/>
+          <a:p xmlns:a="http://schemas.openxmlformats.org/drawingml/2006/main">
+            <a:pPr algn="l">
+              <a:buNone/>
+              <a:defRPr sz="1350" b="1">
                 <a:solidFill>
                   <a:srgbClr val="28685E"/>
                 </a:solidFill>
-              </a:defRPr>
-            </a:pPr>
-            <a:r>
-              <a:rPr sz="1500" b="1">
+                <a:latin typeface="Calibri"/>
+                <a:ea typeface="Calibri"/>
+                <a:cs typeface="Calibri"/>
+              </a:defRPr>
+            </a:pPr>
+            <a:r>
+              <a:rPr sz="1350" b="1">
                 <a:solidFill>
                   <a:srgbClr val="28685E"/>
                 </a:solidFill>
+                <a:latin typeface="Calibri"/>
+                <a:ea typeface="Calibri"/>
+                <a:cs typeface="Calibri"/>
               </a:rPr>
               <a:t>MADE BY MATT  /  GROW SCIENCE</a:t>
             </a:r>
@@ -4716,34 +5583,43 @@
         </p:nvSpPr>
         <p:spPr>
           <a:xfrm xmlns:a="http://schemas.openxmlformats.org/drawingml/2006/main">
-            <a:off x="609600" y="1352550"/>
-            <a:ext cx="10972800" cy="952500"/>
-          </a:xfrm>
-          <a:prstGeom xmlns:a="http://schemas.openxmlformats.org/drawingml/2006/main" prst="rect">
-            <a:avLst/>
-          </a:prstGeom>
-          <a:noFill xmlns:a="http://schemas.openxmlformats.org/drawingml/2006/main"/>
-          <a:ln xmlns:a="http://schemas.openxmlformats.org/drawingml/2006/main" w="0">
-            <a:noFill/>
-            <a:prstDash val="solid"/>
-          </a:ln>
-        </p:spPr>
-        <p:txBody>
-          <a:bodyPr xmlns:a="http://schemas.openxmlformats.org/drawingml/2006/main" lIns="0" tIns="0" rIns="0" bIns="0" anchor="ctr"/>
-          <a:lstStyle xmlns:a="http://schemas.openxmlformats.org/drawingml/2006/main"/>
-          <a:p xmlns:a="http://schemas.openxmlformats.org/drawingml/2006/main">
-            <a:pPr>
-              <a:defRPr sz="3750" b="1">
+            <a:off x="609600" y="990600"/>
+            <a:ext cx="10972800" cy="1000125"/>
+          </a:xfrm>
+          <a:prstGeom xmlns:a="http://schemas.openxmlformats.org/drawingml/2006/main" prst="rect">
+            <a:avLst/>
+          </a:prstGeom>
+          <a:noFill xmlns:a="http://schemas.openxmlformats.org/drawingml/2006/main"/>
+          <a:ln xmlns:a="http://schemas.openxmlformats.org/drawingml/2006/main" w="0">
+            <a:noFill/>
+            <a:prstDash val="solid"/>
+          </a:ln>
+        </p:spPr>
+        <p:txBody>
+          <a:bodyPr xmlns:a="http://schemas.openxmlformats.org/drawingml/2006/main" lIns="0" tIns="0" rIns="0" bIns="0" anchor="ctr">
+            <a:noAutofit/>
+          </a:bodyPr>
+          <a:lstStyle xmlns:a="http://schemas.openxmlformats.org/drawingml/2006/main"/>
+          <a:p xmlns:a="http://schemas.openxmlformats.org/drawingml/2006/main">
+            <a:pPr algn="l">
+              <a:buNone/>
+              <a:defRPr sz="3675" b="1">
                 <a:solidFill>
                   <a:srgbClr val="152B3A"/>
                 </a:solidFill>
-              </a:defRPr>
-            </a:pPr>
-            <a:r>
-              <a:rPr sz="3750" b="1">
+                <a:latin typeface="Calibri"/>
+                <a:ea typeface="Calibri"/>
+                <a:cs typeface="Calibri"/>
+              </a:defRPr>
+            </a:pPr>
+            <a:r>
+              <a:rPr sz="3675" b="1">
                 <a:solidFill>
                   <a:srgbClr val="152B3A"/>
                 </a:solidFill>
+                <a:latin typeface="Calibri"/>
+                <a:ea typeface="Calibri"/>
+                <a:cs typeface="Calibri"/>
               </a:rPr>
               <a:t>What will we change?</a:t>
             </a:r>
@@ -4766,14 +5642,14 @@
         </p:nvSpPr>
         <p:spPr>
           <a:xfrm xmlns:a="http://schemas.openxmlformats.org/drawingml/2006/main">
-            <a:off x="609600" y="6219825"/>
+            <a:off x="609600" y="6191250"/>
             <a:ext cx="10972800" cy="9525"/>
           </a:xfrm>
           <a:prstGeom xmlns:a="http://schemas.openxmlformats.org/drawingml/2006/main" prst="rect">
             <a:avLst/>
           </a:prstGeom>
           <a:solidFill xmlns:a="http://schemas.openxmlformats.org/drawingml/2006/main">
-            <a:srgbClr val="DCE7DD"/>
+            <a:srgbClr val="CEDBD3"/>
           </a:solidFill>
           <a:ln xmlns:a="http://schemas.openxmlformats.org/drawingml/2006/main" w="0">
             <a:noFill/>
@@ -4797,34 +5673,43 @@
         </p:nvSpPr>
         <p:spPr>
           <a:xfrm xmlns:a="http://schemas.openxmlformats.org/drawingml/2006/main">
-            <a:off x="609600" y="6381750"/>
-            <a:ext cx="9906000" cy="228600"/>
-          </a:xfrm>
-          <a:prstGeom xmlns:a="http://schemas.openxmlformats.org/drawingml/2006/main" prst="rect">
-            <a:avLst/>
-          </a:prstGeom>
-          <a:noFill xmlns:a="http://schemas.openxmlformats.org/drawingml/2006/main"/>
-          <a:ln xmlns:a="http://schemas.openxmlformats.org/drawingml/2006/main" w="0">
-            <a:noFill/>
-            <a:prstDash val="solid"/>
-          </a:ln>
-        </p:spPr>
-        <p:txBody>
-          <a:bodyPr xmlns:a="http://schemas.openxmlformats.org/drawingml/2006/main" lIns="0" tIns="0" rIns="0" bIns="0" anchor="ctr"/>
-          <a:lstStyle xmlns:a="http://schemas.openxmlformats.org/drawingml/2006/main"/>
-          <a:p xmlns:a="http://schemas.openxmlformats.org/drawingml/2006/main">
-            <a:pPr>
-              <a:defRPr sz="1275" b="0">
+            <a:off x="609600" y="6419850"/>
+            <a:ext cx="9525000" cy="219075"/>
+          </a:xfrm>
+          <a:prstGeom xmlns:a="http://schemas.openxmlformats.org/drawingml/2006/main" prst="rect">
+            <a:avLst/>
+          </a:prstGeom>
+          <a:noFill xmlns:a="http://schemas.openxmlformats.org/drawingml/2006/main"/>
+          <a:ln xmlns:a="http://schemas.openxmlformats.org/drawingml/2006/main" w="0">
+            <a:noFill/>
+            <a:prstDash val="solid"/>
+          </a:ln>
+        </p:spPr>
+        <p:txBody>
+          <a:bodyPr xmlns:a="http://schemas.openxmlformats.org/drawingml/2006/main" lIns="0" tIns="0" rIns="0" bIns="0" anchor="ctr">
+            <a:noAutofit/>
+          </a:bodyPr>
+          <a:lstStyle xmlns:a="http://schemas.openxmlformats.org/drawingml/2006/main"/>
+          <a:p xmlns:a="http://schemas.openxmlformats.org/drawingml/2006/main">
+            <a:pPr algn="l">
+              <a:buNone/>
+              <a:defRPr sz="1200" b="0">
                 <a:solidFill>
                   <a:srgbClr val="50616B"/>
                 </a:solidFill>
-              </a:defRPr>
-            </a:pPr>
-            <a:r>
-              <a:rPr sz="1275" b="0">
+                <a:latin typeface="Calibri"/>
+                <a:ea typeface="Calibri"/>
+                <a:cs typeface="Calibri"/>
+              </a:defRPr>
+            </a:pPr>
+            <a:r>
+              <a:rPr sz="1200" b="0">
                 <a:solidFill>
                   <a:srgbClr val="50616B"/>
                 </a:solidFill>
+                <a:latin typeface="Calibri"/>
+                <a:ea typeface="Calibri"/>
+                <a:cs typeface="Calibri"/>
               </a:rPr>
               <a:t>AUTUMN 1  ·  WEEK 5  ·  LESSON A</a:t>
             </a:r>
@@ -4847,27 +5732,33 @@
         </p:nvSpPr>
         <p:spPr>
           <a:xfrm xmlns:a="http://schemas.openxmlformats.org/drawingml/2006/main">
-            <a:off x="11106150" y="6362700"/>
-            <a:ext cx="476250" cy="238125"/>
-          </a:xfrm>
-          <a:prstGeom xmlns:a="http://schemas.openxmlformats.org/drawingml/2006/main" prst="rect">
-            <a:avLst/>
-          </a:prstGeom>
-          <a:noFill xmlns:a="http://schemas.openxmlformats.org/drawingml/2006/main"/>
-          <a:ln xmlns:a="http://schemas.openxmlformats.org/drawingml/2006/main" w="0">
-            <a:noFill/>
-            <a:prstDash val="solid"/>
-          </a:ln>
-        </p:spPr>
-        <p:txBody>
-          <a:bodyPr xmlns:a="http://schemas.openxmlformats.org/drawingml/2006/main" lIns="0" tIns="0" rIns="0" bIns="0" anchor="ctr"/>
-          <a:lstStyle xmlns:a="http://schemas.openxmlformats.org/drawingml/2006/main"/>
-          <a:p xmlns:a="http://schemas.openxmlformats.org/drawingml/2006/main">
-            <a:pPr>
+            <a:off x="11106150" y="6400800"/>
+            <a:ext cx="476250" cy="247650"/>
+          </a:xfrm>
+          <a:prstGeom xmlns:a="http://schemas.openxmlformats.org/drawingml/2006/main" prst="rect">
+            <a:avLst/>
+          </a:prstGeom>
+          <a:noFill xmlns:a="http://schemas.openxmlformats.org/drawingml/2006/main"/>
+          <a:ln xmlns:a="http://schemas.openxmlformats.org/drawingml/2006/main" w="0">
+            <a:noFill/>
+            <a:prstDash val="solid"/>
+          </a:ln>
+        </p:spPr>
+        <p:txBody>
+          <a:bodyPr xmlns:a="http://schemas.openxmlformats.org/drawingml/2006/main" lIns="0" tIns="0" rIns="0" bIns="0" anchor="ctr">
+            <a:noAutofit/>
+          </a:bodyPr>
+          <a:lstStyle xmlns:a="http://schemas.openxmlformats.org/drawingml/2006/main"/>
+          <a:p xmlns:a="http://schemas.openxmlformats.org/drawingml/2006/main">
+            <a:pPr algn="l">
+              <a:buNone/>
               <a:defRPr sz="1350" b="1">
                 <a:solidFill>
                   <a:srgbClr val="28685E"/>
                 </a:solidFill>
+                <a:latin typeface="Calibri"/>
+                <a:ea typeface="Calibri"/>
+                <a:cs typeface="Calibri"/>
               </a:defRPr>
             </a:pPr>
             <a:r>
@@ -4875,6 +5766,9 @@
                 <a:solidFill>
                   <a:srgbClr val="28685E"/>
                 </a:solidFill>
+                <a:latin typeface="Calibri"/>
+                <a:ea typeface="Calibri"/>
+                <a:cs typeface="Calibri"/>
               </a:rPr>
               <a:t>02</a:t>
             </a:r>
@@ -4897,34 +5791,45 @@
         </p:nvSpPr>
         <p:spPr>
           <a:xfrm xmlns:a="http://schemas.openxmlformats.org/drawingml/2006/main">
-            <a:off x="609600" y="2686050"/>
-            <a:ext cx="10858500" cy="1524000"/>
-          </a:xfrm>
-          <a:prstGeom xmlns:a="http://schemas.openxmlformats.org/drawingml/2006/main" prst="rect">
-            <a:avLst/>
-          </a:prstGeom>
-          <a:noFill xmlns:a="http://schemas.openxmlformats.org/drawingml/2006/main"/>
-          <a:ln xmlns:a="http://schemas.openxmlformats.org/drawingml/2006/main" w="0">
-            <a:noFill/>
-            <a:prstDash val="solid"/>
-          </a:ln>
-        </p:spPr>
-        <p:txBody>
-          <a:bodyPr xmlns:a="http://schemas.openxmlformats.org/drawingml/2006/main" lIns="0" tIns="0" rIns="0" bIns="0" anchor="ctr"/>
-          <a:lstStyle xmlns:a="http://schemas.openxmlformats.org/drawingml/2006/main"/>
-          <a:p xmlns:a="http://schemas.openxmlformats.org/drawingml/2006/main">
-            <a:pPr>
-              <a:defRPr sz="2925" b="1">
+            <a:off x="457200" y="2181225"/>
+            <a:ext cx="5734050" cy="2409825"/>
+          </a:xfrm>
+          <a:prstGeom xmlns:a="http://schemas.openxmlformats.org/drawingml/2006/main" prst="rect">
+            <a:avLst/>
+          </a:prstGeom>
+          <a:solidFill xmlns:a="http://schemas.openxmlformats.org/drawingml/2006/main">
+            <a:srgbClr val="E7EFE9"/>
+          </a:solidFill>
+          <a:ln xmlns:a="http://schemas.openxmlformats.org/drawingml/2006/main" w="0">
+            <a:noFill/>
+            <a:prstDash val="solid"/>
+          </a:ln>
+        </p:spPr>
+        <p:txBody>
+          <a:bodyPr xmlns:a="http://schemas.openxmlformats.org/drawingml/2006/main" lIns="152400" tIns="114300" rIns="152400" bIns="114300" anchor="ctr">
+            <a:noAutofit/>
+          </a:bodyPr>
+          <a:lstStyle xmlns:a="http://schemas.openxmlformats.org/drawingml/2006/main"/>
+          <a:p xmlns:a="http://schemas.openxmlformats.org/drawingml/2006/main">
+            <a:pPr algn="l">
+              <a:buNone/>
+              <a:defRPr sz="2775" b="1">
                 <a:solidFill>
                   <a:srgbClr val="28685E"/>
                 </a:solidFill>
-              </a:defRPr>
-            </a:pPr>
-            <a:r>
-              <a:rPr sz="2925" b="1">
+                <a:latin typeface="Calibri"/>
+                <a:ea typeface="Calibri"/>
+                <a:cs typeface="Calibri"/>
+              </a:defRPr>
+            </a:pPr>
+            <a:r>
+              <a:rPr sz="2775" b="1">
                 <a:solidFill>
                   <a:srgbClr val="28685E"/>
                 </a:solidFill>
+                <a:latin typeface="Calibri"/>
+                <a:ea typeface="Calibri"/>
+                <a:cs typeface="Calibri"/>
               </a:rPr>
               <a:t>Does the run-out surface affect how far a trolley travels before stopping?</a:t>
             </a:r>
@@ -4947,36 +5852,608 @@
         </p:nvSpPr>
         <p:spPr>
           <a:xfrm xmlns:a="http://schemas.openxmlformats.org/drawingml/2006/main">
-            <a:off x="609600" y="4552950"/>
-            <a:ext cx="10858500" cy="1285875"/>
-          </a:xfrm>
-          <a:prstGeom xmlns:a="http://schemas.openxmlformats.org/drawingml/2006/main" prst="rect">
-            <a:avLst/>
-          </a:prstGeom>
-          <a:noFill xmlns:a="http://schemas.openxmlformats.org/drawingml/2006/main"/>
-          <a:ln xmlns:a="http://schemas.openxmlformats.org/drawingml/2006/main" w="0">
-            <a:noFill/>
-            <a:prstDash val="solid"/>
-          </a:ln>
-        </p:spPr>
-        <p:txBody>
-          <a:bodyPr xmlns:a="http://schemas.openxmlformats.org/drawingml/2006/main" lIns="0" tIns="0" rIns="0" bIns="0" anchor="ctr"/>
-          <a:lstStyle xmlns:a="http://schemas.openxmlformats.org/drawingml/2006/main"/>
-          <a:p xmlns:a="http://schemas.openxmlformats.org/drawingml/2006/main">
-            <a:pPr>
-              <a:defRPr sz="2700" b="0">
+            <a:off x="609600" y="4533900"/>
+            <a:ext cx="5429250" cy="1409700"/>
+          </a:xfrm>
+          <a:prstGeom xmlns:a="http://schemas.openxmlformats.org/drawingml/2006/main" prst="rect">
+            <a:avLst/>
+          </a:prstGeom>
+          <a:noFill xmlns:a="http://schemas.openxmlformats.org/drawingml/2006/main"/>
+          <a:ln xmlns:a="http://schemas.openxmlformats.org/drawingml/2006/main" w="0">
+            <a:noFill/>
+            <a:prstDash val="solid"/>
+          </a:ln>
+        </p:spPr>
+        <p:txBody>
+          <a:bodyPr xmlns:a="http://schemas.openxmlformats.org/drawingml/2006/main" lIns="0" tIns="0" rIns="0" bIns="0" anchor="ctr">
+            <a:noAutofit/>
+          </a:bodyPr>
+          <a:lstStyle xmlns:a="http://schemas.openxmlformats.org/drawingml/2006/main"/>
+          <a:p xmlns:a="http://schemas.openxmlformats.org/drawingml/2006/main">
+            <a:pPr algn="l">
+              <a:buNone/>
+              <a:defRPr sz="2250" b="0">
                 <a:solidFill>
                   <a:srgbClr val="152B3A"/>
                 </a:solidFill>
-              </a:defRPr>
-            </a:pPr>
-            <a:r>
-              <a:rPr sz="2700" b="0">
+                <a:latin typeface="Calibri"/>
+                <a:ea typeface="Calibri"/>
+                <a:cs typeface="Calibri"/>
+              </a:defRPr>
+            </a:pPr>
+            <a:r>
+              <a:rPr sz="2250" b="0">
                 <a:solidFill>
                   <a:srgbClr val="152B3A"/>
                 </a:solidFill>
+                <a:latin typeface="Calibri"/>
+                <a:ea typeface="Calibri"/>
+                <a:cs typeface="Calibri"/>
               </a:rPr>
               <a:t>Name one thing to CHANGE. If ready, name two things to KEEP THE SAME.</a:t>
+            </a:r>
+          </a:p>
+        </p:txBody>
+      </p:sp>
+      <p:sp>
+        <p:nvSpPr>
+          <p:cNvPr id="11" name="ramp-plane">
+            <a:extLst xmlns:a="http://schemas.openxmlformats.org/drawingml/2006/main">
+              <a:ext uri="{FF2B5EF4-FFF2-40B4-BE49-F238E27FC236}">
+                <a16:creationId xmlns:a16="http://schemas.microsoft.com/office/drawing/2014/main" id="{09A373EA-5A82-419F-9B89-360989FF52AF}"/>
+              </a:ext>
+            </a:extLst>
+          </p:cNvPr>
+          <p:cNvSpPr>
+            <a:spLocks xmlns:a="http://schemas.openxmlformats.org/drawingml/2006/main" noGrp="1"/>
+          </p:cNvSpPr>
+          <p:nvPr/>
+        </p:nvSpPr>
+        <p:spPr>
+          <a:xfrm xmlns:a="http://schemas.openxmlformats.org/drawingml/2006/main">
+            <a:off x="6762750" y="3714750"/>
+            <a:ext cx="2238375" cy="1095375"/>
+          </a:xfrm>
+          <a:prstGeom xmlns:a="http://schemas.openxmlformats.org/drawingml/2006/main" prst="rtTriangle">
+            <a:avLst/>
+          </a:prstGeom>
+          <a:solidFill xmlns:a="http://schemas.openxmlformats.org/drawingml/2006/main">
+            <a:srgbClr val="E7EFE9"/>
+          </a:solidFill>
+          <a:ln xmlns:a="http://schemas.openxmlformats.org/drawingml/2006/main" w="19050">
+            <a:solidFill>
+              <a:srgbClr val="152B3A"/>
+            </a:solidFill>
+          </a:ln>
+        </p:spPr>
+      </p:sp>
+      <p:sp>
+        <p:nvSpPr>
+          <p:cNvPr id="12" name="runout">
+            <a:extLst xmlns:a="http://schemas.openxmlformats.org/drawingml/2006/main">
+              <a:ext uri="{FF2B5EF4-FFF2-40B4-BE49-F238E27FC236}">
+                <a16:creationId xmlns:a16="http://schemas.microsoft.com/office/drawing/2014/main" id="{9BE93138-E500-4851-95D1-C2D73F8A0D99}"/>
+              </a:ext>
+            </a:extLst>
+          </p:cNvPr>
+          <p:cNvSpPr>
+            <a:spLocks xmlns:a="http://schemas.openxmlformats.org/drawingml/2006/main" noGrp="1"/>
+          </p:cNvSpPr>
+          <p:nvPr/>
+        </p:nvSpPr>
+        <p:spPr>
+          <a:xfrm xmlns:a="http://schemas.openxmlformats.org/drawingml/2006/main">
+            <a:off x="8763000" y="4810125"/>
+            <a:ext cx="2428875" cy="133350"/>
+          </a:xfrm>
+          <a:prstGeom xmlns:a="http://schemas.openxmlformats.org/drawingml/2006/main" prst="rect">
+            <a:avLst/>
+          </a:prstGeom>
+          <a:solidFill xmlns:a="http://schemas.openxmlformats.org/drawingml/2006/main">
+            <a:srgbClr val="28685E"/>
+          </a:solidFill>
+          <a:ln xmlns:a="http://schemas.openxmlformats.org/drawingml/2006/main" w="0">
+            <a:noFill/>
+          </a:ln>
+        </p:spPr>
+      </p:sp>
+      <p:sp>
+        <p:nvSpPr>
+          <p:cNvPr id="13" name="trolley">
+            <a:extLst xmlns:a="http://schemas.openxmlformats.org/drawingml/2006/main">
+              <a:ext uri="{FF2B5EF4-FFF2-40B4-BE49-F238E27FC236}">
+                <a16:creationId xmlns:a16="http://schemas.microsoft.com/office/drawing/2014/main" id="{DDA623D9-52A1-4C86-991A-488090D93D07}"/>
+              </a:ext>
+            </a:extLst>
+          </p:cNvPr>
+          <p:cNvSpPr>
+            <a:spLocks xmlns:a="http://schemas.openxmlformats.org/drawingml/2006/main" noGrp="1"/>
+          </p:cNvSpPr>
+          <p:nvPr/>
+        </p:nvSpPr>
+        <p:spPr>
+          <a:xfrm xmlns:a="http://schemas.openxmlformats.org/drawingml/2006/main">
+            <a:off x="9544050" y="4352925"/>
+            <a:ext cx="723900" cy="361950"/>
+          </a:xfrm>
+          <a:prstGeom xmlns:a="http://schemas.openxmlformats.org/drawingml/2006/main" prst="rect">
+            <a:avLst/>
+          </a:prstGeom>
+          <a:solidFill xmlns:a="http://schemas.openxmlformats.org/drawingml/2006/main">
+            <a:srgbClr val="28685E"/>
+          </a:solidFill>
+          <a:ln xmlns:a="http://schemas.openxmlformats.org/drawingml/2006/main" w="0">
+            <a:noFill/>
+          </a:ln>
+        </p:spPr>
+      </p:sp>
+      <p:sp>
+        <p:nvSpPr>
+          <p:cNvPr id="14" name="wheel1">
+            <a:extLst xmlns:a="http://schemas.openxmlformats.org/drawingml/2006/main">
+              <a:ext uri="{FF2B5EF4-FFF2-40B4-BE49-F238E27FC236}">
+                <a16:creationId xmlns:a16="http://schemas.microsoft.com/office/drawing/2014/main" id="{89C440AA-62A3-4177-8CFA-1AB761BB8B77}"/>
+              </a:ext>
+            </a:extLst>
+          </p:cNvPr>
+          <p:cNvSpPr>
+            <a:spLocks xmlns:a="http://schemas.openxmlformats.org/drawingml/2006/main" noGrp="1"/>
+          </p:cNvSpPr>
+          <p:nvPr/>
+        </p:nvSpPr>
+        <p:spPr>
+          <a:xfrm xmlns:a="http://schemas.openxmlformats.org/drawingml/2006/main">
+            <a:off x="9620250" y="4676775"/>
+            <a:ext cx="171450" cy="171450"/>
+          </a:xfrm>
+          <a:prstGeom xmlns:a="http://schemas.openxmlformats.org/drawingml/2006/main" prst="ellipse">
+            <a:avLst/>
+          </a:prstGeom>
+          <a:solidFill xmlns:a="http://schemas.openxmlformats.org/drawingml/2006/main">
+            <a:srgbClr val="152B3A"/>
+          </a:solidFill>
+          <a:ln xmlns:a="http://schemas.openxmlformats.org/drawingml/2006/main" w="0">
+            <a:noFill/>
+          </a:ln>
+        </p:spPr>
+      </p:sp>
+      <p:sp>
+        <p:nvSpPr>
+          <p:cNvPr id="15" name="wheel2">
+            <a:extLst xmlns:a="http://schemas.openxmlformats.org/drawingml/2006/main">
+              <a:ext uri="{FF2B5EF4-FFF2-40B4-BE49-F238E27FC236}">
+                <a16:creationId xmlns:a16="http://schemas.microsoft.com/office/drawing/2014/main" id="{555AB27D-9D61-474F-A29A-5171D7BBCE52}"/>
+              </a:ext>
+            </a:extLst>
+          </p:cNvPr>
+          <p:cNvSpPr>
+            <a:spLocks xmlns:a="http://schemas.openxmlformats.org/drawingml/2006/main" noGrp="1"/>
+          </p:cNvSpPr>
+          <p:nvPr/>
+        </p:nvSpPr>
+        <p:spPr>
+          <a:xfrm xmlns:a="http://schemas.openxmlformats.org/drawingml/2006/main">
+            <a:off x="10067925" y="4676775"/>
+            <a:ext cx="171450" cy="171450"/>
+          </a:xfrm>
+          <a:prstGeom xmlns:a="http://schemas.openxmlformats.org/drawingml/2006/main" prst="ellipse">
+            <a:avLst/>
+          </a:prstGeom>
+          <a:solidFill xmlns:a="http://schemas.openxmlformats.org/drawingml/2006/main">
+            <a:srgbClr val="152B3A"/>
+          </a:solidFill>
+          <a:ln xmlns:a="http://schemas.openxmlformats.org/drawingml/2006/main" w="0">
+            <a:noFill/>
+          </a:ln>
+        </p:spPr>
+      </p:sp>
+      <p:sp>
+        <p:nvSpPr>
+          <p:cNvPr id="16" name="measure-rule">
+            <a:extLst xmlns:a="http://schemas.openxmlformats.org/drawingml/2006/main">
+              <a:ext uri="{FF2B5EF4-FFF2-40B4-BE49-F238E27FC236}">
+                <a16:creationId xmlns:a16="http://schemas.microsoft.com/office/drawing/2014/main" id="{9603D986-E9D3-41CF-9D9C-F7427DAA9D62}"/>
+              </a:ext>
+            </a:extLst>
+          </p:cNvPr>
+          <p:cNvSpPr>
+            <a:spLocks xmlns:a="http://schemas.openxmlformats.org/drawingml/2006/main" noGrp="1"/>
+          </p:cNvSpPr>
+          <p:nvPr/>
+        </p:nvSpPr>
+        <p:spPr>
+          <a:xfrm xmlns:a="http://schemas.openxmlformats.org/drawingml/2006/main">
+            <a:off x="8953500" y="5343525"/>
+            <a:ext cx="2047875" cy="0"/>
+          </a:xfrm>
+          <a:prstGeom xmlns:a="http://schemas.openxmlformats.org/drawingml/2006/main" prst="line">
+            <a:avLst/>
+          </a:prstGeom>
+          <a:noFill xmlns:a="http://schemas.openxmlformats.org/drawingml/2006/main"/>
+          <a:ln xmlns:a="http://schemas.openxmlformats.org/drawingml/2006/main" w="19050">
+            <a:solidFill>
+              <a:srgbClr val="152B3A"/>
+            </a:solidFill>
+          </a:ln>
+        </p:spPr>
+      </p:sp>
+      <p:sp>
+        <p:nvSpPr>
+          <p:cNvPr id="17" name="rule-tick-0">
+            <a:extLst xmlns:a="http://schemas.openxmlformats.org/drawingml/2006/main">
+              <a:ext uri="{FF2B5EF4-FFF2-40B4-BE49-F238E27FC236}">
+                <a16:creationId xmlns:a16="http://schemas.microsoft.com/office/drawing/2014/main" id="{F91D684B-2F73-4A24-8451-8BFFC7BBEFAE}"/>
+              </a:ext>
+            </a:extLst>
+          </p:cNvPr>
+          <p:cNvSpPr>
+            <a:spLocks xmlns:a="http://schemas.openxmlformats.org/drawingml/2006/main" noGrp="1"/>
+          </p:cNvSpPr>
+          <p:nvPr/>
+        </p:nvSpPr>
+        <p:spPr>
+          <a:xfrm xmlns:a="http://schemas.openxmlformats.org/drawingml/2006/main">
+            <a:off x="8953500" y="5238750"/>
+            <a:ext cx="0" cy="190500"/>
+          </a:xfrm>
+          <a:prstGeom xmlns:a="http://schemas.openxmlformats.org/drawingml/2006/main" prst="line">
+            <a:avLst/>
+          </a:prstGeom>
+          <a:noFill xmlns:a="http://schemas.openxmlformats.org/drawingml/2006/main"/>
+          <a:ln xmlns:a="http://schemas.openxmlformats.org/drawingml/2006/main" w="19050">
+            <a:solidFill>
+              <a:srgbClr val="152B3A"/>
+            </a:solidFill>
+          </a:ln>
+        </p:spPr>
+      </p:sp>
+      <p:sp>
+        <p:nvSpPr>
+          <p:cNvPr id="18" name="rule-tick-1">
+            <a:extLst xmlns:a="http://schemas.openxmlformats.org/drawingml/2006/main">
+              <a:ext uri="{FF2B5EF4-FFF2-40B4-BE49-F238E27FC236}">
+                <a16:creationId xmlns:a16="http://schemas.microsoft.com/office/drawing/2014/main" id="{29CCC34C-9480-44AC-90AB-20EF93B39644}"/>
+              </a:ext>
+            </a:extLst>
+          </p:cNvPr>
+          <p:cNvSpPr>
+            <a:spLocks xmlns:a="http://schemas.openxmlformats.org/drawingml/2006/main" noGrp="1"/>
+          </p:cNvSpPr>
+          <p:nvPr/>
+        </p:nvSpPr>
+        <p:spPr>
+          <a:xfrm xmlns:a="http://schemas.openxmlformats.org/drawingml/2006/main">
+            <a:off x="9294813" y="5238750"/>
+            <a:ext cx="0" cy="190500"/>
+          </a:xfrm>
+          <a:prstGeom xmlns:a="http://schemas.openxmlformats.org/drawingml/2006/main" prst="line">
+            <a:avLst/>
+          </a:prstGeom>
+          <a:noFill xmlns:a="http://schemas.openxmlformats.org/drawingml/2006/main"/>
+          <a:ln xmlns:a="http://schemas.openxmlformats.org/drawingml/2006/main" w="19050">
+            <a:solidFill>
+              <a:srgbClr val="152B3A"/>
+            </a:solidFill>
+          </a:ln>
+        </p:spPr>
+      </p:sp>
+      <p:sp>
+        <p:nvSpPr>
+          <p:cNvPr id="19" name="rule-tick-2">
+            <a:extLst xmlns:a="http://schemas.openxmlformats.org/drawingml/2006/main">
+              <a:ext uri="{FF2B5EF4-FFF2-40B4-BE49-F238E27FC236}">
+                <a16:creationId xmlns:a16="http://schemas.microsoft.com/office/drawing/2014/main" id="{93AD3D0C-1657-4143-A9FB-EF166E58739E}"/>
+              </a:ext>
+            </a:extLst>
+          </p:cNvPr>
+          <p:cNvSpPr>
+            <a:spLocks xmlns:a="http://schemas.openxmlformats.org/drawingml/2006/main" noGrp="1"/>
+          </p:cNvSpPr>
+          <p:nvPr/>
+        </p:nvSpPr>
+        <p:spPr>
+          <a:xfrm xmlns:a="http://schemas.openxmlformats.org/drawingml/2006/main">
+            <a:off x="9636125" y="5238750"/>
+            <a:ext cx="0" cy="190500"/>
+          </a:xfrm>
+          <a:prstGeom xmlns:a="http://schemas.openxmlformats.org/drawingml/2006/main" prst="line">
+            <a:avLst/>
+          </a:prstGeom>
+          <a:noFill xmlns:a="http://schemas.openxmlformats.org/drawingml/2006/main"/>
+          <a:ln xmlns:a="http://schemas.openxmlformats.org/drawingml/2006/main" w="19050">
+            <a:solidFill>
+              <a:srgbClr val="152B3A"/>
+            </a:solidFill>
+          </a:ln>
+        </p:spPr>
+      </p:sp>
+      <p:sp>
+        <p:nvSpPr>
+          <p:cNvPr id="20" name="rule-tick-3">
+            <a:extLst xmlns:a="http://schemas.openxmlformats.org/drawingml/2006/main">
+              <a:ext uri="{FF2B5EF4-FFF2-40B4-BE49-F238E27FC236}">
+                <a16:creationId xmlns:a16="http://schemas.microsoft.com/office/drawing/2014/main" id="{4137801D-6CF3-433D-BB17-95B270B1084D}"/>
+              </a:ext>
+            </a:extLst>
+          </p:cNvPr>
+          <p:cNvSpPr>
+            <a:spLocks xmlns:a="http://schemas.openxmlformats.org/drawingml/2006/main" noGrp="1"/>
+          </p:cNvSpPr>
+          <p:nvPr/>
+        </p:nvSpPr>
+        <p:spPr>
+          <a:xfrm xmlns:a="http://schemas.openxmlformats.org/drawingml/2006/main">
+            <a:off x="9977438" y="5238750"/>
+            <a:ext cx="0" cy="190500"/>
+          </a:xfrm>
+          <a:prstGeom xmlns:a="http://schemas.openxmlformats.org/drawingml/2006/main" prst="line">
+            <a:avLst/>
+          </a:prstGeom>
+          <a:noFill xmlns:a="http://schemas.openxmlformats.org/drawingml/2006/main"/>
+          <a:ln xmlns:a="http://schemas.openxmlformats.org/drawingml/2006/main" w="19050">
+            <a:solidFill>
+              <a:srgbClr val="152B3A"/>
+            </a:solidFill>
+          </a:ln>
+        </p:spPr>
+      </p:sp>
+      <p:sp>
+        <p:nvSpPr>
+          <p:cNvPr id="21" name="rule-tick-4">
+            <a:extLst xmlns:a="http://schemas.openxmlformats.org/drawingml/2006/main">
+              <a:ext uri="{FF2B5EF4-FFF2-40B4-BE49-F238E27FC236}">
+                <a16:creationId xmlns:a16="http://schemas.microsoft.com/office/drawing/2014/main" id="{CAFB76D0-D201-42D7-B9E9-79DB703857FC}"/>
+              </a:ext>
+            </a:extLst>
+          </p:cNvPr>
+          <p:cNvSpPr>
+            <a:spLocks xmlns:a="http://schemas.openxmlformats.org/drawingml/2006/main" noGrp="1"/>
+          </p:cNvSpPr>
+          <p:nvPr/>
+        </p:nvSpPr>
+        <p:spPr>
+          <a:xfrm xmlns:a="http://schemas.openxmlformats.org/drawingml/2006/main">
+            <a:off x="10318750" y="5238750"/>
+            <a:ext cx="0" cy="190500"/>
+          </a:xfrm>
+          <a:prstGeom xmlns:a="http://schemas.openxmlformats.org/drawingml/2006/main" prst="line">
+            <a:avLst/>
+          </a:prstGeom>
+          <a:noFill xmlns:a="http://schemas.openxmlformats.org/drawingml/2006/main"/>
+          <a:ln xmlns:a="http://schemas.openxmlformats.org/drawingml/2006/main" w="19050">
+            <a:solidFill>
+              <a:srgbClr val="152B3A"/>
+            </a:solidFill>
+          </a:ln>
+        </p:spPr>
+      </p:sp>
+      <p:sp>
+        <p:nvSpPr>
+          <p:cNvPr id="22" name="rule-tick-5">
+            <a:extLst xmlns:a="http://schemas.openxmlformats.org/drawingml/2006/main">
+              <a:ext uri="{FF2B5EF4-FFF2-40B4-BE49-F238E27FC236}">
+                <a16:creationId xmlns:a16="http://schemas.microsoft.com/office/drawing/2014/main" id="{5A160A40-C591-4A94-A193-A84D55F1EBAD}"/>
+              </a:ext>
+            </a:extLst>
+          </p:cNvPr>
+          <p:cNvSpPr>
+            <a:spLocks xmlns:a="http://schemas.openxmlformats.org/drawingml/2006/main" noGrp="1"/>
+          </p:cNvSpPr>
+          <p:nvPr/>
+        </p:nvSpPr>
+        <p:spPr>
+          <a:xfrm xmlns:a="http://schemas.openxmlformats.org/drawingml/2006/main">
+            <a:off x="10660063" y="5238750"/>
+            <a:ext cx="0" cy="190500"/>
+          </a:xfrm>
+          <a:prstGeom xmlns:a="http://schemas.openxmlformats.org/drawingml/2006/main" prst="line">
+            <a:avLst/>
+          </a:prstGeom>
+          <a:noFill xmlns:a="http://schemas.openxmlformats.org/drawingml/2006/main"/>
+          <a:ln xmlns:a="http://schemas.openxmlformats.org/drawingml/2006/main" w="19050">
+            <a:solidFill>
+              <a:srgbClr val="152B3A"/>
+            </a:solidFill>
+          </a:ln>
+        </p:spPr>
+      </p:sp>
+      <p:sp>
+        <p:nvSpPr>
+          <p:cNvPr id="23" name="rule-tick-6">
+            <a:extLst xmlns:a="http://schemas.openxmlformats.org/drawingml/2006/main">
+              <a:ext uri="{FF2B5EF4-FFF2-40B4-BE49-F238E27FC236}">
+                <a16:creationId xmlns:a16="http://schemas.microsoft.com/office/drawing/2014/main" id="{DCF5D14C-56AB-4941-8EAD-81CFED81526E}"/>
+              </a:ext>
+            </a:extLst>
+          </p:cNvPr>
+          <p:cNvSpPr>
+            <a:spLocks xmlns:a="http://schemas.openxmlformats.org/drawingml/2006/main" noGrp="1"/>
+          </p:cNvSpPr>
+          <p:nvPr/>
+        </p:nvSpPr>
+        <p:spPr>
+          <a:xfrm xmlns:a="http://schemas.openxmlformats.org/drawingml/2006/main">
+            <a:off x="11001375" y="5238750"/>
+            <a:ext cx="0" cy="190500"/>
+          </a:xfrm>
+          <a:prstGeom xmlns:a="http://schemas.openxmlformats.org/drawingml/2006/main" prst="line">
+            <a:avLst/>
+          </a:prstGeom>
+          <a:noFill xmlns:a="http://schemas.openxmlformats.org/drawingml/2006/main"/>
+          <a:ln xmlns:a="http://schemas.openxmlformats.org/drawingml/2006/main" w="19050">
+            <a:solidFill>
+              <a:srgbClr val="152B3A"/>
+            </a:solidFill>
+          </a:ln>
+        </p:spPr>
+      </p:sp>
+      <p:sp>
+        <p:nvSpPr>
+          <p:cNvPr id="24" name="rule-zero">
+            <a:extLst xmlns:a="http://schemas.openxmlformats.org/drawingml/2006/main">
+              <a:ext uri="{FF2B5EF4-FFF2-40B4-BE49-F238E27FC236}">
+                <a16:creationId xmlns:a16="http://schemas.microsoft.com/office/drawing/2014/main" id="{D5FF89A0-FB97-4A7C-87BB-99FCC621AD3A}"/>
+              </a:ext>
+            </a:extLst>
+          </p:cNvPr>
+          <p:cNvSpPr>
+            <a:spLocks xmlns:a="http://schemas.openxmlformats.org/drawingml/2006/main" noGrp="1"/>
+          </p:cNvSpPr>
+          <p:nvPr/>
+        </p:nvSpPr>
+        <p:spPr>
+          <a:xfrm xmlns:a="http://schemas.openxmlformats.org/drawingml/2006/main">
+            <a:off x="8858250" y="5572125"/>
+            <a:ext cx="285750" cy="333375"/>
+          </a:xfrm>
+          <a:prstGeom xmlns:a="http://schemas.openxmlformats.org/drawingml/2006/main" prst="rect">
+            <a:avLst/>
+          </a:prstGeom>
+          <a:noFill xmlns:a="http://schemas.openxmlformats.org/drawingml/2006/main"/>
+          <a:ln xmlns:a="http://schemas.openxmlformats.org/drawingml/2006/main" w="0">
+            <a:noFill/>
+          </a:ln>
+        </p:spPr>
+        <p:txBody>
+          <a:bodyPr xmlns:a="http://schemas.openxmlformats.org/drawingml/2006/main" lIns="0" tIns="0" rIns="0" bIns="0" anchor="ctr">
+            <a:noAutofit/>
+          </a:bodyPr>
+          <a:lstStyle xmlns:a="http://schemas.openxmlformats.org/drawingml/2006/main"/>
+          <a:p xmlns:a="http://schemas.openxmlformats.org/drawingml/2006/main">
+            <a:pPr algn="l">
+              <a:defRPr sz="1650" b="0">
+                <a:solidFill>
+                  <a:srgbClr val="152B3A"/>
+                </a:solidFill>
+                <a:latin typeface="Calibri"/>
+                <a:ea typeface="Calibri"/>
+                <a:cs typeface="Calibri"/>
+              </a:defRPr>
+            </a:pPr>
+            <a:r>
+              <a:rPr sz="1650" b="0">
+                <a:solidFill>
+                  <a:srgbClr val="152B3A"/>
+                </a:solidFill>
+                <a:latin typeface="Calibri"/>
+                <a:ea typeface="Calibri"/>
+                <a:cs typeface="Calibri"/>
+              </a:rPr>
+              <a:t>0</a:t>
+            </a:r>
+          </a:p>
+        </p:txBody>
+      </p:sp>
+      <p:sp>
+        <p:nvSpPr>
+          <p:cNvPr id="25" name="rule-unit">
+            <a:extLst xmlns:a="http://schemas.openxmlformats.org/drawingml/2006/main">
+              <a:ext uri="{FF2B5EF4-FFF2-40B4-BE49-F238E27FC236}">
+                <a16:creationId xmlns:a16="http://schemas.microsoft.com/office/drawing/2014/main" id="{6F09CD72-9961-488C-9911-CC51EF2BD6F8}"/>
+              </a:ext>
+            </a:extLst>
+          </p:cNvPr>
+          <p:cNvSpPr>
+            <a:spLocks xmlns:a="http://schemas.openxmlformats.org/drawingml/2006/main" noGrp="1"/>
+          </p:cNvSpPr>
+          <p:nvPr/>
+        </p:nvSpPr>
+        <p:spPr>
+          <a:xfrm xmlns:a="http://schemas.openxmlformats.org/drawingml/2006/main">
+            <a:off x="10810875" y="5572125"/>
+            <a:ext cx="381000" cy="333375"/>
+          </a:xfrm>
+          <a:prstGeom xmlns:a="http://schemas.openxmlformats.org/drawingml/2006/main" prst="rect">
+            <a:avLst/>
+          </a:prstGeom>
+          <a:noFill xmlns:a="http://schemas.openxmlformats.org/drawingml/2006/main"/>
+          <a:ln xmlns:a="http://schemas.openxmlformats.org/drawingml/2006/main" w="0">
+            <a:noFill/>
+          </a:ln>
+        </p:spPr>
+        <p:txBody>
+          <a:bodyPr xmlns:a="http://schemas.openxmlformats.org/drawingml/2006/main" lIns="0" tIns="0" rIns="0" bIns="0" anchor="ctr">
+            <a:noAutofit/>
+          </a:bodyPr>
+          <a:lstStyle xmlns:a="http://schemas.openxmlformats.org/drawingml/2006/main"/>
+          <a:p xmlns:a="http://schemas.openxmlformats.org/drawingml/2006/main">
+            <a:pPr algn="l">
+              <a:defRPr sz="1650" b="0">
+                <a:solidFill>
+                  <a:srgbClr val="152B3A"/>
+                </a:solidFill>
+                <a:latin typeface="Calibri"/>
+                <a:ea typeface="Calibri"/>
+                <a:cs typeface="Calibri"/>
+              </a:defRPr>
+            </a:pPr>
+            <a:r>
+              <a:rPr sz="1650" b="0">
+                <a:solidFill>
+                  <a:srgbClr val="152B3A"/>
+                </a:solidFill>
+                <a:latin typeface="Calibri"/>
+                <a:ea typeface="Calibri"/>
+                <a:cs typeface="Calibri"/>
+              </a:rPr>
+              <a:t>cm</a:t>
+            </a:r>
+          </a:p>
+        </p:txBody>
+      </p:sp>
+      <p:sp>
+        <p:nvSpPr>
+          <p:cNvPr id="26" name="ramp-label">
+            <a:extLst xmlns:a="http://schemas.openxmlformats.org/drawingml/2006/main">
+              <a:ext uri="{FF2B5EF4-FFF2-40B4-BE49-F238E27FC236}">
+                <a16:creationId xmlns:a16="http://schemas.microsoft.com/office/drawing/2014/main" id="{B9A4A1A8-B0FF-47E0-8459-7D7898609C3C}"/>
+              </a:ext>
+            </a:extLst>
+          </p:cNvPr>
+          <p:cNvSpPr>
+            <a:spLocks xmlns:a="http://schemas.openxmlformats.org/drawingml/2006/main" noGrp="1"/>
+          </p:cNvSpPr>
+          <p:nvPr/>
+        </p:nvSpPr>
+        <p:spPr>
+          <a:xfrm xmlns:a="http://schemas.openxmlformats.org/drawingml/2006/main">
+            <a:off x="6762750" y="2971800"/>
+            <a:ext cx="4381500" cy="381000"/>
+          </a:xfrm>
+          <a:prstGeom xmlns:a="http://schemas.openxmlformats.org/drawingml/2006/main" prst="rect">
+            <a:avLst/>
+          </a:prstGeom>
+          <a:noFill xmlns:a="http://schemas.openxmlformats.org/drawingml/2006/main"/>
+          <a:ln xmlns:a="http://schemas.openxmlformats.org/drawingml/2006/main" w="0">
+            <a:noFill/>
+          </a:ln>
+        </p:spPr>
+        <p:txBody>
+          <a:bodyPr xmlns:a="http://schemas.openxmlformats.org/drawingml/2006/main" lIns="0" tIns="0" rIns="0" bIns="0" anchor="ctr">
+            <a:noAutofit/>
+          </a:bodyPr>
+          <a:lstStyle xmlns:a="http://schemas.openxmlformats.org/drawingml/2006/main"/>
+          <a:p xmlns:a="http://schemas.openxmlformats.org/drawingml/2006/main">
+            <a:pPr algn="l">
+              <a:defRPr sz="1875" b="1">
+                <a:solidFill>
+                  <a:srgbClr val="28685E"/>
+                </a:solidFill>
+                <a:latin typeface="Calibri"/>
+                <a:ea typeface="Calibri"/>
+                <a:cs typeface="Calibri"/>
+              </a:defRPr>
+            </a:pPr>
+            <a:r>
+              <a:rPr sz="1875" b="1">
+                <a:solidFill>
+                  <a:srgbClr val="28685E"/>
+                </a:solidFill>
+                <a:latin typeface="Calibri"/>
+                <a:ea typeface="Calibri"/>
+                <a:cs typeface="Calibri"/>
+              </a:rPr>
+              <a:t>same release • no push</a:t>
             </a:r>
           </a:p>
         </p:txBody>
@@ -4997,7 +6474,7 @@
     <p:bg>
       <p:bgPr>
         <a:solidFill xmlns:a="http://schemas.openxmlformats.org/drawingml/2006/main">
-          <a:srgbClr val="F5F1E8"/>
+          <a:srgbClr val="FAF9F5"/>
         </a:solidFill>
       </p:bgPr>
     </p:bg>
@@ -5026,8 +6503,8 @@
         </p:nvSpPr>
         <p:spPr>
           <a:xfrm xmlns:a="http://schemas.openxmlformats.org/drawingml/2006/main">
-            <a:off x="609600" y="552450"/>
-            <a:ext cx="781050" cy="57150"/>
+            <a:off x="609600" y="733425"/>
+            <a:ext cx="781050" cy="38100"/>
           </a:xfrm>
           <a:prstGeom xmlns:a="http://schemas.openxmlformats.org/drawingml/2006/main" prst="rect">
             <a:avLst/>
@@ -5057,34 +6534,43 @@
         </p:nvSpPr>
         <p:spPr>
           <a:xfrm xmlns:a="http://schemas.openxmlformats.org/drawingml/2006/main">
-            <a:off x="609600" y="762000"/>
-            <a:ext cx="8572500" cy="285750"/>
-          </a:xfrm>
-          <a:prstGeom xmlns:a="http://schemas.openxmlformats.org/drawingml/2006/main" prst="rect">
-            <a:avLst/>
-          </a:prstGeom>
-          <a:noFill xmlns:a="http://schemas.openxmlformats.org/drawingml/2006/main"/>
-          <a:ln xmlns:a="http://schemas.openxmlformats.org/drawingml/2006/main" w="0">
-            <a:noFill/>
-            <a:prstDash val="solid"/>
-          </a:ln>
-        </p:spPr>
-        <p:txBody>
-          <a:bodyPr xmlns:a="http://schemas.openxmlformats.org/drawingml/2006/main" lIns="0" tIns="0" rIns="0" bIns="0" anchor="ctr"/>
-          <a:lstStyle xmlns:a="http://schemas.openxmlformats.org/drawingml/2006/main"/>
-          <a:p xmlns:a="http://schemas.openxmlformats.org/drawingml/2006/main">
-            <a:pPr>
-              <a:defRPr sz="1500" b="1">
+            <a:off x="609600" y="342900"/>
+            <a:ext cx="9334500" cy="304800"/>
+          </a:xfrm>
+          <a:prstGeom xmlns:a="http://schemas.openxmlformats.org/drawingml/2006/main" prst="rect">
+            <a:avLst/>
+          </a:prstGeom>
+          <a:noFill xmlns:a="http://schemas.openxmlformats.org/drawingml/2006/main"/>
+          <a:ln xmlns:a="http://schemas.openxmlformats.org/drawingml/2006/main" w="0">
+            <a:noFill/>
+            <a:prstDash val="solid"/>
+          </a:ln>
+        </p:spPr>
+        <p:txBody>
+          <a:bodyPr xmlns:a="http://schemas.openxmlformats.org/drawingml/2006/main" lIns="0" tIns="0" rIns="0" bIns="0" anchor="ctr">
+            <a:noAutofit/>
+          </a:bodyPr>
+          <a:lstStyle xmlns:a="http://schemas.openxmlformats.org/drawingml/2006/main"/>
+          <a:p xmlns:a="http://schemas.openxmlformats.org/drawingml/2006/main">
+            <a:pPr algn="l">
+              <a:buNone/>
+              <a:defRPr sz="1350" b="1">
                 <a:solidFill>
                   <a:srgbClr val="28685E"/>
                 </a:solidFill>
-              </a:defRPr>
-            </a:pPr>
-            <a:r>
-              <a:rPr sz="1500" b="1">
+                <a:latin typeface="Calibri"/>
+                <a:ea typeface="Calibri"/>
+                <a:cs typeface="Calibri"/>
+              </a:defRPr>
+            </a:pPr>
+            <a:r>
+              <a:rPr sz="1350" b="1">
                 <a:solidFill>
                   <a:srgbClr val="28685E"/>
                 </a:solidFill>
+                <a:latin typeface="Calibri"/>
+                <a:ea typeface="Calibri"/>
+                <a:cs typeface="Calibri"/>
               </a:rPr>
               <a:t>MADE BY MATT  /  GROW SCIENCE</a:t>
             </a:r>
@@ -5107,34 +6593,43 @@
         </p:nvSpPr>
         <p:spPr>
           <a:xfrm xmlns:a="http://schemas.openxmlformats.org/drawingml/2006/main">
-            <a:off x="609600" y="1352550"/>
-            <a:ext cx="10972800" cy="952500"/>
-          </a:xfrm>
-          <a:prstGeom xmlns:a="http://schemas.openxmlformats.org/drawingml/2006/main" prst="rect">
-            <a:avLst/>
-          </a:prstGeom>
-          <a:noFill xmlns:a="http://schemas.openxmlformats.org/drawingml/2006/main"/>
-          <a:ln xmlns:a="http://schemas.openxmlformats.org/drawingml/2006/main" w="0">
-            <a:noFill/>
-            <a:prstDash val="solid"/>
-          </a:ln>
-        </p:spPr>
-        <p:txBody>
-          <a:bodyPr xmlns:a="http://schemas.openxmlformats.org/drawingml/2006/main" lIns="0" tIns="0" rIns="0" bIns="0" anchor="ctr"/>
-          <a:lstStyle xmlns:a="http://schemas.openxmlformats.org/drawingml/2006/main"/>
-          <a:p xmlns:a="http://schemas.openxmlformats.org/drawingml/2006/main">
-            <a:pPr>
-              <a:defRPr sz="3750" b="1">
+            <a:off x="609600" y="990600"/>
+            <a:ext cx="10972800" cy="1000125"/>
+          </a:xfrm>
+          <a:prstGeom xmlns:a="http://schemas.openxmlformats.org/drawingml/2006/main" prst="rect">
+            <a:avLst/>
+          </a:prstGeom>
+          <a:noFill xmlns:a="http://schemas.openxmlformats.org/drawingml/2006/main"/>
+          <a:ln xmlns:a="http://schemas.openxmlformats.org/drawingml/2006/main" w="0">
+            <a:noFill/>
+            <a:prstDash val="solid"/>
+          </a:ln>
+        </p:spPr>
+        <p:txBody>
+          <a:bodyPr xmlns:a="http://schemas.openxmlformats.org/drawingml/2006/main" lIns="0" tIns="0" rIns="0" bIns="0" anchor="ctr">
+            <a:noAutofit/>
+          </a:bodyPr>
+          <a:lstStyle xmlns:a="http://schemas.openxmlformats.org/drawingml/2006/main"/>
+          <a:p xmlns:a="http://schemas.openxmlformats.org/drawingml/2006/main">
+            <a:pPr algn="l">
+              <a:buNone/>
+              <a:defRPr sz="3675" b="1">
                 <a:solidFill>
                   <a:srgbClr val="152B3A"/>
                 </a:solidFill>
-              </a:defRPr>
-            </a:pPr>
-            <a:r>
-              <a:rPr sz="3750" b="1">
+                <a:latin typeface="Calibri"/>
+                <a:ea typeface="Calibri"/>
+                <a:cs typeface="Calibri"/>
+              </a:defRPr>
+            </a:pPr>
+            <a:r>
+              <a:rPr sz="3675" b="1">
                 <a:solidFill>
                   <a:srgbClr val="152B3A"/>
                 </a:solidFill>
+                <a:latin typeface="Calibri"/>
+                <a:ea typeface="Calibri"/>
+                <a:cs typeface="Calibri"/>
               </a:rPr>
               <a:t>Three steps in the investigation</a:t>
             </a:r>
@@ -5157,14 +6652,14 @@
         </p:nvSpPr>
         <p:spPr>
           <a:xfrm xmlns:a="http://schemas.openxmlformats.org/drawingml/2006/main">
-            <a:off x="609600" y="6219825"/>
+            <a:off x="609600" y="6191250"/>
             <a:ext cx="10972800" cy="9525"/>
           </a:xfrm>
           <a:prstGeom xmlns:a="http://schemas.openxmlformats.org/drawingml/2006/main" prst="rect">
             <a:avLst/>
           </a:prstGeom>
           <a:solidFill xmlns:a="http://schemas.openxmlformats.org/drawingml/2006/main">
-            <a:srgbClr val="DCE7DD"/>
+            <a:srgbClr val="CEDBD3"/>
           </a:solidFill>
           <a:ln xmlns:a="http://schemas.openxmlformats.org/drawingml/2006/main" w="0">
             <a:noFill/>
@@ -5188,34 +6683,43 @@
         </p:nvSpPr>
         <p:spPr>
           <a:xfrm xmlns:a="http://schemas.openxmlformats.org/drawingml/2006/main">
-            <a:off x="609600" y="6381750"/>
-            <a:ext cx="9906000" cy="228600"/>
-          </a:xfrm>
-          <a:prstGeom xmlns:a="http://schemas.openxmlformats.org/drawingml/2006/main" prst="rect">
-            <a:avLst/>
-          </a:prstGeom>
-          <a:noFill xmlns:a="http://schemas.openxmlformats.org/drawingml/2006/main"/>
-          <a:ln xmlns:a="http://schemas.openxmlformats.org/drawingml/2006/main" w="0">
-            <a:noFill/>
-            <a:prstDash val="solid"/>
-          </a:ln>
-        </p:spPr>
-        <p:txBody>
-          <a:bodyPr xmlns:a="http://schemas.openxmlformats.org/drawingml/2006/main" lIns="0" tIns="0" rIns="0" bIns="0" anchor="ctr"/>
-          <a:lstStyle xmlns:a="http://schemas.openxmlformats.org/drawingml/2006/main"/>
-          <a:p xmlns:a="http://schemas.openxmlformats.org/drawingml/2006/main">
-            <a:pPr>
-              <a:defRPr sz="1275" b="0">
+            <a:off x="609600" y="6419850"/>
+            <a:ext cx="9525000" cy="219075"/>
+          </a:xfrm>
+          <a:prstGeom xmlns:a="http://schemas.openxmlformats.org/drawingml/2006/main" prst="rect">
+            <a:avLst/>
+          </a:prstGeom>
+          <a:noFill xmlns:a="http://schemas.openxmlformats.org/drawingml/2006/main"/>
+          <a:ln xmlns:a="http://schemas.openxmlformats.org/drawingml/2006/main" w="0">
+            <a:noFill/>
+            <a:prstDash val="solid"/>
+          </a:ln>
+        </p:spPr>
+        <p:txBody>
+          <a:bodyPr xmlns:a="http://schemas.openxmlformats.org/drawingml/2006/main" lIns="0" tIns="0" rIns="0" bIns="0" anchor="ctr">
+            <a:noAutofit/>
+          </a:bodyPr>
+          <a:lstStyle xmlns:a="http://schemas.openxmlformats.org/drawingml/2006/main"/>
+          <a:p xmlns:a="http://schemas.openxmlformats.org/drawingml/2006/main">
+            <a:pPr algn="l">
+              <a:buNone/>
+              <a:defRPr sz="1200" b="0">
                 <a:solidFill>
                   <a:srgbClr val="50616B"/>
                 </a:solidFill>
-              </a:defRPr>
-            </a:pPr>
-            <a:r>
-              <a:rPr sz="1275" b="0">
+                <a:latin typeface="Calibri"/>
+                <a:ea typeface="Calibri"/>
+                <a:cs typeface="Calibri"/>
+              </a:defRPr>
+            </a:pPr>
+            <a:r>
+              <a:rPr sz="1200" b="0">
                 <a:solidFill>
                   <a:srgbClr val="50616B"/>
                 </a:solidFill>
+                <a:latin typeface="Calibri"/>
+                <a:ea typeface="Calibri"/>
+                <a:cs typeface="Calibri"/>
               </a:rPr>
               <a:t>AUTUMN 1  ·  WEEK 5  ·  LESSON A</a:t>
             </a:r>
@@ -5238,27 +6742,33 @@
         </p:nvSpPr>
         <p:spPr>
           <a:xfrm xmlns:a="http://schemas.openxmlformats.org/drawingml/2006/main">
-            <a:off x="11106150" y="6362700"/>
-            <a:ext cx="476250" cy="238125"/>
-          </a:xfrm>
-          <a:prstGeom xmlns:a="http://schemas.openxmlformats.org/drawingml/2006/main" prst="rect">
-            <a:avLst/>
-          </a:prstGeom>
-          <a:noFill xmlns:a="http://schemas.openxmlformats.org/drawingml/2006/main"/>
-          <a:ln xmlns:a="http://schemas.openxmlformats.org/drawingml/2006/main" w="0">
-            <a:noFill/>
-            <a:prstDash val="solid"/>
-          </a:ln>
-        </p:spPr>
-        <p:txBody>
-          <a:bodyPr xmlns:a="http://schemas.openxmlformats.org/drawingml/2006/main" lIns="0" tIns="0" rIns="0" bIns="0" anchor="ctr"/>
-          <a:lstStyle xmlns:a="http://schemas.openxmlformats.org/drawingml/2006/main"/>
-          <a:p xmlns:a="http://schemas.openxmlformats.org/drawingml/2006/main">
-            <a:pPr>
+            <a:off x="11106150" y="6400800"/>
+            <a:ext cx="476250" cy="247650"/>
+          </a:xfrm>
+          <a:prstGeom xmlns:a="http://schemas.openxmlformats.org/drawingml/2006/main" prst="rect">
+            <a:avLst/>
+          </a:prstGeom>
+          <a:noFill xmlns:a="http://schemas.openxmlformats.org/drawingml/2006/main"/>
+          <a:ln xmlns:a="http://schemas.openxmlformats.org/drawingml/2006/main" w="0">
+            <a:noFill/>
+            <a:prstDash val="solid"/>
+          </a:ln>
+        </p:spPr>
+        <p:txBody>
+          <a:bodyPr xmlns:a="http://schemas.openxmlformats.org/drawingml/2006/main" lIns="0" tIns="0" rIns="0" bIns="0" anchor="ctr">
+            <a:noAutofit/>
+          </a:bodyPr>
+          <a:lstStyle xmlns:a="http://schemas.openxmlformats.org/drawingml/2006/main"/>
+          <a:p xmlns:a="http://schemas.openxmlformats.org/drawingml/2006/main">
+            <a:pPr algn="l">
+              <a:buNone/>
               <a:defRPr sz="1350" b="1">
                 <a:solidFill>
                   <a:srgbClr val="28685E"/>
                 </a:solidFill>
+                <a:latin typeface="Calibri"/>
+                <a:ea typeface="Calibri"/>
+                <a:cs typeface="Calibri"/>
               </a:defRPr>
             </a:pPr>
             <a:r>
@@ -5266,6 +6776,9 @@
                 <a:solidFill>
                   <a:srgbClr val="28685E"/>
                 </a:solidFill>
+                <a:latin typeface="Calibri"/>
+                <a:ea typeface="Calibri"/>
+                <a:cs typeface="Calibri"/>
               </a:rPr>
               <a:t>03</a:t>
             </a:r>
@@ -5288,34 +6801,43 @@
         </p:nvSpPr>
         <p:spPr>
           <a:xfrm xmlns:a="http://schemas.openxmlformats.org/drawingml/2006/main">
-            <a:off x="609600" y="2619375"/>
-            <a:ext cx="10972800" cy="781050"/>
-          </a:xfrm>
-          <a:prstGeom xmlns:a="http://schemas.openxmlformats.org/drawingml/2006/main" prst="rect">
-            <a:avLst/>
-          </a:prstGeom>
-          <a:noFill xmlns:a="http://schemas.openxmlformats.org/drawingml/2006/main"/>
-          <a:ln xmlns:a="http://schemas.openxmlformats.org/drawingml/2006/main" w="0">
-            <a:noFill/>
-            <a:prstDash val="solid"/>
-          </a:ln>
-        </p:spPr>
-        <p:txBody>
-          <a:bodyPr xmlns:a="http://schemas.openxmlformats.org/drawingml/2006/main" lIns="0" tIns="0" rIns="0" bIns="0" anchor="ctr"/>
-          <a:lstStyle xmlns:a="http://schemas.openxmlformats.org/drawingml/2006/main"/>
-          <a:p xmlns:a="http://schemas.openxmlformats.org/drawingml/2006/main">
-            <a:pPr>
-              <a:defRPr sz="2550" b="0">
+            <a:off x="1000125" y="2333625"/>
+            <a:ext cx="10382250" cy="1076325"/>
+          </a:xfrm>
+          <a:prstGeom xmlns:a="http://schemas.openxmlformats.org/drawingml/2006/main" prst="rect">
+            <a:avLst/>
+          </a:prstGeom>
+          <a:noFill xmlns:a="http://schemas.openxmlformats.org/drawingml/2006/main"/>
+          <a:ln xmlns:a="http://schemas.openxmlformats.org/drawingml/2006/main" w="0">
+            <a:noFill/>
+            <a:prstDash val="solid"/>
+          </a:ln>
+        </p:spPr>
+        <p:txBody>
+          <a:bodyPr xmlns:a="http://schemas.openxmlformats.org/drawingml/2006/main" lIns="0" tIns="0" rIns="0" bIns="0" anchor="ctr">
+            <a:noAutofit/>
+          </a:bodyPr>
+          <a:lstStyle xmlns:a="http://schemas.openxmlformats.org/drawingml/2006/main"/>
+          <a:p xmlns:a="http://schemas.openxmlformats.org/drawingml/2006/main">
+            <a:pPr algn="l">
+              <a:buNone/>
+              <a:defRPr sz="2625" b="0">
                 <a:solidFill>
                   <a:srgbClr val="152B3A"/>
                 </a:solidFill>
-              </a:defRPr>
-            </a:pPr>
-            <a:r>
-              <a:rPr sz="2550" b="0">
+                <a:latin typeface="Calibri"/>
+                <a:ea typeface="Calibri"/>
+                <a:cs typeface="Calibri"/>
+              </a:defRPr>
+            </a:pPr>
+            <a:r>
+              <a:rPr sz="2625" b="0">
                 <a:solidFill>
                   <a:srgbClr val="152B3A"/>
                 </a:solidFill>
+                <a:latin typeface="Calibri"/>
+                <a:ea typeface="Calibri"/>
+                <a:cs typeface="Calibri"/>
               </a:rPr>
               <a:t>1   Name the variables.</a:t>
             </a:r>
@@ -5338,34 +6860,43 @@
         </p:nvSpPr>
         <p:spPr>
           <a:xfrm xmlns:a="http://schemas.openxmlformats.org/drawingml/2006/main">
-            <a:off x="609600" y="3476625"/>
-            <a:ext cx="10972800" cy="781050"/>
-          </a:xfrm>
-          <a:prstGeom xmlns:a="http://schemas.openxmlformats.org/drawingml/2006/main" prst="rect">
-            <a:avLst/>
-          </a:prstGeom>
-          <a:noFill xmlns:a="http://schemas.openxmlformats.org/drawingml/2006/main"/>
-          <a:ln xmlns:a="http://schemas.openxmlformats.org/drawingml/2006/main" w="0">
-            <a:noFill/>
-            <a:prstDash val="solid"/>
-          </a:ln>
-        </p:spPr>
-        <p:txBody>
-          <a:bodyPr xmlns:a="http://schemas.openxmlformats.org/drawingml/2006/main" lIns="0" tIns="0" rIns="0" bIns="0" anchor="ctr"/>
-          <a:lstStyle xmlns:a="http://schemas.openxmlformats.org/drawingml/2006/main"/>
-          <a:p xmlns:a="http://schemas.openxmlformats.org/drawingml/2006/main">
-            <a:pPr>
-              <a:defRPr sz="2550" b="0">
+            <a:off x="1000125" y="3467100"/>
+            <a:ext cx="10382250" cy="1076325"/>
+          </a:xfrm>
+          <a:prstGeom xmlns:a="http://schemas.openxmlformats.org/drawingml/2006/main" prst="rect">
+            <a:avLst/>
+          </a:prstGeom>
+          <a:noFill xmlns:a="http://schemas.openxmlformats.org/drawingml/2006/main"/>
+          <a:ln xmlns:a="http://schemas.openxmlformats.org/drawingml/2006/main" w="0">
+            <a:noFill/>
+            <a:prstDash val="solid"/>
+          </a:ln>
+        </p:spPr>
+        <p:txBody>
+          <a:bodyPr xmlns:a="http://schemas.openxmlformats.org/drawingml/2006/main" lIns="0" tIns="0" rIns="0" bIns="0" anchor="ctr">
+            <a:noAutofit/>
+          </a:bodyPr>
+          <a:lstStyle xmlns:a="http://schemas.openxmlformats.org/drawingml/2006/main"/>
+          <a:p xmlns:a="http://schemas.openxmlformats.org/drawingml/2006/main">
+            <a:pPr algn="l">
+              <a:buNone/>
+              <a:defRPr sz="2625" b="0">
                 <a:solidFill>
                   <a:srgbClr val="152B3A"/>
                 </a:solidFill>
-              </a:defRPr>
-            </a:pPr>
-            <a:r>
-              <a:rPr sz="2550" b="0">
+                <a:latin typeface="Calibri"/>
+                <a:ea typeface="Calibri"/>
+                <a:cs typeface="Calibri"/>
+              </a:defRPr>
+            </a:pPr>
+            <a:r>
+              <a:rPr sz="2625" b="0">
                 <a:solidFill>
                   <a:srgbClr val="152B3A"/>
                 </a:solidFill>
+                <a:latin typeface="Calibri"/>
+                <a:ea typeface="Calibri"/>
+                <a:cs typeface="Calibri"/>
               </a:rPr>
               <a:t>2   Plan three trials for each surface.</a:t>
             </a:r>
@@ -5388,39 +6919,108 @@
         </p:nvSpPr>
         <p:spPr>
           <a:xfrm xmlns:a="http://schemas.openxmlformats.org/drawingml/2006/main">
-            <a:off x="609600" y="4333875"/>
-            <a:ext cx="10972800" cy="781050"/>
-          </a:xfrm>
-          <a:prstGeom xmlns:a="http://schemas.openxmlformats.org/drawingml/2006/main" prst="rect">
-            <a:avLst/>
-          </a:prstGeom>
-          <a:noFill xmlns:a="http://schemas.openxmlformats.org/drawingml/2006/main"/>
-          <a:ln xmlns:a="http://schemas.openxmlformats.org/drawingml/2006/main" w="0">
-            <a:noFill/>
-            <a:prstDash val="solid"/>
-          </a:ln>
-        </p:spPr>
-        <p:txBody>
-          <a:bodyPr xmlns:a="http://schemas.openxmlformats.org/drawingml/2006/main" lIns="0" tIns="0" rIns="0" bIns="0" anchor="ctr"/>
-          <a:lstStyle xmlns:a="http://schemas.openxmlformats.org/drawingml/2006/main"/>
-          <a:p xmlns:a="http://schemas.openxmlformats.org/drawingml/2006/main">
-            <a:pPr>
-              <a:defRPr sz="2550" b="0">
+            <a:off x="1000125" y="4600575"/>
+            <a:ext cx="10382250" cy="1076325"/>
+          </a:xfrm>
+          <a:prstGeom xmlns:a="http://schemas.openxmlformats.org/drawingml/2006/main" prst="rect">
+            <a:avLst/>
+          </a:prstGeom>
+          <a:noFill xmlns:a="http://schemas.openxmlformats.org/drawingml/2006/main"/>
+          <a:ln xmlns:a="http://schemas.openxmlformats.org/drawingml/2006/main" w="0">
+            <a:noFill/>
+            <a:prstDash val="solid"/>
+          </a:ln>
+        </p:spPr>
+        <p:txBody>
+          <a:bodyPr xmlns:a="http://schemas.openxmlformats.org/drawingml/2006/main" lIns="0" tIns="0" rIns="0" bIns="0" anchor="ctr">
+            <a:noAutofit/>
+          </a:bodyPr>
+          <a:lstStyle xmlns:a="http://schemas.openxmlformats.org/drawingml/2006/main"/>
+          <a:p xmlns:a="http://schemas.openxmlformats.org/drawingml/2006/main">
+            <a:pPr algn="l">
+              <a:buNone/>
+              <a:defRPr sz="2625" b="0">
                 <a:solidFill>
                   <a:srgbClr val="152B3A"/>
                 </a:solidFill>
-              </a:defRPr>
-            </a:pPr>
-            <a:r>
-              <a:rPr sz="2550" b="0">
+                <a:latin typeface="Calibri"/>
+                <a:ea typeface="Calibri"/>
+                <a:cs typeface="Calibri"/>
+              </a:defRPr>
+            </a:pPr>
+            <a:r>
+              <a:rPr sz="2625" b="0">
                 <a:solidFill>
                   <a:srgbClr val="152B3A"/>
                 </a:solidFill>
+                <a:latin typeface="Calibri"/>
+                <a:ea typeface="Calibri"/>
+                <a:cs typeface="Calibri"/>
               </a:rPr>
               <a:t>3   Judge what the results can tell us.</a:t>
             </a:r>
           </a:p>
         </p:txBody>
+      </p:sp>
+      <p:sp>
+        <p:nvSpPr>
+          <p:cNvPr id="11" name="row-rule-0">
+            <a:extLst xmlns:a="http://schemas.openxmlformats.org/drawingml/2006/main">
+              <a:ext uri="{FF2B5EF4-FFF2-40B4-BE49-F238E27FC236}">
+                <a16:creationId xmlns:a16="http://schemas.microsoft.com/office/drawing/2014/main" id="{95948A3B-458A-4EBB-A3D0-8116C7330FB5}"/>
+              </a:ext>
+            </a:extLst>
+          </p:cNvPr>
+          <p:cNvSpPr>
+            <a:spLocks xmlns:a="http://schemas.openxmlformats.org/drawingml/2006/main" noGrp="1"/>
+          </p:cNvSpPr>
+          <p:nvPr/>
+        </p:nvSpPr>
+        <p:spPr>
+          <a:xfrm xmlns:a="http://schemas.openxmlformats.org/drawingml/2006/main">
+            <a:off x="1000125" y="3419475"/>
+            <a:ext cx="10334625" cy="0"/>
+          </a:xfrm>
+          <a:prstGeom xmlns:a="http://schemas.openxmlformats.org/drawingml/2006/main" prst="line">
+            <a:avLst/>
+          </a:prstGeom>
+          <a:noFill xmlns:a="http://schemas.openxmlformats.org/drawingml/2006/main"/>
+          <a:ln xmlns:a="http://schemas.openxmlformats.org/drawingml/2006/main" w="9525">
+            <a:solidFill>
+              <a:srgbClr val="CEDBD3"/>
+            </a:solidFill>
+          </a:ln>
+        </p:spPr>
+      </p:sp>
+      <p:sp>
+        <p:nvSpPr>
+          <p:cNvPr id="12" name="row-rule-1">
+            <a:extLst xmlns:a="http://schemas.openxmlformats.org/drawingml/2006/main">
+              <a:ext uri="{FF2B5EF4-FFF2-40B4-BE49-F238E27FC236}">
+                <a16:creationId xmlns:a16="http://schemas.microsoft.com/office/drawing/2014/main" id="{FF2E234E-D626-4512-9A67-E38F7BE246C6}"/>
+              </a:ext>
+            </a:extLst>
+          </p:cNvPr>
+          <p:cNvSpPr>
+            <a:spLocks xmlns:a="http://schemas.openxmlformats.org/drawingml/2006/main" noGrp="1"/>
+          </p:cNvSpPr>
+          <p:nvPr/>
+        </p:nvSpPr>
+        <p:spPr>
+          <a:xfrm xmlns:a="http://schemas.openxmlformats.org/drawingml/2006/main">
+            <a:off x="1000125" y="4552950"/>
+            <a:ext cx="10334625" cy="0"/>
+          </a:xfrm>
+          <a:prstGeom xmlns:a="http://schemas.openxmlformats.org/drawingml/2006/main" prst="line">
+            <a:avLst/>
+          </a:prstGeom>
+          <a:noFill xmlns:a="http://schemas.openxmlformats.org/drawingml/2006/main"/>
+          <a:ln xmlns:a="http://schemas.openxmlformats.org/drawingml/2006/main" w="9525">
+            <a:solidFill>
+              <a:srgbClr val="CEDBD3"/>
+            </a:solidFill>
+          </a:ln>
+        </p:spPr>
       </p:sp>
     </p:spTree>
     <p:extLst>
@@ -5438,7 +7038,7 @@
     <p:bg>
       <p:bgPr>
         <a:solidFill xmlns:a="http://schemas.openxmlformats.org/drawingml/2006/main">
-          <a:srgbClr val="F5F1E8"/>
+          <a:srgbClr val="FAF9F5"/>
         </a:solidFill>
       </p:bgPr>
     </p:bg>
@@ -5467,8 +7067,8 @@
         </p:nvSpPr>
         <p:spPr>
           <a:xfrm xmlns:a="http://schemas.openxmlformats.org/drawingml/2006/main">
-            <a:off x="609600" y="552450"/>
-            <a:ext cx="781050" cy="57150"/>
+            <a:off x="609600" y="733425"/>
+            <a:ext cx="781050" cy="38100"/>
           </a:xfrm>
           <a:prstGeom xmlns:a="http://schemas.openxmlformats.org/drawingml/2006/main" prst="rect">
             <a:avLst/>
@@ -5498,34 +7098,43 @@
         </p:nvSpPr>
         <p:spPr>
           <a:xfrm xmlns:a="http://schemas.openxmlformats.org/drawingml/2006/main">
-            <a:off x="609600" y="762000"/>
-            <a:ext cx="8572500" cy="285750"/>
-          </a:xfrm>
-          <a:prstGeom xmlns:a="http://schemas.openxmlformats.org/drawingml/2006/main" prst="rect">
-            <a:avLst/>
-          </a:prstGeom>
-          <a:noFill xmlns:a="http://schemas.openxmlformats.org/drawingml/2006/main"/>
-          <a:ln xmlns:a="http://schemas.openxmlformats.org/drawingml/2006/main" w="0">
-            <a:noFill/>
-            <a:prstDash val="solid"/>
-          </a:ln>
-        </p:spPr>
-        <p:txBody>
-          <a:bodyPr xmlns:a="http://schemas.openxmlformats.org/drawingml/2006/main" lIns="0" tIns="0" rIns="0" bIns="0" anchor="ctr"/>
-          <a:lstStyle xmlns:a="http://schemas.openxmlformats.org/drawingml/2006/main"/>
-          <a:p xmlns:a="http://schemas.openxmlformats.org/drawingml/2006/main">
-            <a:pPr>
-              <a:defRPr sz="1500" b="1">
+            <a:off x="609600" y="342900"/>
+            <a:ext cx="9334500" cy="304800"/>
+          </a:xfrm>
+          <a:prstGeom xmlns:a="http://schemas.openxmlformats.org/drawingml/2006/main" prst="rect">
+            <a:avLst/>
+          </a:prstGeom>
+          <a:noFill xmlns:a="http://schemas.openxmlformats.org/drawingml/2006/main"/>
+          <a:ln xmlns:a="http://schemas.openxmlformats.org/drawingml/2006/main" w="0">
+            <a:noFill/>
+            <a:prstDash val="solid"/>
+          </a:ln>
+        </p:spPr>
+        <p:txBody>
+          <a:bodyPr xmlns:a="http://schemas.openxmlformats.org/drawingml/2006/main" lIns="0" tIns="0" rIns="0" bIns="0" anchor="ctr">
+            <a:noAutofit/>
+          </a:bodyPr>
+          <a:lstStyle xmlns:a="http://schemas.openxmlformats.org/drawingml/2006/main"/>
+          <a:p xmlns:a="http://schemas.openxmlformats.org/drawingml/2006/main">
+            <a:pPr algn="l">
+              <a:buNone/>
+              <a:defRPr sz="1350" b="1">
                 <a:solidFill>
                   <a:srgbClr val="28685E"/>
                 </a:solidFill>
-              </a:defRPr>
-            </a:pPr>
-            <a:r>
-              <a:rPr sz="1500" b="1">
+                <a:latin typeface="Calibri"/>
+                <a:ea typeface="Calibri"/>
+                <a:cs typeface="Calibri"/>
+              </a:defRPr>
+            </a:pPr>
+            <a:r>
+              <a:rPr sz="1350" b="1">
                 <a:solidFill>
                   <a:srgbClr val="28685E"/>
                 </a:solidFill>
+                <a:latin typeface="Calibri"/>
+                <a:ea typeface="Calibri"/>
+                <a:cs typeface="Calibri"/>
               </a:rPr>
               <a:t>MADE BY MATT  /  GROW SCIENCE</a:t>
             </a:r>
@@ -5548,34 +7157,43 @@
         </p:nvSpPr>
         <p:spPr>
           <a:xfrm xmlns:a="http://schemas.openxmlformats.org/drawingml/2006/main">
-            <a:off x="609600" y="1352550"/>
-            <a:ext cx="10972800" cy="952500"/>
-          </a:xfrm>
-          <a:prstGeom xmlns:a="http://schemas.openxmlformats.org/drawingml/2006/main" prst="rect">
-            <a:avLst/>
-          </a:prstGeom>
-          <a:noFill xmlns:a="http://schemas.openxmlformats.org/drawingml/2006/main"/>
-          <a:ln xmlns:a="http://schemas.openxmlformats.org/drawingml/2006/main" w="0">
-            <a:noFill/>
-            <a:prstDash val="solid"/>
-          </a:ln>
-        </p:spPr>
-        <p:txBody>
-          <a:bodyPr xmlns:a="http://schemas.openxmlformats.org/drawingml/2006/main" lIns="0" tIns="0" rIns="0" bIns="0" anchor="ctr"/>
-          <a:lstStyle xmlns:a="http://schemas.openxmlformats.org/drawingml/2006/main"/>
-          <a:p xmlns:a="http://schemas.openxmlformats.org/drawingml/2006/main">
-            <a:pPr>
-              <a:defRPr sz="3750" b="1">
+            <a:off x="609600" y="990600"/>
+            <a:ext cx="10972800" cy="1000125"/>
+          </a:xfrm>
+          <a:prstGeom xmlns:a="http://schemas.openxmlformats.org/drawingml/2006/main" prst="rect">
+            <a:avLst/>
+          </a:prstGeom>
+          <a:noFill xmlns:a="http://schemas.openxmlformats.org/drawingml/2006/main"/>
+          <a:ln xmlns:a="http://schemas.openxmlformats.org/drawingml/2006/main" w="0">
+            <a:noFill/>
+            <a:prstDash val="solid"/>
+          </a:ln>
+        </p:spPr>
+        <p:txBody>
+          <a:bodyPr xmlns:a="http://schemas.openxmlformats.org/drawingml/2006/main" lIns="0" tIns="0" rIns="0" bIns="0" anchor="ctr">
+            <a:noAutofit/>
+          </a:bodyPr>
+          <a:lstStyle xmlns:a="http://schemas.openxmlformats.org/drawingml/2006/main"/>
+          <a:p xmlns:a="http://schemas.openxmlformats.org/drawingml/2006/main">
+            <a:pPr algn="l">
+              <a:buNone/>
+              <a:defRPr sz="3675" b="1">
                 <a:solidFill>
                   <a:srgbClr val="152B3A"/>
                 </a:solidFill>
-              </a:defRPr>
-            </a:pPr>
-            <a:r>
-              <a:rPr sz="3750" b="1">
+                <a:latin typeface="Calibri"/>
+                <a:ea typeface="Calibri"/>
+                <a:cs typeface="Calibri"/>
+              </a:defRPr>
+            </a:pPr>
+            <a:r>
+              <a:rPr sz="3675" b="1">
                 <a:solidFill>
                   <a:srgbClr val="152B3A"/>
                 </a:solidFill>
+                <a:latin typeface="Calibri"/>
+                <a:ea typeface="Calibri"/>
+                <a:cs typeface="Calibri"/>
               </a:rPr>
               <a:t>Watch an unfair comparison</a:t>
             </a:r>
@@ -5598,14 +7216,14 @@
         </p:nvSpPr>
         <p:spPr>
           <a:xfrm xmlns:a="http://schemas.openxmlformats.org/drawingml/2006/main">
-            <a:off x="609600" y="6219825"/>
+            <a:off x="609600" y="6191250"/>
             <a:ext cx="10972800" cy="9525"/>
           </a:xfrm>
           <a:prstGeom xmlns:a="http://schemas.openxmlformats.org/drawingml/2006/main" prst="rect">
             <a:avLst/>
           </a:prstGeom>
           <a:solidFill xmlns:a="http://schemas.openxmlformats.org/drawingml/2006/main">
-            <a:srgbClr val="DCE7DD"/>
+            <a:srgbClr val="CEDBD3"/>
           </a:solidFill>
           <a:ln xmlns:a="http://schemas.openxmlformats.org/drawingml/2006/main" w="0">
             <a:noFill/>
@@ -5629,34 +7247,43 @@
         </p:nvSpPr>
         <p:spPr>
           <a:xfrm xmlns:a="http://schemas.openxmlformats.org/drawingml/2006/main">
-            <a:off x="609600" y="6381750"/>
-            <a:ext cx="9906000" cy="228600"/>
-          </a:xfrm>
-          <a:prstGeom xmlns:a="http://schemas.openxmlformats.org/drawingml/2006/main" prst="rect">
-            <a:avLst/>
-          </a:prstGeom>
-          <a:noFill xmlns:a="http://schemas.openxmlformats.org/drawingml/2006/main"/>
-          <a:ln xmlns:a="http://schemas.openxmlformats.org/drawingml/2006/main" w="0">
-            <a:noFill/>
-            <a:prstDash val="solid"/>
-          </a:ln>
-        </p:spPr>
-        <p:txBody>
-          <a:bodyPr xmlns:a="http://schemas.openxmlformats.org/drawingml/2006/main" lIns="0" tIns="0" rIns="0" bIns="0" anchor="ctr"/>
-          <a:lstStyle xmlns:a="http://schemas.openxmlformats.org/drawingml/2006/main"/>
-          <a:p xmlns:a="http://schemas.openxmlformats.org/drawingml/2006/main">
-            <a:pPr>
-              <a:defRPr sz="1275" b="0">
+            <a:off x="609600" y="6419850"/>
+            <a:ext cx="9525000" cy="219075"/>
+          </a:xfrm>
+          <a:prstGeom xmlns:a="http://schemas.openxmlformats.org/drawingml/2006/main" prst="rect">
+            <a:avLst/>
+          </a:prstGeom>
+          <a:noFill xmlns:a="http://schemas.openxmlformats.org/drawingml/2006/main"/>
+          <a:ln xmlns:a="http://schemas.openxmlformats.org/drawingml/2006/main" w="0">
+            <a:noFill/>
+            <a:prstDash val="solid"/>
+          </a:ln>
+        </p:spPr>
+        <p:txBody>
+          <a:bodyPr xmlns:a="http://schemas.openxmlformats.org/drawingml/2006/main" lIns="0" tIns="0" rIns="0" bIns="0" anchor="ctr">
+            <a:noAutofit/>
+          </a:bodyPr>
+          <a:lstStyle xmlns:a="http://schemas.openxmlformats.org/drawingml/2006/main"/>
+          <a:p xmlns:a="http://schemas.openxmlformats.org/drawingml/2006/main">
+            <a:pPr algn="l">
+              <a:buNone/>
+              <a:defRPr sz="1200" b="0">
                 <a:solidFill>
                   <a:srgbClr val="50616B"/>
                 </a:solidFill>
-              </a:defRPr>
-            </a:pPr>
-            <a:r>
-              <a:rPr sz="1275" b="0">
+                <a:latin typeface="Calibri"/>
+                <a:ea typeface="Calibri"/>
+                <a:cs typeface="Calibri"/>
+              </a:defRPr>
+            </a:pPr>
+            <a:r>
+              <a:rPr sz="1200" b="0">
                 <a:solidFill>
                   <a:srgbClr val="50616B"/>
                 </a:solidFill>
+                <a:latin typeface="Calibri"/>
+                <a:ea typeface="Calibri"/>
+                <a:cs typeface="Calibri"/>
               </a:rPr>
               <a:t>AUTUMN 1  ·  WEEK 5  ·  LESSON A</a:t>
             </a:r>
@@ -5679,27 +7306,33 @@
         </p:nvSpPr>
         <p:spPr>
           <a:xfrm xmlns:a="http://schemas.openxmlformats.org/drawingml/2006/main">
-            <a:off x="11106150" y="6362700"/>
-            <a:ext cx="476250" cy="238125"/>
-          </a:xfrm>
-          <a:prstGeom xmlns:a="http://schemas.openxmlformats.org/drawingml/2006/main" prst="rect">
-            <a:avLst/>
-          </a:prstGeom>
-          <a:noFill xmlns:a="http://schemas.openxmlformats.org/drawingml/2006/main"/>
-          <a:ln xmlns:a="http://schemas.openxmlformats.org/drawingml/2006/main" w="0">
-            <a:noFill/>
-            <a:prstDash val="solid"/>
-          </a:ln>
-        </p:spPr>
-        <p:txBody>
-          <a:bodyPr xmlns:a="http://schemas.openxmlformats.org/drawingml/2006/main" lIns="0" tIns="0" rIns="0" bIns="0" anchor="ctr"/>
-          <a:lstStyle xmlns:a="http://schemas.openxmlformats.org/drawingml/2006/main"/>
-          <a:p xmlns:a="http://schemas.openxmlformats.org/drawingml/2006/main">
-            <a:pPr>
+            <a:off x="11106150" y="6400800"/>
+            <a:ext cx="476250" cy="247650"/>
+          </a:xfrm>
+          <a:prstGeom xmlns:a="http://schemas.openxmlformats.org/drawingml/2006/main" prst="rect">
+            <a:avLst/>
+          </a:prstGeom>
+          <a:noFill xmlns:a="http://schemas.openxmlformats.org/drawingml/2006/main"/>
+          <a:ln xmlns:a="http://schemas.openxmlformats.org/drawingml/2006/main" w="0">
+            <a:noFill/>
+            <a:prstDash val="solid"/>
+          </a:ln>
+        </p:spPr>
+        <p:txBody>
+          <a:bodyPr xmlns:a="http://schemas.openxmlformats.org/drawingml/2006/main" lIns="0" tIns="0" rIns="0" bIns="0" anchor="ctr">
+            <a:noAutofit/>
+          </a:bodyPr>
+          <a:lstStyle xmlns:a="http://schemas.openxmlformats.org/drawingml/2006/main"/>
+          <a:p xmlns:a="http://schemas.openxmlformats.org/drawingml/2006/main">
+            <a:pPr algn="l">
+              <a:buNone/>
               <a:defRPr sz="1350" b="1">
                 <a:solidFill>
                   <a:srgbClr val="28685E"/>
                 </a:solidFill>
+                <a:latin typeface="Calibri"/>
+                <a:ea typeface="Calibri"/>
+                <a:cs typeface="Calibri"/>
               </a:defRPr>
             </a:pPr>
             <a:r>
@@ -5707,6 +7340,9 @@
                 <a:solidFill>
                   <a:srgbClr val="28685E"/>
                 </a:solidFill>
+                <a:latin typeface="Calibri"/>
+                <a:ea typeface="Calibri"/>
+                <a:cs typeface="Calibri"/>
               </a:rPr>
               <a:t>04</a:t>
             </a:r>
@@ -5729,34 +7365,43 @@
         </p:nvSpPr>
         <p:spPr>
           <a:xfrm xmlns:a="http://schemas.openxmlformats.org/drawingml/2006/main">
-            <a:off x="609600" y="2619375"/>
-            <a:ext cx="10972800" cy="714375"/>
-          </a:xfrm>
-          <a:prstGeom xmlns:a="http://schemas.openxmlformats.org/drawingml/2006/main" prst="rect">
-            <a:avLst/>
-          </a:prstGeom>
-          <a:noFill xmlns:a="http://schemas.openxmlformats.org/drawingml/2006/main"/>
-          <a:ln xmlns:a="http://schemas.openxmlformats.org/drawingml/2006/main" w="0">
-            <a:noFill/>
-            <a:prstDash val="solid"/>
-          </a:ln>
-        </p:spPr>
-        <p:txBody>
-          <a:bodyPr xmlns:a="http://schemas.openxmlformats.org/drawingml/2006/main" lIns="0" tIns="0" rIns="0" bIns="0" anchor="ctr"/>
-          <a:lstStyle xmlns:a="http://schemas.openxmlformats.org/drawingml/2006/main"/>
-          <a:p xmlns:a="http://schemas.openxmlformats.org/drawingml/2006/main">
-            <a:pPr>
-              <a:defRPr sz="2550" b="0">
+            <a:off x="1000125" y="2333625"/>
+            <a:ext cx="10382250" cy="792956"/>
+          </a:xfrm>
+          <a:prstGeom xmlns:a="http://schemas.openxmlformats.org/drawingml/2006/main" prst="rect">
+            <a:avLst/>
+          </a:prstGeom>
+          <a:noFill xmlns:a="http://schemas.openxmlformats.org/drawingml/2006/main"/>
+          <a:ln xmlns:a="http://schemas.openxmlformats.org/drawingml/2006/main" w="0">
+            <a:noFill/>
+            <a:prstDash val="solid"/>
+          </a:ln>
+        </p:spPr>
+        <p:txBody>
+          <a:bodyPr xmlns:a="http://schemas.openxmlformats.org/drawingml/2006/main" lIns="0" tIns="0" rIns="0" bIns="0" anchor="ctr">
+            <a:noAutofit/>
+          </a:bodyPr>
+          <a:lstStyle xmlns:a="http://schemas.openxmlformats.org/drawingml/2006/main"/>
+          <a:p xmlns:a="http://schemas.openxmlformats.org/drawingml/2006/main">
+            <a:pPr algn="l">
+              <a:buNone/>
+              <a:defRPr sz="2400" b="0">
                 <a:solidFill>
                   <a:srgbClr val="152B3A"/>
                 </a:solidFill>
-              </a:defRPr>
-            </a:pPr>
-            <a:r>
-              <a:rPr sz="2550" b="0">
+                <a:latin typeface="Calibri"/>
+                <a:ea typeface="Calibri"/>
+                <a:cs typeface="Calibri"/>
+              </a:defRPr>
+            </a:pPr>
+            <a:r>
+              <a:rPr sz="2400" b="0">
                 <a:solidFill>
                   <a:srgbClr val="152B3A"/>
                 </a:solidFill>
+                <a:latin typeface="Calibri"/>
+                <a:ea typeface="Calibri"/>
+                <a:cs typeface="Calibri"/>
               </a:rPr>
               <a:t>The adult changes the surface AND adds a push.</a:t>
             </a:r>
@@ -5779,34 +7424,43 @@
         </p:nvSpPr>
         <p:spPr>
           <a:xfrm xmlns:a="http://schemas.openxmlformats.org/drawingml/2006/main">
-            <a:off x="609600" y="3409950"/>
-            <a:ext cx="10972800" cy="714375"/>
-          </a:xfrm>
-          <a:prstGeom xmlns:a="http://schemas.openxmlformats.org/drawingml/2006/main" prst="rect">
-            <a:avLst/>
-          </a:prstGeom>
-          <a:noFill xmlns:a="http://schemas.openxmlformats.org/drawingml/2006/main"/>
-          <a:ln xmlns:a="http://schemas.openxmlformats.org/drawingml/2006/main" w="0">
-            <a:noFill/>
-            <a:prstDash val="solid"/>
-          </a:ln>
-        </p:spPr>
-        <p:txBody>
-          <a:bodyPr xmlns:a="http://schemas.openxmlformats.org/drawingml/2006/main" lIns="0" tIns="0" rIns="0" bIns="0" anchor="ctr"/>
-          <a:lstStyle xmlns:a="http://schemas.openxmlformats.org/drawingml/2006/main"/>
-          <a:p xmlns:a="http://schemas.openxmlformats.org/drawingml/2006/main">
-            <a:pPr>
-              <a:defRPr sz="2550" b="0">
+            <a:off x="1000125" y="3183731"/>
+            <a:ext cx="10382250" cy="792956"/>
+          </a:xfrm>
+          <a:prstGeom xmlns:a="http://schemas.openxmlformats.org/drawingml/2006/main" prst="rect">
+            <a:avLst/>
+          </a:prstGeom>
+          <a:noFill xmlns:a="http://schemas.openxmlformats.org/drawingml/2006/main"/>
+          <a:ln xmlns:a="http://schemas.openxmlformats.org/drawingml/2006/main" w="0">
+            <a:noFill/>
+            <a:prstDash val="solid"/>
+          </a:ln>
+        </p:spPr>
+        <p:txBody>
+          <a:bodyPr xmlns:a="http://schemas.openxmlformats.org/drawingml/2006/main" lIns="0" tIns="0" rIns="0" bIns="0" anchor="ctr">
+            <a:noAutofit/>
+          </a:bodyPr>
+          <a:lstStyle xmlns:a="http://schemas.openxmlformats.org/drawingml/2006/main"/>
+          <a:p xmlns:a="http://schemas.openxmlformats.org/drawingml/2006/main">
+            <a:pPr algn="l">
+              <a:buNone/>
+              <a:defRPr sz="2400" b="0">
                 <a:solidFill>
                   <a:srgbClr val="152B3A"/>
                 </a:solidFill>
-              </a:defRPr>
-            </a:pPr>
-            <a:r>
-              <a:rPr sz="2550" b="0">
+                <a:latin typeface="Calibri"/>
+                <a:ea typeface="Calibri"/>
+                <a:cs typeface="Calibri"/>
+              </a:defRPr>
+            </a:pPr>
+            <a:r>
+              <a:rPr sz="2400" b="0">
                 <a:solidFill>
                   <a:srgbClr val="152B3A"/>
                 </a:solidFill>
+                <a:latin typeface="Calibri"/>
+                <a:ea typeface="Calibri"/>
+                <a:cs typeface="Calibri"/>
               </a:rPr>
               <a:t>The trolley stops farther away.</a:t>
             </a:r>
@@ -5829,34 +7483,43 @@
         </p:nvSpPr>
         <p:spPr>
           <a:xfrm xmlns:a="http://schemas.openxmlformats.org/drawingml/2006/main">
-            <a:off x="609600" y="4200525"/>
-            <a:ext cx="10972800" cy="714375"/>
-          </a:xfrm>
-          <a:prstGeom xmlns:a="http://schemas.openxmlformats.org/drawingml/2006/main" prst="rect">
-            <a:avLst/>
-          </a:prstGeom>
-          <a:noFill xmlns:a="http://schemas.openxmlformats.org/drawingml/2006/main"/>
-          <a:ln xmlns:a="http://schemas.openxmlformats.org/drawingml/2006/main" w="0">
-            <a:noFill/>
-            <a:prstDash val="solid"/>
-          </a:ln>
-        </p:spPr>
-        <p:txBody>
-          <a:bodyPr xmlns:a="http://schemas.openxmlformats.org/drawingml/2006/main" lIns="0" tIns="0" rIns="0" bIns="0" anchor="ctr"/>
-          <a:lstStyle xmlns:a="http://schemas.openxmlformats.org/drawingml/2006/main"/>
-          <a:p xmlns:a="http://schemas.openxmlformats.org/drawingml/2006/main">
-            <a:pPr>
-              <a:defRPr sz="2550" b="0">
+            <a:off x="1000125" y="4033838"/>
+            <a:ext cx="10382250" cy="792956"/>
+          </a:xfrm>
+          <a:prstGeom xmlns:a="http://schemas.openxmlformats.org/drawingml/2006/main" prst="rect">
+            <a:avLst/>
+          </a:prstGeom>
+          <a:noFill xmlns:a="http://schemas.openxmlformats.org/drawingml/2006/main"/>
+          <a:ln xmlns:a="http://schemas.openxmlformats.org/drawingml/2006/main" w="0">
+            <a:noFill/>
+            <a:prstDash val="solid"/>
+          </a:ln>
+        </p:spPr>
+        <p:txBody>
+          <a:bodyPr xmlns:a="http://schemas.openxmlformats.org/drawingml/2006/main" lIns="0" tIns="0" rIns="0" bIns="0" anchor="ctr">
+            <a:noAutofit/>
+          </a:bodyPr>
+          <a:lstStyle xmlns:a="http://schemas.openxmlformats.org/drawingml/2006/main"/>
+          <a:p xmlns:a="http://schemas.openxmlformats.org/drawingml/2006/main">
+            <a:pPr algn="l">
+              <a:buNone/>
+              <a:defRPr sz="2400" b="0">
                 <a:solidFill>
                   <a:srgbClr val="152B3A"/>
                 </a:solidFill>
-              </a:defRPr>
-            </a:pPr>
-            <a:r>
-              <a:rPr sz="2550" b="0">
+                <a:latin typeface="Calibri"/>
+                <a:ea typeface="Calibri"/>
+                <a:cs typeface="Calibri"/>
+              </a:defRPr>
+            </a:pPr>
+            <a:r>
+              <a:rPr sz="2400" b="0">
                 <a:solidFill>
                   <a:srgbClr val="152B3A"/>
                 </a:solidFill>
+                <a:latin typeface="Calibri"/>
+                <a:ea typeface="Calibri"/>
+                <a:cs typeface="Calibri"/>
               </a:rPr>
               <a:t>Which change caused that difference?</a:t>
             </a:r>
@@ -5879,36 +7542,363 @@
         </p:nvSpPr>
         <p:spPr>
           <a:xfrm xmlns:a="http://schemas.openxmlformats.org/drawingml/2006/main">
-            <a:off x="609600" y="4991100"/>
-            <a:ext cx="10972800" cy="714375"/>
-          </a:xfrm>
-          <a:prstGeom xmlns:a="http://schemas.openxmlformats.org/drawingml/2006/main" prst="rect">
-            <a:avLst/>
-          </a:prstGeom>
-          <a:noFill xmlns:a="http://schemas.openxmlformats.org/drawingml/2006/main"/>
-          <a:ln xmlns:a="http://schemas.openxmlformats.org/drawingml/2006/main" w="0">
-            <a:noFill/>
-            <a:prstDash val="solid"/>
-          </a:ln>
-        </p:spPr>
-        <p:txBody>
-          <a:bodyPr xmlns:a="http://schemas.openxmlformats.org/drawingml/2006/main" lIns="0" tIns="0" rIns="0" bIns="0" anchor="ctr"/>
-          <a:lstStyle xmlns:a="http://schemas.openxmlformats.org/drawingml/2006/main"/>
-          <a:p xmlns:a="http://schemas.openxmlformats.org/drawingml/2006/main">
-            <a:pPr>
-              <a:defRPr sz="2550" b="0">
+            <a:off x="1000125" y="4883944"/>
+            <a:ext cx="10382250" cy="792956"/>
+          </a:xfrm>
+          <a:prstGeom xmlns:a="http://schemas.openxmlformats.org/drawingml/2006/main" prst="rect">
+            <a:avLst/>
+          </a:prstGeom>
+          <a:noFill xmlns:a="http://schemas.openxmlformats.org/drawingml/2006/main"/>
+          <a:ln xmlns:a="http://schemas.openxmlformats.org/drawingml/2006/main" w="0">
+            <a:noFill/>
+            <a:prstDash val="solid"/>
+          </a:ln>
+        </p:spPr>
+        <p:txBody>
+          <a:bodyPr xmlns:a="http://schemas.openxmlformats.org/drawingml/2006/main" lIns="0" tIns="0" rIns="0" bIns="0" anchor="ctr">
+            <a:noAutofit/>
+          </a:bodyPr>
+          <a:lstStyle xmlns:a="http://schemas.openxmlformats.org/drawingml/2006/main"/>
+          <a:p xmlns:a="http://schemas.openxmlformats.org/drawingml/2006/main">
+            <a:pPr algn="l">
+              <a:buNone/>
+              <a:defRPr sz="2400" b="0">
                 <a:solidFill>
                   <a:srgbClr val="152B3A"/>
                 </a:solidFill>
-              </a:defRPr>
-            </a:pPr>
-            <a:r>
-              <a:rPr sz="2550" b="0">
+                <a:latin typeface="Calibri"/>
+                <a:ea typeface="Calibri"/>
+                <a:cs typeface="Calibri"/>
+              </a:defRPr>
+            </a:pPr>
+            <a:r>
+              <a:rPr sz="2400" b="0">
                 <a:solidFill>
                   <a:srgbClr val="152B3A"/>
                 </a:solidFill>
+                <a:latin typeface="Calibri"/>
+                <a:ea typeface="Calibri"/>
+                <a:cs typeface="Calibri"/>
               </a:rPr>
               <a:t>What would you change about the method?</a:t>
+            </a:r>
+          </a:p>
+        </p:txBody>
+      </p:sp>
+      <p:sp>
+        <p:nvSpPr>
+          <p:cNvPr id="12" name="cue-0">
+            <a:extLst xmlns:a="http://schemas.openxmlformats.org/drawingml/2006/main">
+              <a:ext uri="{FF2B5EF4-FFF2-40B4-BE49-F238E27FC236}">
+                <a16:creationId xmlns:a16="http://schemas.microsoft.com/office/drawing/2014/main" id="{62BCFBF0-6D1C-47CA-8AB8-800C6F18F0B0}"/>
+              </a:ext>
+            </a:extLst>
+          </p:cNvPr>
+          <p:cNvSpPr>
+            <a:spLocks xmlns:a="http://schemas.openxmlformats.org/drawingml/2006/main" noGrp="1"/>
+          </p:cNvSpPr>
+          <p:nvPr/>
+        </p:nvSpPr>
+        <p:spPr>
+          <a:xfrm xmlns:a="http://schemas.openxmlformats.org/drawingml/2006/main">
+            <a:off x="609600" y="2362200"/>
+            <a:ext cx="323850" cy="323850"/>
+          </a:xfrm>
+          <a:prstGeom xmlns:a="http://schemas.openxmlformats.org/drawingml/2006/main" prst="rect">
+            <a:avLst/>
+          </a:prstGeom>
+          <a:noFill xmlns:a="http://schemas.openxmlformats.org/drawingml/2006/main"/>
+          <a:ln xmlns:a="http://schemas.openxmlformats.org/drawingml/2006/main" w="0">
+            <a:noFill/>
+          </a:ln>
+        </p:spPr>
+        <p:txBody>
+          <a:bodyPr xmlns:a="http://schemas.openxmlformats.org/drawingml/2006/main" lIns="0" tIns="0" rIns="0" bIns="0" anchor="ctr">
+            <a:noAutofit/>
+          </a:bodyPr>
+          <a:lstStyle xmlns:a="http://schemas.openxmlformats.org/drawingml/2006/main"/>
+          <a:p xmlns:a="http://schemas.openxmlformats.org/drawingml/2006/main">
+            <a:pPr algn="l">
+              <a:defRPr sz="1350" b="1">
+                <a:solidFill>
+                  <a:srgbClr val="28685E"/>
+                </a:solidFill>
+                <a:latin typeface="Calibri"/>
+                <a:ea typeface="Calibri"/>
+                <a:cs typeface="Calibri"/>
+              </a:defRPr>
+            </a:pPr>
+            <a:r>
+              <a:rPr sz="1350" b="1">
+                <a:solidFill>
+                  <a:srgbClr val="28685E"/>
+                </a:solidFill>
+                <a:latin typeface="Calibri"/>
+                <a:ea typeface="Calibri"/>
+                <a:cs typeface="Calibri"/>
+              </a:rPr>
+              <a:t>01</a:t>
+            </a:r>
+          </a:p>
+        </p:txBody>
+      </p:sp>
+      <p:sp>
+        <p:nvSpPr>
+          <p:cNvPr id="13" name="row-rule-0">
+            <a:extLst xmlns:a="http://schemas.openxmlformats.org/drawingml/2006/main">
+              <a:ext uri="{FF2B5EF4-FFF2-40B4-BE49-F238E27FC236}">
+                <a16:creationId xmlns:a16="http://schemas.microsoft.com/office/drawing/2014/main" id="{AEA4609C-1B63-40BF-85D8-55680FE58830}"/>
+              </a:ext>
+            </a:extLst>
+          </p:cNvPr>
+          <p:cNvSpPr>
+            <a:spLocks xmlns:a="http://schemas.openxmlformats.org/drawingml/2006/main" noGrp="1"/>
+          </p:cNvSpPr>
+          <p:nvPr/>
+        </p:nvSpPr>
+        <p:spPr>
+          <a:xfrm xmlns:a="http://schemas.openxmlformats.org/drawingml/2006/main">
+            <a:off x="1000125" y="3136106"/>
+            <a:ext cx="10334625" cy="0"/>
+          </a:xfrm>
+          <a:prstGeom xmlns:a="http://schemas.openxmlformats.org/drawingml/2006/main" prst="line">
+            <a:avLst/>
+          </a:prstGeom>
+          <a:noFill xmlns:a="http://schemas.openxmlformats.org/drawingml/2006/main"/>
+          <a:ln xmlns:a="http://schemas.openxmlformats.org/drawingml/2006/main" w="9525">
+            <a:solidFill>
+              <a:srgbClr val="CEDBD3"/>
+            </a:solidFill>
+          </a:ln>
+        </p:spPr>
+      </p:sp>
+      <p:sp>
+        <p:nvSpPr>
+          <p:cNvPr id="14" name="cue-1">
+            <a:extLst xmlns:a="http://schemas.openxmlformats.org/drawingml/2006/main">
+              <a:ext uri="{FF2B5EF4-FFF2-40B4-BE49-F238E27FC236}">
+                <a16:creationId xmlns:a16="http://schemas.microsoft.com/office/drawing/2014/main" id="{0998F373-D5CE-4FE0-924C-94C85EBDA8AD}"/>
+              </a:ext>
+            </a:extLst>
+          </p:cNvPr>
+          <p:cNvSpPr>
+            <a:spLocks xmlns:a="http://schemas.openxmlformats.org/drawingml/2006/main" noGrp="1"/>
+          </p:cNvSpPr>
+          <p:nvPr/>
+        </p:nvSpPr>
+        <p:spPr>
+          <a:xfrm xmlns:a="http://schemas.openxmlformats.org/drawingml/2006/main">
+            <a:off x="609600" y="3212306"/>
+            <a:ext cx="323850" cy="323850"/>
+          </a:xfrm>
+          <a:prstGeom xmlns:a="http://schemas.openxmlformats.org/drawingml/2006/main" prst="rect">
+            <a:avLst/>
+          </a:prstGeom>
+          <a:noFill xmlns:a="http://schemas.openxmlformats.org/drawingml/2006/main"/>
+          <a:ln xmlns:a="http://schemas.openxmlformats.org/drawingml/2006/main" w="0">
+            <a:noFill/>
+          </a:ln>
+        </p:spPr>
+        <p:txBody>
+          <a:bodyPr xmlns:a="http://schemas.openxmlformats.org/drawingml/2006/main" lIns="0" tIns="0" rIns="0" bIns="0" anchor="ctr">
+            <a:noAutofit/>
+          </a:bodyPr>
+          <a:lstStyle xmlns:a="http://schemas.openxmlformats.org/drawingml/2006/main"/>
+          <a:p xmlns:a="http://schemas.openxmlformats.org/drawingml/2006/main">
+            <a:pPr algn="l">
+              <a:defRPr sz="1350" b="1">
+                <a:solidFill>
+                  <a:srgbClr val="28685E"/>
+                </a:solidFill>
+                <a:latin typeface="Calibri"/>
+                <a:ea typeface="Calibri"/>
+                <a:cs typeface="Calibri"/>
+              </a:defRPr>
+            </a:pPr>
+            <a:r>
+              <a:rPr sz="1350" b="1">
+                <a:solidFill>
+                  <a:srgbClr val="28685E"/>
+                </a:solidFill>
+                <a:latin typeface="Calibri"/>
+                <a:ea typeface="Calibri"/>
+                <a:cs typeface="Calibri"/>
+              </a:rPr>
+              <a:t>02</a:t>
+            </a:r>
+          </a:p>
+        </p:txBody>
+      </p:sp>
+      <p:sp>
+        <p:nvSpPr>
+          <p:cNvPr id="15" name="row-rule-1">
+            <a:extLst xmlns:a="http://schemas.openxmlformats.org/drawingml/2006/main">
+              <a:ext uri="{FF2B5EF4-FFF2-40B4-BE49-F238E27FC236}">
+                <a16:creationId xmlns:a16="http://schemas.microsoft.com/office/drawing/2014/main" id="{085F7D92-66FE-44BE-9C1F-10EB2A481413}"/>
+              </a:ext>
+            </a:extLst>
+          </p:cNvPr>
+          <p:cNvSpPr>
+            <a:spLocks xmlns:a="http://schemas.openxmlformats.org/drawingml/2006/main" noGrp="1"/>
+          </p:cNvSpPr>
+          <p:nvPr/>
+        </p:nvSpPr>
+        <p:spPr>
+          <a:xfrm xmlns:a="http://schemas.openxmlformats.org/drawingml/2006/main">
+            <a:off x="1000125" y="3986213"/>
+            <a:ext cx="10334625" cy="0"/>
+          </a:xfrm>
+          <a:prstGeom xmlns:a="http://schemas.openxmlformats.org/drawingml/2006/main" prst="line">
+            <a:avLst/>
+          </a:prstGeom>
+          <a:noFill xmlns:a="http://schemas.openxmlformats.org/drawingml/2006/main"/>
+          <a:ln xmlns:a="http://schemas.openxmlformats.org/drawingml/2006/main" w="9525">
+            <a:solidFill>
+              <a:srgbClr val="CEDBD3"/>
+            </a:solidFill>
+          </a:ln>
+        </p:spPr>
+      </p:sp>
+      <p:sp>
+        <p:nvSpPr>
+          <p:cNvPr id="16" name="cue-2">
+            <a:extLst xmlns:a="http://schemas.openxmlformats.org/drawingml/2006/main">
+              <a:ext uri="{FF2B5EF4-FFF2-40B4-BE49-F238E27FC236}">
+                <a16:creationId xmlns:a16="http://schemas.microsoft.com/office/drawing/2014/main" id="{84597EE0-00AB-42ED-A48E-4127F87B7712}"/>
+              </a:ext>
+            </a:extLst>
+          </p:cNvPr>
+          <p:cNvSpPr>
+            <a:spLocks xmlns:a="http://schemas.openxmlformats.org/drawingml/2006/main" noGrp="1"/>
+          </p:cNvSpPr>
+          <p:nvPr/>
+        </p:nvSpPr>
+        <p:spPr>
+          <a:xfrm xmlns:a="http://schemas.openxmlformats.org/drawingml/2006/main">
+            <a:off x="609600" y="4062413"/>
+            <a:ext cx="323850" cy="323850"/>
+          </a:xfrm>
+          <a:prstGeom xmlns:a="http://schemas.openxmlformats.org/drawingml/2006/main" prst="rect">
+            <a:avLst/>
+          </a:prstGeom>
+          <a:noFill xmlns:a="http://schemas.openxmlformats.org/drawingml/2006/main"/>
+          <a:ln xmlns:a="http://schemas.openxmlformats.org/drawingml/2006/main" w="0">
+            <a:noFill/>
+          </a:ln>
+        </p:spPr>
+        <p:txBody>
+          <a:bodyPr xmlns:a="http://schemas.openxmlformats.org/drawingml/2006/main" lIns="0" tIns="0" rIns="0" bIns="0" anchor="ctr">
+            <a:noAutofit/>
+          </a:bodyPr>
+          <a:lstStyle xmlns:a="http://schemas.openxmlformats.org/drawingml/2006/main"/>
+          <a:p xmlns:a="http://schemas.openxmlformats.org/drawingml/2006/main">
+            <a:pPr algn="l">
+              <a:defRPr sz="1350" b="1">
+                <a:solidFill>
+                  <a:srgbClr val="28685E"/>
+                </a:solidFill>
+                <a:latin typeface="Calibri"/>
+                <a:ea typeface="Calibri"/>
+                <a:cs typeface="Calibri"/>
+              </a:defRPr>
+            </a:pPr>
+            <a:r>
+              <a:rPr sz="1350" b="1">
+                <a:solidFill>
+                  <a:srgbClr val="28685E"/>
+                </a:solidFill>
+                <a:latin typeface="Calibri"/>
+                <a:ea typeface="Calibri"/>
+                <a:cs typeface="Calibri"/>
+              </a:rPr>
+              <a:t>03</a:t>
+            </a:r>
+          </a:p>
+        </p:txBody>
+      </p:sp>
+      <p:sp>
+        <p:nvSpPr>
+          <p:cNvPr id="17" name="row-rule-2">
+            <a:extLst xmlns:a="http://schemas.openxmlformats.org/drawingml/2006/main">
+              <a:ext uri="{FF2B5EF4-FFF2-40B4-BE49-F238E27FC236}">
+                <a16:creationId xmlns:a16="http://schemas.microsoft.com/office/drawing/2014/main" id="{D1D570AC-7D45-476E-AC42-C4CF04453B0B}"/>
+              </a:ext>
+            </a:extLst>
+          </p:cNvPr>
+          <p:cNvSpPr>
+            <a:spLocks xmlns:a="http://schemas.openxmlformats.org/drawingml/2006/main" noGrp="1"/>
+          </p:cNvSpPr>
+          <p:nvPr/>
+        </p:nvSpPr>
+        <p:spPr>
+          <a:xfrm xmlns:a="http://schemas.openxmlformats.org/drawingml/2006/main">
+            <a:off x="1000125" y="4836319"/>
+            <a:ext cx="10334625" cy="0"/>
+          </a:xfrm>
+          <a:prstGeom xmlns:a="http://schemas.openxmlformats.org/drawingml/2006/main" prst="line">
+            <a:avLst/>
+          </a:prstGeom>
+          <a:noFill xmlns:a="http://schemas.openxmlformats.org/drawingml/2006/main"/>
+          <a:ln xmlns:a="http://schemas.openxmlformats.org/drawingml/2006/main" w="9525">
+            <a:solidFill>
+              <a:srgbClr val="CEDBD3"/>
+            </a:solidFill>
+          </a:ln>
+        </p:spPr>
+      </p:sp>
+      <p:sp>
+        <p:nvSpPr>
+          <p:cNvPr id="18" name="cue-3">
+            <a:extLst xmlns:a="http://schemas.openxmlformats.org/drawingml/2006/main">
+              <a:ext uri="{FF2B5EF4-FFF2-40B4-BE49-F238E27FC236}">
+                <a16:creationId xmlns:a16="http://schemas.microsoft.com/office/drawing/2014/main" id="{4BD008B0-6D3B-420D-AED1-020B29076AA7}"/>
+              </a:ext>
+            </a:extLst>
+          </p:cNvPr>
+          <p:cNvSpPr>
+            <a:spLocks xmlns:a="http://schemas.openxmlformats.org/drawingml/2006/main" noGrp="1"/>
+          </p:cNvSpPr>
+          <p:nvPr/>
+        </p:nvSpPr>
+        <p:spPr>
+          <a:xfrm xmlns:a="http://schemas.openxmlformats.org/drawingml/2006/main">
+            <a:off x="609600" y="4912519"/>
+            <a:ext cx="323850" cy="323850"/>
+          </a:xfrm>
+          <a:prstGeom xmlns:a="http://schemas.openxmlformats.org/drawingml/2006/main" prst="rect">
+            <a:avLst/>
+          </a:prstGeom>
+          <a:noFill xmlns:a="http://schemas.openxmlformats.org/drawingml/2006/main"/>
+          <a:ln xmlns:a="http://schemas.openxmlformats.org/drawingml/2006/main" w="0">
+            <a:noFill/>
+          </a:ln>
+        </p:spPr>
+        <p:txBody>
+          <a:bodyPr xmlns:a="http://schemas.openxmlformats.org/drawingml/2006/main" lIns="0" tIns="0" rIns="0" bIns="0" anchor="ctr">
+            <a:noAutofit/>
+          </a:bodyPr>
+          <a:lstStyle xmlns:a="http://schemas.openxmlformats.org/drawingml/2006/main"/>
+          <a:p xmlns:a="http://schemas.openxmlformats.org/drawingml/2006/main">
+            <a:pPr algn="l">
+              <a:defRPr sz="1350" b="1">
+                <a:solidFill>
+                  <a:srgbClr val="28685E"/>
+                </a:solidFill>
+                <a:latin typeface="Calibri"/>
+                <a:ea typeface="Calibri"/>
+                <a:cs typeface="Calibri"/>
+              </a:defRPr>
+            </a:pPr>
+            <a:r>
+              <a:rPr sz="1350" b="1">
+                <a:solidFill>
+                  <a:srgbClr val="28685E"/>
+                </a:solidFill>
+                <a:latin typeface="Calibri"/>
+                <a:ea typeface="Calibri"/>
+                <a:cs typeface="Calibri"/>
+              </a:rPr>
+              <a:t>04</a:t>
             </a:r>
           </a:p>
         </p:txBody>
@@ -5929,7 +7919,7 @@
     <p:bg>
       <p:bgPr>
         <a:solidFill xmlns:a="http://schemas.openxmlformats.org/drawingml/2006/main">
-          <a:srgbClr val="F5F1E8"/>
+          <a:srgbClr val="FAF9F5"/>
         </a:solidFill>
       </p:bgPr>
     </p:bg>
@@ -5958,8 +7948,8 @@
         </p:nvSpPr>
         <p:spPr>
           <a:xfrm xmlns:a="http://schemas.openxmlformats.org/drawingml/2006/main">
-            <a:off x="609600" y="552450"/>
-            <a:ext cx="781050" cy="57150"/>
+            <a:off x="609600" y="733425"/>
+            <a:ext cx="781050" cy="38100"/>
           </a:xfrm>
           <a:prstGeom xmlns:a="http://schemas.openxmlformats.org/drawingml/2006/main" prst="rect">
             <a:avLst/>
@@ -5989,34 +7979,43 @@
         </p:nvSpPr>
         <p:spPr>
           <a:xfrm xmlns:a="http://schemas.openxmlformats.org/drawingml/2006/main">
-            <a:off x="609600" y="762000"/>
-            <a:ext cx="8572500" cy="285750"/>
-          </a:xfrm>
-          <a:prstGeom xmlns:a="http://schemas.openxmlformats.org/drawingml/2006/main" prst="rect">
-            <a:avLst/>
-          </a:prstGeom>
-          <a:noFill xmlns:a="http://schemas.openxmlformats.org/drawingml/2006/main"/>
-          <a:ln xmlns:a="http://schemas.openxmlformats.org/drawingml/2006/main" w="0">
-            <a:noFill/>
-            <a:prstDash val="solid"/>
-          </a:ln>
-        </p:spPr>
-        <p:txBody>
-          <a:bodyPr xmlns:a="http://schemas.openxmlformats.org/drawingml/2006/main" lIns="0" tIns="0" rIns="0" bIns="0" anchor="ctr"/>
-          <a:lstStyle xmlns:a="http://schemas.openxmlformats.org/drawingml/2006/main"/>
-          <a:p xmlns:a="http://schemas.openxmlformats.org/drawingml/2006/main">
-            <a:pPr>
-              <a:defRPr sz="1500" b="1">
+            <a:off x="609600" y="342900"/>
+            <a:ext cx="9334500" cy="304800"/>
+          </a:xfrm>
+          <a:prstGeom xmlns:a="http://schemas.openxmlformats.org/drawingml/2006/main" prst="rect">
+            <a:avLst/>
+          </a:prstGeom>
+          <a:noFill xmlns:a="http://schemas.openxmlformats.org/drawingml/2006/main"/>
+          <a:ln xmlns:a="http://schemas.openxmlformats.org/drawingml/2006/main" w="0">
+            <a:noFill/>
+            <a:prstDash val="solid"/>
+          </a:ln>
+        </p:spPr>
+        <p:txBody>
+          <a:bodyPr xmlns:a="http://schemas.openxmlformats.org/drawingml/2006/main" lIns="0" tIns="0" rIns="0" bIns="0" anchor="ctr">
+            <a:noAutofit/>
+          </a:bodyPr>
+          <a:lstStyle xmlns:a="http://schemas.openxmlformats.org/drawingml/2006/main"/>
+          <a:p xmlns:a="http://schemas.openxmlformats.org/drawingml/2006/main">
+            <a:pPr algn="l">
+              <a:buNone/>
+              <a:defRPr sz="1350" b="1">
                 <a:solidFill>
                   <a:srgbClr val="28685E"/>
                 </a:solidFill>
-              </a:defRPr>
-            </a:pPr>
-            <a:r>
-              <a:rPr sz="1500" b="1">
+                <a:latin typeface="Calibri"/>
+                <a:ea typeface="Calibri"/>
+                <a:cs typeface="Calibri"/>
+              </a:defRPr>
+            </a:pPr>
+            <a:r>
+              <a:rPr sz="1350" b="1">
                 <a:solidFill>
                   <a:srgbClr val="28685E"/>
                 </a:solidFill>
+                <a:latin typeface="Calibri"/>
+                <a:ea typeface="Calibri"/>
+                <a:cs typeface="Calibri"/>
               </a:rPr>
               <a:t>MADE BY MATT  /  GROW SCIENCE</a:t>
             </a:r>
@@ -6039,34 +8038,43 @@
         </p:nvSpPr>
         <p:spPr>
           <a:xfrm xmlns:a="http://schemas.openxmlformats.org/drawingml/2006/main">
-            <a:off x="609600" y="1352550"/>
-            <a:ext cx="10972800" cy="952500"/>
-          </a:xfrm>
-          <a:prstGeom xmlns:a="http://schemas.openxmlformats.org/drawingml/2006/main" prst="rect">
-            <a:avLst/>
-          </a:prstGeom>
-          <a:noFill xmlns:a="http://schemas.openxmlformats.org/drawingml/2006/main"/>
-          <a:ln xmlns:a="http://schemas.openxmlformats.org/drawingml/2006/main" w="0">
-            <a:noFill/>
-            <a:prstDash val="solid"/>
-          </a:ln>
-        </p:spPr>
-        <p:txBody>
-          <a:bodyPr xmlns:a="http://schemas.openxmlformats.org/drawingml/2006/main" lIns="0" tIns="0" rIns="0" bIns="0" anchor="ctr"/>
-          <a:lstStyle xmlns:a="http://schemas.openxmlformats.org/drawingml/2006/main"/>
-          <a:p xmlns:a="http://schemas.openxmlformats.org/drawingml/2006/main">
-            <a:pPr>
-              <a:defRPr sz="3750" b="1">
+            <a:off x="609600" y="990600"/>
+            <a:ext cx="10972800" cy="1000125"/>
+          </a:xfrm>
+          <a:prstGeom xmlns:a="http://schemas.openxmlformats.org/drawingml/2006/main" prst="rect">
+            <a:avLst/>
+          </a:prstGeom>
+          <a:noFill xmlns:a="http://schemas.openxmlformats.org/drawingml/2006/main"/>
+          <a:ln xmlns:a="http://schemas.openxmlformats.org/drawingml/2006/main" w="0">
+            <a:noFill/>
+            <a:prstDash val="solid"/>
+          </a:ln>
+        </p:spPr>
+        <p:txBody>
+          <a:bodyPr xmlns:a="http://schemas.openxmlformats.org/drawingml/2006/main" lIns="0" tIns="0" rIns="0" bIns="0" anchor="ctr">
+            <a:noAutofit/>
+          </a:bodyPr>
+          <a:lstStyle xmlns:a="http://schemas.openxmlformats.org/drawingml/2006/main"/>
+          <a:p xmlns:a="http://schemas.openxmlformats.org/drawingml/2006/main">
+            <a:pPr algn="l">
+              <a:buNone/>
+              <a:defRPr sz="3675" b="1">
                 <a:solidFill>
                   <a:srgbClr val="152B3A"/>
                 </a:solidFill>
-              </a:defRPr>
-            </a:pPr>
-            <a:r>
-              <a:rPr sz="3750" b="1">
+                <a:latin typeface="Calibri"/>
+                <a:ea typeface="Calibri"/>
+                <a:cs typeface="Calibri"/>
+              </a:defRPr>
+            </a:pPr>
+            <a:r>
+              <a:rPr sz="3675" b="1">
                 <a:solidFill>
                   <a:srgbClr val="152B3A"/>
                 </a:solidFill>
+                <a:latin typeface="Calibri"/>
+                <a:ea typeface="Calibri"/>
+                <a:cs typeface="Calibri"/>
               </a:rPr>
               <a:t>Repair the method</a:t>
             </a:r>
@@ -6089,8 +8097,157 @@
         </p:nvSpPr>
         <p:spPr>
           <a:xfrm xmlns:a="http://schemas.openxmlformats.org/drawingml/2006/main">
-            <a:off x="609600" y="6219825"/>
+            <a:off x="609600" y="6191250"/>
             <a:ext cx="10972800" cy="9525"/>
+          </a:xfrm>
+          <a:prstGeom xmlns:a="http://schemas.openxmlformats.org/drawingml/2006/main" prst="rect">
+            <a:avLst/>
+          </a:prstGeom>
+          <a:solidFill xmlns:a="http://schemas.openxmlformats.org/drawingml/2006/main">
+            <a:srgbClr val="CEDBD3"/>
+          </a:solidFill>
+          <a:ln xmlns:a="http://schemas.openxmlformats.org/drawingml/2006/main" w="0">
+            <a:noFill/>
+            <a:prstDash val="solid"/>
+          </a:ln>
+        </p:spPr>
+      </p:sp>
+      <p:sp>
+        <p:nvSpPr>
+          <p:cNvPr id="5" name="footer">
+            <a:extLst xmlns:a="http://schemas.openxmlformats.org/drawingml/2006/main">
+              <a:ext uri="{FF2B5EF4-FFF2-40B4-BE49-F238E27FC236}">
+                <a16:creationId xmlns:a16="http://schemas.microsoft.com/office/drawing/2014/main" id="{E0AC9A88-BDD4-455B-A5FC-7E369716AFAF}"/>
+              </a:ext>
+            </a:extLst>
+          </p:cNvPr>
+          <p:cNvSpPr>
+            <a:spLocks xmlns:a="http://schemas.openxmlformats.org/drawingml/2006/main" noGrp="1"/>
+          </p:cNvSpPr>
+          <p:nvPr/>
+        </p:nvSpPr>
+        <p:spPr>
+          <a:xfrm xmlns:a="http://schemas.openxmlformats.org/drawingml/2006/main">
+            <a:off x="609600" y="6419850"/>
+            <a:ext cx="9525000" cy="219075"/>
+          </a:xfrm>
+          <a:prstGeom xmlns:a="http://schemas.openxmlformats.org/drawingml/2006/main" prst="rect">
+            <a:avLst/>
+          </a:prstGeom>
+          <a:noFill xmlns:a="http://schemas.openxmlformats.org/drawingml/2006/main"/>
+          <a:ln xmlns:a="http://schemas.openxmlformats.org/drawingml/2006/main" w="0">
+            <a:noFill/>
+            <a:prstDash val="solid"/>
+          </a:ln>
+        </p:spPr>
+        <p:txBody>
+          <a:bodyPr xmlns:a="http://schemas.openxmlformats.org/drawingml/2006/main" lIns="0" tIns="0" rIns="0" bIns="0" anchor="ctr">
+            <a:noAutofit/>
+          </a:bodyPr>
+          <a:lstStyle xmlns:a="http://schemas.openxmlformats.org/drawingml/2006/main"/>
+          <a:p xmlns:a="http://schemas.openxmlformats.org/drawingml/2006/main">
+            <a:pPr algn="l">
+              <a:buNone/>
+              <a:defRPr sz="1200" b="0">
+                <a:solidFill>
+                  <a:srgbClr val="50616B"/>
+                </a:solidFill>
+                <a:latin typeface="Calibri"/>
+                <a:ea typeface="Calibri"/>
+                <a:cs typeface="Calibri"/>
+              </a:defRPr>
+            </a:pPr>
+            <a:r>
+              <a:rPr sz="1200" b="0">
+                <a:solidFill>
+                  <a:srgbClr val="50616B"/>
+                </a:solidFill>
+                <a:latin typeface="Calibri"/>
+                <a:ea typeface="Calibri"/>
+                <a:cs typeface="Calibri"/>
+              </a:rPr>
+              <a:t>AUTUMN 1  ·  WEEK 5  ·  LESSON A</a:t>
+            </a:r>
+          </a:p>
+        </p:txBody>
+      </p:sp>
+      <p:sp>
+        <p:nvSpPr>
+          <p:cNvPr id="6" name="page">
+            <a:extLst xmlns:a="http://schemas.openxmlformats.org/drawingml/2006/main">
+              <a:ext uri="{FF2B5EF4-FFF2-40B4-BE49-F238E27FC236}">
+                <a16:creationId xmlns:a16="http://schemas.microsoft.com/office/drawing/2014/main" id="{2340FC3B-CA4E-48B1-B9F3-B6F4732596DF}"/>
+              </a:ext>
+            </a:extLst>
+          </p:cNvPr>
+          <p:cNvSpPr>
+            <a:spLocks xmlns:a="http://schemas.openxmlformats.org/drawingml/2006/main" noGrp="1"/>
+          </p:cNvSpPr>
+          <p:nvPr/>
+        </p:nvSpPr>
+        <p:spPr>
+          <a:xfrm xmlns:a="http://schemas.openxmlformats.org/drawingml/2006/main">
+            <a:off x="11106150" y="6400800"/>
+            <a:ext cx="476250" cy="247650"/>
+          </a:xfrm>
+          <a:prstGeom xmlns:a="http://schemas.openxmlformats.org/drawingml/2006/main" prst="rect">
+            <a:avLst/>
+          </a:prstGeom>
+          <a:noFill xmlns:a="http://schemas.openxmlformats.org/drawingml/2006/main"/>
+          <a:ln xmlns:a="http://schemas.openxmlformats.org/drawingml/2006/main" w="0">
+            <a:noFill/>
+            <a:prstDash val="solid"/>
+          </a:ln>
+        </p:spPr>
+        <p:txBody>
+          <a:bodyPr xmlns:a="http://schemas.openxmlformats.org/drawingml/2006/main" lIns="0" tIns="0" rIns="0" bIns="0" anchor="ctr">
+            <a:noAutofit/>
+          </a:bodyPr>
+          <a:lstStyle xmlns:a="http://schemas.openxmlformats.org/drawingml/2006/main"/>
+          <a:p xmlns:a="http://schemas.openxmlformats.org/drawingml/2006/main">
+            <a:pPr algn="l">
+              <a:buNone/>
+              <a:defRPr sz="1350" b="1">
+                <a:solidFill>
+                  <a:srgbClr val="28685E"/>
+                </a:solidFill>
+                <a:latin typeface="Calibri"/>
+                <a:ea typeface="Calibri"/>
+                <a:cs typeface="Calibri"/>
+              </a:defRPr>
+            </a:pPr>
+            <a:r>
+              <a:rPr sz="1350" b="1">
+                <a:solidFill>
+                  <a:srgbClr val="28685E"/>
+                </a:solidFill>
+                <a:latin typeface="Calibri"/>
+                <a:ea typeface="Calibri"/>
+                <a:cs typeface="Calibri"/>
+              </a:rPr>
+              <a:t>05</a:t>
+            </a:r>
+          </a:p>
+        </p:txBody>
+      </p:sp>
+      <p:sp>
+        <p:nvSpPr>
+          <p:cNvPr id="7" name="diagram-shape-0">
+            <a:extLst xmlns:a="http://schemas.openxmlformats.org/drawingml/2006/main">
+              <a:ext uri="{FF2B5EF4-FFF2-40B4-BE49-F238E27FC236}">
+                <a16:creationId xmlns:a16="http://schemas.microsoft.com/office/drawing/2014/main" id="{4ABBB5E3-5679-4FEA-97DB-D38B5C1B334D}"/>
+              </a:ext>
+            </a:extLst>
+          </p:cNvPr>
+          <p:cNvSpPr>
+            <a:spLocks xmlns:a="http://schemas.openxmlformats.org/drawingml/2006/main" noGrp="1"/>
+          </p:cNvSpPr>
+          <p:nvPr/>
+        </p:nvSpPr>
+        <p:spPr>
+          <a:xfrm xmlns:a="http://schemas.openxmlformats.org/drawingml/2006/main">
+            <a:off x="895350" y="2609850"/>
+            <a:ext cx="4953000" cy="819150"/>
           </a:xfrm>
           <a:prstGeom xmlns:a="http://schemas.openxmlformats.org/drawingml/2006/main" prst="rect">
             <a:avLst/>
@@ -6106,121 +8263,21 @@
       </p:sp>
       <p:sp>
         <p:nvSpPr>
-          <p:cNvPr id="5" name="footer">
-            <a:extLst xmlns:a="http://schemas.openxmlformats.org/drawingml/2006/main">
-              <a:ext uri="{FF2B5EF4-FFF2-40B4-BE49-F238E27FC236}">
-                <a16:creationId xmlns:a16="http://schemas.microsoft.com/office/drawing/2014/main" id="{E0AC9A88-BDD4-455B-A5FC-7E369716AFAF}"/>
-              </a:ext>
-            </a:extLst>
-          </p:cNvPr>
-          <p:cNvSpPr>
-            <a:spLocks xmlns:a="http://schemas.openxmlformats.org/drawingml/2006/main" noGrp="1"/>
-          </p:cNvSpPr>
-          <p:nvPr/>
-        </p:nvSpPr>
-        <p:spPr>
-          <a:xfrm xmlns:a="http://schemas.openxmlformats.org/drawingml/2006/main">
-            <a:off x="609600" y="6381750"/>
-            <a:ext cx="9906000" cy="228600"/>
-          </a:xfrm>
-          <a:prstGeom xmlns:a="http://schemas.openxmlformats.org/drawingml/2006/main" prst="rect">
-            <a:avLst/>
-          </a:prstGeom>
-          <a:noFill xmlns:a="http://schemas.openxmlformats.org/drawingml/2006/main"/>
-          <a:ln xmlns:a="http://schemas.openxmlformats.org/drawingml/2006/main" w="0">
-            <a:noFill/>
-            <a:prstDash val="solid"/>
-          </a:ln>
-        </p:spPr>
-        <p:txBody>
-          <a:bodyPr xmlns:a="http://schemas.openxmlformats.org/drawingml/2006/main" lIns="0" tIns="0" rIns="0" bIns="0" anchor="ctr"/>
-          <a:lstStyle xmlns:a="http://schemas.openxmlformats.org/drawingml/2006/main"/>
-          <a:p xmlns:a="http://schemas.openxmlformats.org/drawingml/2006/main">
-            <a:pPr>
-              <a:defRPr sz="1275" b="0">
-                <a:solidFill>
-                  <a:srgbClr val="50616B"/>
-                </a:solidFill>
-              </a:defRPr>
-            </a:pPr>
-            <a:r>
-              <a:rPr sz="1275" b="0">
-                <a:solidFill>
-                  <a:srgbClr val="50616B"/>
-                </a:solidFill>
-              </a:rPr>
-              <a:t>AUTUMN 1  ·  WEEK 5  ·  LESSON A</a:t>
-            </a:r>
-          </a:p>
-        </p:txBody>
-      </p:sp>
-      <p:sp>
-        <p:nvSpPr>
-          <p:cNvPr id="6" name="page">
-            <a:extLst xmlns:a="http://schemas.openxmlformats.org/drawingml/2006/main">
-              <a:ext uri="{FF2B5EF4-FFF2-40B4-BE49-F238E27FC236}">
-                <a16:creationId xmlns:a16="http://schemas.microsoft.com/office/drawing/2014/main" id="{2340FC3B-CA4E-48B1-B9F3-B6F4732596DF}"/>
-              </a:ext>
-            </a:extLst>
-          </p:cNvPr>
-          <p:cNvSpPr>
-            <a:spLocks xmlns:a="http://schemas.openxmlformats.org/drawingml/2006/main" noGrp="1"/>
-          </p:cNvSpPr>
-          <p:nvPr/>
-        </p:nvSpPr>
-        <p:spPr>
-          <a:xfrm xmlns:a="http://schemas.openxmlformats.org/drawingml/2006/main">
-            <a:off x="11106150" y="6362700"/>
-            <a:ext cx="476250" cy="238125"/>
-          </a:xfrm>
-          <a:prstGeom xmlns:a="http://schemas.openxmlformats.org/drawingml/2006/main" prst="rect">
-            <a:avLst/>
-          </a:prstGeom>
-          <a:noFill xmlns:a="http://schemas.openxmlformats.org/drawingml/2006/main"/>
-          <a:ln xmlns:a="http://schemas.openxmlformats.org/drawingml/2006/main" w="0">
-            <a:noFill/>
-            <a:prstDash val="solid"/>
-          </a:ln>
-        </p:spPr>
-        <p:txBody>
-          <a:bodyPr xmlns:a="http://schemas.openxmlformats.org/drawingml/2006/main" lIns="0" tIns="0" rIns="0" bIns="0" anchor="ctr"/>
-          <a:lstStyle xmlns:a="http://schemas.openxmlformats.org/drawingml/2006/main"/>
-          <a:p xmlns:a="http://schemas.openxmlformats.org/drawingml/2006/main">
-            <a:pPr>
-              <a:defRPr sz="1350" b="1">
-                <a:solidFill>
-                  <a:srgbClr val="28685E"/>
-                </a:solidFill>
-              </a:defRPr>
-            </a:pPr>
-            <a:r>
-              <a:rPr sz="1350" b="1">
-                <a:solidFill>
-                  <a:srgbClr val="28685E"/>
-                </a:solidFill>
-              </a:rPr>
-              <a:t>05</a:t>
-            </a:r>
-          </a:p>
-        </p:txBody>
-      </p:sp>
-      <p:sp>
-        <p:nvSpPr>
-          <p:cNvPr id="7" name="diagram-shape-0">
-            <a:extLst xmlns:a="http://schemas.openxmlformats.org/drawingml/2006/main">
-              <a:ext uri="{FF2B5EF4-FFF2-40B4-BE49-F238E27FC236}">
-                <a16:creationId xmlns:a16="http://schemas.microsoft.com/office/drawing/2014/main" id="{4ABBB5E3-5679-4FEA-97DB-D38B5C1B334D}"/>
-              </a:ext>
-            </a:extLst>
-          </p:cNvPr>
-          <p:cNvSpPr>
-            <a:spLocks xmlns:a="http://schemas.openxmlformats.org/drawingml/2006/main" noGrp="1"/>
-          </p:cNvSpPr>
-          <p:nvPr/>
-        </p:nvSpPr>
-        <p:spPr>
-          <a:xfrm xmlns:a="http://schemas.openxmlformats.org/drawingml/2006/main">
-            <a:off x="895350" y="2609850"/>
+          <p:cNvPr id="8" name="diagram-shape-1">
+            <a:extLst xmlns:a="http://schemas.openxmlformats.org/drawingml/2006/main">
+              <a:ext uri="{FF2B5EF4-FFF2-40B4-BE49-F238E27FC236}">
+                <a16:creationId xmlns:a16="http://schemas.microsoft.com/office/drawing/2014/main" id="{AE926A62-6208-4748-ACD2-72D3BBBF1881}"/>
+              </a:ext>
+            </a:extLst>
+          </p:cNvPr>
+          <p:cNvSpPr>
+            <a:spLocks xmlns:a="http://schemas.openxmlformats.org/drawingml/2006/main" noGrp="1"/>
+          </p:cNvSpPr>
+          <p:nvPr/>
+        </p:nvSpPr>
+        <p:spPr>
+          <a:xfrm xmlns:a="http://schemas.openxmlformats.org/drawingml/2006/main">
+            <a:off x="895350" y="3609975"/>
             <a:ext cx="4953000" cy="819150"/>
           </a:xfrm>
           <a:prstGeom xmlns:a="http://schemas.openxmlformats.org/drawingml/2006/main" prst="rect">
@@ -6237,21 +8294,21 @@
       </p:sp>
       <p:sp>
         <p:nvSpPr>
-          <p:cNvPr id="8" name="diagram-shape-1">
-            <a:extLst xmlns:a="http://schemas.openxmlformats.org/drawingml/2006/main">
-              <a:ext uri="{FF2B5EF4-FFF2-40B4-BE49-F238E27FC236}">
-                <a16:creationId xmlns:a16="http://schemas.microsoft.com/office/drawing/2014/main" id="{AE926A62-6208-4748-ACD2-72D3BBBF1881}"/>
-              </a:ext>
-            </a:extLst>
-          </p:cNvPr>
-          <p:cNvSpPr>
-            <a:spLocks xmlns:a="http://schemas.openxmlformats.org/drawingml/2006/main" noGrp="1"/>
-          </p:cNvSpPr>
-          <p:nvPr/>
-        </p:nvSpPr>
-        <p:spPr>
-          <a:xfrm xmlns:a="http://schemas.openxmlformats.org/drawingml/2006/main">
-            <a:off x="895350" y="3609975"/>
+          <p:cNvPr id="9" name="diagram-shape-2">
+            <a:extLst xmlns:a="http://schemas.openxmlformats.org/drawingml/2006/main">
+              <a:ext uri="{FF2B5EF4-FFF2-40B4-BE49-F238E27FC236}">
+                <a16:creationId xmlns:a16="http://schemas.microsoft.com/office/drawing/2014/main" id="{5C402ABB-1559-4F49-B710-11ADFB0623A6}"/>
+              </a:ext>
+            </a:extLst>
+          </p:cNvPr>
+          <p:cNvSpPr>
+            <a:spLocks xmlns:a="http://schemas.openxmlformats.org/drawingml/2006/main" noGrp="1"/>
+          </p:cNvSpPr>
+          <p:nvPr/>
+        </p:nvSpPr>
+        <p:spPr>
+          <a:xfrm xmlns:a="http://schemas.openxmlformats.org/drawingml/2006/main">
+            <a:off x="895350" y="4610100"/>
             <a:ext cx="4953000" cy="819150"/>
           </a:xfrm>
           <a:prstGeom xmlns:a="http://schemas.openxmlformats.org/drawingml/2006/main" prst="rect">
@@ -6268,37 +8325,6 @@
       </p:sp>
       <p:sp>
         <p:nvSpPr>
-          <p:cNvPr id="9" name="diagram-shape-2">
-            <a:extLst xmlns:a="http://schemas.openxmlformats.org/drawingml/2006/main">
-              <a:ext uri="{FF2B5EF4-FFF2-40B4-BE49-F238E27FC236}">
-                <a16:creationId xmlns:a16="http://schemas.microsoft.com/office/drawing/2014/main" id="{5C402ABB-1559-4F49-B710-11ADFB0623A6}"/>
-              </a:ext>
-            </a:extLst>
-          </p:cNvPr>
-          <p:cNvSpPr>
-            <a:spLocks xmlns:a="http://schemas.openxmlformats.org/drawingml/2006/main" noGrp="1"/>
-          </p:cNvSpPr>
-          <p:nvPr/>
-        </p:nvSpPr>
-        <p:spPr>
-          <a:xfrm xmlns:a="http://schemas.openxmlformats.org/drawingml/2006/main">
-            <a:off x="895350" y="4610100"/>
-            <a:ext cx="4953000" cy="819150"/>
-          </a:xfrm>
-          <a:prstGeom xmlns:a="http://schemas.openxmlformats.org/drawingml/2006/main" prst="rect">
-            <a:avLst/>
-          </a:prstGeom>
-          <a:solidFill xmlns:a="http://schemas.openxmlformats.org/drawingml/2006/main">
-            <a:srgbClr val="DCE7DD"/>
-          </a:solidFill>
-          <a:ln xmlns:a="http://schemas.openxmlformats.org/drawingml/2006/main" w="0">
-            <a:noFill/>
-            <a:prstDash val="solid"/>
-          </a:ln>
-        </p:spPr>
-      </p:sp>
-      <p:sp>
-        <p:nvSpPr>
           <p:cNvPr id="10" name="diagram-label-3">
             <a:extLst xmlns:a="http://schemas.openxmlformats.org/drawingml/2006/main">
               <a:ext uri="{FF2B5EF4-FFF2-40B4-BE49-F238E27FC236}">
@@ -6330,6 +8356,7 @@
           <a:lstStyle xmlns:a="http://schemas.openxmlformats.org/drawingml/2006/main"/>
           <a:p xmlns:a="http://schemas.openxmlformats.org/drawingml/2006/main">
             <a:pPr>
+              <a:buNone/>
               <a:defRPr sz="2025" b="1">
                 <a:solidFill>
                   <a:srgbClr val="152B3A"/>
@@ -6380,6 +8407,7 @@
           <a:lstStyle xmlns:a="http://schemas.openxmlformats.org/drawingml/2006/main"/>
           <a:p xmlns:a="http://schemas.openxmlformats.org/drawingml/2006/main">
             <a:pPr>
+              <a:buNone/>
               <a:defRPr sz="1950" b="1">
                 <a:solidFill>
                   <a:srgbClr val="152B3A"/>
@@ -6430,6 +8458,7 @@
           <a:lstStyle xmlns:a="http://schemas.openxmlformats.org/drawingml/2006/main"/>
           <a:p xmlns:a="http://schemas.openxmlformats.org/drawingml/2006/main">
             <a:pPr>
+              <a:buNone/>
               <a:defRPr sz="1875" b="1">
                 <a:solidFill>
                   <a:srgbClr val="152B3A"/>
@@ -6463,34 +8492,43 @@
         </p:nvSpPr>
         <p:spPr>
           <a:xfrm xmlns:a="http://schemas.openxmlformats.org/drawingml/2006/main">
-            <a:off x="6667500" y="2714625"/>
-            <a:ext cx="4857750" cy="1762125"/>
-          </a:xfrm>
-          <a:prstGeom xmlns:a="http://schemas.openxmlformats.org/drawingml/2006/main" prst="rect">
-            <a:avLst/>
-          </a:prstGeom>
-          <a:noFill xmlns:a="http://schemas.openxmlformats.org/drawingml/2006/main"/>
-          <a:ln xmlns:a="http://schemas.openxmlformats.org/drawingml/2006/main" w="0">
-            <a:noFill/>
-            <a:prstDash val="solid"/>
-          </a:ln>
-        </p:spPr>
-        <p:txBody>
-          <a:bodyPr xmlns:a="http://schemas.openxmlformats.org/drawingml/2006/main" lIns="0" tIns="0" rIns="0" bIns="0" anchor="ctr"/>
-          <a:lstStyle xmlns:a="http://schemas.openxmlformats.org/drawingml/2006/main"/>
-          <a:p xmlns:a="http://schemas.openxmlformats.org/drawingml/2006/main">
-            <a:pPr>
-              <a:defRPr sz="2550" b="1">
+            <a:off x="6667500" y="2476500"/>
+            <a:ext cx="4914900" cy="2095500"/>
+          </a:xfrm>
+          <a:prstGeom xmlns:a="http://schemas.openxmlformats.org/drawingml/2006/main" prst="rect">
+            <a:avLst/>
+          </a:prstGeom>
+          <a:noFill xmlns:a="http://schemas.openxmlformats.org/drawingml/2006/main"/>
+          <a:ln xmlns:a="http://schemas.openxmlformats.org/drawingml/2006/main" w="0">
+            <a:noFill/>
+            <a:prstDash val="solid"/>
+          </a:ln>
+        </p:spPr>
+        <p:txBody>
+          <a:bodyPr xmlns:a="http://schemas.openxmlformats.org/drawingml/2006/main" lIns="0" tIns="0" rIns="0" bIns="0" anchor="ctr">
+            <a:noAutofit/>
+          </a:bodyPr>
+          <a:lstStyle xmlns:a="http://schemas.openxmlformats.org/drawingml/2006/main"/>
+          <a:p xmlns:a="http://schemas.openxmlformats.org/drawingml/2006/main">
+            <a:pPr algn="l">
+              <a:buNone/>
+              <a:defRPr sz="2625" b="1">
                 <a:solidFill>
                   <a:srgbClr val="152B3A"/>
                 </a:solidFill>
-              </a:defRPr>
-            </a:pPr>
-            <a:r>
-              <a:rPr sz="2550" b="1">
+                <a:latin typeface="Calibri"/>
+                <a:ea typeface="Calibri"/>
+                <a:cs typeface="Calibri"/>
+              </a:defRPr>
+            </a:pPr>
+            <a:r>
+              <a:rPr sz="2625" b="1">
                 <a:solidFill>
                   <a:srgbClr val="152B3A"/>
                 </a:solidFill>
+                <a:latin typeface="Calibri"/>
+                <a:ea typeface="Calibri"/>
+                <a:cs typeface="Calibri"/>
               </a:rPr>
               <a:t>A variable is something that could change in the investigation.</a:t>
             </a:r>
@@ -6513,27 +8551,33 @@
         </p:nvSpPr>
         <p:spPr>
           <a:xfrm xmlns:a="http://schemas.openxmlformats.org/drawingml/2006/main">
-            <a:off x="6667500" y="4714875"/>
-            <a:ext cx="4857750" cy="1000125"/>
-          </a:xfrm>
-          <a:prstGeom xmlns:a="http://schemas.openxmlformats.org/drawingml/2006/main" prst="rect">
-            <a:avLst/>
-          </a:prstGeom>
-          <a:noFill xmlns:a="http://schemas.openxmlformats.org/drawingml/2006/main"/>
-          <a:ln xmlns:a="http://schemas.openxmlformats.org/drawingml/2006/main" w="0">
-            <a:noFill/>
-            <a:prstDash val="solid"/>
-          </a:ln>
-        </p:spPr>
-        <p:txBody>
-          <a:bodyPr xmlns:a="http://schemas.openxmlformats.org/drawingml/2006/main" lIns="0" tIns="0" rIns="0" bIns="0" anchor="ctr"/>
-          <a:lstStyle xmlns:a="http://schemas.openxmlformats.org/drawingml/2006/main"/>
-          <a:p xmlns:a="http://schemas.openxmlformats.org/drawingml/2006/main">
-            <a:pPr>
+            <a:off x="6667500" y="4781550"/>
+            <a:ext cx="4914900" cy="1057275"/>
+          </a:xfrm>
+          <a:prstGeom xmlns:a="http://schemas.openxmlformats.org/drawingml/2006/main" prst="rect">
+            <a:avLst/>
+          </a:prstGeom>
+          <a:noFill xmlns:a="http://schemas.openxmlformats.org/drawingml/2006/main"/>
+          <a:ln xmlns:a="http://schemas.openxmlformats.org/drawingml/2006/main" w="0">
+            <a:noFill/>
+            <a:prstDash val="solid"/>
+          </a:ln>
+        </p:spPr>
+        <p:txBody>
+          <a:bodyPr xmlns:a="http://schemas.openxmlformats.org/drawingml/2006/main" lIns="0" tIns="0" rIns="0" bIns="0" anchor="ctr">
+            <a:noAutofit/>
+          </a:bodyPr>
+          <a:lstStyle xmlns:a="http://schemas.openxmlformats.org/drawingml/2006/main"/>
+          <a:p xmlns:a="http://schemas.openxmlformats.org/drawingml/2006/main">
+            <a:pPr algn="l">
+              <a:buNone/>
               <a:defRPr sz="2175" b="0">
                 <a:solidFill>
                   <a:srgbClr val="28685E"/>
                 </a:solidFill>
+                <a:latin typeface="Calibri"/>
+                <a:ea typeface="Calibri"/>
+                <a:cs typeface="Calibri"/>
               </a:defRPr>
             </a:pPr>
             <a:r>
@@ -6541,6 +8585,9 @@
                 <a:solidFill>
                   <a:srgbClr val="28685E"/>
                 </a:solidFill>
+                <a:latin typeface="Calibri"/>
+                <a:ea typeface="Calibri"/>
+                <a:cs typeface="Calibri"/>
               </a:rPr>
               <a:t>Plan each box before testing.</a:t>
             </a:r>
@@ -6563,7 +8610,7 @@
     <p:bg>
       <p:bgPr>
         <a:solidFill xmlns:a="http://schemas.openxmlformats.org/drawingml/2006/main">
-          <a:srgbClr val="F5F1E8"/>
+          <a:srgbClr val="FAF9F5"/>
         </a:solidFill>
       </p:bgPr>
     </p:bg>
@@ -6592,8 +8639,8 @@
         </p:nvSpPr>
         <p:spPr>
           <a:xfrm xmlns:a="http://schemas.openxmlformats.org/drawingml/2006/main">
-            <a:off x="609600" y="552450"/>
-            <a:ext cx="781050" cy="57150"/>
+            <a:off x="609600" y="733425"/>
+            <a:ext cx="781050" cy="38100"/>
           </a:xfrm>
           <a:prstGeom xmlns:a="http://schemas.openxmlformats.org/drawingml/2006/main" prst="rect">
             <a:avLst/>
@@ -6623,34 +8670,43 @@
         </p:nvSpPr>
         <p:spPr>
           <a:xfrm xmlns:a="http://schemas.openxmlformats.org/drawingml/2006/main">
-            <a:off x="609600" y="762000"/>
-            <a:ext cx="8572500" cy="285750"/>
-          </a:xfrm>
-          <a:prstGeom xmlns:a="http://schemas.openxmlformats.org/drawingml/2006/main" prst="rect">
-            <a:avLst/>
-          </a:prstGeom>
-          <a:noFill xmlns:a="http://schemas.openxmlformats.org/drawingml/2006/main"/>
-          <a:ln xmlns:a="http://schemas.openxmlformats.org/drawingml/2006/main" w="0">
-            <a:noFill/>
-            <a:prstDash val="solid"/>
-          </a:ln>
-        </p:spPr>
-        <p:txBody>
-          <a:bodyPr xmlns:a="http://schemas.openxmlformats.org/drawingml/2006/main" lIns="0" tIns="0" rIns="0" bIns="0" anchor="ctr"/>
-          <a:lstStyle xmlns:a="http://schemas.openxmlformats.org/drawingml/2006/main"/>
-          <a:p xmlns:a="http://schemas.openxmlformats.org/drawingml/2006/main">
-            <a:pPr>
-              <a:defRPr sz="1500" b="1">
+            <a:off x="609600" y="342900"/>
+            <a:ext cx="9334500" cy="304800"/>
+          </a:xfrm>
+          <a:prstGeom xmlns:a="http://schemas.openxmlformats.org/drawingml/2006/main" prst="rect">
+            <a:avLst/>
+          </a:prstGeom>
+          <a:noFill xmlns:a="http://schemas.openxmlformats.org/drawingml/2006/main"/>
+          <a:ln xmlns:a="http://schemas.openxmlformats.org/drawingml/2006/main" w="0">
+            <a:noFill/>
+            <a:prstDash val="solid"/>
+          </a:ln>
+        </p:spPr>
+        <p:txBody>
+          <a:bodyPr xmlns:a="http://schemas.openxmlformats.org/drawingml/2006/main" lIns="0" tIns="0" rIns="0" bIns="0" anchor="ctr">
+            <a:noAutofit/>
+          </a:bodyPr>
+          <a:lstStyle xmlns:a="http://schemas.openxmlformats.org/drawingml/2006/main"/>
+          <a:p xmlns:a="http://schemas.openxmlformats.org/drawingml/2006/main">
+            <a:pPr algn="l">
+              <a:buNone/>
+              <a:defRPr sz="1350" b="1">
                 <a:solidFill>
                   <a:srgbClr val="28685E"/>
                 </a:solidFill>
-              </a:defRPr>
-            </a:pPr>
-            <a:r>
-              <a:rPr sz="1500" b="1">
+                <a:latin typeface="Calibri"/>
+                <a:ea typeface="Calibri"/>
+                <a:cs typeface="Calibri"/>
+              </a:defRPr>
+            </a:pPr>
+            <a:r>
+              <a:rPr sz="1350" b="1">
                 <a:solidFill>
                   <a:srgbClr val="28685E"/>
                 </a:solidFill>
+                <a:latin typeface="Calibri"/>
+                <a:ea typeface="Calibri"/>
+                <a:cs typeface="Calibri"/>
               </a:rPr>
               <a:t>MADE BY MATT  /  GROW SCIENCE</a:t>
             </a:r>
@@ -6673,34 +8729,43 @@
         </p:nvSpPr>
         <p:spPr>
           <a:xfrm xmlns:a="http://schemas.openxmlformats.org/drawingml/2006/main">
-            <a:off x="609600" y="1352550"/>
-            <a:ext cx="10972800" cy="952500"/>
-          </a:xfrm>
-          <a:prstGeom xmlns:a="http://schemas.openxmlformats.org/drawingml/2006/main" prst="rect">
-            <a:avLst/>
-          </a:prstGeom>
-          <a:noFill xmlns:a="http://schemas.openxmlformats.org/drawingml/2006/main"/>
-          <a:ln xmlns:a="http://schemas.openxmlformats.org/drawingml/2006/main" w="0">
-            <a:noFill/>
-            <a:prstDash val="solid"/>
-          </a:ln>
-        </p:spPr>
-        <p:txBody>
-          <a:bodyPr xmlns:a="http://schemas.openxmlformats.org/drawingml/2006/main" lIns="0" tIns="0" rIns="0" bIns="0" anchor="ctr"/>
-          <a:lstStyle xmlns:a="http://schemas.openxmlformats.org/drawingml/2006/main"/>
-          <a:p xmlns:a="http://schemas.openxmlformats.org/drawingml/2006/main">
-            <a:pPr>
-              <a:defRPr sz="3750" b="1">
+            <a:off x="609600" y="990600"/>
+            <a:ext cx="10972800" cy="1000125"/>
+          </a:xfrm>
+          <a:prstGeom xmlns:a="http://schemas.openxmlformats.org/drawingml/2006/main" prst="rect">
+            <a:avLst/>
+          </a:prstGeom>
+          <a:noFill xmlns:a="http://schemas.openxmlformats.org/drawingml/2006/main"/>
+          <a:ln xmlns:a="http://schemas.openxmlformats.org/drawingml/2006/main" w="0">
+            <a:noFill/>
+            <a:prstDash val="solid"/>
+          </a:ln>
+        </p:spPr>
+        <p:txBody>
+          <a:bodyPr xmlns:a="http://schemas.openxmlformats.org/drawingml/2006/main" lIns="0" tIns="0" rIns="0" bIns="0" anchor="ctr">
+            <a:noAutofit/>
+          </a:bodyPr>
+          <a:lstStyle xmlns:a="http://schemas.openxmlformats.org/drawingml/2006/main"/>
+          <a:p xmlns:a="http://schemas.openxmlformats.org/drawingml/2006/main">
+            <a:pPr algn="l">
+              <a:buNone/>
+              <a:defRPr sz="3675" b="1">
                 <a:solidFill>
                   <a:srgbClr val="152B3A"/>
                 </a:solidFill>
-              </a:defRPr>
-            </a:pPr>
-            <a:r>
-              <a:rPr sz="3750" b="1">
+                <a:latin typeface="Calibri"/>
+                <a:ea typeface="Calibri"/>
+                <a:cs typeface="Calibri"/>
+              </a:defRPr>
+            </a:pPr>
+            <a:r>
+              <a:rPr sz="3675" b="1">
                 <a:solidFill>
                   <a:srgbClr val="152B3A"/>
                 </a:solidFill>
+                <a:latin typeface="Calibri"/>
+                <a:ea typeface="Calibri"/>
+                <a:cs typeface="Calibri"/>
               </a:rPr>
               <a:t>Classify the five variables</a:t>
             </a:r>
@@ -6723,14 +8788,14 @@
         </p:nvSpPr>
         <p:spPr>
           <a:xfrm xmlns:a="http://schemas.openxmlformats.org/drawingml/2006/main">
-            <a:off x="609600" y="6219825"/>
+            <a:off x="609600" y="6191250"/>
             <a:ext cx="10972800" cy="9525"/>
           </a:xfrm>
           <a:prstGeom xmlns:a="http://schemas.openxmlformats.org/drawingml/2006/main" prst="rect">
             <a:avLst/>
           </a:prstGeom>
           <a:solidFill xmlns:a="http://schemas.openxmlformats.org/drawingml/2006/main">
-            <a:srgbClr val="DCE7DD"/>
+            <a:srgbClr val="CEDBD3"/>
           </a:solidFill>
           <a:ln xmlns:a="http://schemas.openxmlformats.org/drawingml/2006/main" w="0">
             <a:noFill/>
@@ -6754,34 +8819,43 @@
         </p:nvSpPr>
         <p:spPr>
           <a:xfrm xmlns:a="http://schemas.openxmlformats.org/drawingml/2006/main">
-            <a:off x="609600" y="6381750"/>
-            <a:ext cx="9906000" cy="228600"/>
-          </a:xfrm>
-          <a:prstGeom xmlns:a="http://schemas.openxmlformats.org/drawingml/2006/main" prst="rect">
-            <a:avLst/>
-          </a:prstGeom>
-          <a:noFill xmlns:a="http://schemas.openxmlformats.org/drawingml/2006/main"/>
-          <a:ln xmlns:a="http://schemas.openxmlformats.org/drawingml/2006/main" w="0">
-            <a:noFill/>
-            <a:prstDash val="solid"/>
-          </a:ln>
-        </p:spPr>
-        <p:txBody>
-          <a:bodyPr xmlns:a="http://schemas.openxmlformats.org/drawingml/2006/main" lIns="0" tIns="0" rIns="0" bIns="0" anchor="ctr"/>
-          <a:lstStyle xmlns:a="http://schemas.openxmlformats.org/drawingml/2006/main"/>
-          <a:p xmlns:a="http://schemas.openxmlformats.org/drawingml/2006/main">
-            <a:pPr>
-              <a:defRPr sz="1275" b="0">
+            <a:off x="609600" y="6419850"/>
+            <a:ext cx="9525000" cy="219075"/>
+          </a:xfrm>
+          <a:prstGeom xmlns:a="http://schemas.openxmlformats.org/drawingml/2006/main" prst="rect">
+            <a:avLst/>
+          </a:prstGeom>
+          <a:noFill xmlns:a="http://schemas.openxmlformats.org/drawingml/2006/main"/>
+          <a:ln xmlns:a="http://schemas.openxmlformats.org/drawingml/2006/main" w="0">
+            <a:noFill/>
+            <a:prstDash val="solid"/>
+          </a:ln>
+        </p:spPr>
+        <p:txBody>
+          <a:bodyPr xmlns:a="http://schemas.openxmlformats.org/drawingml/2006/main" lIns="0" tIns="0" rIns="0" bIns="0" anchor="ctr">
+            <a:noAutofit/>
+          </a:bodyPr>
+          <a:lstStyle xmlns:a="http://schemas.openxmlformats.org/drawingml/2006/main"/>
+          <a:p xmlns:a="http://schemas.openxmlformats.org/drawingml/2006/main">
+            <a:pPr algn="l">
+              <a:buNone/>
+              <a:defRPr sz="1200" b="0">
                 <a:solidFill>
                   <a:srgbClr val="50616B"/>
                 </a:solidFill>
-              </a:defRPr>
-            </a:pPr>
-            <a:r>
-              <a:rPr sz="1275" b="0">
+                <a:latin typeface="Calibri"/>
+                <a:ea typeface="Calibri"/>
+                <a:cs typeface="Calibri"/>
+              </a:defRPr>
+            </a:pPr>
+            <a:r>
+              <a:rPr sz="1200" b="0">
                 <a:solidFill>
                   <a:srgbClr val="50616B"/>
                 </a:solidFill>
+                <a:latin typeface="Calibri"/>
+                <a:ea typeface="Calibri"/>
+                <a:cs typeface="Calibri"/>
               </a:rPr>
               <a:t>AUTUMN 1  ·  WEEK 5  ·  LESSON A</a:t>
             </a:r>
@@ -6804,27 +8878,33 @@
         </p:nvSpPr>
         <p:spPr>
           <a:xfrm xmlns:a="http://schemas.openxmlformats.org/drawingml/2006/main">
-            <a:off x="11106150" y="6362700"/>
-            <a:ext cx="476250" cy="238125"/>
-          </a:xfrm>
-          <a:prstGeom xmlns:a="http://schemas.openxmlformats.org/drawingml/2006/main" prst="rect">
-            <a:avLst/>
-          </a:prstGeom>
-          <a:noFill xmlns:a="http://schemas.openxmlformats.org/drawingml/2006/main"/>
-          <a:ln xmlns:a="http://schemas.openxmlformats.org/drawingml/2006/main" w="0">
-            <a:noFill/>
-            <a:prstDash val="solid"/>
-          </a:ln>
-        </p:spPr>
-        <p:txBody>
-          <a:bodyPr xmlns:a="http://schemas.openxmlformats.org/drawingml/2006/main" lIns="0" tIns="0" rIns="0" bIns="0" anchor="ctr"/>
-          <a:lstStyle xmlns:a="http://schemas.openxmlformats.org/drawingml/2006/main"/>
-          <a:p xmlns:a="http://schemas.openxmlformats.org/drawingml/2006/main">
-            <a:pPr>
+            <a:off x="11106150" y="6400800"/>
+            <a:ext cx="476250" cy="247650"/>
+          </a:xfrm>
+          <a:prstGeom xmlns:a="http://schemas.openxmlformats.org/drawingml/2006/main" prst="rect">
+            <a:avLst/>
+          </a:prstGeom>
+          <a:noFill xmlns:a="http://schemas.openxmlformats.org/drawingml/2006/main"/>
+          <a:ln xmlns:a="http://schemas.openxmlformats.org/drawingml/2006/main" w="0">
+            <a:noFill/>
+            <a:prstDash val="solid"/>
+          </a:ln>
+        </p:spPr>
+        <p:txBody>
+          <a:bodyPr xmlns:a="http://schemas.openxmlformats.org/drawingml/2006/main" lIns="0" tIns="0" rIns="0" bIns="0" anchor="ctr">
+            <a:noAutofit/>
+          </a:bodyPr>
+          <a:lstStyle xmlns:a="http://schemas.openxmlformats.org/drawingml/2006/main"/>
+          <a:p xmlns:a="http://schemas.openxmlformats.org/drawingml/2006/main">
+            <a:pPr algn="l">
+              <a:buNone/>
               <a:defRPr sz="1350" b="1">
                 <a:solidFill>
                   <a:srgbClr val="28685E"/>
                 </a:solidFill>
+                <a:latin typeface="Calibri"/>
+                <a:ea typeface="Calibri"/>
+                <a:cs typeface="Calibri"/>
               </a:defRPr>
             </a:pPr>
             <a:r>
@@ -6832,6 +8912,9 @@
                 <a:solidFill>
                   <a:srgbClr val="28685E"/>
                 </a:solidFill>
+                <a:latin typeface="Calibri"/>
+                <a:ea typeface="Calibri"/>
+                <a:cs typeface="Calibri"/>
               </a:rPr>
               <a:t>06</a:t>
             </a:r>
@@ -6854,34 +8937,43 @@
         </p:nvSpPr>
         <p:spPr>
           <a:xfrm xmlns:a="http://schemas.openxmlformats.org/drawingml/2006/main">
-            <a:off x="609600" y="2619375"/>
-            <a:ext cx="10972800" cy="533400"/>
-          </a:xfrm>
-          <a:prstGeom xmlns:a="http://schemas.openxmlformats.org/drawingml/2006/main" prst="rect">
-            <a:avLst/>
-          </a:prstGeom>
-          <a:noFill xmlns:a="http://schemas.openxmlformats.org/drawingml/2006/main"/>
-          <a:ln xmlns:a="http://schemas.openxmlformats.org/drawingml/2006/main" w="0">
-            <a:noFill/>
-            <a:prstDash val="solid"/>
-          </a:ln>
-        </p:spPr>
-        <p:txBody>
-          <a:bodyPr xmlns:a="http://schemas.openxmlformats.org/drawingml/2006/main" lIns="0" tIns="0" rIns="0" bIns="0" anchor="ctr"/>
-          <a:lstStyle xmlns:a="http://schemas.openxmlformats.org/drawingml/2006/main"/>
-          <a:p xmlns:a="http://schemas.openxmlformats.org/drawingml/2006/main">
-            <a:pPr>
-              <a:defRPr sz="2175" b="0">
+            <a:off x="1000125" y="2333625"/>
+            <a:ext cx="10382250" cy="622935"/>
+          </a:xfrm>
+          <a:prstGeom xmlns:a="http://schemas.openxmlformats.org/drawingml/2006/main" prst="rect">
+            <a:avLst/>
+          </a:prstGeom>
+          <a:noFill xmlns:a="http://schemas.openxmlformats.org/drawingml/2006/main"/>
+          <a:ln xmlns:a="http://schemas.openxmlformats.org/drawingml/2006/main" w="0">
+            <a:noFill/>
+            <a:prstDash val="solid"/>
+          </a:ln>
+        </p:spPr>
+        <p:txBody>
+          <a:bodyPr xmlns:a="http://schemas.openxmlformats.org/drawingml/2006/main" lIns="0" tIns="0" rIns="0" bIns="0" anchor="ctr">
+            <a:noAutofit/>
+          </a:bodyPr>
+          <a:lstStyle xmlns:a="http://schemas.openxmlformats.org/drawingml/2006/main"/>
+          <a:p xmlns:a="http://schemas.openxmlformats.org/drawingml/2006/main">
+            <a:pPr algn="l">
+              <a:buNone/>
+              <a:defRPr sz="2400" b="0">
                 <a:solidFill>
                   <a:srgbClr val="152B3A"/>
                 </a:solidFill>
-              </a:defRPr>
-            </a:pPr>
-            <a:r>
-              <a:rPr sz="2175" b="0">
+                <a:latin typeface="Calibri"/>
+                <a:ea typeface="Calibri"/>
+                <a:cs typeface="Calibri"/>
+              </a:defRPr>
+            </a:pPr>
+            <a:r>
+              <a:rPr sz="2400" b="0">
                 <a:solidFill>
                   <a:srgbClr val="152B3A"/>
                 </a:solidFill>
+                <a:latin typeface="Calibri"/>
+                <a:ea typeface="Calibri"/>
+                <a:cs typeface="Calibri"/>
               </a:rPr>
               <a:t>The surface the trolley rolls on</a:t>
             </a:r>
@@ -6904,34 +8996,43 @@
         </p:nvSpPr>
         <p:spPr>
           <a:xfrm xmlns:a="http://schemas.openxmlformats.org/drawingml/2006/main">
-            <a:off x="609600" y="3228975"/>
-            <a:ext cx="10972800" cy="533400"/>
-          </a:xfrm>
-          <a:prstGeom xmlns:a="http://schemas.openxmlformats.org/drawingml/2006/main" prst="rect">
-            <a:avLst/>
-          </a:prstGeom>
-          <a:noFill xmlns:a="http://schemas.openxmlformats.org/drawingml/2006/main"/>
-          <a:ln xmlns:a="http://schemas.openxmlformats.org/drawingml/2006/main" w="0">
-            <a:noFill/>
-            <a:prstDash val="solid"/>
-          </a:ln>
-        </p:spPr>
-        <p:txBody>
-          <a:bodyPr xmlns:a="http://schemas.openxmlformats.org/drawingml/2006/main" lIns="0" tIns="0" rIns="0" bIns="0" anchor="ctr"/>
-          <a:lstStyle xmlns:a="http://schemas.openxmlformats.org/drawingml/2006/main"/>
-          <a:p xmlns:a="http://schemas.openxmlformats.org/drawingml/2006/main">
-            <a:pPr>
-              <a:defRPr sz="2175" b="0">
+            <a:off x="1000125" y="3013710"/>
+            <a:ext cx="10382250" cy="622935"/>
+          </a:xfrm>
+          <a:prstGeom xmlns:a="http://schemas.openxmlformats.org/drawingml/2006/main" prst="rect">
+            <a:avLst/>
+          </a:prstGeom>
+          <a:noFill xmlns:a="http://schemas.openxmlformats.org/drawingml/2006/main"/>
+          <a:ln xmlns:a="http://schemas.openxmlformats.org/drawingml/2006/main" w="0">
+            <a:noFill/>
+            <a:prstDash val="solid"/>
+          </a:ln>
+        </p:spPr>
+        <p:txBody>
+          <a:bodyPr xmlns:a="http://schemas.openxmlformats.org/drawingml/2006/main" lIns="0" tIns="0" rIns="0" bIns="0" anchor="ctr">
+            <a:noAutofit/>
+          </a:bodyPr>
+          <a:lstStyle xmlns:a="http://schemas.openxmlformats.org/drawingml/2006/main"/>
+          <a:p xmlns:a="http://schemas.openxmlformats.org/drawingml/2006/main">
+            <a:pPr algn="l">
+              <a:buNone/>
+              <a:defRPr sz="2400" b="0">
                 <a:solidFill>
                   <a:srgbClr val="152B3A"/>
                 </a:solidFill>
-              </a:defRPr>
-            </a:pPr>
-            <a:r>
-              <a:rPr sz="2175" b="0">
+                <a:latin typeface="Calibri"/>
+                <a:ea typeface="Calibri"/>
+                <a:cs typeface="Calibri"/>
+              </a:defRPr>
+            </a:pPr>
+            <a:r>
+              <a:rPr sz="2400" b="0">
                 <a:solidFill>
                   <a:srgbClr val="152B3A"/>
                 </a:solidFill>
+                <a:latin typeface="Calibri"/>
+                <a:ea typeface="Calibri"/>
+                <a:cs typeface="Calibri"/>
               </a:rPr>
               <a:t>Distance the trolley travels</a:t>
             </a:r>
@@ -6954,34 +9055,43 @@
         </p:nvSpPr>
         <p:spPr>
           <a:xfrm xmlns:a="http://schemas.openxmlformats.org/drawingml/2006/main">
-            <a:off x="609600" y="3838575"/>
-            <a:ext cx="10972800" cy="533400"/>
-          </a:xfrm>
-          <a:prstGeom xmlns:a="http://schemas.openxmlformats.org/drawingml/2006/main" prst="rect">
-            <a:avLst/>
-          </a:prstGeom>
-          <a:noFill xmlns:a="http://schemas.openxmlformats.org/drawingml/2006/main"/>
-          <a:ln xmlns:a="http://schemas.openxmlformats.org/drawingml/2006/main" w="0">
-            <a:noFill/>
-            <a:prstDash val="solid"/>
-          </a:ln>
-        </p:spPr>
-        <p:txBody>
-          <a:bodyPr xmlns:a="http://schemas.openxmlformats.org/drawingml/2006/main" lIns="0" tIns="0" rIns="0" bIns="0" anchor="ctr"/>
-          <a:lstStyle xmlns:a="http://schemas.openxmlformats.org/drawingml/2006/main"/>
-          <a:p xmlns:a="http://schemas.openxmlformats.org/drawingml/2006/main">
-            <a:pPr>
-              <a:defRPr sz="2175" b="0">
+            <a:off x="1000125" y="3693795"/>
+            <a:ext cx="10382250" cy="622935"/>
+          </a:xfrm>
+          <a:prstGeom xmlns:a="http://schemas.openxmlformats.org/drawingml/2006/main" prst="rect">
+            <a:avLst/>
+          </a:prstGeom>
+          <a:noFill xmlns:a="http://schemas.openxmlformats.org/drawingml/2006/main"/>
+          <a:ln xmlns:a="http://schemas.openxmlformats.org/drawingml/2006/main" w="0">
+            <a:noFill/>
+            <a:prstDash val="solid"/>
+          </a:ln>
+        </p:spPr>
+        <p:txBody>
+          <a:bodyPr xmlns:a="http://schemas.openxmlformats.org/drawingml/2006/main" lIns="0" tIns="0" rIns="0" bIns="0" anchor="ctr">
+            <a:noAutofit/>
+          </a:bodyPr>
+          <a:lstStyle xmlns:a="http://schemas.openxmlformats.org/drawingml/2006/main"/>
+          <a:p xmlns:a="http://schemas.openxmlformats.org/drawingml/2006/main">
+            <a:pPr algn="l">
+              <a:buNone/>
+              <a:defRPr sz="2400" b="0">
                 <a:solidFill>
                   <a:srgbClr val="152B3A"/>
                 </a:solidFill>
-              </a:defRPr>
-            </a:pPr>
-            <a:r>
-              <a:rPr sz="2175" b="0">
+                <a:latin typeface="Calibri"/>
+                <a:ea typeface="Calibri"/>
+                <a:cs typeface="Calibri"/>
+              </a:defRPr>
+            </a:pPr>
+            <a:r>
+              <a:rPr sz="2400" b="0">
                 <a:solidFill>
                   <a:srgbClr val="152B3A"/>
                 </a:solidFill>
+                <a:latin typeface="Calibri"/>
+                <a:ea typeface="Calibri"/>
+                <a:cs typeface="Calibri"/>
               </a:rPr>
               <a:t>Height of the ramp</a:t>
             </a:r>
@@ -7004,34 +9114,43 @@
         </p:nvSpPr>
         <p:spPr>
           <a:xfrm xmlns:a="http://schemas.openxmlformats.org/drawingml/2006/main">
-            <a:off x="609600" y="4448175"/>
-            <a:ext cx="10972800" cy="533400"/>
-          </a:xfrm>
-          <a:prstGeom xmlns:a="http://schemas.openxmlformats.org/drawingml/2006/main" prst="rect">
-            <a:avLst/>
-          </a:prstGeom>
-          <a:noFill xmlns:a="http://schemas.openxmlformats.org/drawingml/2006/main"/>
-          <a:ln xmlns:a="http://schemas.openxmlformats.org/drawingml/2006/main" w="0">
-            <a:noFill/>
-            <a:prstDash val="solid"/>
-          </a:ln>
-        </p:spPr>
-        <p:txBody>
-          <a:bodyPr xmlns:a="http://schemas.openxmlformats.org/drawingml/2006/main" lIns="0" tIns="0" rIns="0" bIns="0" anchor="ctr"/>
-          <a:lstStyle xmlns:a="http://schemas.openxmlformats.org/drawingml/2006/main"/>
-          <a:p xmlns:a="http://schemas.openxmlformats.org/drawingml/2006/main">
-            <a:pPr>
-              <a:defRPr sz="2175" b="0">
+            <a:off x="1000125" y="4373880"/>
+            <a:ext cx="10382250" cy="622935"/>
+          </a:xfrm>
+          <a:prstGeom xmlns:a="http://schemas.openxmlformats.org/drawingml/2006/main" prst="rect">
+            <a:avLst/>
+          </a:prstGeom>
+          <a:noFill xmlns:a="http://schemas.openxmlformats.org/drawingml/2006/main"/>
+          <a:ln xmlns:a="http://schemas.openxmlformats.org/drawingml/2006/main" w="0">
+            <a:noFill/>
+            <a:prstDash val="solid"/>
+          </a:ln>
+        </p:spPr>
+        <p:txBody>
+          <a:bodyPr xmlns:a="http://schemas.openxmlformats.org/drawingml/2006/main" lIns="0" tIns="0" rIns="0" bIns="0" anchor="ctr">
+            <a:noAutofit/>
+          </a:bodyPr>
+          <a:lstStyle xmlns:a="http://schemas.openxmlformats.org/drawingml/2006/main"/>
+          <a:p xmlns:a="http://schemas.openxmlformats.org/drawingml/2006/main">
+            <a:pPr algn="l">
+              <a:buNone/>
+              <a:defRPr sz="2400" b="0">
                 <a:solidFill>
                   <a:srgbClr val="152B3A"/>
                 </a:solidFill>
-              </a:defRPr>
-            </a:pPr>
-            <a:r>
-              <a:rPr sz="2175" b="0">
+                <a:latin typeface="Calibri"/>
+                <a:ea typeface="Calibri"/>
+                <a:cs typeface="Calibri"/>
+              </a:defRPr>
+            </a:pPr>
+            <a:r>
+              <a:rPr sz="2400" b="0">
                 <a:solidFill>
                   <a:srgbClr val="152B3A"/>
                 </a:solidFill>
+                <a:latin typeface="Calibri"/>
+                <a:ea typeface="Calibri"/>
+                <a:cs typeface="Calibri"/>
               </a:rPr>
               <a:t>Which trolley we use</a:t>
             </a:r>
@@ -7054,36 +9173,450 @@
         </p:nvSpPr>
         <p:spPr>
           <a:xfrm xmlns:a="http://schemas.openxmlformats.org/drawingml/2006/main">
-            <a:off x="609600" y="5057775"/>
-            <a:ext cx="10972800" cy="533400"/>
-          </a:xfrm>
-          <a:prstGeom xmlns:a="http://schemas.openxmlformats.org/drawingml/2006/main" prst="rect">
-            <a:avLst/>
-          </a:prstGeom>
-          <a:noFill xmlns:a="http://schemas.openxmlformats.org/drawingml/2006/main"/>
-          <a:ln xmlns:a="http://schemas.openxmlformats.org/drawingml/2006/main" w="0">
-            <a:noFill/>
-            <a:prstDash val="solid"/>
-          </a:ln>
-        </p:spPr>
-        <p:txBody>
-          <a:bodyPr xmlns:a="http://schemas.openxmlformats.org/drawingml/2006/main" lIns="0" tIns="0" rIns="0" bIns="0" anchor="ctr"/>
-          <a:lstStyle xmlns:a="http://schemas.openxmlformats.org/drawingml/2006/main"/>
-          <a:p xmlns:a="http://schemas.openxmlformats.org/drawingml/2006/main">
-            <a:pPr>
-              <a:defRPr sz="2175" b="0">
+            <a:off x="1000125" y="5053965"/>
+            <a:ext cx="10382250" cy="622935"/>
+          </a:xfrm>
+          <a:prstGeom xmlns:a="http://schemas.openxmlformats.org/drawingml/2006/main" prst="rect">
+            <a:avLst/>
+          </a:prstGeom>
+          <a:noFill xmlns:a="http://schemas.openxmlformats.org/drawingml/2006/main"/>
+          <a:ln xmlns:a="http://schemas.openxmlformats.org/drawingml/2006/main" w="0">
+            <a:noFill/>
+            <a:prstDash val="solid"/>
+          </a:ln>
+        </p:spPr>
+        <p:txBody>
+          <a:bodyPr xmlns:a="http://schemas.openxmlformats.org/drawingml/2006/main" lIns="0" tIns="0" rIns="0" bIns="0" anchor="ctr">
+            <a:noAutofit/>
+          </a:bodyPr>
+          <a:lstStyle xmlns:a="http://schemas.openxmlformats.org/drawingml/2006/main"/>
+          <a:p xmlns:a="http://schemas.openxmlformats.org/drawingml/2006/main">
+            <a:pPr algn="l">
+              <a:buNone/>
+              <a:defRPr sz="2400" b="0">
                 <a:solidFill>
                   <a:srgbClr val="152B3A"/>
                 </a:solidFill>
-              </a:defRPr>
-            </a:pPr>
-            <a:r>
-              <a:rPr sz="2175" b="0">
+                <a:latin typeface="Calibri"/>
+                <a:ea typeface="Calibri"/>
+                <a:cs typeface="Calibri"/>
+              </a:defRPr>
+            </a:pPr>
+            <a:r>
+              <a:rPr sz="2400" b="0">
                 <a:solidFill>
                   <a:srgbClr val="152B3A"/>
                 </a:solidFill>
+                <a:latin typeface="Calibri"/>
+                <a:ea typeface="Calibri"/>
+                <a:cs typeface="Calibri"/>
               </a:rPr>
               <a:t>How the trolley is released</a:t>
+            </a:r>
+          </a:p>
+        </p:txBody>
+      </p:sp>
+      <p:sp>
+        <p:nvSpPr>
+          <p:cNvPr id="13" name="cue-0">
+            <a:extLst xmlns:a="http://schemas.openxmlformats.org/drawingml/2006/main">
+              <a:ext uri="{FF2B5EF4-FFF2-40B4-BE49-F238E27FC236}">
+                <a16:creationId xmlns:a16="http://schemas.microsoft.com/office/drawing/2014/main" id="{70E98127-9594-4002-BB10-A2D92EE9E1D0}"/>
+              </a:ext>
+            </a:extLst>
+          </p:cNvPr>
+          <p:cNvSpPr>
+            <a:spLocks xmlns:a="http://schemas.openxmlformats.org/drawingml/2006/main" noGrp="1"/>
+          </p:cNvSpPr>
+          <p:nvPr/>
+        </p:nvSpPr>
+        <p:spPr>
+          <a:xfrm xmlns:a="http://schemas.openxmlformats.org/drawingml/2006/main">
+            <a:off x="609600" y="2362200"/>
+            <a:ext cx="323850" cy="323850"/>
+          </a:xfrm>
+          <a:prstGeom xmlns:a="http://schemas.openxmlformats.org/drawingml/2006/main" prst="rect">
+            <a:avLst/>
+          </a:prstGeom>
+          <a:noFill xmlns:a="http://schemas.openxmlformats.org/drawingml/2006/main"/>
+          <a:ln xmlns:a="http://schemas.openxmlformats.org/drawingml/2006/main" w="0">
+            <a:noFill/>
+          </a:ln>
+        </p:spPr>
+        <p:txBody>
+          <a:bodyPr xmlns:a="http://schemas.openxmlformats.org/drawingml/2006/main" lIns="0" tIns="0" rIns="0" bIns="0" anchor="ctr">
+            <a:noAutofit/>
+          </a:bodyPr>
+          <a:lstStyle xmlns:a="http://schemas.openxmlformats.org/drawingml/2006/main"/>
+          <a:p xmlns:a="http://schemas.openxmlformats.org/drawingml/2006/main">
+            <a:pPr algn="l">
+              <a:defRPr sz="1350" b="1">
+                <a:solidFill>
+                  <a:srgbClr val="28685E"/>
+                </a:solidFill>
+                <a:latin typeface="Calibri"/>
+                <a:ea typeface="Calibri"/>
+                <a:cs typeface="Calibri"/>
+              </a:defRPr>
+            </a:pPr>
+            <a:r>
+              <a:rPr sz="1350" b="1">
+                <a:solidFill>
+                  <a:srgbClr val="28685E"/>
+                </a:solidFill>
+                <a:latin typeface="Calibri"/>
+                <a:ea typeface="Calibri"/>
+                <a:cs typeface="Calibri"/>
+              </a:rPr>
+              <a:t>01</a:t>
+            </a:r>
+          </a:p>
+        </p:txBody>
+      </p:sp>
+      <p:sp>
+        <p:nvSpPr>
+          <p:cNvPr id="14" name="row-rule-0">
+            <a:extLst xmlns:a="http://schemas.openxmlformats.org/drawingml/2006/main">
+              <a:ext uri="{FF2B5EF4-FFF2-40B4-BE49-F238E27FC236}">
+                <a16:creationId xmlns:a16="http://schemas.microsoft.com/office/drawing/2014/main" id="{E031D3DD-2BC5-4C47-B172-C38AD6ACEF94}"/>
+              </a:ext>
+            </a:extLst>
+          </p:cNvPr>
+          <p:cNvSpPr>
+            <a:spLocks xmlns:a="http://schemas.openxmlformats.org/drawingml/2006/main" noGrp="1"/>
+          </p:cNvSpPr>
+          <p:nvPr/>
+        </p:nvSpPr>
+        <p:spPr>
+          <a:xfrm xmlns:a="http://schemas.openxmlformats.org/drawingml/2006/main">
+            <a:off x="1000125" y="2966085"/>
+            <a:ext cx="10334625" cy="0"/>
+          </a:xfrm>
+          <a:prstGeom xmlns:a="http://schemas.openxmlformats.org/drawingml/2006/main" prst="line">
+            <a:avLst/>
+          </a:prstGeom>
+          <a:noFill xmlns:a="http://schemas.openxmlformats.org/drawingml/2006/main"/>
+          <a:ln xmlns:a="http://schemas.openxmlformats.org/drawingml/2006/main" w="9525">
+            <a:solidFill>
+              <a:srgbClr val="CEDBD3"/>
+            </a:solidFill>
+          </a:ln>
+        </p:spPr>
+      </p:sp>
+      <p:sp>
+        <p:nvSpPr>
+          <p:cNvPr id="15" name="cue-1">
+            <a:extLst xmlns:a="http://schemas.openxmlformats.org/drawingml/2006/main">
+              <a:ext uri="{FF2B5EF4-FFF2-40B4-BE49-F238E27FC236}">
+                <a16:creationId xmlns:a16="http://schemas.microsoft.com/office/drawing/2014/main" id="{2CA9D404-DD4E-45E7-9AC5-650491DDCA47}"/>
+              </a:ext>
+            </a:extLst>
+          </p:cNvPr>
+          <p:cNvSpPr>
+            <a:spLocks xmlns:a="http://schemas.openxmlformats.org/drawingml/2006/main" noGrp="1"/>
+          </p:cNvSpPr>
+          <p:nvPr/>
+        </p:nvSpPr>
+        <p:spPr>
+          <a:xfrm xmlns:a="http://schemas.openxmlformats.org/drawingml/2006/main">
+            <a:off x="609600" y="3042285"/>
+            <a:ext cx="323850" cy="323850"/>
+          </a:xfrm>
+          <a:prstGeom xmlns:a="http://schemas.openxmlformats.org/drawingml/2006/main" prst="rect">
+            <a:avLst/>
+          </a:prstGeom>
+          <a:noFill xmlns:a="http://schemas.openxmlformats.org/drawingml/2006/main"/>
+          <a:ln xmlns:a="http://schemas.openxmlformats.org/drawingml/2006/main" w="0">
+            <a:noFill/>
+          </a:ln>
+        </p:spPr>
+        <p:txBody>
+          <a:bodyPr xmlns:a="http://schemas.openxmlformats.org/drawingml/2006/main" lIns="0" tIns="0" rIns="0" bIns="0" anchor="ctr">
+            <a:noAutofit/>
+          </a:bodyPr>
+          <a:lstStyle xmlns:a="http://schemas.openxmlformats.org/drawingml/2006/main"/>
+          <a:p xmlns:a="http://schemas.openxmlformats.org/drawingml/2006/main">
+            <a:pPr algn="l">
+              <a:defRPr sz="1350" b="1">
+                <a:solidFill>
+                  <a:srgbClr val="28685E"/>
+                </a:solidFill>
+                <a:latin typeface="Calibri"/>
+                <a:ea typeface="Calibri"/>
+                <a:cs typeface="Calibri"/>
+              </a:defRPr>
+            </a:pPr>
+            <a:r>
+              <a:rPr sz="1350" b="1">
+                <a:solidFill>
+                  <a:srgbClr val="28685E"/>
+                </a:solidFill>
+                <a:latin typeface="Calibri"/>
+                <a:ea typeface="Calibri"/>
+                <a:cs typeface="Calibri"/>
+              </a:rPr>
+              <a:t>02</a:t>
+            </a:r>
+          </a:p>
+        </p:txBody>
+      </p:sp>
+      <p:sp>
+        <p:nvSpPr>
+          <p:cNvPr id="16" name="row-rule-1">
+            <a:extLst xmlns:a="http://schemas.openxmlformats.org/drawingml/2006/main">
+              <a:ext uri="{FF2B5EF4-FFF2-40B4-BE49-F238E27FC236}">
+                <a16:creationId xmlns:a16="http://schemas.microsoft.com/office/drawing/2014/main" id="{4E89F186-E88F-48EB-AE05-D5F4C6B7098F}"/>
+              </a:ext>
+            </a:extLst>
+          </p:cNvPr>
+          <p:cNvSpPr>
+            <a:spLocks xmlns:a="http://schemas.openxmlformats.org/drawingml/2006/main" noGrp="1"/>
+          </p:cNvSpPr>
+          <p:nvPr/>
+        </p:nvSpPr>
+        <p:spPr>
+          <a:xfrm xmlns:a="http://schemas.openxmlformats.org/drawingml/2006/main">
+            <a:off x="1000125" y="3646170"/>
+            <a:ext cx="10334625" cy="0"/>
+          </a:xfrm>
+          <a:prstGeom xmlns:a="http://schemas.openxmlformats.org/drawingml/2006/main" prst="line">
+            <a:avLst/>
+          </a:prstGeom>
+          <a:noFill xmlns:a="http://schemas.openxmlformats.org/drawingml/2006/main"/>
+          <a:ln xmlns:a="http://schemas.openxmlformats.org/drawingml/2006/main" w="9525">
+            <a:solidFill>
+              <a:srgbClr val="CEDBD3"/>
+            </a:solidFill>
+          </a:ln>
+        </p:spPr>
+      </p:sp>
+      <p:sp>
+        <p:nvSpPr>
+          <p:cNvPr id="17" name="cue-2">
+            <a:extLst xmlns:a="http://schemas.openxmlformats.org/drawingml/2006/main">
+              <a:ext uri="{FF2B5EF4-FFF2-40B4-BE49-F238E27FC236}">
+                <a16:creationId xmlns:a16="http://schemas.microsoft.com/office/drawing/2014/main" id="{3808E86F-FAE0-46BE-A177-A0668C377A94}"/>
+              </a:ext>
+            </a:extLst>
+          </p:cNvPr>
+          <p:cNvSpPr>
+            <a:spLocks xmlns:a="http://schemas.openxmlformats.org/drawingml/2006/main" noGrp="1"/>
+          </p:cNvSpPr>
+          <p:nvPr/>
+        </p:nvSpPr>
+        <p:spPr>
+          <a:xfrm xmlns:a="http://schemas.openxmlformats.org/drawingml/2006/main">
+            <a:off x="609600" y="3722370"/>
+            <a:ext cx="323850" cy="323850"/>
+          </a:xfrm>
+          <a:prstGeom xmlns:a="http://schemas.openxmlformats.org/drawingml/2006/main" prst="rect">
+            <a:avLst/>
+          </a:prstGeom>
+          <a:noFill xmlns:a="http://schemas.openxmlformats.org/drawingml/2006/main"/>
+          <a:ln xmlns:a="http://schemas.openxmlformats.org/drawingml/2006/main" w="0">
+            <a:noFill/>
+          </a:ln>
+        </p:spPr>
+        <p:txBody>
+          <a:bodyPr xmlns:a="http://schemas.openxmlformats.org/drawingml/2006/main" lIns="0" tIns="0" rIns="0" bIns="0" anchor="ctr">
+            <a:noAutofit/>
+          </a:bodyPr>
+          <a:lstStyle xmlns:a="http://schemas.openxmlformats.org/drawingml/2006/main"/>
+          <a:p xmlns:a="http://schemas.openxmlformats.org/drawingml/2006/main">
+            <a:pPr algn="l">
+              <a:defRPr sz="1350" b="1">
+                <a:solidFill>
+                  <a:srgbClr val="28685E"/>
+                </a:solidFill>
+                <a:latin typeface="Calibri"/>
+                <a:ea typeface="Calibri"/>
+                <a:cs typeface="Calibri"/>
+              </a:defRPr>
+            </a:pPr>
+            <a:r>
+              <a:rPr sz="1350" b="1">
+                <a:solidFill>
+                  <a:srgbClr val="28685E"/>
+                </a:solidFill>
+                <a:latin typeface="Calibri"/>
+                <a:ea typeface="Calibri"/>
+                <a:cs typeface="Calibri"/>
+              </a:rPr>
+              <a:t>03</a:t>
+            </a:r>
+          </a:p>
+        </p:txBody>
+      </p:sp>
+      <p:sp>
+        <p:nvSpPr>
+          <p:cNvPr id="18" name="row-rule-2">
+            <a:extLst xmlns:a="http://schemas.openxmlformats.org/drawingml/2006/main">
+              <a:ext uri="{FF2B5EF4-FFF2-40B4-BE49-F238E27FC236}">
+                <a16:creationId xmlns:a16="http://schemas.microsoft.com/office/drawing/2014/main" id="{DBE32EE7-740C-4535-9BC4-1616BC90EB9D}"/>
+              </a:ext>
+            </a:extLst>
+          </p:cNvPr>
+          <p:cNvSpPr>
+            <a:spLocks xmlns:a="http://schemas.openxmlformats.org/drawingml/2006/main" noGrp="1"/>
+          </p:cNvSpPr>
+          <p:nvPr/>
+        </p:nvSpPr>
+        <p:spPr>
+          <a:xfrm xmlns:a="http://schemas.openxmlformats.org/drawingml/2006/main">
+            <a:off x="1000125" y="4326255"/>
+            <a:ext cx="10334625" cy="0"/>
+          </a:xfrm>
+          <a:prstGeom xmlns:a="http://schemas.openxmlformats.org/drawingml/2006/main" prst="line">
+            <a:avLst/>
+          </a:prstGeom>
+          <a:noFill xmlns:a="http://schemas.openxmlformats.org/drawingml/2006/main"/>
+          <a:ln xmlns:a="http://schemas.openxmlformats.org/drawingml/2006/main" w="9525">
+            <a:solidFill>
+              <a:srgbClr val="CEDBD3"/>
+            </a:solidFill>
+          </a:ln>
+        </p:spPr>
+      </p:sp>
+      <p:sp>
+        <p:nvSpPr>
+          <p:cNvPr id="19" name="cue-3">
+            <a:extLst xmlns:a="http://schemas.openxmlformats.org/drawingml/2006/main">
+              <a:ext uri="{FF2B5EF4-FFF2-40B4-BE49-F238E27FC236}">
+                <a16:creationId xmlns:a16="http://schemas.microsoft.com/office/drawing/2014/main" id="{5CF74301-4EE9-4ED1-B484-52A859E080A6}"/>
+              </a:ext>
+            </a:extLst>
+          </p:cNvPr>
+          <p:cNvSpPr>
+            <a:spLocks xmlns:a="http://schemas.openxmlformats.org/drawingml/2006/main" noGrp="1"/>
+          </p:cNvSpPr>
+          <p:nvPr/>
+        </p:nvSpPr>
+        <p:spPr>
+          <a:xfrm xmlns:a="http://schemas.openxmlformats.org/drawingml/2006/main">
+            <a:off x="609600" y="4402455"/>
+            <a:ext cx="323850" cy="323850"/>
+          </a:xfrm>
+          <a:prstGeom xmlns:a="http://schemas.openxmlformats.org/drawingml/2006/main" prst="rect">
+            <a:avLst/>
+          </a:prstGeom>
+          <a:noFill xmlns:a="http://schemas.openxmlformats.org/drawingml/2006/main"/>
+          <a:ln xmlns:a="http://schemas.openxmlformats.org/drawingml/2006/main" w="0">
+            <a:noFill/>
+          </a:ln>
+        </p:spPr>
+        <p:txBody>
+          <a:bodyPr xmlns:a="http://schemas.openxmlformats.org/drawingml/2006/main" lIns="0" tIns="0" rIns="0" bIns="0" anchor="ctr">
+            <a:noAutofit/>
+          </a:bodyPr>
+          <a:lstStyle xmlns:a="http://schemas.openxmlformats.org/drawingml/2006/main"/>
+          <a:p xmlns:a="http://schemas.openxmlformats.org/drawingml/2006/main">
+            <a:pPr algn="l">
+              <a:defRPr sz="1350" b="1">
+                <a:solidFill>
+                  <a:srgbClr val="28685E"/>
+                </a:solidFill>
+                <a:latin typeface="Calibri"/>
+                <a:ea typeface="Calibri"/>
+                <a:cs typeface="Calibri"/>
+              </a:defRPr>
+            </a:pPr>
+            <a:r>
+              <a:rPr sz="1350" b="1">
+                <a:solidFill>
+                  <a:srgbClr val="28685E"/>
+                </a:solidFill>
+                <a:latin typeface="Calibri"/>
+                <a:ea typeface="Calibri"/>
+                <a:cs typeface="Calibri"/>
+              </a:rPr>
+              <a:t>04</a:t>
+            </a:r>
+          </a:p>
+        </p:txBody>
+      </p:sp>
+      <p:sp>
+        <p:nvSpPr>
+          <p:cNvPr id="20" name="row-rule-3">
+            <a:extLst xmlns:a="http://schemas.openxmlformats.org/drawingml/2006/main">
+              <a:ext uri="{FF2B5EF4-FFF2-40B4-BE49-F238E27FC236}">
+                <a16:creationId xmlns:a16="http://schemas.microsoft.com/office/drawing/2014/main" id="{4CD4D408-E15A-4C69-9E82-65571ED88D65}"/>
+              </a:ext>
+            </a:extLst>
+          </p:cNvPr>
+          <p:cNvSpPr>
+            <a:spLocks xmlns:a="http://schemas.openxmlformats.org/drawingml/2006/main" noGrp="1"/>
+          </p:cNvSpPr>
+          <p:nvPr/>
+        </p:nvSpPr>
+        <p:spPr>
+          <a:xfrm xmlns:a="http://schemas.openxmlformats.org/drawingml/2006/main">
+            <a:off x="1000125" y="5006340"/>
+            <a:ext cx="10334625" cy="0"/>
+          </a:xfrm>
+          <a:prstGeom xmlns:a="http://schemas.openxmlformats.org/drawingml/2006/main" prst="line">
+            <a:avLst/>
+          </a:prstGeom>
+          <a:noFill xmlns:a="http://schemas.openxmlformats.org/drawingml/2006/main"/>
+          <a:ln xmlns:a="http://schemas.openxmlformats.org/drawingml/2006/main" w="9525">
+            <a:solidFill>
+              <a:srgbClr val="CEDBD3"/>
+            </a:solidFill>
+          </a:ln>
+        </p:spPr>
+      </p:sp>
+      <p:sp>
+        <p:nvSpPr>
+          <p:cNvPr id="21" name="cue-4">
+            <a:extLst xmlns:a="http://schemas.openxmlformats.org/drawingml/2006/main">
+              <a:ext uri="{FF2B5EF4-FFF2-40B4-BE49-F238E27FC236}">
+                <a16:creationId xmlns:a16="http://schemas.microsoft.com/office/drawing/2014/main" id="{71580AC3-8514-4A8C-A6ED-693DB4BEC27A}"/>
+              </a:ext>
+            </a:extLst>
+          </p:cNvPr>
+          <p:cNvSpPr>
+            <a:spLocks xmlns:a="http://schemas.openxmlformats.org/drawingml/2006/main" noGrp="1"/>
+          </p:cNvSpPr>
+          <p:nvPr/>
+        </p:nvSpPr>
+        <p:spPr>
+          <a:xfrm xmlns:a="http://schemas.openxmlformats.org/drawingml/2006/main">
+            <a:off x="609600" y="5082540"/>
+            <a:ext cx="323850" cy="323850"/>
+          </a:xfrm>
+          <a:prstGeom xmlns:a="http://schemas.openxmlformats.org/drawingml/2006/main" prst="rect">
+            <a:avLst/>
+          </a:prstGeom>
+          <a:noFill xmlns:a="http://schemas.openxmlformats.org/drawingml/2006/main"/>
+          <a:ln xmlns:a="http://schemas.openxmlformats.org/drawingml/2006/main" w="0">
+            <a:noFill/>
+          </a:ln>
+        </p:spPr>
+        <p:txBody>
+          <a:bodyPr xmlns:a="http://schemas.openxmlformats.org/drawingml/2006/main" lIns="0" tIns="0" rIns="0" bIns="0" anchor="ctr">
+            <a:noAutofit/>
+          </a:bodyPr>
+          <a:lstStyle xmlns:a="http://schemas.openxmlformats.org/drawingml/2006/main"/>
+          <a:p xmlns:a="http://schemas.openxmlformats.org/drawingml/2006/main">
+            <a:pPr algn="l">
+              <a:defRPr sz="1350" b="1">
+                <a:solidFill>
+                  <a:srgbClr val="28685E"/>
+                </a:solidFill>
+                <a:latin typeface="Calibri"/>
+                <a:ea typeface="Calibri"/>
+                <a:cs typeface="Calibri"/>
+              </a:defRPr>
+            </a:pPr>
+            <a:r>
+              <a:rPr sz="1350" b="1">
+                <a:solidFill>
+                  <a:srgbClr val="28685E"/>
+                </a:solidFill>
+                <a:latin typeface="Calibri"/>
+                <a:ea typeface="Calibri"/>
+                <a:cs typeface="Calibri"/>
+              </a:rPr>
+              <a:t>05</a:t>
             </a:r>
           </a:p>
         </p:txBody>
@@ -7104,7 +9637,7 @@
     <p:bg>
       <p:bgPr>
         <a:solidFill xmlns:a="http://schemas.openxmlformats.org/drawingml/2006/main">
-          <a:srgbClr val="F5F1E8"/>
+          <a:srgbClr val="FAF9F5"/>
         </a:solidFill>
       </p:bgPr>
     </p:bg>
@@ -7133,8 +9666,8 @@
         </p:nvSpPr>
         <p:spPr>
           <a:xfrm xmlns:a="http://schemas.openxmlformats.org/drawingml/2006/main">
-            <a:off x="609600" y="552450"/>
-            <a:ext cx="781050" cy="57150"/>
+            <a:off x="609600" y="733425"/>
+            <a:ext cx="781050" cy="38100"/>
           </a:xfrm>
           <a:prstGeom xmlns:a="http://schemas.openxmlformats.org/drawingml/2006/main" prst="rect">
             <a:avLst/>
@@ -7164,34 +9697,43 @@
         </p:nvSpPr>
         <p:spPr>
           <a:xfrm xmlns:a="http://schemas.openxmlformats.org/drawingml/2006/main">
-            <a:off x="609600" y="762000"/>
-            <a:ext cx="8572500" cy="285750"/>
-          </a:xfrm>
-          <a:prstGeom xmlns:a="http://schemas.openxmlformats.org/drawingml/2006/main" prst="rect">
-            <a:avLst/>
-          </a:prstGeom>
-          <a:noFill xmlns:a="http://schemas.openxmlformats.org/drawingml/2006/main"/>
-          <a:ln xmlns:a="http://schemas.openxmlformats.org/drawingml/2006/main" w="0">
-            <a:noFill/>
-            <a:prstDash val="solid"/>
-          </a:ln>
-        </p:spPr>
-        <p:txBody>
-          <a:bodyPr xmlns:a="http://schemas.openxmlformats.org/drawingml/2006/main" lIns="0" tIns="0" rIns="0" bIns="0" anchor="ctr"/>
-          <a:lstStyle xmlns:a="http://schemas.openxmlformats.org/drawingml/2006/main"/>
-          <a:p xmlns:a="http://schemas.openxmlformats.org/drawingml/2006/main">
-            <a:pPr>
-              <a:defRPr sz="1500" b="1">
+            <a:off x="609600" y="342900"/>
+            <a:ext cx="9334500" cy="304800"/>
+          </a:xfrm>
+          <a:prstGeom xmlns:a="http://schemas.openxmlformats.org/drawingml/2006/main" prst="rect">
+            <a:avLst/>
+          </a:prstGeom>
+          <a:noFill xmlns:a="http://schemas.openxmlformats.org/drawingml/2006/main"/>
+          <a:ln xmlns:a="http://schemas.openxmlformats.org/drawingml/2006/main" w="0">
+            <a:noFill/>
+            <a:prstDash val="solid"/>
+          </a:ln>
+        </p:spPr>
+        <p:txBody>
+          <a:bodyPr xmlns:a="http://schemas.openxmlformats.org/drawingml/2006/main" lIns="0" tIns="0" rIns="0" bIns="0" anchor="ctr">
+            <a:noAutofit/>
+          </a:bodyPr>
+          <a:lstStyle xmlns:a="http://schemas.openxmlformats.org/drawingml/2006/main"/>
+          <a:p xmlns:a="http://schemas.openxmlformats.org/drawingml/2006/main">
+            <a:pPr algn="l">
+              <a:buNone/>
+              <a:defRPr sz="1350" b="1">
                 <a:solidFill>
                   <a:srgbClr val="28685E"/>
                 </a:solidFill>
-              </a:defRPr>
-            </a:pPr>
-            <a:r>
-              <a:rPr sz="1500" b="1">
+                <a:latin typeface="Calibri"/>
+                <a:ea typeface="Calibri"/>
+                <a:cs typeface="Calibri"/>
+              </a:defRPr>
+            </a:pPr>
+            <a:r>
+              <a:rPr sz="1350" b="1">
                 <a:solidFill>
                   <a:srgbClr val="28685E"/>
                 </a:solidFill>
+                <a:latin typeface="Calibri"/>
+                <a:ea typeface="Calibri"/>
+                <a:cs typeface="Calibri"/>
               </a:rPr>
               <a:t>MADE BY MATT  /  GROW SCIENCE</a:t>
             </a:r>
@@ -7214,34 +9756,43 @@
         </p:nvSpPr>
         <p:spPr>
           <a:xfrm xmlns:a="http://schemas.openxmlformats.org/drawingml/2006/main">
-            <a:off x="609600" y="1352550"/>
-            <a:ext cx="10972800" cy="952500"/>
-          </a:xfrm>
-          <a:prstGeom xmlns:a="http://schemas.openxmlformats.org/drawingml/2006/main" prst="rect">
-            <a:avLst/>
-          </a:prstGeom>
-          <a:noFill xmlns:a="http://schemas.openxmlformats.org/drawingml/2006/main"/>
-          <a:ln xmlns:a="http://schemas.openxmlformats.org/drawingml/2006/main" w="0">
-            <a:noFill/>
-            <a:prstDash val="solid"/>
-          </a:ln>
-        </p:spPr>
-        <p:txBody>
-          <a:bodyPr xmlns:a="http://schemas.openxmlformats.org/drawingml/2006/main" lIns="0" tIns="0" rIns="0" bIns="0" anchor="ctr"/>
-          <a:lstStyle xmlns:a="http://schemas.openxmlformats.org/drawingml/2006/main"/>
-          <a:p xmlns:a="http://schemas.openxmlformats.org/drawingml/2006/main">
-            <a:pPr>
-              <a:defRPr sz="3750" b="1">
+            <a:off x="609600" y="990600"/>
+            <a:ext cx="10972800" cy="1000125"/>
+          </a:xfrm>
+          <a:prstGeom xmlns:a="http://schemas.openxmlformats.org/drawingml/2006/main" prst="rect">
+            <a:avLst/>
+          </a:prstGeom>
+          <a:noFill xmlns:a="http://schemas.openxmlformats.org/drawingml/2006/main"/>
+          <a:ln xmlns:a="http://schemas.openxmlformats.org/drawingml/2006/main" w="0">
+            <a:noFill/>
+            <a:prstDash val="solid"/>
+          </a:ln>
+        </p:spPr>
+        <p:txBody>
+          <a:bodyPr xmlns:a="http://schemas.openxmlformats.org/drawingml/2006/main" lIns="0" tIns="0" rIns="0" bIns="0" anchor="ctr">
+            <a:noAutofit/>
+          </a:bodyPr>
+          <a:lstStyle xmlns:a="http://schemas.openxmlformats.org/drawingml/2006/main"/>
+          <a:p xmlns:a="http://schemas.openxmlformats.org/drawingml/2006/main">
+            <a:pPr algn="l">
+              <a:buNone/>
+              <a:defRPr sz="3675" b="1">
                 <a:solidFill>
                   <a:srgbClr val="152B3A"/>
                 </a:solidFill>
-              </a:defRPr>
-            </a:pPr>
-            <a:r>
-              <a:rPr sz="3750" b="1">
+                <a:latin typeface="Calibri"/>
+                <a:ea typeface="Calibri"/>
+                <a:cs typeface="Calibri"/>
+              </a:defRPr>
+            </a:pPr>
+            <a:r>
+              <a:rPr sz="3675" b="1">
                 <a:solidFill>
                   <a:srgbClr val="152B3A"/>
                 </a:solidFill>
+                <a:latin typeface="Calibri"/>
+                <a:ea typeface="Calibri"/>
+                <a:cs typeface="Calibri"/>
               </a:rPr>
               <a:t>Check the variable roles</a:t>
             </a:r>
@@ -7264,14 +9815,14 @@
         </p:nvSpPr>
         <p:spPr>
           <a:xfrm xmlns:a="http://schemas.openxmlformats.org/drawingml/2006/main">
-            <a:off x="609600" y="6219825"/>
+            <a:off x="609600" y="6191250"/>
             <a:ext cx="10972800" cy="9525"/>
           </a:xfrm>
           <a:prstGeom xmlns:a="http://schemas.openxmlformats.org/drawingml/2006/main" prst="rect">
             <a:avLst/>
           </a:prstGeom>
           <a:solidFill xmlns:a="http://schemas.openxmlformats.org/drawingml/2006/main">
-            <a:srgbClr val="DCE7DD"/>
+            <a:srgbClr val="CEDBD3"/>
           </a:solidFill>
           <a:ln xmlns:a="http://schemas.openxmlformats.org/drawingml/2006/main" w="0">
             <a:noFill/>
@@ -7295,34 +9846,43 @@
         </p:nvSpPr>
         <p:spPr>
           <a:xfrm xmlns:a="http://schemas.openxmlformats.org/drawingml/2006/main">
-            <a:off x="609600" y="6381750"/>
-            <a:ext cx="9906000" cy="228600"/>
-          </a:xfrm>
-          <a:prstGeom xmlns:a="http://schemas.openxmlformats.org/drawingml/2006/main" prst="rect">
-            <a:avLst/>
-          </a:prstGeom>
-          <a:noFill xmlns:a="http://schemas.openxmlformats.org/drawingml/2006/main"/>
-          <a:ln xmlns:a="http://schemas.openxmlformats.org/drawingml/2006/main" w="0">
-            <a:noFill/>
-            <a:prstDash val="solid"/>
-          </a:ln>
-        </p:spPr>
-        <p:txBody>
-          <a:bodyPr xmlns:a="http://schemas.openxmlformats.org/drawingml/2006/main" lIns="0" tIns="0" rIns="0" bIns="0" anchor="ctr"/>
-          <a:lstStyle xmlns:a="http://schemas.openxmlformats.org/drawingml/2006/main"/>
-          <a:p xmlns:a="http://schemas.openxmlformats.org/drawingml/2006/main">
-            <a:pPr>
-              <a:defRPr sz="1275" b="0">
+            <a:off x="609600" y="6419850"/>
+            <a:ext cx="9525000" cy="219075"/>
+          </a:xfrm>
+          <a:prstGeom xmlns:a="http://schemas.openxmlformats.org/drawingml/2006/main" prst="rect">
+            <a:avLst/>
+          </a:prstGeom>
+          <a:noFill xmlns:a="http://schemas.openxmlformats.org/drawingml/2006/main"/>
+          <a:ln xmlns:a="http://schemas.openxmlformats.org/drawingml/2006/main" w="0">
+            <a:noFill/>
+            <a:prstDash val="solid"/>
+          </a:ln>
+        </p:spPr>
+        <p:txBody>
+          <a:bodyPr xmlns:a="http://schemas.openxmlformats.org/drawingml/2006/main" lIns="0" tIns="0" rIns="0" bIns="0" anchor="ctr">
+            <a:noAutofit/>
+          </a:bodyPr>
+          <a:lstStyle xmlns:a="http://schemas.openxmlformats.org/drawingml/2006/main"/>
+          <a:p xmlns:a="http://schemas.openxmlformats.org/drawingml/2006/main">
+            <a:pPr algn="l">
+              <a:buNone/>
+              <a:defRPr sz="1200" b="0">
                 <a:solidFill>
                   <a:srgbClr val="50616B"/>
                 </a:solidFill>
-              </a:defRPr>
-            </a:pPr>
-            <a:r>
-              <a:rPr sz="1275" b="0">
+                <a:latin typeface="Calibri"/>
+                <a:ea typeface="Calibri"/>
+                <a:cs typeface="Calibri"/>
+              </a:defRPr>
+            </a:pPr>
+            <a:r>
+              <a:rPr sz="1200" b="0">
                 <a:solidFill>
                   <a:srgbClr val="50616B"/>
                 </a:solidFill>
+                <a:latin typeface="Calibri"/>
+                <a:ea typeface="Calibri"/>
+                <a:cs typeface="Calibri"/>
               </a:rPr>
               <a:t>AUTUMN 1  ·  WEEK 5  ·  LESSON A</a:t>
             </a:r>
@@ -7345,27 +9905,33 @@
         </p:nvSpPr>
         <p:spPr>
           <a:xfrm xmlns:a="http://schemas.openxmlformats.org/drawingml/2006/main">
-            <a:off x="11106150" y="6362700"/>
-            <a:ext cx="476250" cy="238125"/>
-          </a:xfrm>
-          <a:prstGeom xmlns:a="http://schemas.openxmlformats.org/drawingml/2006/main" prst="rect">
-            <a:avLst/>
-          </a:prstGeom>
-          <a:noFill xmlns:a="http://schemas.openxmlformats.org/drawingml/2006/main"/>
-          <a:ln xmlns:a="http://schemas.openxmlformats.org/drawingml/2006/main" w="0">
-            <a:noFill/>
-            <a:prstDash val="solid"/>
-          </a:ln>
-        </p:spPr>
-        <p:txBody>
-          <a:bodyPr xmlns:a="http://schemas.openxmlformats.org/drawingml/2006/main" lIns="0" tIns="0" rIns="0" bIns="0" anchor="ctr"/>
-          <a:lstStyle xmlns:a="http://schemas.openxmlformats.org/drawingml/2006/main"/>
-          <a:p xmlns:a="http://schemas.openxmlformats.org/drawingml/2006/main">
-            <a:pPr>
+            <a:off x="11106150" y="6400800"/>
+            <a:ext cx="476250" cy="247650"/>
+          </a:xfrm>
+          <a:prstGeom xmlns:a="http://schemas.openxmlformats.org/drawingml/2006/main" prst="rect">
+            <a:avLst/>
+          </a:prstGeom>
+          <a:noFill xmlns:a="http://schemas.openxmlformats.org/drawingml/2006/main"/>
+          <a:ln xmlns:a="http://schemas.openxmlformats.org/drawingml/2006/main" w="0">
+            <a:noFill/>
+            <a:prstDash val="solid"/>
+          </a:ln>
+        </p:spPr>
+        <p:txBody>
+          <a:bodyPr xmlns:a="http://schemas.openxmlformats.org/drawingml/2006/main" lIns="0" tIns="0" rIns="0" bIns="0" anchor="ctr">
+            <a:noAutofit/>
+          </a:bodyPr>
+          <a:lstStyle xmlns:a="http://schemas.openxmlformats.org/drawingml/2006/main"/>
+          <a:p xmlns:a="http://schemas.openxmlformats.org/drawingml/2006/main">
+            <a:pPr algn="l">
+              <a:buNone/>
               <a:defRPr sz="1350" b="1">
                 <a:solidFill>
                   <a:srgbClr val="28685E"/>
                 </a:solidFill>
+                <a:latin typeface="Calibri"/>
+                <a:ea typeface="Calibri"/>
+                <a:cs typeface="Calibri"/>
               </a:defRPr>
             </a:pPr>
             <a:r>
@@ -7373,6 +9939,9 @@
                 <a:solidFill>
                   <a:srgbClr val="28685E"/>
                 </a:solidFill>
+                <a:latin typeface="Calibri"/>
+                <a:ea typeface="Calibri"/>
+                <a:cs typeface="Calibri"/>
               </a:rPr>
               <a:t>07</a:t>
             </a:r>
@@ -7395,34 +9964,45 @@
         </p:nvSpPr>
         <p:spPr>
           <a:xfrm xmlns:a="http://schemas.openxmlformats.org/drawingml/2006/main">
-            <a:off x="609600" y="2619375"/>
-            <a:ext cx="4953000" cy="428625"/>
-          </a:xfrm>
-          <a:prstGeom xmlns:a="http://schemas.openxmlformats.org/drawingml/2006/main" prst="rect">
-            <a:avLst/>
-          </a:prstGeom>
-          <a:noFill xmlns:a="http://schemas.openxmlformats.org/drawingml/2006/main"/>
-          <a:ln xmlns:a="http://schemas.openxmlformats.org/drawingml/2006/main" w="0">
-            <a:noFill/>
-            <a:prstDash val="solid"/>
-          </a:ln>
-        </p:spPr>
-        <p:txBody>
-          <a:bodyPr xmlns:a="http://schemas.openxmlformats.org/drawingml/2006/main" lIns="0" tIns="0" rIns="0" bIns="0" anchor="ctr"/>
-          <a:lstStyle xmlns:a="http://schemas.openxmlformats.org/drawingml/2006/main"/>
-          <a:p xmlns:a="http://schemas.openxmlformats.org/drawingml/2006/main">
-            <a:pPr>
-              <a:defRPr sz="2025" b="1">
+            <a:off x="609600" y="2219325"/>
+            <a:ext cx="5257800" cy="762000"/>
+          </a:xfrm>
+          <a:prstGeom xmlns:a="http://schemas.openxmlformats.org/drawingml/2006/main" prst="rect">
+            <a:avLst/>
+          </a:prstGeom>
+          <a:solidFill xmlns:a="http://schemas.openxmlformats.org/drawingml/2006/main">
+            <a:srgbClr val="E7EFE9"/>
+          </a:solidFill>
+          <a:ln xmlns:a="http://schemas.openxmlformats.org/drawingml/2006/main" w="0">
+            <a:noFill/>
+            <a:prstDash val="solid"/>
+          </a:ln>
+        </p:spPr>
+        <p:txBody>
+          <a:bodyPr xmlns:a="http://schemas.openxmlformats.org/drawingml/2006/main" lIns="228600" tIns="114300" rIns="228600" bIns="114300" anchor="ctr">
+            <a:noAutofit/>
+          </a:bodyPr>
+          <a:lstStyle xmlns:a="http://schemas.openxmlformats.org/drawingml/2006/main"/>
+          <a:p xmlns:a="http://schemas.openxmlformats.org/drawingml/2006/main">
+            <a:pPr algn="l">
+              <a:buNone/>
+              <a:defRPr sz="1875" b="1">
                 <a:solidFill>
                   <a:srgbClr val="28685E"/>
                 </a:solidFill>
-              </a:defRPr>
-            </a:pPr>
-            <a:r>
-              <a:rPr sz="2025" b="1">
+                <a:latin typeface="Calibri"/>
+                <a:ea typeface="Calibri"/>
+                <a:cs typeface="Calibri"/>
+              </a:defRPr>
+            </a:pPr>
+            <a:r>
+              <a:rPr sz="1875" b="1">
                 <a:solidFill>
                   <a:srgbClr val="28685E"/>
                 </a:solidFill>
+                <a:latin typeface="Calibri"/>
+                <a:ea typeface="Calibri"/>
+                <a:cs typeface="Calibri"/>
               </a:rPr>
               <a:t>CHANGE AND MEASURE</a:t>
             </a:r>
@@ -7445,34 +10025,45 @@
         </p:nvSpPr>
         <p:spPr>
           <a:xfrm xmlns:a="http://schemas.openxmlformats.org/drawingml/2006/main">
-            <a:off x="6572250" y="2619375"/>
-            <a:ext cx="4953000" cy="428625"/>
-          </a:xfrm>
-          <a:prstGeom xmlns:a="http://schemas.openxmlformats.org/drawingml/2006/main" prst="rect">
-            <a:avLst/>
-          </a:prstGeom>
-          <a:noFill xmlns:a="http://schemas.openxmlformats.org/drawingml/2006/main"/>
-          <a:ln xmlns:a="http://schemas.openxmlformats.org/drawingml/2006/main" w="0">
-            <a:noFill/>
-            <a:prstDash val="solid"/>
-          </a:ln>
-        </p:spPr>
-        <p:txBody>
-          <a:bodyPr xmlns:a="http://schemas.openxmlformats.org/drawingml/2006/main" lIns="0" tIns="0" rIns="0" bIns="0" anchor="ctr"/>
-          <a:lstStyle xmlns:a="http://schemas.openxmlformats.org/drawingml/2006/main"/>
-          <a:p xmlns:a="http://schemas.openxmlformats.org/drawingml/2006/main">
-            <a:pPr>
-              <a:defRPr sz="2025" b="1">
-                <a:solidFill>
-                  <a:srgbClr val="A65D25"/>
-                </a:solidFill>
-              </a:defRPr>
-            </a:pPr>
-            <a:r>
-              <a:rPr sz="2025" b="1">
-                <a:solidFill>
-                  <a:srgbClr val="A65D25"/>
-                </a:solidFill>
+            <a:off x="6381750" y="2219325"/>
+            <a:ext cx="5200650" cy="762000"/>
+          </a:xfrm>
+          <a:prstGeom xmlns:a="http://schemas.openxmlformats.org/drawingml/2006/main" prst="rect">
+            <a:avLst/>
+          </a:prstGeom>
+          <a:solidFill xmlns:a="http://schemas.openxmlformats.org/drawingml/2006/main">
+            <a:srgbClr val="F0EBE3"/>
+          </a:solidFill>
+          <a:ln xmlns:a="http://schemas.openxmlformats.org/drawingml/2006/main" w="0">
+            <a:noFill/>
+            <a:prstDash val="solid"/>
+          </a:ln>
+        </p:spPr>
+        <p:txBody>
+          <a:bodyPr xmlns:a="http://schemas.openxmlformats.org/drawingml/2006/main" lIns="228600" tIns="114300" rIns="228600" bIns="114300" anchor="ctr">
+            <a:noAutofit/>
+          </a:bodyPr>
+          <a:lstStyle xmlns:a="http://schemas.openxmlformats.org/drawingml/2006/main"/>
+          <a:p xmlns:a="http://schemas.openxmlformats.org/drawingml/2006/main">
+            <a:pPr algn="l">
+              <a:buNone/>
+              <a:defRPr sz="1875" b="1">
+                <a:solidFill>
+                  <a:srgbClr val="A95D21"/>
+                </a:solidFill>
+                <a:latin typeface="Calibri"/>
+                <a:ea typeface="Calibri"/>
+                <a:cs typeface="Calibri"/>
+              </a:defRPr>
+            </a:pPr>
+            <a:r>
+              <a:rPr sz="1875" b="1">
+                <a:solidFill>
+                  <a:srgbClr val="A95D21"/>
+                </a:solidFill>
+                <a:latin typeface="Calibri"/>
+                <a:ea typeface="Calibri"/>
+                <a:cs typeface="Calibri"/>
               </a:rPr>
               <a:t>KEEP THE SAME</a:t>
             </a:r>
@@ -7495,27 +10086,35 @@
         </p:nvSpPr>
         <p:spPr>
           <a:xfrm xmlns:a="http://schemas.openxmlformats.org/drawingml/2006/main">
-            <a:off x="609600" y="3333750"/>
-            <a:ext cx="4953000" cy="2524125"/>
-          </a:xfrm>
-          <a:prstGeom xmlns:a="http://schemas.openxmlformats.org/drawingml/2006/main" prst="rect">
-            <a:avLst/>
-          </a:prstGeom>
-          <a:noFill xmlns:a="http://schemas.openxmlformats.org/drawingml/2006/main"/>
-          <a:ln xmlns:a="http://schemas.openxmlformats.org/drawingml/2006/main" w="0">
-            <a:noFill/>
-            <a:prstDash val="solid"/>
-          </a:ln>
-        </p:spPr>
-        <p:txBody>
-          <a:bodyPr xmlns:a="http://schemas.openxmlformats.org/drawingml/2006/main" lIns="0" tIns="0" rIns="0" bIns="0" anchor="ctr"/>
-          <a:lstStyle xmlns:a="http://schemas.openxmlformats.org/drawingml/2006/main"/>
-          <a:p xmlns:a="http://schemas.openxmlformats.org/drawingml/2006/main">
-            <a:pPr>
+            <a:off x="609600" y="2981325"/>
+            <a:ext cx="5257800" cy="2714625"/>
+          </a:xfrm>
+          <a:prstGeom xmlns:a="http://schemas.openxmlformats.org/drawingml/2006/main" prst="rect">
+            <a:avLst/>
+          </a:prstGeom>
+          <a:solidFill xmlns:a="http://schemas.openxmlformats.org/drawingml/2006/main">
+            <a:srgbClr val="E7EFE9"/>
+          </a:solidFill>
+          <a:ln xmlns:a="http://schemas.openxmlformats.org/drawingml/2006/main" w="0">
+            <a:noFill/>
+            <a:prstDash val="solid"/>
+          </a:ln>
+        </p:spPr>
+        <p:txBody>
+          <a:bodyPr xmlns:a="http://schemas.openxmlformats.org/drawingml/2006/main" lIns="228600" tIns="114300" rIns="228600" bIns="114300" anchor="ctr">
+            <a:noAutofit/>
+          </a:bodyPr>
+          <a:lstStyle xmlns:a="http://schemas.openxmlformats.org/drawingml/2006/main"/>
+          <a:p xmlns:a="http://schemas.openxmlformats.org/drawingml/2006/main">
+            <a:pPr algn="l">
+              <a:buNone/>
               <a:defRPr sz="2400" b="0">
                 <a:solidFill>
                   <a:srgbClr val="152B3A"/>
                 </a:solidFill>
+                <a:latin typeface="Calibri"/>
+                <a:ea typeface="Calibri"/>
+                <a:cs typeface="Calibri"/>
               </a:defRPr>
             </a:pPr>
             <a:r>
@@ -7523,16 +10122,23 @@
                 <a:solidFill>
                   <a:srgbClr val="152B3A"/>
                 </a:solidFill>
+                <a:latin typeface="Calibri"/>
+                <a:ea typeface="Calibri"/>
+                <a:cs typeface="Calibri"/>
               </a:rPr>
               <a:t>CHANGE: run-out surface</a:t>
             </a:r>
           </a:p>
           <a:p xmlns:a="http://schemas.openxmlformats.org/drawingml/2006/main">
-            <a:pPr>
+            <a:pPr algn="l">
+              <a:buNone/>
               <a:defRPr sz="2400" b="0">
                 <a:solidFill>
                   <a:srgbClr val="152B3A"/>
                 </a:solidFill>
+                <a:latin typeface="Calibri"/>
+                <a:ea typeface="Calibri"/>
+                <a:cs typeface="Calibri"/>
               </a:defRPr>
             </a:pPr>
             <a:r>
@@ -7540,6 +10146,9 @@
                 <a:solidFill>
                   <a:srgbClr val="152B3A"/>
                 </a:solidFill>
+                <a:latin typeface="Calibri"/>
+                <a:ea typeface="Calibri"/>
+                <a:cs typeface="Calibri"/>
               </a:rPr>
               <a:t>MEASURE: stopping distance / cm</a:t>
             </a:r>
@@ -7562,27 +10171,35 @@
         </p:nvSpPr>
         <p:spPr>
           <a:xfrm xmlns:a="http://schemas.openxmlformats.org/drawingml/2006/main">
-            <a:off x="6572250" y="3333750"/>
-            <a:ext cx="4857750" cy="2524125"/>
-          </a:xfrm>
-          <a:prstGeom xmlns:a="http://schemas.openxmlformats.org/drawingml/2006/main" prst="rect">
-            <a:avLst/>
-          </a:prstGeom>
-          <a:noFill xmlns:a="http://schemas.openxmlformats.org/drawingml/2006/main"/>
-          <a:ln xmlns:a="http://schemas.openxmlformats.org/drawingml/2006/main" w="0">
-            <a:noFill/>
-            <a:prstDash val="solid"/>
-          </a:ln>
-        </p:spPr>
-        <p:txBody>
-          <a:bodyPr xmlns:a="http://schemas.openxmlformats.org/drawingml/2006/main" lIns="0" tIns="0" rIns="0" bIns="0" anchor="ctr"/>
-          <a:lstStyle xmlns:a="http://schemas.openxmlformats.org/drawingml/2006/main"/>
-          <a:p xmlns:a="http://schemas.openxmlformats.org/drawingml/2006/main">
-            <a:pPr>
+            <a:off x="6381750" y="2981325"/>
+            <a:ext cx="5200650" cy="2714625"/>
+          </a:xfrm>
+          <a:prstGeom xmlns:a="http://schemas.openxmlformats.org/drawingml/2006/main" prst="rect">
+            <a:avLst/>
+          </a:prstGeom>
+          <a:solidFill xmlns:a="http://schemas.openxmlformats.org/drawingml/2006/main">
+            <a:srgbClr val="F0EBE3"/>
+          </a:solidFill>
+          <a:ln xmlns:a="http://schemas.openxmlformats.org/drawingml/2006/main" w="0">
+            <a:noFill/>
+            <a:prstDash val="solid"/>
+          </a:ln>
+        </p:spPr>
+        <p:txBody>
+          <a:bodyPr xmlns:a="http://schemas.openxmlformats.org/drawingml/2006/main" lIns="228600" tIns="114300" rIns="228600" bIns="114300" anchor="ctr">
+            <a:noAutofit/>
+          </a:bodyPr>
+          <a:lstStyle xmlns:a="http://schemas.openxmlformats.org/drawingml/2006/main"/>
+          <a:p xmlns:a="http://schemas.openxmlformats.org/drawingml/2006/main">
+            <a:pPr algn="l">
+              <a:buNone/>
               <a:defRPr sz="2400" b="0">
                 <a:solidFill>
                   <a:srgbClr val="152B3A"/>
                 </a:solidFill>
+                <a:latin typeface="Calibri"/>
+                <a:ea typeface="Calibri"/>
+                <a:cs typeface="Calibri"/>
               </a:defRPr>
             </a:pPr>
             <a:r>
@@ -7590,16 +10207,23 @@
                 <a:solidFill>
                   <a:srgbClr val="152B3A"/>
                 </a:solidFill>
+                <a:latin typeface="Calibri"/>
+                <a:ea typeface="Calibri"/>
+                <a:cs typeface="Calibri"/>
               </a:rPr>
               <a:t>Ramp height</a:t>
             </a:r>
           </a:p>
           <a:p xmlns:a="http://schemas.openxmlformats.org/drawingml/2006/main">
-            <a:pPr>
+            <a:pPr algn="l">
+              <a:buNone/>
               <a:defRPr sz="2400" b="0">
                 <a:solidFill>
                   <a:srgbClr val="152B3A"/>
                 </a:solidFill>
+                <a:latin typeface="Calibri"/>
+                <a:ea typeface="Calibri"/>
+                <a:cs typeface="Calibri"/>
               </a:defRPr>
             </a:pPr>
             <a:r>
@@ -7607,16 +10231,23 @@
                 <a:solidFill>
                   <a:srgbClr val="152B3A"/>
                 </a:solidFill>
+                <a:latin typeface="Calibri"/>
+                <a:ea typeface="Calibri"/>
+                <a:cs typeface="Calibri"/>
               </a:rPr>
               <a:t>Same trolley</a:t>
             </a:r>
           </a:p>
           <a:p xmlns:a="http://schemas.openxmlformats.org/drawingml/2006/main">
-            <a:pPr>
+            <a:pPr algn="l">
+              <a:buNone/>
               <a:defRPr sz="2400" b="0">
                 <a:solidFill>
                   <a:srgbClr val="152B3A"/>
                 </a:solidFill>
+                <a:latin typeface="Calibri"/>
+                <a:ea typeface="Calibri"/>
+                <a:cs typeface="Calibri"/>
               </a:defRPr>
             </a:pPr>
             <a:r>
@@ -7624,6 +10255,9 @@
                 <a:solidFill>
                   <a:srgbClr val="152B3A"/>
                 </a:solidFill>
+                <a:latin typeface="Calibri"/>
+                <a:ea typeface="Calibri"/>
+                <a:cs typeface="Calibri"/>
               </a:rPr>
               <a:t>Release mark; no push</a:t>
             </a:r>
@@ -7646,7 +10280,7 @@
     <p:bg>
       <p:bgPr>
         <a:solidFill xmlns:a="http://schemas.openxmlformats.org/drawingml/2006/main">
-          <a:srgbClr val="F5F1E8"/>
+          <a:srgbClr val="FAF9F5"/>
         </a:solidFill>
       </p:bgPr>
     </p:bg>
@@ -7675,8 +10309,8 @@
         </p:nvSpPr>
         <p:spPr>
           <a:xfrm xmlns:a="http://schemas.openxmlformats.org/drawingml/2006/main">
-            <a:off x="609600" y="552450"/>
-            <a:ext cx="781050" cy="57150"/>
+            <a:off x="609600" y="733425"/>
+            <a:ext cx="781050" cy="38100"/>
           </a:xfrm>
           <a:prstGeom xmlns:a="http://schemas.openxmlformats.org/drawingml/2006/main" prst="rect">
             <a:avLst/>
@@ -7706,34 +10340,43 @@
         </p:nvSpPr>
         <p:spPr>
           <a:xfrm xmlns:a="http://schemas.openxmlformats.org/drawingml/2006/main">
-            <a:off x="609600" y="762000"/>
-            <a:ext cx="8572500" cy="285750"/>
-          </a:xfrm>
-          <a:prstGeom xmlns:a="http://schemas.openxmlformats.org/drawingml/2006/main" prst="rect">
-            <a:avLst/>
-          </a:prstGeom>
-          <a:noFill xmlns:a="http://schemas.openxmlformats.org/drawingml/2006/main"/>
-          <a:ln xmlns:a="http://schemas.openxmlformats.org/drawingml/2006/main" w="0">
-            <a:noFill/>
-            <a:prstDash val="solid"/>
-          </a:ln>
-        </p:spPr>
-        <p:txBody>
-          <a:bodyPr xmlns:a="http://schemas.openxmlformats.org/drawingml/2006/main" lIns="0" tIns="0" rIns="0" bIns="0" anchor="ctr"/>
-          <a:lstStyle xmlns:a="http://schemas.openxmlformats.org/drawingml/2006/main"/>
-          <a:p xmlns:a="http://schemas.openxmlformats.org/drawingml/2006/main">
-            <a:pPr>
-              <a:defRPr sz="1500" b="1">
+            <a:off x="609600" y="342900"/>
+            <a:ext cx="9334500" cy="304800"/>
+          </a:xfrm>
+          <a:prstGeom xmlns:a="http://schemas.openxmlformats.org/drawingml/2006/main" prst="rect">
+            <a:avLst/>
+          </a:prstGeom>
+          <a:noFill xmlns:a="http://schemas.openxmlformats.org/drawingml/2006/main"/>
+          <a:ln xmlns:a="http://schemas.openxmlformats.org/drawingml/2006/main" w="0">
+            <a:noFill/>
+            <a:prstDash val="solid"/>
+          </a:ln>
+        </p:spPr>
+        <p:txBody>
+          <a:bodyPr xmlns:a="http://schemas.openxmlformats.org/drawingml/2006/main" lIns="0" tIns="0" rIns="0" bIns="0" anchor="ctr">
+            <a:noAutofit/>
+          </a:bodyPr>
+          <a:lstStyle xmlns:a="http://schemas.openxmlformats.org/drawingml/2006/main"/>
+          <a:p xmlns:a="http://schemas.openxmlformats.org/drawingml/2006/main">
+            <a:pPr algn="l">
+              <a:buNone/>
+              <a:defRPr sz="1350" b="1">
                 <a:solidFill>
                   <a:srgbClr val="28685E"/>
                 </a:solidFill>
-              </a:defRPr>
-            </a:pPr>
-            <a:r>
-              <a:rPr sz="1500" b="1">
+                <a:latin typeface="Calibri"/>
+                <a:ea typeface="Calibri"/>
+                <a:cs typeface="Calibri"/>
+              </a:defRPr>
+            </a:pPr>
+            <a:r>
+              <a:rPr sz="1350" b="1">
                 <a:solidFill>
                   <a:srgbClr val="28685E"/>
                 </a:solidFill>
+                <a:latin typeface="Calibri"/>
+                <a:ea typeface="Calibri"/>
+                <a:cs typeface="Calibri"/>
               </a:rPr>
               <a:t>MADE BY MATT  /  GROW SCIENCE</a:t>
             </a:r>
@@ -7756,34 +10399,43 @@
         </p:nvSpPr>
         <p:spPr>
           <a:xfrm xmlns:a="http://schemas.openxmlformats.org/drawingml/2006/main">
-            <a:off x="609600" y="1352550"/>
-            <a:ext cx="10972800" cy="952500"/>
-          </a:xfrm>
-          <a:prstGeom xmlns:a="http://schemas.openxmlformats.org/drawingml/2006/main" prst="rect">
-            <a:avLst/>
-          </a:prstGeom>
-          <a:noFill xmlns:a="http://schemas.openxmlformats.org/drawingml/2006/main"/>
-          <a:ln xmlns:a="http://schemas.openxmlformats.org/drawingml/2006/main" w="0">
-            <a:noFill/>
-            <a:prstDash val="solid"/>
-          </a:ln>
-        </p:spPr>
-        <p:txBody>
-          <a:bodyPr xmlns:a="http://schemas.openxmlformats.org/drawingml/2006/main" lIns="0" tIns="0" rIns="0" bIns="0" anchor="ctr"/>
-          <a:lstStyle xmlns:a="http://schemas.openxmlformats.org/drawingml/2006/main"/>
-          <a:p xmlns:a="http://schemas.openxmlformats.org/drawingml/2006/main">
-            <a:pPr>
-              <a:defRPr sz="3750" b="1">
+            <a:off x="609600" y="990600"/>
+            <a:ext cx="10972800" cy="1000125"/>
+          </a:xfrm>
+          <a:prstGeom xmlns:a="http://schemas.openxmlformats.org/drawingml/2006/main" prst="rect">
+            <a:avLst/>
+          </a:prstGeom>
+          <a:noFill xmlns:a="http://schemas.openxmlformats.org/drawingml/2006/main"/>
+          <a:ln xmlns:a="http://schemas.openxmlformats.org/drawingml/2006/main" w="0">
+            <a:noFill/>
+            <a:prstDash val="solid"/>
+          </a:ln>
+        </p:spPr>
+        <p:txBody>
+          <a:bodyPr xmlns:a="http://schemas.openxmlformats.org/drawingml/2006/main" lIns="0" tIns="0" rIns="0" bIns="0" anchor="ctr">
+            <a:noAutofit/>
+          </a:bodyPr>
+          <a:lstStyle xmlns:a="http://schemas.openxmlformats.org/drawingml/2006/main"/>
+          <a:p xmlns:a="http://schemas.openxmlformats.org/drawingml/2006/main">
+            <a:pPr algn="l">
+              <a:buNone/>
+              <a:defRPr sz="3675" b="1">
                 <a:solidFill>
                   <a:srgbClr val="152B3A"/>
                 </a:solidFill>
-              </a:defRPr>
-            </a:pPr>
-            <a:r>
-              <a:rPr sz="3750" b="1">
+                <a:latin typeface="Calibri"/>
+                <a:ea typeface="Calibri"/>
+                <a:cs typeface="Calibri"/>
+              </a:defRPr>
+            </a:pPr>
+            <a:r>
+              <a:rPr sz="3675" b="1">
                 <a:solidFill>
                   <a:srgbClr val="152B3A"/>
                 </a:solidFill>
+                <a:latin typeface="Calibri"/>
+                <a:ea typeface="Calibri"/>
+                <a:cs typeface="Calibri"/>
               </a:rPr>
               <a:t>Direct one useful correction</a:t>
             </a:r>
@@ -7806,14 +10458,14 @@
         </p:nvSpPr>
         <p:spPr>
           <a:xfrm xmlns:a="http://schemas.openxmlformats.org/drawingml/2006/main">
-            <a:off x="609600" y="6219825"/>
+            <a:off x="609600" y="6191250"/>
             <a:ext cx="10972800" cy="9525"/>
           </a:xfrm>
           <a:prstGeom xmlns:a="http://schemas.openxmlformats.org/drawingml/2006/main" prst="rect">
             <a:avLst/>
           </a:prstGeom>
           <a:solidFill xmlns:a="http://schemas.openxmlformats.org/drawingml/2006/main">
-            <a:srgbClr val="DCE7DD"/>
+            <a:srgbClr val="CEDBD3"/>
           </a:solidFill>
           <a:ln xmlns:a="http://schemas.openxmlformats.org/drawingml/2006/main" w="0">
             <a:noFill/>
@@ -7837,34 +10489,43 @@
         </p:nvSpPr>
         <p:spPr>
           <a:xfrm xmlns:a="http://schemas.openxmlformats.org/drawingml/2006/main">
-            <a:off x="609600" y="6381750"/>
-            <a:ext cx="9906000" cy="228600"/>
-          </a:xfrm>
-          <a:prstGeom xmlns:a="http://schemas.openxmlformats.org/drawingml/2006/main" prst="rect">
-            <a:avLst/>
-          </a:prstGeom>
-          <a:noFill xmlns:a="http://schemas.openxmlformats.org/drawingml/2006/main"/>
-          <a:ln xmlns:a="http://schemas.openxmlformats.org/drawingml/2006/main" w="0">
-            <a:noFill/>
-            <a:prstDash val="solid"/>
-          </a:ln>
-        </p:spPr>
-        <p:txBody>
-          <a:bodyPr xmlns:a="http://schemas.openxmlformats.org/drawingml/2006/main" lIns="0" tIns="0" rIns="0" bIns="0" anchor="ctr"/>
-          <a:lstStyle xmlns:a="http://schemas.openxmlformats.org/drawingml/2006/main"/>
-          <a:p xmlns:a="http://schemas.openxmlformats.org/drawingml/2006/main">
-            <a:pPr>
-              <a:defRPr sz="1275" b="0">
+            <a:off x="609600" y="6419850"/>
+            <a:ext cx="9525000" cy="219075"/>
+          </a:xfrm>
+          <a:prstGeom xmlns:a="http://schemas.openxmlformats.org/drawingml/2006/main" prst="rect">
+            <a:avLst/>
+          </a:prstGeom>
+          <a:noFill xmlns:a="http://schemas.openxmlformats.org/drawingml/2006/main"/>
+          <a:ln xmlns:a="http://schemas.openxmlformats.org/drawingml/2006/main" w="0">
+            <a:noFill/>
+            <a:prstDash val="solid"/>
+          </a:ln>
+        </p:spPr>
+        <p:txBody>
+          <a:bodyPr xmlns:a="http://schemas.openxmlformats.org/drawingml/2006/main" lIns="0" tIns="0" rIns="0" bIns="0" anchor="ctr">
+            <a:noAutofit/>
+          </a:bodyPr>
+          <a:lstStyle xmlns:a="http://schemas.openxmlformats.org/drawingml/2006/main"/>
+          <a:p xmlns:a="http://schemas.openxmlformats.org/drawingml/2006/main">
+            <a:pPr algn="l">
+              <a:buNone/>
+              <a:defRPr sz="1200" b="0">
                 <a:solidFill>
                   <a:srgbClr val="50616B"/>
                 </a:solidFill>
-              </a:defRPr>
-            </a:pPr>
-            <a:r>
-              <a:rPr sz="1275" b="0">
+                <a:latin typeface="Calibri"/>
+                <a:ea typeface="Calibri"/>
+                <a:cs typeface="Calibri"/>
+              </a:defRPr>
+            </a:pPr>
+            <a:r>
+              <a:rPr sz="1200" b="0">
                 <a:solidFill>
                   <a:srgbClr val="50616B"/>
                 </a:solidFill>
+                <a:latin typeface="Calibri"/>
+                <a:ea typeface="Calibri"/>
+                <a:cs typeface="Calibri"/>
               </a:rPr>
               <a:t>AUTUMN 1  ·  WEEK 5  ·  LESSON A</a:t>
             </a:r>
@@ -7887,27 +10548,33 @@
         </p:nvSpPr>
         <p:spPr>
           <a:xfrm xmlns:a="http://schemas.openxmlformats.org/drawingml/2006/main">
-            <a:off x="11106150" y="6362700"/>
-            <a:ext cx="476250" cy="238125"/>
-          </a:xfrm>
-          <a:prstGeom xmlns:a="http://schemas.openxmlformats.org/drawingml/2006/main" prst="rect">
-            <a:avLst/>
-          </a:prstGeom>
-          <a:noFill xmlns:a="http://schemas.openxmlformats.org/drawingml/2006/main"/>
-          <a:ln xmlns:a="http://schemas.openxmlformats.org/drawingml/2006/main" w="0">
-            <a:noFill/>
-            <a:prstDash val="solid"/>
-          </a:ln>
-        </p:spPr>
-        <p:txBody>
-          <a:bodyPr xmlns:a="http://schemas.openxmlformats.org/drawingml/2006/main" lIns="0" tIns="0" rIns="0" bIns="0" anchor="ctr"/>
-          <a:lstStyle xmlns:a="http://schemas.openxmlformats.org/drawingml/2006/main"/>
-          <a:p xmlns:a="http://schemas.openxmlformats.org/drawingml/2006/main">
-            <a:pPr>
+            <a:off x="11106150" y="6400800"/>
+            <a:ext cx="476250" cy="247650"/>
+          </a:xfrm>
+          <a:prstGeom xmlns:a="http://schemas.openxmlformats.org/drawingml/2006/main" prst="rect">
+            <a:avLst/>
+          </a:prstGeom>
+          <a:noFill xmlns:a="http://schemas.openxmlformats.org/drawingml/2006/main"/>
+          <a:ln xmlns:a="http://schemas.openxmlformats.org/drawingml/2006/main" w="0">
+            <a:noFill/>
+            <a:prstDash val="solid"/>
+          </a:ln>
+        </p:spPr>
+        <p:txBody>
+          <a:bodyPr xmlns:a="http://schemas.openxmlformats.org/drawingml/2006/main" lIns="0" tIns="0" rIns="0" bIns="0" anchor="ctr">
+            <a:noAutofit/>
+          </a:bodyPr>
+          <a:lstStyle xmlns:a="http://schemas.openxmlformats.org/drawingml/2006/main"/>
+          <a:p xmlns:a="http://schemas.openxmlformats.org/drawingml/2006/main">
+            <a:pPr algn="l">
+              <a:buNone/>
               <a:defRPr sz="1350" b="1">
                 <a:solidFill>
                   <a:srgbClr val="28685E"/>
                 </a:solidFill>
+                <a:latin typeface="Calibri"/>
+                <a:ea typeface="Calibri"/>
+                <a:cs typeface="Calibri"/>
               </a:defRPr>
             </a:pPr>
             <a:r>
@@ -7915,6 +10582,9 @@
                 <a:solidFill>
                   <a:srgbClr val="28685E"/>
                 </a:solidFill>
+                <a:latin typeface="Calibri"/>
+                <a:ea typeface="Calibri"/>
+                <a:cs typeface="Calibri"/>
               </a:rPr>
               <a:t>08</a:t>
             </a:r>
@@ -7937,34 +10607,43 @@
         </p:nvSpPr>
         <p:spPr>
           <a:xfrm xmlns:a="http://schemas.openxmlformats.org/drawingml/2006/main">
-            <a:off x="609600" y="2619375"/>
-            <a:ext cx="10972800" cy="781050"/>
-          </a:xfrm>
-          <a:prstGeom xmlns:a="http://schemas.openxmlformats.org/drawingml/2006/main" prst="rect">
-            <a:avLst/>
-          </a:prstGeom>
-          <a:noFill xmlns:a="http://schemas.openxmlformats.org/drawingml/2006/main"/>
-          <a:ln xmlns:a="http://schemas.openxmlformats.org/drawingml/2006/main" w="0">
-            <a:noFill/>
-            <a:prstDash val="solid"/>
-          </a:ln>
-        </p:spPr>
-        <p:txBody>
-          <a:bodyPr xmlns:a="http://schemas.openxmlformats.org/drawingml/2006/main" lIns="0" tIns="0" rIns="0" bIns="0" anchor="ctr"/>
-          <a:lstStyle xmlns:a="http://schemas.openxmlformats.org/drawingml/2006/main"/>
-          <a:p xmlns:a="http://schemas.openxmlformats.org/drawingml/2006/main">
-            <a:pPr>
-              <a:defRPr sz="2550" b="0">
+            <a:off x="1000125" y="2333625"/>
+            <a:ext cx="10382250" cy="1076325"/>
+          </a:xfrm>
+          <a:prstGeom xmlns:a="http://schemas.openxmlformats.org/drawingml/2006/main" prst="rect">
+            <a:avLst/>
+          </a:prstGeom>
+          <a:noFill xmlns:a="http://schemas.openxmlformats.org/drawingml/2006/main"/>
+          <a:ln xmlns:a="http://schemas.openxmlformats.org/drawingml/2006/main" w="0">
+            <a:noFill/>
+            <a:prstDash val="solid"/>
+          </a:ln>
+        </p:spPr>
+        <p:txBody>
+          <a:bodyPr xmlns:a="http://schemas.openxmlformats.org/drawingml/2006/main" lIns="0" tIns="0" rIns="0" bIns="0" anchor="ctr">
+            <a:noAutofit/>
+          </a:bodyPr>
+          <a:lstStyle xmlns:a="http://schemas.openxmlformats.org/drawingml/2006/main"/>
+          <a:p xmlns:a="http://schemas.openxmlformats.org/drawingml/2006/main">
+            <a:pPr algn="l">
+              <a:buNone/>
+              <a:defRPr sz="2625" b="0">
                 <a:solidFill>
                   <a:srgbClr val="152B3A"/>
                 </a:solidFill>
-              </a:defRPr>
-            </a:pPr>
-            <a:r>
-              <a:rPr sz="2550" b="0">
+                <a:latin typeface="Calibri"/>
+                <a:ea typeface="Calibri"/>
+                <a:cs typeface="Calibri"/>
+              </a:defRPr>
+            </a:pPr>
+            <a:r>
+              <a:rPr sz="2625" b="0">
                 <a:solidFill>
                   <a:srgbClr val="152B3A"/>
                 </a:solidFill>
+                <a:latin typeface="Calibri"/>
+                <a:ea typeface="Calibri"/>
+                <a:cs typeface="Calibri"/>
               </a:rPr>
               <a:t>Check the ruler’s zero against the agreed start.</a:t>
             </a:r>
@@ -7987,34 +10666,43 @@
         </p:nvSpPr>
         <p:spPr>
           <a:xfrm xmlns:a="http://schemas.openxmlformats.org/drawingml/2006/main">
-            <a:off x="609600" y="3476625"/>
-            <a:ext cx="10972800" cy="781050"/>
-          </a:xfrm>
-          <a:prstGeom xmlns:a="http://schemas.openxmlformats.org/drawingml/2006/main" prst="rect">
-            <a:avLst/>
-          </a:prstGeom>
-          <a:noFill xmlns:a="http://schemas.openxmlformats.org/drawingml/2006/main"/>
-          <a:ln xmlns:a="http://schemas.openxmlformats.org/drawingml/2006/main" w="0">
-            <a:noFill/>
-            <a:prstDash val="solid"/>
-          </a:ln>
-        </p:spPr>
-        <p:txBody>
-          <a:bodyPr xmlns:a="http://schemas.openxmlformats.org/drawingml/2006/main" lIns="0" tIns="0" rIns="0" bIns="0" anchor="ctr"/>
-          <a:lstStyle xmlns:a="http://schemas.openxmlformats.org/drawingml/2006/main"/>
-          <a:p xmlns:a="http://schemas.openxmlformats.org/drawingml/2006/main">
-            <a:pPr>
-              <a:defRPr sz="2550" b="0">
+            <a:off x="1000125" y="3467100"/>
+            <a:ext cx="10382250" cy="1076325"/>
+          </a:xfrm>
+          <a:prstGeom xmlns:a="http://schemas.openxmlformats.org/drawingml/2006/main" prst="rect">
+            <a:avLst/>
+          </a:prstGeom>
+          <a:noFill xmlns:a="http://schemas.openxmlformats.org/drawingml/2006/main"/>
+          <a:ln xmlns:a="http://schemas.openxmlformats.org/drawingml/2006/main" w="0">
+            <a:noFill/>
+            <a:prstDash val="solid"/>
+          </a:ln>
+        </p:spPr>
+        <p:txBody>
+          <a:bodyPr xmlns:a="http://schemas.openxmlformats.org/drawingml/2006/main" lIns="0" tIns="0" rIns="0" bIns="0" anchor="ctr">
+            <a:noAutofit/>
+          </a:bodyPr>
+          <a:lstStyle xmlns:a="http://schemas.openxmlformats.org/drawingml/2006/main"/>
+          <a:p xmlns:a="http://schemas.openxmlformats.org/drawingml/2006/main">
+            <a:pPr algn="l">
+              <a:buNone/>
+              <a:defRPr sz="2625" b="0">
                 <a:solidFill>
                   <a:srgbClr val="152B3A"/>
                 </a:solidFill>
-              </a:defRPr>
-            </a:pPr>
-            <a:r>
-              <a:rPr sz="2550" b="0">
+                <a:latin typeface="Calibri"/>
+                <a:ea typeface="Calibri"/>
+                <a:cs typeface="Calibri"/>
+              </a:defRPr>
+            </a:pPr>
+            <a:r>
+              <a:rPr sz="2625" b="0">
                 <a:solidFill>
                   <a:srgbClr val="152B3A"/>
                 </a:solidFill>
+                <a:latin typeface="Calibri"/>
+                <a:ea typeface="Calibri"/>
+                <a:cs typeface="Calibri"/>
               </a:rPr>
               <a:t>Is the ruler end the same as its zero mark?</a:t>
             </a:r>
@@ -8037,36 +10725,276 @@
         </p:nvSpPr>
         <p:spPr>
           <a:xfrm xmlns:a="http://schemas.openxmlformats.org/drawingml/2006/main">
-            <a:off x="609600" y="4333875"/>
-            <a:ext cx="10972800" cy="781050"/>
-          </a:xfrm>
-          <a:prstGeom xmlns:a="http://schemas.openxmlformats.org/drawingml/2006/main" prst="rect">
-            <a:avLst/>
-          </a:prstGeom>
-          <a:noFill xmlns:a="http://schemas.openxmlformats.org/drawingml/2006/main"/>
-          <a:ln xmlns:a="http://schemas.openxmlformats.org/drawingml/2006/main" w="0">
-            <a:noFill/>
-            <a:prstDash val="solid"/>
-          </a:ln>
-        </p:spPr>
-        <p:txBody>
-          <a:bodyPr xmlns:a="http://schemas.openxmlformats.org/drawingml/2006/main" lIns="0" tIns="0" rIns="0" bIns="0" anchor="ctr"/>
-          <a:lstStyle xmlns:a="http://schemas.openxmlformats.org/drawingml/2006/main"/>
-          <a:p xmlns:a="http://schemas.openxmlformats.org/drawingml/2006/main">
-            <a:pPr>
-              <a:defRPr sz="2550" b="0">
+            <a:off x="1000125" y="4600575"/>
+            <a:ext cx="10382250" cy="1076325"/>
+          </a:xfrm>
+          <a:prstGeom xmlns:a="http://schemas.openxmlformats.org/drawingml/2006/main" prst="rect">
+            <a:avLst/>
+          </a:prstGeom>
+          <a:noFill xmlns:a="http://schemas.openxmlformats.org/drawingml/2006/main"/>
+          <a:ln xmlns:a="http://schemas.openxmlformats.org/drawingml/2006/main" w="0">
+            <a:noFill/>
+            <a:prstDash val="solid"/>
+          </a:ln>
+        </p:spPr>
+        <p:txBody>
+          <a:bodyPr xmlns:a="http://schemas.openxmlformats.org/drawingml/2006/main" lIns="0" tIns="0" rIns="0" bIns="0" anchor="ctr">
+            <a:noAutofit/>
+          </a:bodyPr>
+          <a:lstStyle xmlns:a="http://schemas.openxmlformats.org/drawingml/2006/main"/>
+          <a:p xmlns:a="http://schemas.openxmlformats.org/drawingml/2006/main">
+            <a:pPr algn="l">
+              <a:buNone/>
+              <a:defRPr sz="2625" b="0">
                 <a:solidFill>
                   <a:srgbClr val="152B3A"/>
                 </a:solidFill>
-              </a:defRPr>
-            </a:pPr>
-            <a:r>
-              <a:rPr sz="2550" b="0">
+                <a:latin typeface="Calibri"/>
+                <a:ea typeface="Calibri"/>
+                <a:cs typeface="Calibri"/>
+              </a:defRPr>
+            </a:pPr>
+            <a:r>
+              <a:rPr sz="2625" b="0">
                 <a:solidFill>
                   <a:srgbClr val="152B3A"/>
                 </a:solidFill>
+                <a:latin typeface="Calibri"/>
+                <a:ea typeface="Calibri"/>
+                <a:cs typeface="Calibri"/>
               </a:rPr>
               <a:t>Direct the adult to correct one control.</a:t>
+            </a:r>
+          </a:p>
+        </p:txBody>
+      </p:sp>
+      <p:sp>
+        <p:nvSpPr>
+          <p:cNvPr id="11" name="cue-0">
+            <a:extLst xmlns:a="http://schemas.openxmlformats.org/drawingml/2006/main">
+              <a:ext uri="{FF2B5EF4-FFF2-40B4-BE49-F238E27FC236}">
+                <a16:creationId xmlns:a16="http://schemas.microsoft.com/office/drawing/2014/main" id="{A413BF75-DC9D-46FD-9C90-2C69946B0CEE}"/>
+              </a:ext>
+            </a:extLst>
+          </p:cNvPr>
+          <p:cNvSpPr>
+            <a:spLocks xmlns:a="http://schemas.openxmlformats.org/drawingml/2006/main" noGrp="1"/>
+          </p:cNvSpPr>
+          <p:nvPr/>
+        </p:nvSpPr>
+        <p:spPr>
+          <a:xfrm xmlns:a="http://schemas.openxmlformats.org/drawingml/2006/main">
+            <a:off x="609600" y="2362200"/>
+            <a:ext cx="323850" cy="323850"/>
+          </a:xfrm>
+          <a:prstGeom xmlns:a="http://schemas.openxmlformats.org/drawingml/2006/main" prst="rect">
+            <a:avLst/>
+          </a:prstGeom>
+          <a:noFill xmlns:a="http://schemas.openxmlformats.org/drawingml/2006/main"/>
+          <a:ln xmlns:a="http://schemas.openxmlformats.org/drawingml/2006/main" w="0">
+            <a:noFill/>
+          </a:ln>
+        </p:spPr>
+        <p:txBody>
+          <a:bodyPr xmlns:a="http://schemas.openxmlformats.org/drawingml/2006/main" lIns="0" tIns="0" rIns="0" bIns="0" anchor="ctr">
+            <a:noAutofit/>
+          </a:bodyPr>
+          <a:lstStyle xmlns:a="http://schemas.openxmlformats.org/drawingml/2006/main"/>
+          <a:p xmlns:a="http://schemas.openxmlformats.org/drawingml/2006/main">
+            <a:pPr algn="l">
+              <a:defRPr sz="1350" b="1">
+                <a:solidFill>
+                  <a:srgbClr val="28685E"/>
+                </a:solidFill>
+                <a:latin typeface="Calibri"/>
+                <a:ea typeface="Calibri"/>
+                <a:cs typeface="Calibri"/>
+              </a:defRPr>
+            </a:pPr>
+            <a:r>
+              <a:rPr sz="1350" b="1">
+                <a:solidFill>
+                  <a:srgbClr val="28685E"/>
+                </a:solidFill>
+                <a:latin typeface="Calibri"/>
+                <a:ea typeface="Calibri"/>
+                <a:cs typeface="Calibri"/>
+              </a:rPr>
+              <a:t>01</a:t>
+            </a:r>
+          </a:p>
+        </p:txBody>
+      </p:sp>
+      <p:sp>
+        <p:nvSpPr>
+          <p:cNvPr id="12" name="row-rule-0">
+            <a:extLst xmlns:a="http://schemas.openxmlformats.org/drawingml/2006/main">
+              <a:ext uri="{FF2B5EF4-FFF2-40B4-BE49-F238E27FC236}">
+                <a16:creationId xmlns:a16="http://schemas.microsoft.com/office/drawing/2014/main" id="{1B56A576-B838-4CC8-A7A8-0CC0CF7B5749}"/>
+              </a:ext>
+            </a:extLst>
+          </p:cNvPr>
+          <p:cNvSpPr>
+            <a:spLocks xmlns:a="http://schemas.openxmlformats.org/drawingml/2006/main" noGrp="1"/>
+          </p:cNvSpPr>
+          <p:nvPr/>
+        </p:nvSpPr>
+        <p:spPr>
+          <a:xfrm xmlns:a="http://schemas.openxmlformats.org/drawingml/2006/main">
+            <a:off x="1000125" y="3419475"/>
+            <a:ext cx="10334625" cy="0"/>
+          </a:xfrm>
+          <a:prstGeom xmlns:a="http://schemas.openxmlformats.org/drawingml/2006/main" prst="line">
+            <a:avLst/>
+          </a:prstGeom>
+          <a:noFill xmlns:a="http://schemas.openxmlformats.org/drawingml/2006/main"/>
+          <a:ln xmlns:a="http://schemas.openxmlformats.org/drawingml/2006/main" w="9525">
+            <a:solidFill>
+              <a:srgbClr val="CEDBD3"/>
+            </a:solidFill>
+          </a:ln>
+        </p:spPr>
+      </p:sp>
+      <p:sp>
+        <p:nvSpPr>
+          <p:cNvPr id="13" name="cue-1">
+            <a:extLst xmlns:a="http://schemas.openxmlformats.org/drawingml/2006/main">
+              <a:ext uri="{FF2B5EF4-FFF2-40B4-BE49-F238E27FC236}">
+                <a16:creationId xmlns:a16="http://schemas.microsoft.com/office/drawing/2014/main" id="{41B5CEA4-6950-4399-9427-6B4BD068B342}"/>
+              </a:ext>
+            </a:extLst>
+          </p:cNvPr>
+          <p:cNvSpPr>
+            <a:spLocks xmlns:a="http://schemas.openxmlformats.org/drawingml/2006/main" noGrp="1"/>
+          </p:cNvSpPr>
+          <p:nvPr/>
+        </p:nvSpPr>
+        <p:spPr>
+          <a:xfrm xmlns:a="http://schemas.openxmlformats.org/drawingml/2006/main">
+            <a:off x="609600" y="3495675"/>
+            <a:ext cx="323850" cy="323850"/>
+          </a:xfrm>
+          <a:prstGeom xmlns:a="http://schemas.openxmlformats.org/drawingml/2006/main" prst="rect">
+            <a:avLst/>
+          </a:prstGeom>
+          <a:noFill xmlns:a="http://schemas.openxmlformats.org/drawingml/2006/main"/>
+          <a:ln xmlns:a="http://schemas.openxmlformats.org/drawingml/2006/main" w="0">
+            <a:noFill/>
+          </a:ln>
+        </p:spPr>
+        <p:txBody>
+          <a:bodyPr xmlns:a="http://schemas.openxmlformats.org/drawingml/2006/main" lIns="0" tIns="0" rIns="0" bIns="0" anchor="ctr">
+            <a:noAutofit/>
+          </a:bodyPr>
+          <a:lstStyle xmlns:a="http://schemas.openxmlformats.org/drawingml/2006/main"/>
+          <a:p xmlns:a="http://schemas.openxmlformats.org/drawingml/2006/main">
+            <a:pPr algn="l">
+              <a:defRPr sz="1350" b="1">
+                <a:solidFill>
+                  <a:srgbClr val="28685E"/>
+                </a:solidFill>
+                <a:latin typeface="Calibri"/>
+                <a:ea typeface="Calibri"/>
+                <a:cs typeface="Calibri"/>
+              </a:defRPr>
+            </a:pPr>
+            <a:r>
+              <a:rPr sz="1350" b="1">
+                <a:solidFill>
+                  <a:srgbClr val="28685E"/>
+                </a:solidFill>
+                <a:latin typeface="Calibri"/>
+                <a:ea typeface="Calibri"/>
+                <a:cs typeface="Calibri"/>
+              </a:rPr>
+              <a:t>02</a:t>
+            </a:r>
+          </a:p>
+        </p:txBody>
+      </p:sp>
+      <p:sp>
+        <p:nvSpPr>
+          <p:cNvPr id="14" name="row-rule-1">
+            <a:extLst xmlns:a="http://schemas.openxmlformats.org/drawingml/2006/main">
+              <a:ext uri="{FF2B5EF4-FFF2-40B4-BE49-F238E27FC236}">
+                <a16:creationId xmlns:a16="http://schemas.microsoft.com/office/drawing/2014/main" id="{C06E48BD-E4E0-4014-9DF4-BC0A30529D77}"/>
+              </a:ext>
+            </a:extLst>
+          </p:cNvPr>
+          <p:cNvSpPr>
+            <a:spLocks xmlns:a="http://schemas.openxmlformats.org/drawingml/2006/main" noGrp="1"/>
+          </p:cNvSpPr>
+          <p:nvPr/>
+        </p:nvSpPr>
+        <p:spPr>
+          <a:xfrm xmlns:a="http://schemas.openxmlformats.org/drawingml/2006/main">
+            <a:off x="1000125" y="4552950"/>
+            <a:ext cx="10334625" cy="0"/>
+          </a:xfrm>
+          <a:prstGeom xmlns:a="http://schemas.openxmlformats.org/drawingml/2006/main" prst="line">
+            <a:avLst/>
+          </a:prstGeom>
+          <a:noFill xmlns:a="http://schemas.openxmlformats.org/drawingml/2006/main"/>
+          <a:ln xmlns:a="http://schemas.openxmlformats.org/drawingml/2006/main" w="9525">
+            <a:solidFill>
+              <a:srgbClr val="CEDBD3"/>
+            </a:solidFill>
+          </a:ln>
+        </p:spPr>
+      </p:sp>
+      <p:sp>
+        <p:nvSpPr>
+          <p:cNvPr id="15" name="cue-2">
+            <a:extLst xmlns:a="http://schemas.openxmlformats.org/drawingml/2006/main">
+              <a:ext uri="{FF2B5EF4-FFF2-40B4-BE49-F238E27FC236}">
+                <a16:creationId xmlns:a16="http://schemas.microsoft.com/office/drawing/2014/main" id="{34B602F1-56B7-4E89-8AA3-703499BC8F15}"/>
+              </a:ext>
+            </a:extLst>
+          </p:cNvPr>
+          <p:cNvSpPr>
+            <a:spLocks xmlns:a="http://schemas.openxmlformats.org/drawingml/2006/main" noGrp="1"/>
+          </p:cNvSpPr>
+          <p:nvPr/>
+        </p:nvSpPr>
+        <p:spPr>
+          <a:xfrm xmlns:a="http://schemas.openxmlformats.org/drawingml/2006/main">
+            <a:off x="609600" y="4629150"/>
+            <a:ext cx="323850" cy="323850"/>
+          </a:xfrm>
+          <a:prstGeom xmlns:a="http://schemas.openxmlformats.org/drawingml/2006/main" prst="rect">
+            <a:avLst/>
+          </a:prstGeom>
+          <a:noFill xmlns:a="http://schemas.openxmlformats.org/drawingml/2006/main"/>
+          <a:ln xmlns:a="http://schemas.openxmlformats.org/drawingml/2006/main" w="0">
+            <a:noFill/>
+          </a:ln>
+        </p:spPr>
+        <p:txBody>
+          <a:bodyPr xmlns:a="http://schemas.openxmlformats.org/drawingml/2006/main" lIns="0" tIns="0" rIns="0" bIns="0" anchor="ctr">
+            <a:noAutofit/>
+          </a:bodyPr>
+          <a:lstStyle xmlns:a="http://schemas.openxmlformats.org/drawingml/2006/main"/>
+          <a:p xmlns:a="http://schemas.openxmlformats.org/drawingml/2006/main">
+            <a:pPr algn="l">
+              <a:defRPr sz="1350" b="1">
+                <a:solidFill>
+                  <a:srgbClr val="28685E"/>
+                </a:solidFill>
+                <a:latin typeface="Calibri"/>
+                <a:ea typeface="Calibri"/>
+                <a:cs typeface="Calibri"/>
+              </a:defRPr>
+            </a:pPr>
+            <a:r>
+              <a:rPr sz="1350" b="1">
+                <a:solidFill>
+                  <a:srgbClr val="28685E"/>
+                </a:solidFill>
+                <a:latin typeface="Calibri"/>
+                <a:ea typeface="Calibri"/>
+                <a:cs typeface="Calibri"/>
+              </a:rPr>
+              <a:t>03</a:t>
             </a:r>
           </a:p>
         </p:txBody>
@@ -8087,7 +11015,7 @@
     <p:bg>
       <p:bgPr>
         <a:solidFill xmlns:a="http://schemas.openxmlformats.org/drawingml/2006/main">
-          <a:srgbClr val="F5F1E8"/>
+          <a:srgbClr val="FAF9F5"/>
         </a:solidFill>
       </p:bgPr>
     </p:bg>
@@ -8116,8 +11044,8 @@
         </p:nvSpPr>
         <p:spPr>
           <a:xfrm xmlns:a="http://schemas.openxmlformats.org/drawingml/2006/main">
-            <a:off x="609600" y="552450"/>
-            <a:ext cx="781050" cy="57150"/>
+            <a:off x="609600" y="733425"/>
+            <a:ext cx="781050" cy="38100"/>
           </a:xfrm>
           <a:prstGeom xmlns:a="http://schemas.openxmlformats.org/drawingml/2006/main" prst="rect">
             <a:avLst/>
@@ -8147,34 +11075,43 @@
         </p:nvSpPr>
         <p:spPr>
           <a:xfrm xmlns:a="http://schemas.openxmlformats.org/drawingml/2006/main">
-            <a:off x="609600" y="762000"/>
-            <a:ext cx="8572500" cy="285750"/>
-          </a:xfrm>
-          <a:prstGeom xmlns:a="http://schemas.openxmlformats.org/drawingml/2006/main" prst="rect">
-            <a:avLst/>
-          </a:prstGeom>
-          <a:noFill xmlns:a="http://schemas.openxmlformats.org/drawingml/2006/main"/>
-          <a:ln xmlns:a="http://schemas.openxmlformats.org/drawingml/2006/main" w="0">
-            <a:noFill/>
-            <a:prstDash val="solid"/>
-          </a:ln>
-        </p:spPr>
-        <p:txBody>
-          <a:bodyPr xmlns:a="http://schemas.openxmlformats.org/drawingml/2006/main" lIns="0" tIns="0" rIns="0" bIns="0" anchor="ctr"/>
-          <a:lstStyle xmlns:a="http://schemas.openxmlformats.org/drawingml/2006/main"/>
-          <a:p xmlns:a="http://schemas.openxmlformats.org/drawingml/2006/main">
-            <a:pPr>
-              <a:defRPr sz="1500" b="1">
+            <a:off x="609600" y="342900"/>
+            <a:ext cx="9334500" cy="304800"/>
+          </a:xfrm>
+          <a:prstGeom xmlns:a="http://schemas.openxmlformats.org/drawingml/2006/main" prst="rect">
+            <a:avLst/>
+          </a:prstGeom>
+          <a:noFill xmlns:a="http://schemas.openxmlformats.org/drawingml/2006/main"/>
+          <a:ln xmlns:a="http://schemas.openxmlformats.org/drawingml/2006/main" w="0">
+            <a:noFill/>
+            <a:prstDash val="solid"/>
+          </a:ln>
+        </p:spPr>
+        <p:txBody>
+          <a:bodyPr xmlns:a="http://schemas.openxmlformats.org/drawingml/2006/main" lIns="0" tIns="0" rIns="0" bIns="0" anchor="ctr">
+            <a:noAutofit/>
+          </a:bodyPr>
+          <a:lstStyle xmlns:a="http://schemas.openxmlformats.org/drawingml/2006/main"/>
+          <a:p xmlns:a="http://schemas.openxmlformats.org/drawingml/2006/main">
+            <a:pPr algn="l">
+              <a:buNone/>
+              <a:defRPr sz="1350" b="1">
                 <a:solidFill>
                   <a:srgbClr val="28685E"/>
                 </a:solidFill>
-              </a:defRPr>
-            </a:pPr>
-            <a:r>
-              <a:rPr sz="1500" b="1">
+                <a:latin typeface="Calibri"/>
+                <a:ea typeface="Calibri"/>
+                <a:cs typeface="Calibri"/>
+              </a:defRPr>
+            </a:pPr>
+            <a:r>
+              <a:rPr sz="1350" b="1">
                 <a:solidFill>
                   <a:srgbClr val="28685E"/>
                 </a:solidFill>
+                <a:latin typeface="Calibri"/>
+                <a:ea typeface="Calibri"/>
+                <a:cs typeface="Calibri"/>
               </a:rPr>
               <a:t>MADE BY MATT  /  GROW SCIENCE</a:t>
             </a:r>
@@ -8197,34 +11134,43 @@
         </p:nvSpPr>
         <p:spPr>
           <a:xfrm xmlns:a="http://schemas.openxmlformats.org/drawingml/2006/main">
-            <a:off x="609600" y="1352550"/>
-            <a:ext cx="10972800" cy="952500"/>
-          </a:xfrm>
-          <a:prstGeom xmlns:a="http://schemas.openxmlformats.org/drawingml/2006/main" prst="rect">
-            <a:avLst/>
-          </a:prstGeom>
-          <a:noFill xmlns:a="http://schemas.openxmlformats.org/drawingml/2006/main"/>
-          <a:ln xmlns:a="http://schemas.openxmlformats.org/drawingml/2006/main" w="0">
-            <a:noFill/>
-            <a:prstDash val="solid"/>
-          </a:ln>
-        </p:spPr>
-        <p:txBody>
-          <a:bodyPr xmlns:a="http://schemas.openxmlformats.org/drawingml/2006/main" lIns="0" tIns="0" rIns="0" bIns="0" anchor="ctr"/>
-          <a:lstStyle xmlns:a="http://schemas.openxmlformats.org/drawingml/2006/main"/>
-          <a:p xmlns:a="http://schemas.openxmlformats.org/drawingml/2006/main">
-            <a:pPr>
-              <a:defRPr sz="3750" b="1">
+            <a:off x="609600" y="990600"/>
+            <a:ext cx="10972800" cy="1000125"/>
+          </a:xfrm>
+          <a:prstGeom xmlns:a="http://schemas.openxmlformats.org/drawingml/2006/main" prst="rect">
+            <a:avLst/>
+          </a:prstGeom>
+          <a:noFill xmlns:a="http://schemas.openxmlformats.org/drawingml/2006/main"/>
+          <a:ln xmlns:a="http://schemas.openxmlformats.org/drawingml/2006/main" w="0">
+            <a:noFill/>
+            <a:prstDash val="solid"/>
+          </a:ln>
+        </p:spPr>
+        <p:txBody>
+          <a:bodyPr xmlns:a="http://schemas.openxmlformats.org/drawingml/2006/main" lIns="0" tIns="0" rIns="0" bIns="0" anchor="ctr">
+            <a:noAutofit/>
+          </a:bodyPr>
+          <a:lstStyle xmlns:a="http://schemas.openxmlformats.org/drawingml/2006/main"/>
+          <a:p xmlns:a="http://schemas.openxmlformats.org/drawingml/2006/main">
+            <a:pPr algn="l">
+              <a:buNone/>
+              <a:defRPr sz="3675" b="1">
                 <a:solidFill>
                   <a:srgbClr val="152B3A"/>
                 </a:solidFill>
-              </a:defRPr>
-            </a:pPr>
-            <a:r>
-              <a:rPr sz="3750" b="1">
+                <a:latin typeface="Calibri"/>
+                <a:ea typeface="Calibri"/>
+                <a:cs typeface="Calibri"/>
+              </a:defRPr>
+            </a:pPr>
+            <a:r>
+              <a:rPr sz="3675" b="1">
                 <a:solidFill>
                   <a:srgbClr val="152B3A"/>
                 </a:solidFill>
+                <a:latin typeface="Calibri"/>
+                <a:ea typeface="Calibri"/>
+                <a:cs typeface="Calibri"/>
               </a:rPr>
               <a:t>Say the plan before touching kit</a:t>
             </a:r>
@@ -8247,14 +11193,14 @@
         </p:nvSpPr>
         <p:spPr>
           <a:xfrm xmlns:a="http://schemas.openxmlformats.org/drawingml/2006/main">
-            <a:off x="609600" y="6219825"/>
+            <a:off x="609600" y="6191250"/>
             <a:ext cx="10972800" cy="9525"/>
           </a:xfrm>
           <a:prstGeom xmlns:a="http://schemas.openxmlformats.org/drawingml/2006/main" prst="rect">
             <a:avLst/>
           </a:prstGeom>
           <a:solidFill xmlns:a="http://schemas.openxmlformats.org/drawingml/2006/main">
-            <a:srgbClr val="DCE7DD"/>
+            <a:srgbClr val="CEDBD3"/>
           </a:solidFill>
           <a:ln xmlns:a="http://schemas.openxmlformats.org/drawingml/2006/main" w="0">
             <a:noFill/>
@@ -8278,34 +11224,43 @@
         </p:nvSpPr>
         <p:spPr>
           <a:xfrm xmlns:a="http://schemas.openxmlformats.org/drawingml/2006/main">
-            <a:off x="609600" y="6381750"/>
-            <a:ext cx="9906000" cy="228600"/>
-          </a:xfrm>
-          <a:prstGeom xmlns:a="http://schemas.openxmlformats.org/drawingml/2006/main" prst="rect">
-            <a:avLst/>
-          </a:prstGeom>
-          <a:noFill xmlns:a="http://schemas.openxmlformats.org/drawingml/2006/main"/>
-          <a:ln xmlns:a="http://schemas.openxmlformats.org/drawingml/2006/main" w="0">
-            <a:noFill/>
-            <a:prstDash val="solid"/>
-          </a:ln>
-        </p:spPr>
-        <p:txBody>
-          <a:bodyPr xmlns:a="http://schemas.openxmlformats.org/drawingml/2006/main" lIns="0" tIns="0" rIns="0" bIns="0" anchor="ctr"/>
-          <a:lstStyle xmlns:a="http://schemas.openxmlformats.org/drawingml/2006/main"/>
-          <a:p xmlns:a="http://schemas.openxmlformats.org/drawingml/2006/main">
-            <a:pPr>
-              <a:defRPr sz="1275" b="0">
+            <a:off x="609600" y="6419850"/>
+            <a:ext cx="9525000" cy="219075"/>
+          </a:xfrm>
+          <a:prstGeom xmlns:a="http://schemas.openxmlformats.org/drawingml/2006/main" prst="rect">
+            <a:avLst/>
+          </a:prstGeom>
+          <a:noFill xmlns:a="http://schemas.openxmlformats.org/drawingml/2006/main"/>
+          <a:ln xmlns:a="http://schemas.openxmlformats.org/drawingml/2006/main" w="0">
+            <a:noFill/>
+            <a:prstDash val="solid"/>
+          </a:ln>
+        </p:spPr>
+        <p:txBody>
+          <a:bodyPr xmlns:a="http://schemas.openxmlformats.org/drawingml/2006/main" lIns="0" tIns="0" rIns="0" bIns="0" anchor="ctr">
+            <a:noAutofit/>
+          </a:bodyPr>
+          <a:lstStyle xmlns:a="http://schemas.openxmlformats.org/drawingml/2006/main"/>
+          <a:p xmlns:a="http://schemas.openxmlformats.org/drawingml/2006/main">
+            <a:pPr algn="l">
+              <a:buNone/>
+              <a:defRPr sz="1200" b="0">
                 <a:solidFill>
                   <a:srgbClr val="50616B"/>
                 </a:solidFill>
-              </a:defRPr>
-            </a:pPr>
-            <a:r>
-              <a:rPr sz="1275" b="0">
+                <a:latin typeface="Calibri"/>
+                <a:ea typeface="Calibri"/>
+                <a:cs typeface="Calibri"/>
+              </a:defRPr>
+            </a:pPr>
+            <a:r>
+              <a:rPr sz="1200" b="0">
                 <a:solidFill>
                   <a:srgbClr val="50616B"/>
                 </a:solidFill>
+                <a:latin typeface="Calibri"/>
+                <a:ea typeface="Calibri"/>
+                <a:cs typeface="Calibri"/>
               </a:rPr>
               <a:t>AUTUMN 1  ·  WEEK 5  ·  LESSON A</a:t>
             </a:r>
@@ -8328,27 +11283,33 @@
         </p:nvSpPr>
         <p:spPr>
           <a:xfrm xmlns:a="http://schemas.openxmlformats.org/drawingml/2006/main">
-            <a:off x="11106150" y="6362700"/>
-            <a:ext cx="476250" cy="238125"/>
-          </a:xfrm>
-          <a:prstGeom xmlns:a="http://schemas.openxmlformats.org/drawingml/2006/main" prst="rect">
-            <a:avLst/>
-          </a:prstGeom>
-          <a:noFill xmlns:a="http://schemas.openxmlformats.org/drawingml/2006/main"/>
-          <a:ln xmlns:a="http://schemas.openxmlformats.org/drawingml/2006/main" w="0">
-            <a:noFill/>
-            <a:prstDash val="solid"/>
-          </a:ln>
-        </p:spPr>
-        <p:txBody>
-          <a:bodyPr xmlns:a="http://schemas.openxmlformats.org/drawingml/2006/main" lIns="0" tIns="0" rIns="0" bIns="0" anchor="ctr"/>
-          <a:lstStyle xmlns:a="http://schemas.openxmlformats.org/drawingml/2006/main"/>
-          <a:p xmlns:a="http://schemas.openxmlformats.org/drawingml/2006/main">
-            <a:pPr>
+            <a:off x="11106150" y="6400800"/>
+            <a:ext cx="476250" cy="247650"/>
+          </a:xfrm>
+          <a:prstGeom xmlns:a="http://schemas.openxmlformats.org/drawingml/2006/main" prst="rect">
+            <a:avLst/>
+          </a:prstGeom>
+          <a:noFill xmlns:a="http://schemas.openxmlformats.org/drawingml/2006/main"/>
+          <a:ln xmlns:a="http://schemas.openxmlformats.org/drawingml/2006/main" w="0">
+            <a:noFill/>
+            <a:prstDash val="solid"/>
+          </a:ln>
+        </p:spPr>
+        <p:txBody>
+          <a:bodyPr xmlns:a="http://schemas.openxmlformats.org/drawingml/2006/main" lIns="0" tIns="0" rIns="0" bIns="0" anchor="ctr">
+            <a:noAutofit/>
+          </a:bodyPr>
+          <a:lstStyle xmlns:a="http://schemas.openxmlformats.org/drawingml/2006/main"/>
+          <a:p xmlns:a="http://schemas.openxmlformats.org/drawingml/2006/main">
+            <a:pPr algn="l">
+              <a:buNone/>
               <a:defRPr sz="1350" b="1">
                 <a:solidFill>
                   <a:srgbClr val="28685E"/>
                 </a:solidFill>
+                <a:latin typeface="Calibri"/>
+                <a:ea typeface="Calibri"/>
+                <a:cs typeface="Calibri"/>
               </a:defRPr>
             </a:pPr>
             <a:r>
@@ -8356,6 +11317,9 @@
                 <a:solidFill>
                   <a:srgbClr val="28685E"/>
                 </a:solidFill>
+                <a:latin typeface="Calibri"/>
+                <a:ea typeface="Calibri"/>
+                <a:cs typeface="Calibri"/>
               </a:rPr>
               <a:t>09</a:t>
             </a:r>
@@ -8378,36 +11342,95 @@
         </p:nvSpPr>
         <p:spPr>
           <a:xfrm xmlns:a="http://schemas.openxmlformats.org/drawingml/2006/main">
-            <a:off x="609600" y="2686050"/>
-            <a:ext cx="10858500" cy="1524000"/>
-          </a:xfrm>
-          <a:prstGeom xmlns:a="http://schemas.openxmlformats.org/drawingml/2006/main" prst="rect">
-            <a:avLst/>
-          </a:prstGeom>
-          <a:noFill xmlns:a="http://schemas.openxmlformats.org/drawingml/2006/main"/>
-          <a:ln xmlns:a="http://schemas.openxmlformats.org/drawingml/2006/main" w="0">
-            <a:noFill/>
-            <a:prstDash val="solid"/>
-          </a:ln>
-        </p:spPr>
-        <p:txBody>
-          <a:bodyPr xmlns:a="http://schemas.openxmlformats.org/drawingml/2006/main" lIns="0" tIns="0" rIns="0" bIns="0" anchor="ctr"/>
-          <a:lstStyle xmlns:a="http://schemas.openxmlformats.org/drawingml/2006/main"/>
-          <a:p xmlns:a="http://schemas.openxmlformats.org/drawingml/2006/main">
-            <a:pPr>
-              <a:defRPr sz="2925" b="1">
+            <a:off x="457200" y="2190750"/>
+            <a:ext cx="11277600" cy="2143125"/>
+          </a:xfrm>
+          <a:prstGeom xmlns:a="http://schemas.openxmlformats.org/drawingml/2006/main" prst="rect">
+            <a:avLst/>
+          </a:prstGeom>
+          <a:solidFill xmlns:a="http://schemas.openxmlformats.org/drawingml/2006/main">
+            <a:srgbClr val="E7EFE9"/>
+          </a:solidFill>
+          <a:ln xmlns:a="http://schemas.openxmlformats.org/drawingml/2006/main" w="0">
+            <a:noFill/>
+            <a:prstDash val="solid"/>
+          </a:ln>
+        </p:spPr>
+        <p:txBody>
+          <a:bodyPr xmlns:a="http://schemas.openxmlformats.org/drawingml/2006/main" lIns="152400" tIns="114300" rIns="152400" bIns="114300" anchor="ctr">
+            <a:noAutofit/>
+          </a:bodyPr>
+          <a:lstStyle xmlns:a="http://schemas.openxmlformats.org/drawingml/2006/main"/>
+          <a:p xmlns:a="http://schemas.openxmlformats.org/drawingml/2006/main">
+            <a:pPr algn="l">
+              <a:buNone/>
+              <a:defRPr sz="3075" b="1">
                 <a:solidFill>
                   <a:srgbClr val="28685E"/>
                 </a:solidFill>
-              </a:defRPr>
-            </a:pPr>
-            <a:r>
-              <a:rPr sz="2925" b="1">
+                <a:latin typeface="Calibri"/>
+                <a:ea typeface="Calibri"/>
+                <a:cs typeface="Calibri"/>
+              </a:defRPr>
+            </a:pPr>
+            <a:r>
+              <a:rPr sz="3075" b="1">
                 <a:solidFill>
                   <a:srgbClr val="28685E"/>
                 </a:solidFill>
-              </a:rPr>
-              <a:t>I will change ___. I will keep ___ and ___ the same. I will measure ___ in ___.</a:t>
+                <a:latin typeface="Calibri"/>
+                <a:ea typeface="Calibri"/>
+                <a:cs typeface="Calibri"/>
+              </a:rPr>
+              <a:t>I will change ___.</a:t>
+            </a:r>
+          </a:p>
+          <a:p xmlns:a="http://schemas.openxmlformats.org/drawingml/2006/main">
+            <a:pPr algn="l">
+              <a:buNone/>
+              <a:defRPr sz="3075" b="1">
+                <a:solidFill>
+                  <a:srgbClr val="28685E"/>
+                </a:solidFill>
+                <a:latin typeface="Calibri"/>
+                <a:ea typeface="Calibri"/>
+                <a:cs typeface="Calibri"/>
+              </a:defRPr>
+            </a:pPr>
+            <a:r>
+              <a:rPr sz="3075" b="1">
+                <a:solidFill>
+                  <a:srgbClr val="28685E"/>
+                </a:solidFill>
+                <a:latin typeface="Calibri"/>
+                <a:ea typeface="Calibri"/>
+                <a:cs typeface="Calibri"/>
+              </a:rPr>
+              <a:t>I will keep ___ and ___ the same.</a:t>
+            </a:r>
+          </a:p>
+          <a:p xmlns:a="http://schemas.openxmlformats.org/drawingml/2006/main">
+            <a:pPr algn="l">
+              <a:buNone/>
+              <a:defRPr sz="3075" b="1">
+                <a:solidFill>
+                  <a:srgbClr val="28685E"/>
+                </a:solidFill>
+                <a:latin typeface="Calibri"/>
+                <a:ea typeface="Calibri"/>
+                <a:cs typeface="Calibri"/>
+              </a:defRPr>
+            </a:pPr>
+            <a:r>
+              <a:rPr sz="3075" b="1">
+                <a:solidFill>
+                  <a:srgbClr val="28685E"/>
+                </a:solidFill>
+                <a:latin typeface="Calibri"/>
+                <a:ea typeface="Calibri"/>
+                <a:cs typeface="Calibri"/>
+              </a:rPr>
+              <a:t>I will measure ___ in ___.</a:t>
             </a:r>
           </a:p>
         </p:txBody>
@@ -8428,34 +11451,43 @@
         </p:nvSpPr>
         <p:spPr>
           <a:xfrm xmlns:a="http://schemas.openxmlformats.org/drawingml/2006/main">
-            <a:off x="609600" y="4552950"/>
-            <a:ext cx="10858500" cy="1285875"/>
-          </a:xfrm>
-          <a:prstGeom xmlns:a="http://schemas.openxmlformats.org/drawingml/2006/main" prst="rect">
-            <a:avLst/>
-          </a:prstGeom>
-          <a:noFill xmlns:a="http://schemas.openxmlformats.org/drawingml/2006/main"/>
-          <a:ln xmlns:a="http://schemas.openxmlformats.org/drawingml/2006/main" w="0">
-            <a:noFill/>
-            <a:prstDash val="solid"/>
-          </a:ln>
-        </p:spPr>
-        <p:txBody>
-          <a:bodyPr xmlns:a="http://schemas.openxmlformats.org/drawingml/2006/main" lIns="0" tIns="0" rIns="0" bIns="0" anchor="ctr"/>
-          <a:lstStyle xmlns:a="http://schemas.openxmlformats.org/drawingml/2006/main"/>
-          <a:p xmlns:a="http://schemas.openxmlformats.org/drawingml/2006/main">
-            <a:pPr>
-              <a:defRPr sz="2700" b="0">
+            <a:off x="609600" y="4438650"/>
+            <a:ext cx="10972800" cy="1257300"/>
+          </a:xfrm>
+          <a:prstGeom xmlns:a="http://schemas.openxmlformats.org/drawingml/2006/main" prst="rect">
+            <a:avLst/>
+          </a:prstGeom>
+          <a:noFill xmlns:a="http://schemas.openxmlformats.org/drawingml/2006/main"/>
+          <a:ln xmlns:a="http://schemas.openxmlformats.org/drawingml/2006/main" w="0">
+            <a:noFill/>
+            <a:prstDash val="solid"/>
+          </a:ln>
+        </p:spPr>
+        <p:txBody>
+          <a:bodyPr xmlns:a="http://schemas.openxmlformats.org/drawingml/2006/main" lIns="0" tIns="0" rIns="0" bIns="0" anchor="ctr">
+            <a:noAutofit/>
+          </a:bodyPr>
+          <a:lstStyle xmlns:a="http://schemas.openxmlformats.org/drawingml/2006/main"/>
+          <a:p xmlns:a="http://schemas.openxmlformats.org/drawingml/2006/main">
+            <a:pPr algn="l">
+              <a:buNone/>
+              <a:defRPr sz="2550" b="0">
                 <a:solidFill>
                   <a:srgbClr val="152B3A"/>
                 </a:solidFill>
-              </a:defRPr>
-            </a:pPr>
-            <a:r>
-              <a:rPr sz="2700" b="0">
+                <a:latin typeface="Calibri"/>
+                <a:ea typeface="Calibri"/>
+                <a:cs typeface="Calibri"/>
+              </a:defRPr>
+            </a:pPr>
+            <a:r>
+              <a:rPr sz="2550" b="0">
                 <a:solidFill>
                   <a:srgbClr val="152B3A"/>
                 </a:solidFill>
+                <a:latin typeface="Calibri"/>
+                <a:ea typeface="Calibri"/>
+                <a:cs typeface="Calibri"/>
               </a:rPr>
               <a:t>Your plan should make the comparison clear.</a:t>
             </a:r>
